--- a/lessons/vizualizatsiya/presentation.pptx
+++ b/lessons/vizualizatsiya/presentation.pptx
@@ -23,6 +23,7 @@
     <p:sldId id="271" r:id="rId23"/>
     <p:sldId id="272" r:id="rId24"/>
     <p:sldId id="273" r:id="rId25"/>
+    <p:sldId id="274" r:id="rId26"/>
   </p:sldIdLst>
   <p:sldSz cx="12191695" cy="6858000" type="screen4x3"/>
   <p:notesSz cx="6858000" cy="9144000"/>
@@ -1080,6 +1081,76 @@
           <a:p>
             <a:r>
               <a:t>Завершение перед project.ipynb.</a:t>
+            </a:r>
+          </a:p>
+        </p:txBody>
+      </p:sp>
+      <p:sp>
+        <p:nvSpPr>
+          <p:cNvPr id="4" name="Slide Number Placeholder 3"/>
+          <p:cNvSpPr>
+            <a:spLocks noGrp="1"/>
+          </p:cNvSpPr>
+          <p:nvPr>
+            <p:ph type="sldNum" idx="5" sz="quarter"/>
+          </p:nvPr>
+        </p:nvSpPr>
+        <p:spPr/>
+      </p:sp>
+    </p:spTree>
+  </p:cSld>
+  <p:clrMapOvr>
+    <a:masterClrMapping/>
+  </p:clrMapOvr>
+</p:notes>
+</file>
+
+<file path=ppt/notesSlides/notesSlide18.xml><?xml version="1.0" encoding="utf-8"?>
+<p:notes xmlns:a="http://schemas.openxmlformats.org/drawingml/2006/main" xmlns:p="http://schemas.openxmlformats.org/presentationml/2006/main" xmlns:r="http://schemas.openxmlformats.org/officeDocument/2006/relationships">
+  <p:cSld>
+    <p:spTree>
+      <p:nvGrpSpPr>
+        <p:cNvPr id="1" name=""/>
+        <p:cNvGrpSpPr/>
+        <p:nvPr/>
+      </p:nvGrpSpPr>
+      <p:grpSpPr>
+        <a:xfrm>
+          <a:off x="0" y="0"/>
+          <a:ext cx="0" cy="0"/>
+          <a:chOff x="0" y="0"/>
+          <a:chExt cx="0" cy="0"/>
+        </a:xfrm>
+      </p:grpSpPr>
+      <p:sp>
+        <p:nvSpPr>
+          <p:cNvPr id="2" name="Slide Image Placeholder 1"/>
+          <p:cNvSpPr>
+            <a:spLocks noGrp="1"/>
+          </p:cNvSpPr>
+          <p:nvPr>
+            <p:ph type="sldImg" idx="2"/>
+          </p:nvPr>
+        </p:nvSpPr>
+        <p:spPr/>
+      </p:sp>
+      <p:sp>
+        <p:nvSpPr>
+          <p:cNvPr id="3" name="Notes Placeholder 2"/>
+          <p:cNvSpPr>
+            <a:spLocks noGrp="1"/>
+          </p:cNvSpPr>
+          <p:nvPr>
+            <p:ph type="body" idx="3" sz="quarter"/>
+          </p:nvPr>
+        </p:nvSpPr>
+        <p:spPr/>
+        <p:txBody>
+          <a:bodyPr/>
+          <a:lstStyle/>
+          <a:p>
+            <a:r>
+              <a:t>Colab-ссылки обновляются агентом при --apply.</a:t>
             </a:r>
           </a:p>
         </p:txBody>
@@ -6294,6 +6365,461 @@
           </a:prstGeom>
         </p:spPr>
       </p:pic>
+    </p:spTree>
+  </p:cSld>
+  <p:clrMapOvr>
+    <a:masterClrMapping/>
+  </p:clrMapOvr>
+</p:sld>
+</file>
+
+<file path=ppt/slides/slide19.xml><?xml version="1.0" encoding="utf-8"?>
+<p:sld xmlns:a="http://schemas.openxmlformats.org/drawingml/2006/main" xmlns:p="http://schemas.openxmlformats.org/presentationml/2006/main" xmlns:r="http://schemas.openxmlformats.org/officeDocument/2006/relationships">
+  <p:cSld>
+    <p:spTree>
+      <p:nvGrpSpPr>
+        <p:cNvPr id="1" name=""/>
+        <p:cNvGrpSpPr/>
+        <p:nvPr/>
+      </p:nvGrpSpPr>
+      <p:grpSpPr/>
+      <p:sp>
+        <p:nvSpPr>
+          <p:cNvPr id="2" name="TextBox 1"/>
+          <p:cNvSpPr txBox="1"/>
+          <p:nvPr/>
+        </p:nvSpPr>
+        <p:spPr>
+          <a:xfrm>
+            <a:off x="457200" y="274320"/>
+            <a:ext cx="11247120" cy="914400"/>
+          </a:xfrm>
+          <a:prstGeom prst="rect">
+            <a:avLst/>
+          </a:prstGeom>
+          <a:noFill/>
+        </p:spPr>
+        <p:txBody>
+          <a:bodyPr wrap="square">
+            <a:spAutoFit/>
+          </a:bodyPr>
+          <a:lstStyle/>
+          <a:p>
+            <a:r>
+              <a:rPr lang="ru-RU" dirty="0" sz="3200" b="1">
+                <a:solidFill>
+                  <a:srgbClr val="1A1A2E"/>
+                </a:solidFill>
+              </a:rPr>
+              <a:t>Источники и практика</a:t>
+            </a:r>
+          </a:p>
+        </p:txBody>
+      </p:sp>
+      <p:sp>
+        <p:nvSpPr>
+          <p:cNvPr id="3" name="TextBox 2"/>
+          <p:cNvSpPr txBox="1"/>
+          <p:nvPr/>
+        </p:nvSpPr>
+        <p:spPr>
+          <a:xfrm>
+            <a:off x="640080" y="1325880"/>
+            <a:ext cx="6583680" cy="320040"/>
+          </a:xfrm>
+          <a:prstGeom prst="rect">
+            <a:avLst/>
+          </a:prstGeom>
+          <a:noFill/>
+        </p:spPr>
+        <p:txBody>
+          <a:bodyPr wrap="none">
+            <a:spAutoFit/>
+          </a:bodyPr>
+          <a:lstStyle/>
+          <a:p>
+            <a:pPr>
+              <a:defRPr sz="1800" b="1">
+                <a:solidFill>
+                  <a:srgbClr val="000000"/>
+                </a:solidFill>
+              </a:defRPr>
+            </a:pPr>
+            <a:r>
+              <a:t>Литература</a:t>
+            </a:r>
+          </a:p>
+        </p:txBody>
+      </p:sp>
+      <p:sp>
+        <p:nvSpPr>
+          <p:cNvPr id="4" name="TextBox 3"/>
+          <p:cNvSpPr txBox="1"/>
+          <p:nvPr/>
+        </p:nvSpPr>
+        <p:spPr>
+          <a:xfrm>
+            <a:off x="640080" y="1673352"/>
+            <a:ext cx="6583680" cy="566928"/>
+          </a:xfrm>
+          <a:prstGeom prst="rect">
+            <a:avLst/>
+          </a:prstGeom>
+          <a:noFill/>
+        </p:spPr>
+        <p:txBody>
+          <a:bodyPr wrap="square">
+            <a:spAutoFit/>
+          </a:bodyPr>
+          <a:lstStyle/>
+          <a:p>
+            <a:pPr>
+              <a:spcAft>
+                <a:spcPts val="400"/>
+              </a:spcAft>
+            </a:pPr>
+            <a:r>
+              <a:rPr lang="ru-RU" dirty="0" sz="1600">
+                <a:solidFill>
+                  <a:srgbClr val="000000"/>
+                </a:solidFill>
+              </a:rPr>
+              <a:t xml:space="preserve">• </a:t>
+            </a:r>
+            <a:r>
+              <a:rPr sz="1600">
+                <a:solidFill>
+                  <a:srgbClr val="3366CC"/>
+                </a:solidFill>
+                <a:hlinkClick r:id="rId2"/>
+              </a:rPr>
+              <a:t>Cleveland W.S., McGill R. (1984). Graphical Perception: Theory, Experimentation, and Application to the Development of Graphical Methods</a:t>
+            </a:r>
+          </a:p>
+        </p:txBody>
+      </p:sp>
+      <p:sp>
+        <p:nvSpPr>
+          <p:cNvPr id="5" name="TextBox 4"/>
+          <p:cNvSpPr txBox="1"/>
+          <p:nvPr/>
+        </p:nvSpPr>
+        <p:spPr>
+          <a:xfrm>
+            <a:off x="640080" y="2240280"/>
+            <a:ext cx="6583680" cy="566928"/>
+          </a:xfrm>
+          <a:prstGeom prst="rect">
+            <a:avLst/>
+          </a:prstGeom>
+          <a:noFill/>
+        </p:spPr>
+        <p:txBody>
+          <a:bodyPr wrap="square">
+            <a:spAutoFit/>
+          </a:bodyPr>
+          <a:lstStyle/>
+          <a:p>
+            <a:pPr>
+              <a:spcAft>
+                <a:spcPts val="400"/>
+              </a:spcAft>
+            </a:pPr>
+            <a:r>
+              <a:rPr lang="ru-RU" dirty="0" sz="1600">
+                <a:solidFill>
+                  <a:srgbClr val="000000"/>
+                </a:solidFill>
+              </a:rPr>
+              <a:t xml:space="preserve">• </a:t>
+            </a:r>
+            <a:r>
+              <a:rPr sz="1600">
+                <a:solidFill>
+                  <a:srgbClr val="3366CC"/>
+                </a:solidFill>
+                <a:hlinkClick r:id="rId3"/>
+              </a:rPr>
+              <a:t>Wickham H. (2010). A Layered Grammar of Graphics</a:t>
+            </a:r>
+          </a:p>
+        </p:txBody>
+      </p:sp>
+      <p:sp>
+        <p:nvSpPr>
+          <p:cNvPr id="6" name="TextBox 5"/>
+          <p:cNvSpPr txBox="1"/>
+          <p:nvPr/>
+        </p:nvSpPr>
+        <p:spPr>
+          <a:xfrm>
+            <a:off x="640080" y="2807208"/>
+            <a:ext cx="6583680" cy="566928"/>
+          </a:xfrm>
+          <a:prstGeom prst="rect">
+            <a:avLst/>
+          </a:prstGeom>
+          <a:noFill/>
+        </p:spPr>
+        <p:txBody>
+          <a:bodyPr wrap="square">
+            <a:spAutoFit/>
+          </a:bodyPr>
+          <a:lstStyle/>
+          <a:p>
+            <a:pPr>
+              <a:spcAft>
+                <a:spcPts val="400"/>
+              </a:spcAft>
+            </a:pPr>
+            <a:r>
+              <a:rPr lang="ru-RU" dirty="0" sz="1600">
+                <a:solidFill>
+                  <a:srgbClr val="000000"/>
+                </a:solidFill>
+              </a:rPr>
+              <a:t>• Tufte E.R. (1983). The Visual Display of Quantitative Information</a:t>
+            </a:r>
+          </a:p>
+        </p:txBody>
+      </p:sp>
+      <p:sp>
+        <p:nvSpPr>
+          <p:cNvPr id="7" name="TextBox 6"/>
+          <p:cNvSpPr txBox="1"/>
+          <p:nvPr/>
+        </p:nvSpPr>
+        <p:spPr>
+          <a:xfrm>
+            <a:off x="640080" y="3374136"/>
+            <a:ext cx="6583680" cy="320040"/>
+          </a:xfrm>
+          <a:prstGeom prst="rect">
+            <a:avLst/>
+          </a:prstGeom>
+          <a:noFill/>
+        </p:spPr>
+        <p:txBody>
+          <a:bodyPr wrap="none">
+            <a:spAutoFit/>
+          </a:bodyPr>
+          <a:lstStyle/>
+          <a:p>
+            <a:pPr>
+              <a:defRPr sz="1800" b="1">
+                <a:solidFill>
+                  <a:srgbClr val="000000"/>
+                </a:solidFill>
+              </a:defRPr>
+            </a:pPr>
+            <a:r>
+              <a:t>Практика в Colab</a:t>
+            </a:r>
+          </a:p>
+        </p:txBody>
+      </p:sp>
+      <p:sp>
+        <p:nvSpPr>
+          <p:cNvPr id="8" name="TextBox 7"/>
+          <p:cNvSpPr txBox="1"/>
+          <p:nvPr/>
+        </p:nvSpPr>
+        <p:spPr>
+          <a:xfrm>
+            <a:off x="640080" y="3721608"/>
+            <a:ext cx="6583680" cy="457200"/>
+          </a:xfrm>
+          <a:prstGeom prst="rect">
+            <a:avLst/>
+          </a:prstGeom>
+          <a:noFill/>
+        </p:spPr>
+        <p:txBody>
+          <a:bodyPr wrap="square">
+            <a:spAutoFit/>
+          </a:bodyPr>
+          <a:lstStyle/>
+          <a:p>
+            <a:r>
+              <a:rPr lang="ru-RU" dirty="0" sz="1500">
+                <a:solidFill>
+                  <a:srgbClr val="000000"/>
+                </a:solidFill>
+              </a:rPr>
+              <a:t xml:space="preserve">• Примеры по слайдам: </a:t>
+            </a:r>
+            <a:r>
+              <a:rPr sz="1400">
+                <a:solidFill>
+                  <a:srgbClr val="3366CC"/>
+                </a:solidFill>
+                <a:hlinkClick r:id="rId4"/>
+              </a:rPr>
+              <a:t>https://colab.research.google.com/github/gurovic/ml-lessons/blob/feature/references-and-slide-code/lessons/vizualizatsiya/code.ipynb</a:t>
+            </a:r>
+          </a:p>
+        </p:txBody>
+      </p:sp>
+      <p:sp>
+        <p:nvSpPr>
+          <p:cNvPr id="9" name="TextBox 8"/>
+          <p:cNvSpPr txBox="1"/>
+          <p:nvPr/>
+        </p:nvSpPr>
+        <p:spPr>
+          <a:xfrm>
+            <a:off x="640080" y="4178808"/>
+            <a:ext cx="6583680" cy="457200"/>
+          </a:xfrm>
+          <a:prstGeom prst="rect">
+            <a:avLst/>
+          </a:prstGeom>
+          <a:noFill/>
+        </p:spPr>
+        <p:txBody>
+          <a:bodyPr wrap="square">
+            <a:spAutoFit/>
+          </a:bodyPr>
+          <a:lstStyle/>
+          <a:p>
+            <a:r>
+              <a:rPr lang="ru-RU" dirty="0" sz="1500">
+                <a:solidFill>
+                  <a:srgbClr val="000000"/>
+                </a:solidFill>
+              </a:rPr>
+              <a:t xml:space="preserve">• Мини-проект: </a:t>
+            </a:r>
+            <a:r>
+              <a:rPr sz="1400">
+                <a:solidFill>
+                  <a:srgbClr val="3366CC"/>
+                </a:solidFill>
+                <a:hlinkClick r:id="rId5"/>
+              </a:rPr>
+              <a:t>https://colab.research.google.com/github/gurovic/ml-lessons/blob/feature/references-and-slide-code/lessons/vizualizatsiya/project.ipynb</a:t>
+            </a:r>
+          </a:p>
+        </p:txBody>
+      </p:sp>
+      <p:pic>
+        <p:nvPicPr>
+          <p:cNvPr id="10" name="Picture 9" descr="_qr_ref_18_0.png"/>
+          <p:cNvPicPr>
+            <a:picLocks noChangeAspect="1"/>
+          </p:cNvPicPr>
+          <p:nvPr/>
+        </p:nvPicPr>
+        <p:blipFill>
+          <a:blip r:embed="rId6"/>
+          <a:stretch>
+            <a:fillRect/>
+          </a:stretch>
+        </p:blipFill>
+        <p:spPr>
+          <a:xfrm>
+            <a:off x="8229600" y="1463040"/>
+            <a:ext cx="1051560" cy="1051560"/>
+          </a:xfrm>
+          <a:prstGeom prst="rect">
+            <a:avLst/>
+          </a:prstGeom>
+        </p:spPr>
+      </p:pic>
+      <p:sp>
+        <p:nvSpPr>
+          <p:cNvPr id="11" name="TextBox 10"/>
+          <p:cNvSpPr txBox="1"/>
+          <p:nvPr/>
+        </p:nvSpPr>
+        <p:spPr>
+          <a:xfrm>
+            <a:off x="8138160" y="2532888"/>
+            <a:ext cx="1417319" cy="274320"/>
+          </a:xfrm>
+          <a:prstGeom prst="rect">
+            <a:avLst/>
+          </a:prstGeom>
+          <a:noFill/>
+        </p:spPr>
+        <p:txBody>
+          <a:bodyPr wrap="none">
+            <a:spAutoFit/>
+          </a:bodyPr>
+          <a:lstStyle/>
+          <a:p>
+            <a:pPr algn="ctr">
+              <a:defRPr sz="1000">
+                <a:solidFill>
+                  <a:srgbClr val="555555"/>
+                </a:solidFill>
+              </a:defRPr>
+            </a:pPr>
+            <a:r>
+              <a:t>Примеры по слайдам</a:t>
+            </a:r>
+          </a:p>
+        </p:txBody>
+      </p:sp>
+      <p:pic>
+        <p:nvPicPr>
+          <p:cNvPr id="12" name="Picture 11" descr="_qr_ref_18_1.png"/>
+          <p:cNvPicPr>
+            <a:picLocks noChangeAspect="1"/>
+          </p:cNvPicPr>
+          <p:nvPr/>
+        </p:nvPicPr>
+        <p:blipFill>
+          <a:blip r:embed="rId7"/>
+          <a:stretch>
+            <a:fillRect/>
+          </a:stretch>
+        </p:blipFill>
+        <p:spPr>
+          <a:xfrm>
+            <a:off x="8229600" y="3063240"/>
+            <a:ext cx="1051560" cy="1051560"/>
+          </a:xfrm>
+          <a:prstGeom prst="rect">
+            <a:avLst/>
+          </a:prstGeom>
+        </p:spPr>
+      </p:pic>
+      <p:sp>
+        <p:nvSpPr>
+          <p:cNvPr id="13" name="TextBox 12"/>
+          <p:cNvSpPr txBox="1"/>
+          <p:nvPr/>
+        </p:nvSpPr>
+        <p:spPr>
+          <a:xfrm>
+            <a:off x="8138160" y="4133087"/>
+            <a:ext cx="1417319" cy="274320"/>
+          </a:xfrm>
+          <a:prstGeom prst="rect">
+            <a:avLst/>
+          </a:prstGeom>
+          <a:noFill/>
+        </p:spPr>
+        <p:txBody>
+          <a:bodyPr wrap="none">
+            <a:spAutoFit/>
+          </a:bodyPr>
+          <a:lstStyle/>
+          <a:p>
+            <a:pPr algn="ctr">
+              <a:defRPr sz="1000">
+                <a:solidFill>
+                  <a:srgbClr val="555555"/>
+                </a:solidFill>
+              </a:defRPr>
+            </a:pPr>
+            <a:r>
+              <a:t>Мини-проект</a:t>
+            </a:r>
+          </a:p>
+        </p:txBody>
+      </p:sp>
     </p:spTree>
   </p:cSld>
   <p:clrMapOvr>

--- a/lessons/vizualizatsiya/presentation.pptx
+++ b/lessons/vizualizatsiya/presentation.pptx
@@ -4916,7 +4916,7 @@
         <p:spPr>
           <a:xfrm>
             <a:off x="640080" y="1371600"/>
-            <a:ext cx="6858000" cy="5029200"/>
+            <a:ext cx="6858000" cy="1810512"/>
           </a:xfrm>
           <a:prstGeom prst="rect">
             <a:avLst/>
@@ -4990,9 +4990,160 @@
           </a:p>
         </p:txBody>
       </p:sp>
+      <p:sp>
+        <p:nvSpPr>
+          <p:cNvPr id="4" name="Rectangle 3"/>
+          <p:cNvSpPr/>
+          <p:nvPr/>
+        </p:nvSpPr>
+        <p:spPr>
+          <a:xfrm>
+            <a:off x="640080" y="3291840"/>
+            <a:ext cx="6766560" cy="630936"/>
+          </a:xfrm>
+          <a:prstGeom prst="rect">
+            <a:avLst/>
+          </a:prstGeom>
+          <a:solidFill>
+            <a:srgbClr val="F5F5F5"/>
+          </a:solidFill>
+          <a:ln>
+            <a:solidFill>
+              <a:srgbClr val="DDDDDD"/>
+            </a:solidFill>
+          </a:ln>
+        </p:spPr>
+        <p:style>
+          <a:lnRef idx="1">
+            <a:schemeClr val="accent1"/>
+          </a:lnRef>
+          <a:fillRef idx="3">
+            <a:schemeClr val="accent1"/>
+          </a:fillRef>
+          <a:effectRef idx="2">
+            <a:schemeClr val="accent1"/>
+          </a:effectRef>
+          <a:fontRef idx="minor">
+            <a:schemeClr val="lt1"/>
+          </a:fontRef>
+        </p:style>
+        <p:txBody>
+          <a:bodyPr rtlCol="0" anchor="ctr"/>
+          <a:lstStyle/>
+          <a:p>
+            <a:pPr algn="ctr"/>
+          </a:p>
+        </p:txBody>
+      </p:sp>
+      <p:sp>
+        <p:nvSpPr>
+          <p:cNvPr id="5" name="TextBox 4"/>
+          <p:cNvSpPr txBox="1"/>
+          <p:nvPr/>
+        </p:nvSpPr>
+        <p:spPr>
+          <a:xfrm>
+            <a:off x="713231" y="3328416"/>
+            <a:ext cx="6620256" cy="557784"/>
+          </a:xfrm>
+          <a:prstGeom prst="rect">
+            <a:avLst/>
+          </a:prstGeom>
+          <a:noFill/>
+        </p:spPr>
+        <p:txBody>
+          <a:bodyPr wrap="square">
+            <a:noAutofit/>
+          </a:bodyPr>
+          <a:lstStyle/>
+          <a:p>
+            <a:pPr>
+              <a:spcAft>
+                <a:spcPts val="0"/>
+              </a:spcAft>
+              <a:defRPr sz="1100">
+                <a:solidFill>
+                  <a:srgbClr val="000000"/>
+                </a:solidFill>
+                <a:latin typeface="Consolas"/>
+              </a:defRPr>
+            </a:pPr>
+            <a:r>
+              <a:t>fig, axes = plt.subplots(2, 2, figsize=(8, 6))</a:t>
+            </a:r>
+          </a:p>
+          <a:p>
+            <a:pPr>
+              <a:spcAft>
+                <a:spcPts val="0"/>
+              </a:spcAft>
+              <a:defRPr sz="1100">
+                <a:solidFill>
+                  <a:srgbClr val="000000"/>
+                </a:solidFill>
+                <a:latin typeface="Consolas"/>
+              </a:defRPr>
+            </a:pPr>
+            <a:r>
+              <a:t>axes[0, 0].hist(a); axes[0, 1].scatter(x, y)</a:t>
+            </a:r>
+          </a:p>
+          <a:p>
+            <a:pPr>
+              <a:spcAft>
+                <a:spcPts val="0"/>
+              </a:spcAft>
+              <a:defRPr sz="1100">
+                <a:solidFill>
+                  <a:srgbClr val="000000"/>
+                </a:solidFill>
+                <a:latin typeface="Consolas"/>
+              </a:defRPr>
+            </a:pPr>
+            <a:r>
+              <a:t>fig.tight_layout()</a:t>
+            </a:r>
+          </a:p>
+        </p:txBody>
+      </p:sp>
+      <p:sp>
+        <p:nvSpPr>
+          <p:cNvPr id="6" name="TextBox 5"/>
+          <p:cNvSpPr txBox="1"/>
+          <p:nvPr/>
+        </p:nvSpPr>
+        <p:spPr>
+          <a:xfrm>
+            <a:off x="640080" y="3977639"/>
+            <a:ext cx="6766560" cy="201168"/>
+          </a:xfrm>
+          <a:prstGeom prst="rect">
+            <a:avLst/>
+          </a:prstGeom>
+          <a:noFill/>
+        </p:spPr>
+        <p:txBody>
+          <a:bodyPr wrap="none">
+            <a:spAutoFit/>
+          </a:bodyPr>
+          <a:lstStyle/>
+          <a:p>
+            <a:pPr algn="l">
+              <a:defRPr sz="1000" i="1">
+                <a:solidFill>
+                  <a:srgbClr val="555555"/>
+                </a:solidFill>
+              </a:defRPr>
+            </a:pPr>
+            <a:r>
+              <a:t>Сетка 2×2</a:t>
+            </a:r>
+          </a:p>
+        </p:txBody>
+      </p:sp>
       <p:pic>
         <p:nvPicPr>
-          <p:cNvPr id="4" name="Picture 3" descr="subplots_grid_2x2.png"/>
+          <p:cNvPr id="7" name="Picture 6" descr="subplots_grid_2x2.png"/>
           <p:cNvPicPr>
             <a:picLocks noChangeAspect="1"/>
           </p:cNvPicPr>
@@ -5074,7 +5225,7 @@
         <p:spPr>
           <a:xfrm>
             <a:off x="640080" y="1371600"/>
-            <a:ext cx="6858000" cy="5029200"/>
+            <a:ext cx="6858000" cy="1810512"/>
           </a:xfrm>
           <a:prstGeom prst="rect">
             <a:avLst/>
@@ -5148,9 +5299,160 @@
           </a:p>
         </p:txBody>
       </p:sp>
+      <p:sp>
+        <p:nvSpPr>
+          <p:cNvPr id="4" name="Rectangle 3"/>
+          <p:cNvSpPr/>
+          <p:nvPr/>
+        </p:nvSpPr>
+        <p:spPr>
+          <a:xfrm>
+            <a:off x="640080" y="3291840"/>
+            <a:ext cx="6766560" cy="630936"/>
+          </a:xfrm>
+          <a:prstGeom prst="rect">
+            <a:avLst/>
+          </a:prstGeom>
+          <a:solidFill>
+            <a:srgbClr val="F5F5F5"/>
+          </a:solidFill>
+          <a:ln>
+            <a:solidFill>
+              <a:srgbClr val="DDDDDD"/>
+            </a:solidFill>
+          </a:ln>
+        </p:spPr>
+        <p:style>
+          <a:lnRef idx="1">
+            <a:schemeClr val="accent1"/>
+          </a:lnRef>
+          <a:fillRef idx="3">
+            <a:schemeClr val="accent1"/>
+          </a:fillRef>
+          <a:effectRef idx="2">
+            <a:schemeClr val="accent1"/>
+          </a:effectRef>
+          <a:fontRef idx="minor">
+            <a:schemeClr val="lt1"/>
+          </a:fontRef>
+        </p:style>
+        <p:txBody>
+          <a:bodyPr rtlCol="0" anchor="ctr"/>
+          <a:lstStyle/>
+          <a:p>
+            <a:pPr algn="ctr"/>
+          </a:p>
+        </p:txBody>
+      </p:sp>
+      <p:sp>
+        <p:nvSpPr>
+          <p:cNvPr id="5" name="TextBox 4"/>
+          <p:cNvSpPr txBox="1"/>
+          <p:nvPr/>
+        </p:nvSpPr>
+        <p:spPr>
+          <a:xfrm>
+            <a:off x="713231" y="3328416"/>
+            <a:ext cx="6620256" cy="557784"/>
+          </a:xfrm>
+          <a:prstGeom prst="rect">
+            <a:avLst/>
+          </a:prstGeom>
+          <a:noFill/>
+        </p:spPr>
+        <p:txBody>
+          <a:bodyPr wrap="square">
+            <a:noAutofit/>
+          </a:bodyPr>
+          <a:lstStyle/>
+          <a:p>
+            <a:pPr>
+              <a:spcAft>
+                <a:spcPts val="0"/>
+              </a:spcAft>
+              <a:defRPr sz="1100">
+                <a:solidFill>
+                  <a:srgbClr val="000000"/>
+                </a:solidFill>
+                <a:latin typeface="Consolas"/>
+              </a:defRPr>
+            </a:pPr>
+            <a:r>
+              <a:t>import seaborn as sns</a:t>
+            </a:r>
+          </a:p>
+          <a:p>
+            <a:pPr>
+              <a:spcAft>
+                <a:spcPts val="0"/>
+              </a:spcAft>
+              <a:defRPr sz="1100">
+                <a:solidFill>
+                  <a:srgbClr val="000000"/>
+                </a:solidFill>
+                <a:latin typeface="Consolas"/>
+              </a:defRPr>
+            </a:pPr>
+            <a:r>
+              <a:t>corr = df.corr(numeric_only=True)</a:t>
+            </a:r>
+          </a:p>
+          <a:p>
+            <a:pPr>
+              <a:spcAft>
+                <a:spcPts val="0"/>
+              </a:spcAft>
+              <a:defRPr sz="1100">
+                <a:solidFill>
+                  <a:srgbClr val="000000"/>
+                </a:solidFill>
+                <a:latin typeface="Consolas"/>
+              </a:defRPr>
+            </a:pPr>
+            <a:r>
+              <a:t>sns.heatmap(corr, annot=True, cmap='coolwarm', vmin=-1, vmax=1)</a:t>
+            </a:r>
+          </a:p>
+        </p:txBody>
+      </p:sp>
+      <p:sp>
+        <p:nvSpPr>
+          <p:cNvPr id="6" name="TextBox 5"/>
+          <p:cNvSpPr txBox="1"/>
+          <p:nvPr/>
+        </p:nvSpPr>
+        <p:spPr>
+          <a:xfrm>
+            <a:off x="640080" y="3977639"/>
+            <a:ext cx="6766560" cy="201168"/>
+          </a:xfrm>
+          <a:prstGeom prst="rect">
+            <a:avLst/>
+          </a:prstGeom>
+          <a:noFill/>
+        </p:spPr>
+        <p:txBody>
+          <a:bodyPr wrap="none">
+            <a:spAutoFit/>
+          </a:bodyPr>
+          <a:lstStyle/>
+          <a:p>
+            <a:pPr algn="l">
+              <a:defRPr sz="1000" i="1">
+                <a:solidFill>
+                  <a:srgbClr val="555555"/>
+                </a:solidFill>
+              </a:defRPr>
+            </a:pPr>
+            <a:r>
+              <a:t>heatmap корреляций</a:t>
+            </a:r>
+          </a:p>
+        </p:txBody>
+      </p:sp>
       <p:pic>
         <p:nvPicPr>
-          <p:cNvPr id="4" name="Picture 3" descr="correlation_heatmap.png"/>
+          <p:cNvPr id="7" name="Picture 6" descr="correlation_heatmap.png"/>
           <p:cNvPicPr>
             <a:picLocks noChangeAspect="1"/>
           </p:cNvPicPr>
@@ -5232,7 +5534,7 @@
         <p:spPr>
           <a:xfrm>
             <a:off x="640080" y="1371600"/>
-            <a:ext cx="6858000" cy="5029200"/>
+            <a:ext cx="6858000" cy="1810512"/>
           </a:xfrm>
           <a:prstGeom prst="rect">
             <a:avLst/>
@@ -5306,9 +5608,144 @@
           </a:p>
         </p:txBody>
       </p:sp>
+      <p:sp>
+        <p:nvSpPr>
+          <p:cNvPr id="4" name="Rectangle 3"/>
+          <p:cNvSpPr/>
+          <p:nvPr/>
+        </p:nvSpPr>
+        <p:spPr>
+          <a:xfrm>
+            <a:off x="640080" y="3291840"/>
+            <a:ext cx="6766560" cy="457200"/>
+          </a:xfrm>
+          <a:prstGeom prst="rect">
+            <a:avLst/>
+          </a:prstGeom>
+          <a:solidFill>
+            <a:srgbClr val="F5F5F5"/>
+          </a:solidFill>
+          <a:ln>
+            <a:solidFill>
+              <a:srgbClr val="DDDDDD"/>
+            </a:solidFill>
+          </a:ln>
+        </p:spPr>
+        <p:style>
+          <a:lnRef idx="1">
+            <a:schemeClr val="accent1"/>
+          </a:lnRef>
+          <a:fillRef idx="3">
+            <a:schemeClr val="accent1"/>
+          </a:fillRef>
+          <a:effectRef idx="2">
+            <a:schemeClr val="accent1"/>
+          </a:effectRef>
+          <a:fontRef idx="minor">
+            <a:schemeClr val="lt1"/>
+          </a:fontRef>
+        </p:style>
+        <p:txBody>
+          <a:bodyPr rtlCol="0" anchor="ctr"/>
+          <a:lstStyle/>
+          <a:p>
+            <a:pPr algn="ctr"/>
+          </a:p>
+        </p:txBody>
+      </p:sp>
+      <p:sp>
+        <p:nvSpPr>
+          <p:cNvPr id="5" name="TextBox 4"/>
+          <p:cNvSpPr txBox="1"/>
+          <p:nvPr/>
+        </p:nvSpPr>
+        <p:spPr>
+          <a:xfrm>
+            <a:off x="713231" y="3328416"/>
+            <a:ext cx="6620256" cy="384048"/>
+          </a:xfrm>
+          <a:prstGeom prst="rect">
+            <a:avLst/>
+          </a:prstGeom>
+          <a:noFill/>
+        </p:spPr>
+        <p:txBody>
+          <a:bodyPr wrap="square">
+            <a:noAutofit/>
+          </a:bodyPr>
+          <a:lstStyle/>
+          <a:p>
+            <a:pPr>
+              <a:spcAft>
+                <a:spcPts val="0"/>
+              </a:spcAft>
+              <a:defRPr sz="1100">
+                <a:solidFill>
+                  <a:srgbClr val="000000"/>
+                </a:solidFill>
+                <a:latin typeface="Consolas"/>
+              </a:defRPr>
+            </a:pPr>
+            <a:r>
+              <a:t>sns.countplot(data=df, x='category', order=df['category'].value_counts().index)</a:t>
+            </a:r>
+          </a:p>
+          <a:p>
+            <a:pPr>
+              <a:spcAft>
+                <a:spcPts val="0"/>
+              </a:spcAft>
+              <a:defRPr sz="1100">
+                <a:solidFill>
+                  <a:srgbClr val="000000"/>
+                </a:solidFill>
+                <a:latin typeface="Consolas"/>
+              </a:defRPr>
+            </a:pPr>
+            <a:r>
+              <a:t>plt.xticks(rotation=30)</a:t>
+            </a:r>
+          </a:p>
+        </p:txBody>
+      </p:sp>
+      <p:sp>
+        <p:nvSpPr>
+          <p:cNvPr id="6" name="TextBox 5"/>
+          <p:cNvSpPr txBox="1"/>
+          <p:nvPr/>
+        </p:nvSpPr>
+        <p:spPr>
+          <a:xfrm>
+            <a:off x="640080" y="3803904"/>
+            <a:ext cx="6766560" cy="201168"/>
+          </a:xfrm>
+          <a:prstGeom prst="rect">
+            <a:avLst/>
+          </a:prstGeom>
+          <a:noFill/>
+        </p:spPr>
+        <p:txBody>
+          <a:bodyPr wrap="none">
+            <a:spAutoFit/>
+          </a:bodyPr>
+          <a:lstStyle/>
+          <a:p>
+            <a:pPr algn="l">
+              <a:defRPr sz="1000" i="1">
+                <a:solidFill>
+                  <a:srgbClr val="555555"/>
+                </a:solidFill>
+              </a:defRPr>
+            </a:pPr>
+            <a:r>
+              <a:t>countplot</a:t>
+            </a:r>
+          </a:p>
+        </p:txBody>
+      </p:sp>
       <p:pic>
         <p:nvPicPr>
-          <p:cNvPr id="4" name="Picture 3" descr="categorical_plots.png"/>
+          <p:cNvPr id="7" name="Picture 6" descr="categorical_plots.png"/>
           <p:cNvPicPr>
             <a:picLocks noChangeAspect="1"/>
           </p:cNvPicPr>
@@ -5390,7 +5827,7 @@
         <p:spPr>
           <a:xfrm>
             <a:off x="640080" y="1371600"/>
-            <a:ext cx="6858000" cy="5029200"/>
+            <a:ext cx="6858000" cy="1810512"/>
           </a:xfrm>
           <a:prstGeom prst="rect">
             <a:avLst/>
@@ -5580,7 +6017,7 @@
         <p:spPr>
           <a:xfrm>
             <a:off x="640080" y="1371600"/>
-            <a:ext cx="6858000" cy="5029200"/>
+            <a:ext cx="6858000" cy="1810512"/>
           </a:xfrm>
           <a:prstGeom prst="rect">
             <a:avLst/>
@@ -5738,7 +6175,7 @@
         <p:spPr>
           <a:xfrm>
             <a:off x="640080" y="1371600"/>
-            <a:ext cx="6858000" cy="5029200"/>
+            <a:ext cx="6858000" cy="1810512"/>
           </a:xfrm>
           <a:prstGeom prst="rect">
             <a:avLst/>
@@ -5851,9 +6288,160 @@
           </a:p>
         </p:txBody>
       </p:sp>
+      <p:sp>
+        <p:nvSpPr>
+          <p:cNvPr id="4" name="Rectangle 3"/>
+          <p:cNvSpPr/>
+          <p:nvPr/>
+        </p:nvSpPr>
+        <p:spPr>
+          <a:xfrm>
+            <a:off x="640080" y="3291840"/>
+            <a:ext cx="6766560" cy="630936"/>
+          </a:xfrm>
+          <a:prstGeom prst="rect">
+            <a:avLst/>
+          </a:prstGeom>
+          <a:solidFill>
+            <a:srgbClr val="F5F5F5"/>
+          </a:solidFill>
+          <a:ln>
+            <a:solidFill>
+              <a:srgbClr val="DDDDDD"/>
+            </a:solidFill>
+          </a:ln>
+        </p:spPr>
+        <p:style>
+          <a:lnRef idx="1">
+            <a:schemeClr val="accent1"/>
+          </a:lnRef>
+          <a:fillRef idx="3">
+            <a:schemeClr val="accent1"/>
+          </a:fillRef>
+          <a:effectRef idx="2">
+            <a:schemeClr val="accent1"/>
+          </a:effectRef>
+          <a:fontRef idx="minor">
+            <a:schemeClr val="lt1"/>
+          </a:fontRef>
+        </p:style>
+        <p:txBody>
+          <a:bodyPr rtlCol="0" anchor="ctr"/>
+          <a:lstStyle/>
+          <a:p>
+            <a:pPr algn="ctr"/>
+          </a:p>
+        </p:txBody>
+      </p:sp>
+      <p:sp>
+        <p:nvSpPr>
+          <p:cNvPr id="5" name="TextBox 4"/>
+          <p:cNvSpPr txBox="1"/>
+          <p:nvPr/>
+        </p:nvSpPr>
+        <p:spPr>
+          <a:xfrm>
+            <a:off x="713231" y="3328416"/>
+            <a:ext cx="6620256" cy="557784"/>
+          </a:xfrm>
+          <a:prstGeom prst="rect">
+            <a:avLst/>
+          </a:prstGeom>
+          <a:noFill/>
+        </p:spPr>
+        <p:txBody>
+          <a:bodyPr wrap="square">
+            <a:noAutofit/>
+          </a:bodyPr>
+          <a:lstStyle/>
+          <a:p>
+            <a:pPr>
+              <a:spcAft>
+                <a:spcPts val="0"/>
+              </a:spcAft>
+              <a:defRPr sz="1100">
+                <a:solidFill>
+                  <a:srgbClr val="000000"/>
+                </a:solidFill>
+                <a:latin typeface="Consolas"/>
+              </a:defRPr>
+            </a:pPr>
+            <a:r>
+              <a:t>residuals = y_test - y_pred</a:t>
+            </a:r>
+          </a:p>
+          <a:p>
+            <a:pPr>
+              <a:spcAft>
+                <a:spcPts val="0"/>
+              </a:spcAft>
+              <a:defRPr sz="1100">
+                <a:solidFill>
+                  <a:srgbClr val="000000"/>
+                </a:solidFill>
+                <a:latin typeface="Consolas"/>
+              </a:defRPr>
+            </a:pPr>
+            <a:r>
+              <a:t>ax.scatter(y_pred, residuals, alpha=0.6)</a:t>
+            </a:r>
+          </a:p>
+          <a:p>
+            <a:pPr>
+              <a:spcAft>
+                <a:spcPts val="0"/>
+              </a:spcAft>
+              <a:defRPr sz="1100">
+                <a:solidFill>
+                  <a:srgbClr val="000000"/>
+                </a:solidFill>
+                <a:latin typeface="Consolas"/>
+              </a:defRPr>
+            </a:pPr>
+            <a:r>
+              <a:t>ax.axhline(0, color='red', linestyle='--')</a:t>
+            </a:r>
+          </a:p>
+        </p:txBody>
+      </p:sp>
+      <p:sp>
+        <p:nvSpPr>
+          <p:cNvPr id="6" name="TextBox 5"/>
+          <p:cNvSpPr txBox="1"/>
+          <p:nvPr/>
+        </p:nvSpPr>
+        <p:spPr>
+          <a:xfrm>
+            <a:off x="640080" y="3977639"/>
+            <a:ext cx="6766560" cy="201168"/>
+          </a:xfrm>
+          <a:prstGeom prst="rect">
+            <a:avLst/>
+          </a:prstGeom>
+          <a:noFill/>
+        </p:spPr>
+        <p:txBody>
+          <a:bodyPr wrap="none">
+            <a:spAutoFit/>
+          </a:bodyPr>
+          <a:lstStyle/>
+          <a:p>
+            <a:pPr algn="l">
+              <a:defRPr sz="1000" i="1">
+                <a:solidFill>
+                  <a:srgbClr val="555555"/>
+                </a:solidFill>
+              </a:defRPr>
+            </a:pPr>
+            <a:r>
+              <a:t>Остатки vs предсказание</a:t>
+            </a:r>
+          </a:p>
+        </p:txBody>
+      </p:sp>
       <p:pic>
         <p:nvPicPr>
-          <p:cNvPr id="4" name="Picture 3" descr="residuals_good_vs_funnel.png"/>
+          <p:cNvPr id="7" name="Picture 6" descr="residuals_good_vs_funnel.png"/>
           <p:cNvPicPr>
             <a:picLocks noChangeAspect="1"/>
           </p:cNvPicPr>
@@ -5935,7 +6523,7 @@
         <p:spPr>
           <a:xfrm>
             <a:off x="640080" y="1371600"/>
-            <a:ext cx="6858000" cy="5029200"/>
+            <a:ext cx="6858000" cy="1810512"/>
           </a:xfrm>
           <a:prstGeom prst="rect">
             <a:avLst/>
@@ -6025,9 +6613,160 @@
           </a:p>
         </p:txBody>
       </p:sp>
+      <p:sp>
+        <p:nvSpPr>
+          <p:cNvPr id="4" name="Rectangle 3"/>
+          <p:cNvSpPr/>
+          <p:nvPr/>
+        </p:nvSpPr>
+        <p:spPr>
+          <a:xfrm>
+            <a:off x="640080" y="3291840"/>
+            <a:ext cx="6766560" cy="630936"/>
+          </a:xfrm>
+          <a:prstGeom prst="rect">
+            <a:avLst/>
+          </a:prstGeom>
+          <a:solidFill>
+            <a:srgbClr val="F5F5F5"/>
+          </a:solidFill>
+          <a:ln>
+            <a:solidFill>
+              <a:srgbClr val="DDDDDD"/>
+            </a:solidFill>
+          </a:ln>
+        </p:spPr>
+        <p:style>
+          <a:lnRef idx="1">
+            <a:schemeClr val="accent1"/>
+          </a:lnRef>
+          <a:fillRef idx="3">
+            <a:schemeClr val="accent1"/>
+          </a:fillRef>
+          <a:effectRef idx="2">
+            <a:schemeClr val="accent1"/>
+          </a:effectRef>
+          <a:fontRef idx="minor">
+            <a:schemeClr val="lt1"/>
+          </a:fontRef>
+        </p:style>
+        <p:txBody>
+          <a:bodyPr rtlCol="0" anchor="ctr"/>
+          <a:lstStyle/>
+          <a:p>
+            <a:pPr algn="ctr"/>
+          </a:p>
+        </p:txBody>
+      </p:sp>
+      <p:sp>
+        <p:nvSpPr>
+          <p:cNvPr id="5" name="TextBox 4"/>
+          <p:cNvSpPr txBox="1"/>
+          <p:nvPr/>
+        </p:nvSpPr>
+        <p:spPr>
+          <a:xfrm>
+            <a:off x="713231" y="3328416"/>
+            <a:ext cx="6620256" cy="557784"/>
+          </a:xfrm>
+          <a:prstGeom prst="rect">
+            <a:avLst/>
+          </a:prstGeom>
+          <a:noFill/>
+        </p:spPr>
+        <p:txBody>
+          <a:bodyPr wrap="square">
+            <a:noAutofit/>
+          </a:bodyPr>
+          <a:lstStyle/>
+          <a:p>
+            <a:pPr>
+              <a:spcAft>
+                <a:spcPts val="0"/>
+              </a:spcAft>
+              <a:defRPr sz="1100">
+                <a:solidFill>
+                  <a:srgbClr val="000000"/>
+                </a:solidFill>
+                <a:latin typeface="Consolas"/>
+              </a:defRPr>
+            </a:pPr>
+            <a:r>
+              <a:t>from sklearn.metrics import RocCurveDisplay</a:t>
+            </a:r>
+          </a:p>
+          <a:p>
+            <a:pPr>
+              <a:spcAft>
+                <a:spcPts val="0"/>
+              </a:spcAft>
+              <a:defRPr sz="1100">
+                <a:solidFill>
+                  <a:srgbClr val="000000"/>
+                </a:solidFill>
+                <a:latin typeface="Consolas"/>
+              </a:defRPr>
+            </a:pPr>
+            <a:r>
+              <a:t>RocCurveDisplay.from_predictions(y_test, y_score)</a:t>
+            </a:r>
+          </a:p>
+          <a:p>
+            <a:pPr>
+              <a:spcAft>
+                <a:spcPts val="0"/>
+              </a:spcAft>
+              <a:defRPr sz="1100">
+                <a:solidFill>
+                  <a:srgbClr val="000000"/>
+                </a:solidFill>
+                <a:latin typeface="Consolas"/>
+              </a:defRPr>
+            </a:pPr>
+            <a:r>
+              <a:t>plt.title('ROC')</a:t>
+            </a:r>
+          </a:p>
+        </p:txBody>
+      </p:sp>
+      <p:sp>
+        <p:nvSpPr>
+          <p:cNvPr id="6" name="TextBox 5"/>
+          <p:cNvSpPr txBox="1"/>
+          <p:nvPr/>
+        </p:nvSpPr>
+        <p:spPr>
+          <a:xfrm>
+            <a:off x="640080" y="3977639"/>
+            <a:ext cx="6766560" cy="201168"/>
+          </a:xfrm>
+          <a:prstGeom prst="rect">
+            <a:avLst/>
+          </a:prstGeom>
+          <a:noFill/>
+        </p:spPr>
+        <p:txBody>
+          <a:bodyPr wrap="none">
+            <a:spAutoFit/>
+          </a:bodyPr>
+          <a:lstStyle/>
+          <a:p>
+            <a:pPr algn="l">
+              <a:defRPr sz="1000" i="1">
+                <a:solidFill>
+                  <a:srgbClr val="555555"/>
+                </a:solidFill>
+              </a:defRPr>
+            </a:pPr>
+            <a:r>
+              <a:t>RocCurveDisplay</a:t>
+            </a:r>
+          </a:p>
+        </p:txBody>
+      </p:sp>
       <p:pic>
         <p:nvPicPr>
-          <p:cNvPr id="4" name="Picture 3" descr="roc_pr_curves.png"/>
+          <p:cNvPr id="7" name="Picture 6" descr="roc_pr_curves.png"/>
           <p:cNvPicPr>
             <a:picLocks noChangeAspect="1"/>
           </p:cNvPicPr>
@@ -6109,7 +6848,7 @@
         <p:spPr>
           <a:xfrm>
             <a:off x="640080" y="1371600"/>
-            <a:ext cx="6858000" cy="5029200"/>
+            <a:ext cx="6858000" cy="1810512"/>
           </a:xfrm>
           <a:prstGeom prst="rect">
             <a:avLst/>
@@ -6267,7 +7006,7 @@
         <p:spPr>
           <a:xfrm>
             <a:off x="640080" y="1371600"/>
-            <a:ext cx="6858000" cy="5029200"/>
+            <a:ext cx="6858000" cy="1810512"/>
           </a:xfrm>
           <a:prstGeom prst="rect">
             <a:avLst/>
@@ -6880,7 +7619,7 @@
         <p:spPr>
           <a:xfrm>
             <a:off x="640080" y="1371600"/>
-            <a:ext cx="6858000" cy="5029200"/>
+            <a:ext cx="6858000" cy="1810512"/>
           </a:xfrm>
           <a:prstGeom prst="rect">
             <a:avLst/>
@@ -7054,7 +7793,7 @@
         <p:spPr>
           <a:xfrm>
             <a:off x="640080" y="1371600"/>
-            <a:ext cx="6858000" cy="5029200"/>
+            <a:ext cx="6858000" cy="1810512"/>
           </a:xfrm>
           <a:prstGeom prst="rect">
             <a:avLst/>
@@ -7160,9 +7899,176 @@
           </a:p>
         </p:txBody>
       </p:sp>
+      <p:sp>
+        <p:nvSpPr>
+          <p:cNvPr id="4" name="Rectangle 3"/>
+          <p:cNvSpPr/>
+          <p:nvPr/>
+        </p:nvSpPr>
+        <p:spPr>
+          <a:xfrm>
+            <a:off x="640080" y="3291840"/>
+            <a:ext cx="6766560" cy="804672"/>
+          </a:xfrm>
+          <a:prstGeom prst="rect">
+            <a:avLst/>
+          </a:prstGeom>
+          <a:solidFill>
+            <a:srgbClr val="F5F5F5"/>
+          </a:solidFill>
+          <a:ln>
+            <a:solidFill>
+              <a:srgbClr val="DDDDDD"/>
+            </a:solidFill>
+          </a:ln>
+        </p:spPr>
+        <p:style>
+          <a:lnRef idx="1">
+            <a:schemeClr val="accent1"/>
+          </a:lnRef>
+          <a:fillRef idx="3">
+            <a:schemeClr val="accent1"/>
+          </a:fillRef>
+          <a:effectRef idx="2">
+            <a:schemeClr val="accent1"/>
+          </a:effectRef>
+          <a:fontRef idx="minor">
+            <a:schemeClr val="lt1"/>
+          </a:fontRef>
+        </p:style>
+        <p:txBody>
+          <a:bodyPr rtlCol="0" anchor="ctr"/>
+          <a:lstStyle/>
+          <a:p>
+            <a:pPr algn="ctr"/>
+          </a:p>
+        </p:txBody>
+      </p:sp>
+      <p:sp>
+        <p:nvSpPr>
+          <p:cNvPr id="5" name="TextBox 4"/>
+          <p:cNvSpPr txBox="1"/>
+          <p:nvPr/>
+        </p:nvSpPr>
+        <p:spPr>
+          <a:xfrm>
+            <a:off x="713231" y="3328416"/>
+            <a:ext cx="6620256" cy="731520"/>
+          </a:xfrm>
+          <a:prstGeom prst="rect">
+            <a:avLst/>
+          </a:prstGeom>
+          <a:noFill/>
+        </p:spPr>
+        <p:txBody>
+          <a:bodyPr wrap="square">
+            <a:noAutofit/>
+          </a:bodyPr>
+          <a:lstStyle/>
+          <a:p>
+            <a:pPr>
+              <a:spcAft>
+                <a:spcPts val="0"/>
+              </a:spcAft>
+              <a:defRPr sz="1100">
+                <a:solidFill>
+                  <a:srgbClr val="000000"/>
+                </a:solidFill>
+                <a:latin typeface="Consolas"/>
+              </a:defRPr>
+            </a:pPr>
+            <a:r>
+              <a:t>import matplotlib.pyplot as plt</a:t>
+            </a:r>
+          </a:p>
+          <a:p>
+            <a:pPr>
+              <a:spcAft>
+                <a:spcPts val="0"/>
+              </a:spcAft>
+              <a:defRPr sz="1100">
+                <a:solidFill>
+                  <a:srgbClr val="000000"/>
+                </a:solidFill>
+                <a:latin typeface="Consolas"/>
+              </a:defRPr>
+            </a:pPr>
+            <a:r>
+              <a:t>fig, ax = plt.subplots(figsize=(6, 4))</a:t>
+            </a:r>
+          </a:p>
+          <a:p>
+            <a:pPr>
+              <a:spcAft>
+                <a:spcPts val="0"/>
+              </a:spcAft>
+              <a:defRPr sz="1100">
+                <a:solidFill>
+                  <a:srgbClr val="000000"/>
+                </a:solidFill>
+                <a:latin typeface="Consolas"/>
+              </a:defRPr>
+            </a:pPr>
+            <a:r>
+              <a:t>ax.plot([1, 2, 3], [1, 4, 9])</a:t>
+            </a:r>
+          </a:p>
+          <a:p>
+            <a:pPr>
+              <a:spcAft>
+                <a:spcPts val="0"/>
+              </a:spcAft>
+              <a:defRPr sz="1100">
+                <a:solidFill>
+                  <a:srgbClr val="000000"/>
+                </a:solidFill>
+                <a:latin typeface="Consolas"/>
+              </a:defRPr>
+            </a:pPr>
+            <a:r>
+              <a:t>ax.set_xlabel('x'); ax.set_ylabel('y')</a:t>
+            </a:r>
+          </a:p>
+        </p:txBody>
+      </p:sp>
+      <p:sp>
+        <p:nvSpPr>
+          <p:cNvPr id="6" name="TextBox 5"/>
+          <p:cNvSpPr txBox="1"/>
+          <p:nvPr/>
+        </p:nvSpPr>
+        <p:spPr>
+          <a:xfrm>
+            <a:off x="640080" y="4151376"/>
+            <a:ext cx="6766560" cy="201168"/>
+          </a:xfrm>
+          <a:prstGeom prst="rect">
+            <a:avLst/>
+          </a:prstGeom>
+          <a:noFill/>
+        </p:spPr>
+        <p:txBody>
+          <a:bodyPr wrap="none">
+            <a:spAutoFit/>
+          </a:bodyPr>
+          <a:lstStyle/>
+          <a:p>
+            <a:pPr algn="l">
+              <a:defRPr sz="1000" i="1">
+                <a:solidFill>
+                  <a:srgbClr val="555555"/>
+                </a:solidFill>
+              </a:defRPr>
+            </a:pPr>
+            <a:r>
+              <a:t>OO-стиль matplotlib</a:t>
+            </a:r>
+          </a:p>
+        </p:txBody>
+      </p:sp>
       <p:pic>
         <p:nvPicPr>
-          <p:cNvPr id="4" name="Picture 3" descr="fig_axes_diagram.png"/>
+          <p:cNvPr id="7" name="Picture 6" descr="fig_axes_diagram.png"/>
           <p:cNvPicPr>
             <a:picLocks noChangeAspect="1"/>
           </p:cNvPicPr>
@@ -7244,7 +8150,7 @@
         <p:spPr>
           <a:xfrm>
             <a:off x="640080" y="1371600"/>
-            <a:ext cx="6858000" cy="5029200"/>
+            <a:ext cx="6858000" cy="1810512"/>
           </a:xfrm>
           <a:prstGeom prst="rect">
             <a:avLst/>
@@ -7318,9 +8224,160 @@
           </a:p>
         </p:txBody>
       </p:sp>
+      <p:sp>
+        <p:nvSpPr>
+          <p:cNvPr id="4" name="Rectangle 3"/>
+          <p:cNvSpPr/>
+          <p:nvPr/>
+        </p:nvSpPr>
+        <p:spPr>
+          <a:xfrm>
+            <a:off x="640080" y="3291840"/>
+            <a:ext cx="6766560" cy="630936"/>
+          </a:xfrm>
+          <a:prstGeom prst="rect">
+            <a:avLst/>
+          </a:prstGeom>
+          <a:solidFill>
+            <a:srgbClr val="F5F5F5"/>
+          </a:solidFill>
+          <a:ln>
+            <a:solidFill>
+              <a:srgbClr val="DDDDDD"/>
+            </a:solidFill>
+          </a:ln>
+        </p:spPr>
+        <p:style>
+          <a:lnRef idx="1">
+            <a:schemeClr val="accent1"/>
+          </a:lnRef>
+          <a:fillRef idx="3">
+            <a:schemeClr val="accent1"/>
+          </a:fillRef>
+          <a:effectRef idx="2">
+            <a:schemeClr val="accent1"/>
+          </a:effectRef>
+          <a:fontRef idx="minor">
+            <a:schemeClr val="lt1"/>
+          </a:fontRef>
+        </p:style>
+        <p:txBody>
+          <a:bodyPr rtlCol="0" anchor="ctr"/>
+          <a:lstStyle/>
+          <a:p>
+            <a:pPr algn="ctr"/>
+          </a:p>
+        </p:txBody>
+      </p:sp>
+      <p:sp>
+        <p:nvSpPr>
+          <p:cNvPr id="5" name="TextBox 4"/>
+          <p:cNvSpPr txBox="1"/>
+          <p:nvPr/>
+        </p:nvSpPr>
+        <p:spPr>
+          <a:xfrm>
+            <a:off x="713231" y="3328416"/>
+            <a:ext cx="6620256" cy="557784"/>
+          </a:xfrm>
+          <a:prstGeom prst="rect">
+            <a:avLst/>
+          </a:prstGeom>
+          <a:noFill/>
+        </p:spPr>
+        <p:txBody>
+          <a:bodyPr wrap="square">
+            <a:noAutofit/>
+          </a:bodyPr>
+          <a:lstStyle/>
+          <a:p>
+            <a:pPr>
+              <a:spcAft>
+                <a:spcPts val="0"/>
+              </a:spcAft>
+              <a:defRPr sz="1100">
+                <a:solidFill>
+                  <a:srgbClr val="000000"/>
+                </a:solidFill>
+                <a:latin typeface="Consolas"/>
+              </a:defRPr>
+            </a:pPr>
+            <a:r>
+              <a:t>ax.plot(x, y, label='train', color='C0')</a:t>
+            </a:r>
+          </a:p>
+          <a:p>
+            <a:pPr>
+              <a:spcAft>
+                <a:spcPts val="0"/>
+              </a:spcAft>
+              <a:defRPr sz="1100">
+                <a:solidFill>
+                  <a:srgbClr val="000000"/>
+                </a:solidFill>
+                <a:latin typeface="Consolas"/>
+              </a:defRPr>
+            </a:pPr>
+            <a:r>
+              <a:t>ax.plot(x, y_test, label='test', linestyle='--')</a:t>
+            </a:r>
+          </a:p>
+          <a:p>
+            <a:pPr>
+              <a:spcAft>
+                <a:spcPts val="0"/>
+              </a:spcAft>
+              <a:defRPr sz="1100">
+                <a:solidFill>
+                  <a:srgbClr val="000000"/>
+                </a:solidFill>
+                <a:latin typeface="Consolas"/>
+              </a:defRPr>
+            </a:pPr>
+            <a:r>
+              <a:t>ax.legend()</a:t>
+            </a:r>
+          </a:p>
+        </p:txBody>
+      </p:sp>
+      <p:sp>
+        <p:nvSpPr>
+          <p:cNvPr id="6" name="TextBox 5"/>
+          <p:cNvSpPr txBox="1"/>
+          <p:nvPr/>
+        </p:nvSpPr>
+        <p:spPr>
+          <a:xfrm>
+            <a:off x="640080" y="3977639"/>
+            <a:ext cx="6766560" cy="201168"/>
+          </a:xfrm>
+          <a:prstGeom prst="rect">
+            <a:avLst/>
+          </a:prstGeom>
+          <a:noFill/>
+        </p:spPr>
+        <p:txBody>
+          <a:bodyPr wrap="none">
+            <a:spAutoFit/>
+          </a:bodyPr>
+          <a:lstStyle/>
+          <a:p>
+            <a:pPr algn="l">
+              <a:defRPr sz="1000" i="1">
+                <a:solidFill>
+                  <a:srgbClr val="555555"/>
+                </a:solidFill>
+              </a:defRPr>
+            </a:pPr>
+            <a:r>
+              <a:t>Несколько линий</a:t>
+            </a:r>
+          </a:p>
+        </p:txBody>
+      </p:sp>
       <p:pic>
         <p:nvPicPr>
-          <p:cNvPr id="4" name="Picture 3" descr="line_learning_curve.png"/>
+          <p:cNvPr id="7" name="Picture 6" descr="line_learning_curve.png"/>
           <p:cNvPicPr>
             <a:picLocks noChangeAspect="1"/>
           </p:cNvPicPr>
@@ -7402,7 +8459,7 @@
         <p:spPr>
           <a:xfrm>
             <a:off x="640080" y="1371600"/>
-            <a:ext cx="6858000" cy="5029200"/>
+            <a:ext cx="6858000" cy="1810512"/>
           </a:xfrm>
           <a:prstGeom prst="rect">
             <a:avLst/>
@@ -7476,9 +8533,144 @@
           </a:p>
         </p:txBody>
       </p:sp>
+      <p:sp>
+        <p:nvSpPr>
+          <p:cNvPr id="4" name="Rectangle 3"/>
+          <p:cNvSpPr/>
+          <p:nvPr/>
+        </p:nvSpPr>
+        <p:spPr>
+          <a:xfrm>
+            <a:off x="640080" y="3291840"/>
+            <a:ext cx="6766560" cy="457200"/>
+          </a:xfrm>
+          <a:prstGeom prst="rect">
+            <a:avLst/>
+          </a:prstGeom>
+          <a:solidFill>
+            <a:srgbClr val="F5F5F5"/>
+          </a:solidFill>
+          <a:ln>
+            <a:solidFill>
+              <a:srgbClr val="DDDDDD"/>
+            </a:solidFill>
+          </a:ln>
+        </p:spPr>
+        <p:style>
+          <a:lnRef idx="1">
+            <a:schemeClr val="accent1"/>
+          </a:lnRef>
+          <a:fillRef idx="3">
+            <a:schemeClr val="accent1"/>
+          </a:fillRef>
+          <a:effectRef idx="2">
+            <a:schemeClr val="accent1"/>
+          </a:effectRef>
+          <a:fontRef idx="minor">
+            <a:schemeClr val="lt1"/>
+          </a:fontRef>
+        </p:style>
+        <p:txBody>
+          <a:bodyPr rtlCol="0" anchor="ctr"/>
+          <a:lstStyle/>
+          <a:p>
+            <a:pPr algn="ctr"/>
+          </a:p>
+        </p:txBody>
+      </p:sp>
+      <p:sp>
+        <p:nvSpPr>
+          <p:cNvPr id="5" name="TextBox 4"/>
+          <p:cNvSpPr txBox="1"/>
+          <p:nvPr/>
+        </p:nvSpPr>
+        <p:spPr>
+          <a:xfrm>
+            <a:off x="713231" y="3328416"/>
+            <a:ext cx="6620256" cy="384048"/>
+          </a:xfrm>
+          <a:prstGeom prst="rect">
+            <a:avLst/>
+          </a:prstGeom>
+          <a:noFill/>
+        </p:spPr>
+        <p:txBody>
+          <a:bodyPr wrap="square">
+            <a:noAutofit/>
+          </a:bodyPr>
+          <a:lstStyle/>
+          <a:p>
+            <a:pPr>
+              <a:spcAft>
+                <a:spcPts val="0"/>
+              </a:spcAft>
+              <a:defRPr sz="1100">
+                <a:solidFill>
+                  <a:srgbClr val="000000"/>
+                </a:solidFill>
+                <a:latin typeface="Consolas"/>
+              </a:defRPr>
+            </a:pPr>
+            <a:r>
+              <a:t>ax.scatter(X[:, 0], X[:, 1], c=y, cmap='viridis', alpha=0.7)</a:t>
+            </a:r>
+          </a:p>
+          <a:p>
+            <a:pPr>
+              <a:spcAft>
+                <a:spcPts val="0"/>
+              </a:spcAft>
+              <a:defRPr sz="1100">
+                <a:solidFill>
+                  <a:srgbClr val="000000"/>
+                </a:solidFill>
+                <a:latin typeface="Consolas"/>
+              </a:defRPr>
+            </a:pPr>
+            <a:r>
+              <a:t>ax.set_xlabel('feature 1'); ax.set_ylabel('feature 2')</a:t>
+            </a:r>
+          </a:p>
+        </p:txBody>
+      </p:sp>
+      <p:sp>
+        <p:nvSpPr>
+          <p:cNvPr id="6" name="TextBox 5"/>
+          <p:cNvSpPr txBox="1"/>
+          <p:nvPr/>
+        </p:nvSpPr>
+        <p:spPr>
+          <a:xfrm>
+            <a:off x="640080" y="3803904"/>
+            <a:ext cx="6766560" cy="201168"/>
+          </a:xfrm>
+          <a:prstGeom prst="rect">
+            <a:avLst/>
+          </a:prstGeom>
+          <a:noFill/>
+        </p:spPr>
+        <p:txBody>
+          <a:bodyPr wrap="none">
+            <a:spAutoFit/>
+          </a:bodyPr>
+          <a:lstStyle/>
+          <a:p>
+            <a:pPr algn="l">
+              <a:defRPr sz="1000" i="1">
+                <a:solidFill>
+                  <a:srgbClr val="555555"/>
+                </a:solidFill>
+              </a:defRPr>
+            </a:pPr>
+            <a:r>
+              <a:t>Классы цветом</a:t>
+            </a:r>
+          </a:p>
+        </p:txBody>
+      </p:sp>
       <p:pic>
         <p:nvPicPr>
-          <p:cNvPr id="4" name="Picture 3" descr="scatter_classes.png"/>
+          <p:cNvPr id="7" name="Picture 6" descr="scatter_classes.png"/>
           <p:cNvPicPr>
             <a:picLocks noChangeAspect="1"/>
           </p:cNvPicPr>
@@ -7560,7 +8752,7 @@
         <p:spPr>
           <a:xfrm>
             <a:off x="640080" y="1371600"/>
-            <a:ext cx="6858000" cy="5029200"/>
+            <a:ext cx="6858000" cy="1810512"/>
           </a:xfrm>
           <a:prstGeom prst="rect">
             <a:avLst/>
@@ -7666,9 +8858,160 @@
           </a:p>
         </p:txBody>
       </p:sp>
+      <p:sp>
+        <p:nvSpPr>
+          <p:cNvPr id="4" name="Rectangle 3"/>
+          <p:cNvSpPr/>
+          <p:nvPr/>
+        </p:nvSpPr>
+        <p:spPr>
+          <a:xfrm>
+            <a:off x="640080" y="3291840"/>
+            <a:ext cx="6766560" cy="630936"/>
+          </a:xfrm>
+          <a:prstGeom prst="rect">
+            <a:avLst/>
+          </a:prstGeom>
+          <a:solidFill>
+            <a:srgbClr val="F5F5F5"/>
+          </a:solidFill>
+          <a:ln>
+            <a:solidFill>
+              <a:srgbClr val="DDDDDD"/>
+            </a:solidFill>
+          </a:ln>
+        </p:spPr>
+        <p:style>
+          <a:lnRef idx="1">
+            <a:schemeClr val="accent1"/>
+          </a:lnRef>
+          <a:fillRef idx="3">
+            <a:schemeClr val="accent1"/>
+          </a:fillRef>
+          <a:effectRef idx="2">
+            <a:schemeClr val="accent1"/>
+          </a:effectRef>
+          <a:fontRef idx="minor">
+            <a:schemeClr val="lt1"/>
+          </a:fontRef>
+        </p:style>
+        <p:txBody>
+          <a:bodyPr rtlCol="0" anchor="ctr"/>
+          <a:lstStyle/>
+          <a:p>
+            <a:pPr algn="ctr"/>
+          </a:p>
+        </p:txBody>
+      </p:sp>
+      <p:sp>
+        <p:nvSpPr>
+          <p:cNvPr id="5" name="TextBox 4"/>
+          <p:cNvSpPr txBox="1"/>
+          <p:nvPr/>
+        </p:nvSpPr>
+        <p:spPr>
+          <a:xfrm>
+            <a:off x="713231" y="3328416"/>
+            <a:ext cx="6620256" cy="557784"/>
+          </a:xfrm>
+          <a:prstGeom prst="rect">
+            <a:avLst/>
+          </a:prstGeom>
+          <a:noFill/>
+        </p:spPr>
+        <p:txBody>
+          <a:bodyPr wrap="square">
+            <a:noAutofit/>
+          </a:bodyPr>
+          <a:lstStyle/>
+          <a:p>
+            <a:pPr>
+              <a:spcAft>
+                <a:spcPts val="0"/>
+              </a:spcAft>
+              <a:defRPr sz="1100">
+                <a:solidFill>
+                  <a:srgbClr val="000000"/>
+                </a:solidFill>
+                <a:latin typeface="Consolas"/>
+              </a:defRPr>
+            </a:pPr>
+            <a:r>
+              <a:t>ax.bar(categories, values, color='steelblue')</a:t>
+            </a:r>
+          </a:p>
+          <a:p>
+            <a:pPr>
+              <a:spcAft>
+                <a:spcPts val="0"/>
+              </a:spcAft>
+              <a:defRPr sz="1100">
+                <a:solidFill>
+                  <a:srgbClr val="000000"/>
+                </a:solidFill>
+                <a:latin typeface="Consolas"/>
+              </a:defRPr>
+            </a:pPr>
+            <a:r>
+              <a:t>ax.set_ylabel('count')</a:t>
+            </a:r>
+          </a:p>
+          <a:p>
+            <a:pPr>
+              <a:spcAft>
+                <a:spcPts val="0"/>
+              </a:spcAft>
+              <a:defRPr sz="1100">
+                <a:solidFill>
+                  <a:srgbClr val="000000"/>
+                </a:solidFill>
+                <a:latin typeface="Consolas"/>
+              </a:defRPr>
+            </a:pPr>
+            <a:r>
+              <a:t>plt.xticks(rotation=45)</a:t>
+            </a:r>
+          </a:p>
+        </p:txBody>
+      </p:sp>
+      <p:sp>
+        <p:nvSpPr>
+          <p:cNvPr id="6" name="TextBox 5"/>
+          <p:cNvSpPr txBox="1"/>
+          <p:nvPr/>
+        </p:nvSpPr>
+        <p:spPr>
+          <a:xfrm>
+            <a:off x="640080" y="3977639"/>
+            <a:ext cx="6766560" cy="201168"/>
+          </a:xfrm>
+          <a:prstGeom prst="rect">
+            <a:avLst/>
+          </a:prstGeom>
+          <a:noFill/>
+        </p:spPr>
+        <p:txBody>
+          <a:bodyPr wrap="none">
+            <a:spAutoFit/>
+          </a:bodyPr>
+          <a:lstStyle/>
+          <a:p>
+            <a:pPr algn="l">
+              <a:defRPr sz="1000" i="1">
+                <a:solidFill>
+                  <a:srgbClr val="555555"/>
+                </a:solidFill>
+              </a:defRPr>
+            </a:pPr>
+            <a:r>
+              <a:t>Столбчатая диаграмма</a:t>
+            </a:r>
+          </a:p>
+        </p:txBody>
+      </p:sp>
       <p:pic>
         <p:nvPicPr>
-          <p:cNvPr id="4" name="Picture 3" descr="bar_metrics_compare.png"/>
+          <p:cNvPr id="7" name="Picture 6" descr="bar_metrics_compare.png"/>
           <p:cNvPicPr>
             <a:picLocks noChangeAspect="1"/>
           </p:cNvPicPr>
@@ -7750,7 +9093,7 @@
         <p:spPr>
           <a:xfrm>
             <a:off x="640080" y="1371600"/>
-            <a:ext cx="6858000" cy="5029200"/>
+            <a:ext cx="6858000" cy="1810512"/>
           </a:xfrm>
           <a:prstGeom prst="rect">
             <a:avLst/>
@@ -7824,9 +9167,160 @@
           </a:p>
         </p:txBody>
       </p:sp>
+      <p:sp>
+        <p:nvSpPr>
+          <p:cNvPr id="4" name="Rectangle 3"/>
+          <p:cNvSpPr/>
+          <p:nvPr/>
+        </p:nvSpPr>
+        <p:spPr>
+          <a:xfrm>
+            <a:off x="640080" y="3291840"/>
+            <a:ext cx="6766560" cy="630936"/>
+          </a:xfrm>
+          <a:prstGeom prst="rect">
+            <a:avLst/>
+          </a:prstGeom>
+          <a:solidFill>
+            <a:srgbClr val="F5F5F5"/>
+          </a:solidFill>
+          <a:ln>
+            <a:solidFill>
+              <a:srgbClr val="DDDDDD"/>
+            </a:solidFill>
+          </a:ln>
+        </p:spPr>
+        <p:style>
+          <a:lnRef idx="1">
+            <a:schemeClr val="accent1"/>
+          </a:lnRef>
+          <a:fillRef idx="3">
+            <a:schemeClr val="accent1"/>
+          </a:fillRef>
+          <a:effectRef idx="2">
+            <a:schemeClr val="accent1"/>
+          </a:effectRef>
+          <a:fontRef idx="minor">
+            <a:schemeClr val="lt1"/>
+          </a:fontRef>
+        </p:style>
+        <p:txBody>
+          <a:bodyPr rtlCol="0" anchor="ctr"/>
+          <a:lstStyle/>
+          <a:p>
+            <a:pPr algn="ctr"/>
+          </a:p>
+        </p:txBody>
+      </p:sp>
+      <p:sp>
+        <p:nvSpPr>
+          <p:cNvPr id="5" name="TextBox 4"/>
+          <p:cNvSpPr txBox="1"/>
+          <p:nvPr/>
+        </p:nvSpPr>
+        <p:spPr>
+          <a:xfrm>
+            <a:off x="713231" y="3328416"/>
+            <a:ext cx="6620256" cy="557784"/>
+          </a:xfrm>
+          <a:prstGeom prst="rect">
+            <a:avLst/>
+          </a:prstGeom>
+          <a:noFill/>
+        </p:spPr>
+        <p:txBody>
+          <a:bodyPr wrap="square">
+            <a:noAutofit/>
+          </a:bodyPr>
+          <a:lstStyle/>
+          <a:p>
+            <a:pPr>
+              <a:spcAft>
+                <a:spcPts val="0"/>
+              </a:spcAft>
+              <a:defRPr sz="1100">
+                <a:solidFill>
+                  <a:srgbClr val="000000"/>
+                </a:solidFill>
+                <a:latin typeface="Consolas"/>
+              </a:defRPr>
+            </a:pPr>
+            <a:r>
+              <a:t>ax.hist(data, bins=30, edgecolor='white')</a:t>
+            </a:r>
+          </a:p>
+          <a:p>
+            <a:pPr>
+              <a:spcAft>
+                <a:spcPts val="0"/>
+              </a:spcAft>
+              <a:defRPr sz="1100">
+                <a:solidFill>
+                  <a:srgbClr val="000000"/>
+                </a:solidFill>
+                <a:latin typeface="Consolas"/>
+              </a:defRPr>
+            </a:pPr>
+            <a:r>
+              <a:t>ax.boxplot(data, vert=True)</a:t>
+            </a:r>
+          </a:p>
+          <a:p>
+            <a:pPr>
+              <a:spcAft>
+                <a:spcPts val="0"/>
+              </a:spcAft>
+              <a:defRPr sz="1100">
+                <a:solidFill>
+                  <a:srgbClr val="000000"/>
+                </a:solidFill>
+                <a:latin typeface="Consolas"/>
+              </a:defRPr>
+            </a:pPr>
+            <a:r>
+              <a:t>ax.set_title('Распределение')</a:t>
+            </a:r>
+          </a:p>
+        </p:txBody>
+      </p:sp>
+      <p:sp>
+        <p:nvSpPr>
+          <p:cNvPr id="6" name="TextBox 5"/>
+          <p:cNvSpPr txBox="1"/>
+          <p:nvPr/>
+        </p:nvSpPr>
+        <p:spPr>
+          <a:xfrm>
+            <a:off x="640080" y="3977639"/>
+            <a:ext cx="6766560" cy="201168"/>
+          </a:xfrm>
+          <a:prstGeom prst="rect">
+            <a:avLst/>
+          </a:prstGeom>
+          <a:noFill/>
+        </p:spPr>
+        <p:txBody>
+          <a:bodyPr wrap="none">
+            <a:spAutoFit/>
+          </a:bodyPr>
+          <a:lstStyle/>
+          <a:p>
+            <a:pPr algn="l">
+              <a:defRPr sz="1000" i="1">
+                <a:solidFill>
+                  <a:srgbClr val="555555"/>
+                </a:solidFill>
+              </a:defRPr>
+            </a:pPr>
+            <a:r>
+              <a:t>hist + boxplot</a:t>
+            </a:r>
+          </a:p>
+        </p:txBody>
+      </p:sp>
       <p:pic>
         <p:nvPicPr>
-          <p:cNvPr id="4" name="Picture 3" descr="hist_box_combo.png"/>
+          <p:cNvPr id="7" name="Picture 6" descr="hist_box_combo.png"/>
           <p:cNvPicPr>
             <a:picLocks noChangeAspect="1"/>
           </p:cNvPicPr>
@@ -7908,7 +9402,7 @@
         <p:spPr>
           <a:xfrm>
             <a:off x="640080" y="1371600"/>
-            <a:ext cx="6858000" cy="5029200"/>
+            <a:ext cx="6858000" cy="1810512"/>
           </a:xfrm>
           <a:prstGeom prst="rect">
             <a:avLst/>
@@ -7982,9 +9476,160 @@
           </a:p>
         </p:txBody>
       </p:sp>
+      <p:sp>
+        <p:nvSpPr>
+          <p:cNvPr id="4" name="Rectangle 3"/>
+          <p:cNvSpPr/>
+          <p:nvPr/>
+        </p:nvSpPr>
+        <p:spPr>
+          <a:xfrm>
+            <a:off x="640080" y="3291840"/>
+            <a:ext cx="6766560" cy="630936"/>
+          </a:xfrm>
+          <a:prstGeom prst="rect">
+            <a:avLst/>
+          </a:prstGeom>
+          <a:solidFill>
+            <a:srgbClr val="F5F5F5"/>
+          </a:solidFill>
+          <a:ln>
+            <a:solidFill>
+              <a:srgbClr val="DDDDDD"/>
+            </a:solidFill>
+          </a:ln>
+        </p:spPr>
+        <p:style>
+          <a:lnRef idx="1">
+            <a:schemeClr val="accent1"/>
+          </a:lnRef>
+          <a:fillRef idx="3">
+            <a:schemeClr val="accent1"/>
+          </a:fillRef>
+          <a:effectRef idx="2">
+            <a:schemeClr val="accent1"/>
+          </a:effectRef>
+          <a:fontRef idx="minor">
+            <a:schemeClr val="lt1"/>
+          </a:fontRef>
+        </p:style>
+        <p:txBody>
+          <a:bodyPr rtlCol="0" anchor="ctr"/>
+          <a:lstStyle/>
+          <a:p>
+            <a:pPr algn="ctr"/>
+          </a:p>
+        </p:txBody>
+      </p:sp>
+      <p:sp>
+        <p:nvSpPr>
+          <p:cNvPr id="5" name="TextBox 4"/>
+          <p:cNvSpPr txBox="1"/>
+          <p:nvPr/>
+        </p:nvSpPr>
+        <p:spPr>
+          <a:xfrm>
+            <a:off x="713231" y="3328416"/>
+            <a:ext cx="6620256" cy="557784"/>
+          </a:xfrm>
+          <a:prstGeom prst="rect">
+            <a:avLst/>
+          </a:prstGeom>
+          <a:noFill/>
+        </p:spPr>
+        <p:txBody>
+          <a:bodyPr wrap="square">
+            <a:noAutofit/>
+          </a:bodyPr>
+          <a:lstStyle/>
+          <a:p>
+            <a:pPr>
+              <a:spcAft>
+                <a:spcPts val="0"/>
+              </a:spcAft>
+              <a:defRPr sz="1100">
+                <a:solidFill>
+                  <a:srgbClr val="000000"/>
+                </a:solidFill>
+                <a:latin typeface="Consolas"/>
+              </a:defRPr>
+            </a:pPr>
+            <a:r>
+              <a:t>import seaborn as sns</a:t>
+            </a:r>
+          </a:p>
+          <a:p>
+            <a:pPr>
+              <a:spcAft>
+                <a:spcPts val="0"/>
+              </a:spcAft>
+              <a:defRPr sz="1100">
+                <a:solidFill>
+                  <a:srgbClr val="000000"/>
+                </a:solidFill>
+                <a:latin typeface="Consolas"/>
+              </a:defRPr>
+            </a:pPr>
+            <a:r>
+              <a:t>sns.scatterplot(data=df, x='x', y='y', hue='class')</a:t>
+            </a:r>
+          </a:p>
+          <a:p>
+            <a:pPr>
+              <a:spcAft>
+                <a:spcPts val="0"/>
+              </a:spcAft>
+              <a:defRPr sz="1100">
+                <a:solidFill>
+                  <a:srgbClr val="000000"/>
+                </a:solidFill>
+                <a:latin typeface="Consolas"/>
+              </a:defRPr>
+            </a:pPr>
+            <a:r>
+              <a:t>sns.regplot(data=df, x='x', y='y', scatter_kws={'alpha': 0.5})</a:t>
+            </a:r>
+          </a:p>
+        </p:txBody>
+      </p:sp>
+      <p:sp>
+        <p:nvSpPr>
+          <p:cNvPr id="6" name="TextBox 5"/>
+          <p:cNvSpPr txBox="1"/>
+          <p:nvPr/>
+        </p:nvSpPr>
+        <p:spPr>
+          <a:xfrm>
+            <a:off x="640080" y="3977639"/>
+            <a:ext cx="6766560" cy="201168"/>
+          </a:xfrm>
+          <a:prstGeom prst="rect">
+            <a:avLst/>
+          </a:prstGeom>
+          <a:noFill/>
+        </p:spPr>
+        <p:txBody>
+          <a:bodyPr wrap="none">
+            <a:spAutoFit/>
+          </a:bodyPr>
+          <a:lstStyle/>
+          <a:p>
+            <a:pPr algn="l">
+              <a:defRPr sz="1000" i="1">
+                <a:solidFill>
+                  <a:srgbClr val="555555"/>
+                </a:solidFill>
+              </a:defRPr>
+            </a:pPr>
+            <a:r>
+              <a:t>scatterplot / regplot</a:t>
+            </a:r>
+          </a:p>
+        </p:txBody>
+      </p:sp>
       <p:pic>
         <p:nvPicPr>
-          <p:cNvPr id="4" name="Picture 3" descr="seaborn_scatter_reg.png"/>
+          <p:cNvPr id="7" name="Picture 6" descr="seaborn_scatter_reg.png"/>
           <p:cNvPicPr>
             <a:picLocks noChangeAspect="1"/>
           </p:cNvPicPr>
@@ -8066,7 +9711,7 @@
         <p:spPr>
           <a:xfrm>
             <a:off x="640080" y="1371600"/>
-            <a:ext cx="6858000" cy="5029200"/>
+            <a:ext cx="6858000" cy="1810512"/>
           </a:xfrm>
           <a:prstGeom prst="rect">
             <a:avLst/>
@@ -8156,9 +9801,160 @@
           </a:p>
         </p:txBody>
       </p:sp>
+      <p:sp>
+        <p:nvSpPr>
+          <p:cNvPr id="4" name="Rectangle 3"/>
+          <p:cNvSpPr/>
+          <p:nvPr/>
+        </p:nvSpPr>
+        <p:spPr>
+          <a:xfrm>
+            <a:off x="640080" y="3291840"/>
+            <a:ext cx="6766560" cy="630936"/>
+          </a:xfrm>
+          <a:prstGeom prst="rect">
+            <a:avLst/>
+          </a:prstGeom>
+          <a:solidFill>
+            <a:srgbClr val="F5F5F5"/>
+          </a:solidFill>
+          <a:ln>
+            <a:solidFill>
+              <a:srgbClr val="DDDDDD"/>
+            </a:solidFill>
+          </a:ln>
+        </p:spPr>
+        <p:style>
+          <a:lnRef idx="1">
+            <a:schemeClr val="accent1"/>
+          </a:lnRef>
+          <a:fillRef idx="3">
+            <a:schemeClr val="accent1"/>
+          </a:fillRef>
+          <a:effectRef idx="2">
+            <a:schemeClr val="accent1"/>
+          </a:effectRef>
+          <a:fontRef idx="minor">
+            <a:schemeClr val="lt1"/>
+          </a:fontRef>
+        </p:style>
+        <p:txBody>
+          <a:bodyPr rtlCol="0" anchor="ctr"/>
+          <a:lstStyle/>
+          <a:p>
+            <a:pPr algn="ctr"/>
+          </a:p>
+        </p:txBody>
+      </p:sp>
+      <p:sp>
+        <p:nvSpPr>
+          <p:cNvPr id="5" name="TextBox 4"/>
+          <p:cNvSpPr txBox="1"/>
+          <p:nvPr/>
+        </p:nvSpPr>
+        <p:spPr>
+          <a:xfrm>
+            <a:off x="713231" y="3328416"/>
+            <a:ext cx="6620256" cy="557784"/>
+          </a:xfrm>
+          <a:prstGeom prst="rect">
+            <a:avLst/>
+          </a:prstGeom>
+          <a:noFill/>
+        </p:spPr>
+        <p:txBody>
+          <a:bodyPr wrap="square">
+            <a:noAutofit/>
+          </a:bodyPr>
+          <a:lstStyle/>
+          <a:p>
+            <a:pPr>
+              <a:spcAft>
+                <a:spcPts val="0"/>
+              </a:spcAft>
+              <a:defRPr sz="1100">
+                <a:solidFill>
+                  <a:srgbClr val="000000"/>
+                </a:solidFill>
+                <a:latin typeface="Consolas"/>
+              </a:defRPr>
+            </a:pPr>
+            <a:r>
+              <a:t>ax.set_title('ROC-кривая', fontsize=14)</a:t>
+            </a:r>
+          </a:p>
+          <a:p>
+            <a:pPr>
+              <a:spcAft>
+                <a:spcPts val="0"/>
+              </a:spcAft>
+              <a:defRPr sz="1100">
+                <a:solidFill>
+                  <a:srgbClr val="000000"/>
+                </a:solidFill>
+                <a:latin typeface="Consolas"/>
+              </a:defRPr>
+            </a:pPr>
+            <a:r>
+              <a:t>ax.legend(loc='lower right')</a:t>
+            </a:r>
+          </a:p>
+          <a:p>
+            <a:pPr>
+              <a:spcAft>
+                <a:spcPts val="0"/>
+              </a:spcAft>
+              <a:defRPr sz="1100">
+                <a:solidFill>
+                  <a:srgbClr val="000000"/>
+                </a:solidFill>
+                <a:latin typeface="Consolas"/>
+              </a:defRPr>
+            </a:pPr>
+            <a:r>
+              <a:t>ax.grid(True, alpha=0.3)</a:t>
+            </a:r>
+          </a:p>
+        </p:txBody>
+      </p:sp>
+      <p:sp>
+        <p:nvSpPr>
+          <p:cNvPr id="6" name="TextBox 5"/>
+          <p:cNvSpPr txBox="1"/>
+          <p:nvPr/>
+        </p:nvSpPr>
+        <p:spPr>
+          <a:xfrm>
+            <a:off x="640080" y="3977639"/>
+            <a:ext cx="6766560" cy="201168"/>
+          </a:xfrm>
+          <a:prstGeom prst="rect">
+            <a:avLst/>
+          </a:prstGeom>
+          <a:noFill/>
+        </p:spPr>
+        <p:txBody>
+          <a:bodyPr wrap="none">
+            <a:spAutoFit/>
+          </a:bodyPr>
+          <a:lstStyle/>
+          <a:p>
+            <a:pPr algn="l">
+              <a:defRPr sz="1000" i="1">
+                <a:solidFill>
+                  <a:srgbClr val="555555"/>
+                </a:solidFill>
+              </a:defRPr>
+            </a:pPr>
+            <a:r>
+              <a:t>title / legend / grid</a:t>
+            </a:r>
+          </a:p>
+        </p:txBody>
+      </p:sp>
       <p:pic>
         <p:nvPicPr>
-          <p:cNvPr id="4" name="Picture 3" descr="legend_color_marker.png"/>
+          <p:cNvPr id="7" name="Picture 6" descr="legend_color_marker.png"/>
           <p:cNvPicPr>
             <a:picLocks noChangeAspect="1"/>
           </p:cNvPicPr>

--- a/lessons/vizualizatsiya/presentation.pptx
+++ b/lessons/vizualizatsiya/presentation.pptx
@@ -7394,7 +7394,7 @@
                 </a:solidFill>
                 <a:hlinkClick r:id="rId4"/>
               </a:rPr>
-              <a:t>https://colab.research.google.com/github/gurovic/ml-lessons/blob/feature/references-and-slide-code/lessons/vizualizatsiya/code.ipynb</a:t>
+              <a:t>https://colab.research.google.com/github/gurovic/ml-lessons/blob/main/lessons/vizualizatsiya/code.ipynb</a:t>
             </a:r>
           </a:p>
         </p:txBody>
@@ -7436,7 +7436,7 @@
                 </a:solidFill>
                 <a:hlinkClick r:id="rId5"/>
               </a:rPr>
-              <a:t>https://colab.research.google.com/github/gurovic/ml-lessons/blob/feature/references-and-slide-code/lessons/vizualizatsiya/project.ipynb</a:t>
+              <a:t>https://colab.research.google.com/github/gurovic/ml-lessons/blob/main/lessons/vizualizatsiya/project.ipynb</a:t>
             </a:r>
           </a:p>
         </p:txBody>

--- a/lessons/vizualizatsiya/presentation.pptx
+++ b/lessons/vizualizatsiya/presentation.pptx
@@ -4916,7 +4916,7 @@
         <p:spPr>
           <a:xfrm>
             <a:off x="640080" y="1371600"/>
-            <a:ext cx="6858000" cy="1810512"/>
+            <a:ext cx="6858000" cy="3383279"/>
           </a:xfrm>
           <a:prstGeom prst="rect">
             <a:avLst/>
@@ -4925,7 +4925,7 @@
         </p:spPr>
         <p:txBody>
           <a:bodyPr wrap="square">
-            <a:spAutoFit/>
+            <a:normAutofit/>
           </a:bodyPr>
           <a:lstStyle/>
           <a:p>
@@ -4998,7 +4998,7 @@
         </p:nvSpPr>
         <p:spPr>
           <a:xfrm>
-            <a:off x="640080" y="3291840"/>
+            <a:off x="640080" y="4864607"/>
             <a:ext cx="6766560" cy="630936"/>
           </a:xfrm>
           <a:prstGeom prst="rect">
@@ -5043,7 +5043,7 @@
         </p:nvSpPr>
         <p:spPr>
           <a:xfrm>
-            <a:off x="713231" y="3328416"/>
+            <a:off x="713231" y="4901183"/>
             <a:ext cx="6620256" cy="557784"/>
           </a:xfrm>
           <a:prstGeom prst="rect">
@@ -5052,7 +5052,7 @@
           <a:noFill/>
         </p:spPr>
         <p:txBody>
-          <a:bodyPr wrap="square">
+          <a:bodyPr wrap="none">
             <a:noAutofit/>
           </a:bodyPr>
           <a:lstStyle/>
@@ -5061,14 +5061,14 @@
               <a:spcAft>
                 <a:spcPts val="0"/>
               </a:spcAft>
-              <a:defRPr sz="1100">
+            </a:pPr>
+            <a:r>
+              <a:rPr sz="1100">
                 <a:solidFill>
                   <a:srgbClr val="000000"/>
                 </a:solidFill>
                 <a:latin typeface="Consolas"/>
-              </a:defRPr>
-            </a:pPr>
-            <a:r>
+              </a:rPr>
               <a:t>fig, axes = plt.subplots(2, 2, figsize=(8, 6))</a:t>
             </a:r>
           </a:p>
@@ -5077,14 +5077,14 @@
               <a:spcAft>
                 <a:spcPts val="0"/>
               </a:spcAft>
-              <a:defRPr sz="1100">
+            </a:pPr>
+            <a:r>
+              <a:rPr sz="1100">
                 <a:solidFill>
                   <a:srgbClr val="000000"/>
                 </a:solidFill>
                 <a:latin typeface="Consolas"/>
-              </a:defRPr>
-            </a:pPr>
-            <a:r>
+              </a:rPr>
               <a:t>axes[0, 0].hist(a); axes[0, 1].scatter(x, y)</a:t>
             </a:r>
           </a:p>
@@ -5093,14 +5093,14 @@
               <a:spcAft>
                 <a:spcPts val="0"/>
               </a:spcAft>
-              <a:defRPr sz="1100">
+            </a:pPr>
+            <a:r>
+              <a:rPr sz="1100">
                 <a:solidFill>
                   <a:srgbClr val="000000"/>
                 </a:solidFill>
                 <a:latin typeface="Consolas"/>
-              </a:defRPr>
-            </a:pPr>
-            <a:r>
+              </a:rPr>
               <a:t>fig.tight_layout()</a:t>
             </a:r>
           </a:p>
@@ -5114,7 +5114,7 @@
         </p:nvSpPr>
         <p:spPr>
           <a:xfrm>
-            <a:off x="640080" y="3977639"/>
+            <a:off x="640080" y="5550407"/>
             <a:ext cx="6766560" cy="201168"/>
           </a:xfrm>
           <a:prstGeom prst="rect">
@@ -5225,7 +5225,7 @@
         <p:spPr>
           <a:xfrm>
             <a:off x="640080" y="1371600"/>
-            <a:ext cx="6858000" cy="1810512"/>
+            <a:ext cx="6858000" cy="3383279"/>
           </a:xfrm>
           <a:prstGeom prst="rect">
             <a:avLst/>
@@ -5234,7 +5234,7 @@
         </p:spPr>
         <p:txBody>
           <a:bodyPr wrap="square">
-            <a:spAutoFit/>
+            <a:normAutofit/>
           </a:bodyPr>
           <a:lstStyle/>
           <a:p>
@@ -5307,7 +5307,7 @@
         </p:nvSpPr>
         <p:spPr>
           <a:xfrm>
-            <a:off x="640080" y="3291840"/>
+            <a:off x="640080" y="4864607"/>
             <a:ext cx="6766560" cy="630936"/>
           </a:xfrm>
           <a:prstGeom prst="rect">
@@ -5352,7 +5352,7 @@
         </p:nvSpPr>
         <p:spPr>
           <a:xfrm>
-            <a:off x="713231" y="3328416"/>
+            <a:off x="713231" y="4901183"/>
             <a:ext cx="6620256" cy="557784"/>
           </a:xfrm>
           <a:prstGeom prst="rect">
@@ -5361,7 +5361,7 @@
           <a:noFill/>
         </p:spPr>
         <p:txBody>
-          <a:bodyPr wrap="square">
+          <a:bodyPr wrap="none">
             <a:noAutofit/>
           </a:bodyPr>
           <a:lstStyle/>
@@ -5370,14 +5370,14 @@
               <a:spcAft>
                 <a:spcPts val="0"/>
               </a:spcAft>
-              <a:defRPr sz="1100">
+            </a:pPr>
+            <a:r>
+              <a:rPr sz="1100">
                 <a:solidFill>
                   <a:srgbClr val="000000"/>
                 </a:solidFill>
                 <a:latin typeface="Consolas"/>
-              </a:defRPr>
-            </a:pPr>
-            <a:r>
+              </a:rPr>
               <a:t>import seaborn as sns</a:t>
             </a:r>
           </a:p>
@@ -5386,14 +5386,14 @@
               <a:spcAft>
                 <a:spcPts val="0"/>
               </a:spcAft>
-              <a:defRPr sz="1100">
+            </a:pPr>
+            <a:r>
+              <a:rPr sz="1100">
                 <a:solidFill>
                   <a:srgbClr val="000000"/>
                 </a:solidFill>
                 <a:latin typeface="Consolas"/>
-              </a:defRPr>
-            </a:pPr>
-            <a:r>
+              </a:rPr>
               <a:t>corr = df.corr(numeric_only=True)</a:t>
             </a:r>
           </a:p>
@@ -5402,14 +5402,14 @@
               <a:spcAft>
                 <a:spcPts val="0"/>
               </a:spcAft>
-              <a:defRPr sz="1100">
+            </a:pPr>
+            <a:r>
+              <a:rPr sz="1100">
                 <a:solidFill>
                   <a:srgbClr val="000000"/>
                 </a:solidFill>
                 <a:latin typeface="Consolas"/>
-              </a:defRPr>
-            </a:pPr>
-            <a:r>
+              </a:rPr>
               <a:t>sns.heatmap(corr, annot=True, cmap='coolwarm', vmin=-1, vmax=1)</a:t>
             </a:r>
           </a:p>
@@ -5423,7 +5423,7 @@
         </p:nvSpPr>
         <p:spPr>
           <a:xfrm>
-            <a:off x="640080" y="3977639"/>
+            <a:off x="640080" y="5550407"/>
             <a:ext cx="6766560" cy="201168"/>
           </a:xfrm>
           <a:prstGeom prst="rect">
@@ -5534,7 +5534,7 @@
         <p:spPr>
           <a:xfrm>
             <a:off x="640080" y="1371600"/>
-            <a:ext cx="6858000" cy="1810512"/>
+            <a:ext cx="6858000" cy="3557015"/>
           </a:xfrm>
           <a:prstGeom prst="rect">
             <a:avLst/>
@@ -5543,7 +5543,7 @@
         </p:spPr>
         <p:txBody>
           <a:bodyPr wrap="square">
-            <a:spAutoFit/>
+            <a:normAutofit/>
           </a:bodyPr>
           <a:lstStyle/>
           <a:p>
@@ -5616,7 +5616,7 @@
         </p:nvSpPr>
         <p:spPr>
           <a:xfrm>
-            <a:off x="640080" y="3291840"/>
+            <a:off x="640080" y="5038344"/>
             <a:ext cx="6766560" cy="457200"/>
           </a:xfrm>
           <a:prstGeom prst="rect">
@@ -5661,7 +5661,7 @@
         </p:nvSpPr>
         <p:spPr>
           <a:xfrm>
-            <a:off x="713231" y="3328416"/>
+            <a:off x="713231" y="5074920"/>
             <a:ext cx="6620256" cy="384048"/>
           </a:xfrm>
           <a:prstGeom prst="rect">
@@ -5670,7 +5670,7 @@
           <a:noFill/>
         </p:spPr>
         <p:txBody>
-          <a:bodyPr wrap="square">
+          <a:bodyPr wrap="none">
             <a:noAutofit/>
           </a:bodyPr>
           <a:lstStyle/>
@@ -5679,14 +5679,14 @@
               <a:spcAft>
                 <a:spcPts val="0"/>
               </a:spcAft>
-              <a:defRPr sz="1100">
+            </a:pPr>
+            <a:r>
+              <a:rPr sz="1100">
                 <a:solidFill>
                   <a:srgbClr val="000000"/>
                 </a:solidFill>
                 <a:latin typeface="Consolas"/>
-              </a:defRPr>
-            </a:pPr>
-            <a:r>
+              </a:rPr>
               <a:t>sns.countplot(data=df, x='category', order=df['category'].value_counts().index)</a:t>
             </a:r>
           </a:p>
@@ -5695,14 +5695,14 @@
               <a:spcAft>
                 <a:spcPts val="0"/>
               </a:spcAft>
-              <a:defRPr sz="1100">
+            </a:pPr>
+            <a:r>
+              <a:rPr sz="1100">
                 <a:solidFill>
                   <a:srgbClr val="000000"/>
                 </a:solidFill>
                 <a:latin typeface="Consolas"/>
-              </a:defRPr>
-            </a:pPr>
-            <a:r>
+              </a:rPr>
               <a:t>plt.xticks(rotation=30)</a:t>
             </a:r>
           </a:p>
@@ -5716,7 +5716,7 @@
         </p:nvSpPr>
         <p:spPr>
           <a:xfrm>
-            <a:off x="640080" y="3803904"/>
+            <a:off x="640080" y="5550408"/>
             <a:ext cx="6766560" cy="201168"/>
           </a:xfrm>
           <a:prstGeom prst="rect">
@@ -6175,7 +6175,7 @@
         <p:spPr>
           <a:xfrm>
             <a:off x="640080" y="1371600"/>
-            <a:ext cx="6858000" cy="1810512"/>
+            <a:ext cx="6858000" cy="3383279"/>
           </a:xfrm>
           <a:prstGeom prst="rect">
             <a:avLst/>
@@ -6184,7 +6184,7 @@
         </p:spPr>
         <p:txBody>
           <a:bodyPr wrap="square">
-            <a:spAutoFit/>
+            <a:normAutofit/>
           </a:bodyPr>
           <a:lstStyle/>
           <a:p>
@@ -6296,7 +6296,7 @@
         </p:nvSpPr>
         <p:spPr>
           <a:xfrm>
-            <a:off x="640080" y="3291840"/>
+            <a:off x="640080" y="4864607"/>
             <a:ext cx="6766560" cy="630936"/>
           </a:xfrm>
           <a:prstGeom prst="rect">
@@ -6341,7 +6341,7 @@
         </p:nvSpPr>
         <p:spPr>
           <a:xfrm>
-            <a:off x="713231" y="3328416"/>
+            <a:off x="713231" y="4901183"/>
             <a:ext cx="6620256" cy="557784"/>
           </a:xfrm>
           <a:prstGeom prst="rect">
@@ -6350,7 +6350,7 @@
           <a:noFill/>
         </p:spPr>
         <p:txBody>
-          <a:bodyPr wrap="square">
+          <a:bodyPr wrap="none">
             <a:noAutofit/>
           </a:bodyPr>
           <a:lstStyle/>
@@ -6359,14 +6359,14 @@
               <a:spcAft>
                 <a:spcPts val="0"/>
               </a:spcAft>
-              <a:defRPr sz="1100">
+            </a:pPr>
+            <a:r>
+              <a:rPr sz="1100">
                 <a:solidFill>
                   <a:srgbClr val="000000"/>
                 </a:solidFill>
                 <a:latin typeface="Consolas"/>
-              </a:defRPr>
-            </a:pPr>
-            <a:r>
+              </a:rPr>
               <a:t>residuals = y_test - y_pred</a:t>
             </a:r>
           </a:p>
@@ -6375,14 +6375,14 @@
               <a:spcAft>
                 <a:spcPts val="0"/>
               </a:spcAft>
-              <a:defRPr sz="1100">
+            </a:pPr>
+            <a:r>
+              <a:rPr sz="1100">
                 <a:solidFill>
                   <a:srgbClr val="000000"/>
                 </a:solidFill>
                 <a:latin typeface="Consolas"/>
-              </a:defRPr>
-            </a:pPr>
-            <a:r>
+              </a:rPr>
               <a:t>ax.scatter(y_pred, residuals, alpha=0.6)</a:t>
             </a:r>
           </a:p>
@@ -6391,14 +6391,14 @@
               <a:spcAft>
                 <a:spcPts val="0"/>
               </a:spcAft>
-              <a:defRPr sz="1100">
+            </a:pPr>
+            <a:r>
+              <a:rPr sz="1100">
                 <a:solidFill>
                   <a:srgbClr val="000000"/>
                 </a:solidFill>
                 <a:latin typeface="Consolas"/>
-              </a:defRPr>
-            </a:pPr>
-            <a:r>
+              </a:rPr>
               <a:t>ax.axhline(0, color='red', linestyle='--')</a:t>
             </a:r>
           </a:p>
@@ -6412,7 +6412,7 @@
         </p:nvSpPr>
         <p:spPr>
           <a:xfrm>
-            <a:off x="640080" y="3977639"/>
+            <a:off x="640080" y="5550407"/>
             <a:ext cx="6766560" cy="201168"/>
           </a:xfrm>
           <a:prstGeom prst="rect">
@@ -6523,7 +6523,7 @@
         <p:spPr>
           <a:xfrm>
             <a:off x="640080" y="1371600"/>
-            <a:ext cx="6858000" cy="1810512"/>
+            <a:ext cx="6858000" cy="3383279"/>
           </a:xfrm>
           <a:prstGeom prst="rect">
             <a:avLst/>
@@ -6532,7 +6532,7 @@
         </p:spPr>
         <p:txBody>
           <a:bodyPr wrap="square">
-            <a:spAutoFit/>
+            <a:normAutofit/>
           </a:bodyPr>
           <a:lstStyle/>
           <a:p>
@@ -6621,7 +6621,7 @@
         </p:nvSpPr>
         <p:spPr>
           <a:xfrm>
-            <a:off x="640080" y="3291840"/>
+            <a:off x="640080" y="4864607"/>
             <a:ext cx="6766560" cy="630936"/>
           </a:xfrm>
           <a:prstGeom prst="rect">
@@ -6666,7 +6666,7 @@
         </p:nvSpPr>
         <p:spPr>
           <a:xfrm>
-            <a:off x="713231" y="3328416"/>
+            <a:off x="713231" y="4901183"/>
             <a:ext cx="6620256" cy="557784"/>
           </a:xfrm>
           <a:prstGeom prst="rect">
@@ -6675,7 +6675,7 @@
           <a:noFill/>
         </p:spPr>
         <p:txBody>
-          <a:bodyPr wrap="square">
+          <a:bodyPr wrap="none">
             <a:noAutofit/>
           </a:bodyPr>
           <a:lstStyle/>
@@ -6684,14 +6684,14 @@
               <a:spcAft>
                 <a:spcPts val="0"/>
               </a:spcAft>
-              <a:defRPr sz="1100">
+            </a:pPr>
+            <a:r>
+              <a:rPr sz="1100">
                 <a:solidFill>
                   <a:srgbClr val="000000"/>
                 </a:solidFill>
                 <a:latin typeface="Consolas"/>
-              </a:defRPr>
-            </a:pPr>
-            <a:r>
+              </a:rPr>
               <a:t>from sklearn.metrics import RocCurveDisplay</a:t>
             </a:r>
           </a:p>
@@ -6700,14 +6700,14 @@
               <a:spcAft>
                 <a:spcPts val="0"/>
               </a:spcAft>
-              <a:defRPr sz="1100">
+            </a:pPr>
+            <a:r>
+              <a:rPr sz="1100">
                 <a:solidFill>
                   <a:srgbClr val="000000"/>
                 </a:solidFill>
                 <a:latin typeface="Consolas"/>
-              </a:defRPr>
-            </a:pPr>
-            <a:r>
+              </a:rPr>
               <a:t>RocCurveDisplay.from_predictions(y_test, y_score)</a:t>
             </a:r>
           </a:p>
@@ -6716,14 +6716,14 @@
               <a:spcAft>
                 <a:spcPts val="0"/>
               </a:spcAft>
-              <a:defRPr sz="1100">
+            </a:pPr>
+            <a:r>
+              <a:rPr sz="1100">
                 <a:solidFill>
                   <a:srgbClr val="000000"/>
                 </a:solidFill>
                 <a:latin typeface="Consolas"/>
-              </a:defRPr>
-            </a:pPr>
-            <a:r>
+              </a:rPr>
               <a:t>plt.title('ROC')</a:t>
             </a:r>
           </a:p>
@@ -6737,7 +6737,7 @@
         </p:nvSpPr>
         <p:spPr>
           <a:xfrm>
-            <a:off x="640080" y="3977639"/>
+            <a:off x="640080" y="5550407"/>
             <a:ext cx="6766560" cy="201168"/>
           </a:xfrm>
           <a:prstGeom prst="rect">
@@ -7793,7 +7793,7 @@
         <p:spPr>
           <a:xfrm>
             <a:off x="640080" y="1371600"/>
-            <a:ext cx="6858000" cy="1810512"/>
+            <a:ext cx="6858000" cy="3209544"/>
           </a:xfrm>
           <a:prstGeom prst="rect">
             <a:avLst/>
@@ -7802,7 +7802,7 @@
         </p:spPr>
         <p:txBody>
           <a:bodyPr wrap="square">
-            <a:spAutoFit/>
+            <a:normAutofit/>
           </a:bodyPr>
           <a:lstStyle/>
           <a:p>
@@ -7907,7 +7907,7 @@
         </p:nvSpPr>
         <p:spPr>
           <a:xfrm>
-            <a:off x="640080" y="3291840"/>
+            <a:off x="640080" y="4690872"/>
             <a:ext cx="6766560" cy="804672"/>
           </a:xfrm>
           <a:prstGeom prst="rect">
@@ -7952,7 +7952,7 @@
         </p:nvSpPr>
         <p:spPr>
           <a:xfrm>
-            <a:off x="713231" y="3328416"/>
+            <a:off x="713231" y="4727448"/>
             <a:ext cx="6620256" cy="731520"/>
           </a:xfrm>
           <a:prstGeom prst="rect">
@@ -7961,7 +7961,7 @@
           <a:noFill/>
         </p:spPr>
         <p:txBody>
-          <a:bodyPr wrap="square">
+          <a:bodyPr wrap="none">
             <a:noAutofit/>
           </a:bodyPr>
           <a:lstStyle/>
@@ -7970,14 +7970,14 @@
               <a:spcAft>
                 <a:spcPts val="0"/>
               </a:spcAft>
-              <a:defRPr sz="1100">
+            </a:pPr>
+            <a:r>
+              <a:rPr sz="1100">
                 <a:solidFill>
                   <a:srgbClr val="000000"/>
                 </a:solidFill>
                 <a:latin typeface="Consolas"/>
-              </a:defRPr>
-            </a:pPr>
-            <a:r>
+              </a:rPr>
               <a:t>import matplotlib.pyplot as plt</a:t>
             </a:r>
           </a:p>
@@ -7986,14 +7986,14 @@
               <a:spcAft>
                 <a:spcPts val="0"/>
               </a:spcAft>
-              <a:defRPr sz="1100">
+            </a:pPr>
+            <a:r>
+              <a:rPr sz="1100">
                 <a:solidFill>
                   <a:srgbClr val="000000"/>
                 </a:solidFill>
                 <a:latin typeface="Consolas"/>
-              </a:defRPr>
-            </a:pPr>
-            <a:r>
+              </a:rPr>
               <a:t>fig, ax = plt.subplots(figsize=(6, 4))</a:t>
             </a:r>
           </a:p>
@@ -8002,14 +8002,14 @@
               <a:spcAft>
                 <a:spcPts val="0"/>
               </a:spcAft>
-              <a:defRPr sz="1100">
+            </a:pPr>
+            <a:r>
+              <a:rPr sz="1100">
                 <a:solidFill>
                   <a:srgbClr val="000000"/>
                 </a:solidFill>
                 <a:latin typeface="Consolas"/>
-              </a:defRPr>
-            </a:pPr>
-            <a:r>
+              </a:rPr>
               <a:t>ax.plot([1, 2, 3], [1, 4, 9])</a:t>
             </a:r>
           </a:p>
@@ -8018,14 +8018,14 @@
               <a:spcAft>
                 <a:spcPts val="0"/>
               </a:spcAft>
-              <a:defRPr sz="1100">
+            </a:pPr>
+            <a:r>
+              <a:rPr sz="1100">
                 <a:solidFill>
                   <a:srgbClr val="000000"/>
                 </a:solidFill>
                 <a:latin typeface="Consolas"/>
-              </a:defRPr>
-            </a:pPr>
-            <a:r>
+              </a:rPr>
               <a:t>ax.set_xlabel('x'); ax.set_ylabel('y')</a:t>
             </a:r>
           </a:p>
@@ -8039,7 +8039,7 @@
         </p:nvSpPr>
         <p:spPr>
           <a:xfrm>
-            <a:off x="640080" y="4151376"/>
+            <a:off x="640080" y="5550408"/>
             <a:ext cx="6766560" cy="201168"/>
           </a:xfrm>
           <a:prstGeom prst="rect">
@@ -8150,7 +8150,7 @@
         <p:spPr>
           <a:xfrm>
             <a:off x="640080" y="1371600"/>
-            <a:ext cx="6858000" cy="1810512"/>
+            <a:ext cx="6858000" cy="3383279"/>
           </a:xfrm>
           <a:prstGeom prst="rect">
             <a:avLst/>
@@ -8159,7 +8159,7 @@
         </p:spPr>
         <p:txBody>
           <a:bodyPr wrap="square">
-            <a:spAutoFit/>
+            <a:normAutofit/>
           </a:bodyPr>
           <a:lstStyle/>
           <a:p>
@@ -8232,7 +8232,7 @@
         </p:nvSpPr>
         <p:spPr>
           <a:xfrm>
-            <a:off x="640080" y="3291840"/>
+            <a:off x="640080" y="4864607"/>
             <a:ext cx="6766560" cy="630936"/>
           </a:xfrm>
           <a:prstGeom prst="rect">
@@ -8277,7 +8277,7 @@
         </p:nvSpPr>
         <p:spPr>
           <a:xfrm>
-            <a:off x="713231" y="3328416"/>
+            <a:off x="713231" y="4901183"/>
             <a:ext cx="6620256" cy="557784"/>
           </a:xfrm>
           <a:prstGeom prst="rect">
@@ -8286,7 +8286,7 @@
           <a:noFill/>
         </p:spPr>
         <p:txBody>
-          <a:bodyPr wrap="square">
+          <a:bodyPr wrap="none">
             <a:noAutofit/>
           </a:bodyPr>
           <a:lstStyle/>
@@ -8295,14 +8295,14 @@
               <a:spcAft>
                 <a:spcPts val="0"/>
               </a:spcAft>
-              <a:defRPr sz="1100">
+            </a:pPr>
+            <a:r>
+              <a:rPr sz="1100">
                 <a:solidFill>
                   <a:srgbClr val="000000"/>
                 </a:solidFill>
                 <a:latin typeface="Consolas"/>
-              </a:defRPr>
-            </a:pPr>
-            <a:r>
+              </a:rPr>
               <a:t>ax.plot(x, y, label='train', color='C0')</a:t>
             </a:r>
           </a:p>
@@ -8311,14 +8311,14 @@
               <a:spcAft>
                 <a:spcPts val="0"/>
               </a:spcAft>
-              <a:defRPr sz="1100">
+            </a:pPr>
+            <a:r>
+              <a:rPr sz="1100">
                 <a:solidFill>
                   <a:srgbClr val="000000"/>
                 </a:solidFill>
                 <a:latin typeface="Consolas"/>
-              </a:defRPr>
-            </a:pPr>
-            <a:r>
+              </a:rPr>
               <a:t>ax.plot(x, y_test, label='test', linestyle='--')</a:t>
             </a:r>
           </a:p>
@@ -8327,14 +8327,14 @@
               <a:spcAft>
                 <a:spcPts val="0"/>
               </a:spcAft>
-              <a:defRPr sz="1100">
+            </a:pPr>
+            <a:r>
+              <a:rPr sz="1100">
                 <a:solidFill>
                   <a:srgbClr val="000000"/>
                 </a:solidFill>
                 <a:latin typeface="Consolas"/>
-              </a:defRPr>
-            </a:pPr>
-            <a:r>
+              </a:rPr>
               <a:t>ax.legend()</a:t>
             </a:r>
           </a:p>
@@ -8348,7 +8348,7 @@
         </p:nvSpPr>
         <p:spPr>
           <a:xfrm>
-            <a:off x="640080" y="3977639"/>
+            <a:off x="640080" y="5550407"/>
             <a:ext cx="6766560" cy="201168"/>
           </a:xfrm>
           <a:prstGeom prst="rect">
@@ -8459,7 +8459,7 @@
         <p:spPr>
           <a:xfrm>
             <a:off x="640080" y="1371600"/>
-            <a:ext cx="6858000" cy="1810512"/>
+            <a:ext cx="6858000" cy="3557015"/>
           </a:xfrm>
           <a:prstGeom prst="rect">
             <a:avLst/>
@@ -8468,7 +8468,7 @@
         </p:spPr>
         <p:txBody>
           <a:bodyPr wrap="square">
-            <a:spAutoFit/>
+            <a:normAutofit/>
           </a:bodyPr>
           <a:lstStyle/>
           <a:p>
@@ -8541,7 +8541,7 @@
         </p:nvSpPr>
         <p:spPr>
           <a:xfrm>
-            <a:off x="640080" y="3291840"/>
+            <a:off x="640080" y="5038344"/>
             <a:ext cx="6766560" cy="457200"/>
           </a:xfrm>
           <a:prstGeom prst="rect">
@@ -8586,7 +8586,7 @@
         </p:nvSpPr>
         <p:spPr>
           <a:xfrm>
-            <a:off x="713231" y="3328416"/>
+            <a:off x="713231" y="5074920"/>
             <a:ext cx="6620256" cy="384048"/>
           </a:xfrm>
           <a:prstGeom prst="rect">
@@ -8595,7 +8595,7 @@
           <a:noFill/>
         </p:spPr>
         <p:txBody>
-          <a:bodyPr wrap="square">
+          <a:bodyPr wrap="none">
             <a:noAutofit/>
           </a:bodyPr>
           <a:lstStyle/>
@@ -8604,14 +8604,14 @@
               <a:spcAft>
                 <a:spcPts val="0"/>
               </a:spcAft>
-              <a:defRPr sz="1100">
+            </a:pPr>
+            <a:r>
+              <a:rPr sz="1100">
                 <a:solidFill>
                   <a:srgbClr val="000000"/>
                 </a:solidFill>
                 <a:latin typeface="Consolas"/>
-              </a:defRPr>
-            </a:pPr>
-            <a:r>
+              </a:rPr>
               <a:t>ax.scatter(X[:, 0], X[:, 1], c=y, cmap='viridis', alpha=0.7)</a:t>
             </a:r>
           </a:p>
@@ -8620,14 +8620,14 @@
               <a:spcAft>
                 <a:spcPts val="0"/>
               </a:spcAft>
-              <a:defRPr sz="1100">
+            </a:pPr>
+            <a:r>
+              <a:rPr sz="1100">
                 <a:solidFill>
                   <a:srgbClr val="000000"/>
                 </a:solidFill>
                 <a:latin typeface="Consolas"/>
-              </a:defRPr>
-            </a:pPr>
-            <a:r>
+              </a:rPr>
               <a:t>ax.set_xlabel('feature 1'); ax.set_ylabel('feature 2')</a:t>
             </a:r>
           </a:p>
@@ -8641,7 +8641,7 @@
         </p:nvSpPr>
         <p:spPr>
           <a:xfrm>
-            <a:off x="640080" y="3803904"/>
+            <a:off x="640080" y="5550408"/>
             <a:ext cx="6766560" cy="201168"/>
           </a:xfrm>
           <a:prstGeom prst="rect">
@@ -8752,7 +8752,7 @@
         <p:spPr>
           <a:xfrm>
             <a:off x="640080" y="1371600"/>
-            <a:ext cx="6858000" cy="1810512"/>
+            <a:ext cx="6858000" cy="3383279"/>
           </a:xfrm>
           <a:prstGeom prst="rect">
             <a:avLst/>
@@ -8761,7 +8761,7 @@
         </p:spPr>
         <p:txBody>
           <a:bodyPr wrap="square">
-            <a:spAutoFit/>
+            <a:normAutofit/>
           </a:bodyPr>
           <a:lstStyle/>
           <a:p>
@@ -8866,7 +8866,7 @@
         </p:nvSpPr>
         <p:spPr>
           <a:xfrm>
-            <a:off x="640080" y="3291840"/>
+            <a:off x="640080" y="4864607"/>
             <a:ext cx="6766560" cy="630936"/>
           </a:xfrm>
           <a:prstGeom prst="rect">
@@ -8911,7 +8911,7 @@
         </p:nvSpPr>
         <p:spPr>
           <a:xfrm>
-            <a:off x="713231" y="3328416"/>
+            <a:off x="713231" y="4901183"/>
             <a:ext cx="6620256" cy="557784"/>
           </a:xfrm>
           <a:prstGeom prst="rect">
@@ -8920,7 +8920,7 @@
           <a:noFill/>
         </p:spPr>
         <p:txBody>
-          <a:bodyPr wrap="square">
+          <a:bodyPr wrap="none">
             <a:noAutofit/>
           </a:bodyPr>
           <a:lstStyle/>
@@ -8929,14 +8929,14 @@
               <a:spcAft>
                 <a:spcPts val="0"/>
               </a:spcAft>
-              <a:defRPr sz="1100">
+            </a:pPr>
+            <a:r>
+              <a:rPr sz="1100">
                 <a:solidFill>
                   <a:srgbClr val="000000"/>
                 </a:solidFill>
                 <a:latin typeface="Consolas"/>
-              </a:defRPr>
-            </a:pPr>
-            <a:r>
+              </a:rPr>
               <a:t>ax.bar(categories, values, color='steelblue')</a:t>
             </a:r>
           </a:p>
@@ -8945,14 +8945,14 @@
               <a:spcAft>
                 <a:spcPts val="0"/>
               </a:spcAft>
-              <a:defRPr sz="1100">
+            </a:pPr>
+            <a:r>
+              <a:rPr sz="1100">
                 <a:solidFill>
                   <a:srgbClr val="000000"/>
                 </a:solidFill>
                 <a:latin typeface="Consolas"/>
-              </a:defRPr>
-            </a:pPr>
-            <a:r>
+              </a:rPr>
               <a:t>ax.set_ylabel('count')</a:t>
             </a:r>
           </a:p>
@@ -8961,14 +8961,14 @@
               <a:spcAft>
                 <a:spcPts val="0"/>
               </a:spcAft>
-              <a:defRPr sz="1100">
+            </a:pPr>
+            <a:r>
+              <a:rPr sz="1100">
                 <a:solidFill>
                   <a:srgbClr val="000000"/>
                 </a:solidFill>
                 <a:latin typeface="Consolas"/>
-              </a:defRPr>
-            </a:pPr>
-            <a:r>
+              </a:rPr>
               <a:t>plt.xticks(rotation=45)</a:t>
             </a:r>
           </a:p>
@@ -8982,7 +8982,7 @@
         </p:nvSpPr>
         <p:spPr>
           <a:xfrm>
-            <a:off x="640080" y="3977639"/>
+            <a:off x="640080" y="5550407"/>
             <a:ext cx="6766560" cy="201168"/>
           </a:xfrm>
           <a:prstGeom prst="rect">
@@ -9093,7 +9093,7 @@
         <p:spPr>
           <a:xfrm>
             <a:off x="640080" y="1371600"/>
-            <a:ext cx="6858000" cy="1810512"/>
+            <a:ext cx="6858000" cy="3383279"/>
           </a:xfrm>
           <a:prstGeom prst="rect">
             <a:avLst/>
@@ -9102,7 +9102,7 @@
         </p:spPr>
         <p:txBody>
           <a:bodyPr wrap="square">
-            <a:spAutoFit/>
+            <a:normAutofit/>
           </a:bodyPr>
           <a:lstStyle/>
           <a:p>
@@ -9175,7 +9175,7 @@
         </p:nvSpPr>
         <p:spPr>
           <a:xfrm>
-            <a:off x="640080" y="3291840"/>
+            <a:off x="640080" y="4864607"/>
             <a:ext cx="6766560" cy="630936"/>
           </a:xfrm>
           <a:prstGeom prst="rect">
@@ -9220,7 +9220,7 @@
         </p:nvSpPr>
         <p:spPr>
           <a:xfrm>
-            <a:off x="713231" y="3328416"/>
+            <a:off x="713231" y="4901183"/>
             <a:ext cx="6620256" cy="557784"/>
           </a:xfrm>
           <a:prstGeom prst="rect">
@@ -9229,7 +9229,7 @@
           <a:noFill/>
         </p:spPr>
         <p:txBody>
-          <a:bodyPr wrap="square">
+          <a:bodyPr wrap="none">
             <a:noAutofit/>
           </a:bodyPr>
           <a:lstStyle/>
@@ -9238,14 +9238,14 @@
               <a:spcAft>
                 <a:spcPts val="0"/>
               </a:spcAft>
-              <a:defRPr sz="1100">
+            </a:pPr>
+            <a:r>
+              <a:rPr sz="1100">
                 <a:solidFill>
                   <a:srgbClr val="000000"/>
                 </a:solidFill>
                 <a:latin typeface="Consolas"/>
-              </a:defRPr>
-            </a:pPr>
-            <a:r>
+              </a:rPr>
               <a:t>ax.hist(data, bins=30, edgecolor='white')</a:t>
             </a:r>
           </a:p>
@@ -9254,14 +9254,14 @@
               <a:spcAft>
                 <a:spcPts val="0"/>
               </a:spcAft>
-              <a:defRPr sz="1100">
+            </a:pPr>
+            <a:r>
+              <a:rPr sz="1100">
                 <a:solidFill>
                   <a:srgbClr val="000000"/>
                 </a:solidFill>
                 <a:latin typeface="Consolas"/>
-              </a:defRPr>
-            </a:pPr>
-            <a:r>
+              </a:rPr>
               <a:t>ax.boxplot(data, vert=True)</a:t>
             </a:r>
           </a:p>
@@ -9270,14 +9270,14 @@
               <a:spcAft>
                 <a:spcPts val="0"/>
               </a:spcAft>
-              <a:defRPr sz="1100">
+            </a:pPr>
+            <a:r>
+              <a:rPr sz="1100">
                 <a:solidFill>
                   <a:srgbClr val="000000"/>
                 </a:solidFill>
                 <a:latin typeface="Consolas"/>
-              </a:defRPr>
-            </a:pPr>
-            <a:r>
+              </a:rPr>
               <a:t>ax.set_title('Распределение')</a:t>
             </a:r>
           </a:p>
@@ -9291,7 +9291,7 @@
         </p:nvSpPr>
         <p:spPr>
           <a:xfrm>
-            <a:off x="640080" y="3977639"/>
+            <a:off x="640080" y="5550407"/>
             <a:ext cx="6766560" cy="201168"/>
           </a:xfrm>
           <a:prstGeom prst="rect">
@@ -9402,7 +9402,7 @@
         <p:spPr>
           <a:xfrm>
             <a:off x="640080" y="1371600"/>
-            <a:ext cx="6858000" cy="1810512"/>
+            <a:ext cx="6858000" cy="3383279"/>
           </a:xfrm>
           <a:prstGeom prst="rect">
             <a:avLst/>
@@ -9411,7 +9411,7 @@
         </p:spPr>
         <p:txBody>
           <a:bodyPr wrap="square">
-            <a:spAutoFit/>
+            <a:normAutofit/>
           </a:bodyPr>
           <a:lstStyle/>
           <a:p>
@@ -9484,7 +9484,7 @@
         </p:nvSpPr>
         <p:spPr>
           <a:xfrm>
-            <a:off x="640080" y="3291840"/>
+            <a:off x="640080" y="4864607"/>
             <a:ext cx="6766560" cy="630936"/>
           </a:xfrm>
           <a:prstGeom prst="rect">
@@ -9529,7 +9529,7 @@
         </p:nvSpPr>
         <p:spPr>
           <a:xfrm>
-            <a:off x="713231" y="3328416"/>
+            <a:off x="713231" y="4901183"/>
             <a:ext cx="6620256" cy="557784"/>
           </a:xfrm>
           <a:prstGeom prst="rect">
@@ -9538,7 +9538,7 @@
           <a:noFill/>
         </p:spPr>
         <p:txBody>
-          <a:bodyPr wrap="square">
+          <a:bodyPr wrap="none">
             <a:noAutofit/>
           </a:bodyPr>
           <a:lstStyle/>
@@ -9547,14 +9547,14 @@
               <a:spcAft>
                 <a:spcPts val="0"/>
               </a:spcAft>
-              <a:defRPr sz="1100">
+            </a:pPr>
+            <a:r>
+              <a:rPr sz="1100">
                 <a:solidFill>
                   <a:srgbClr val="000000"/>
                 </a:solidFill>
                 <a:latin typeface="Consolas"/>
-              </a:defRPr>
-            </a:pPr>
-            <a:r>
+              </a:rPr>
               <a:t>import seaborn as sns</a:t>
             </a:r>
           </a:p>
@@ -9563,14 +9563,14 @@
               <a:spcAft>
                 <a:spcPts val="0"/>
               </a:spcAft>
-              <a:defRPr sz="1100">
+            </a:pPr>
+            <a:r>
+              <a:rPr sz="1100">
                 <a:solidFill>
                   <a:srgbClr val="000000"/>
                 </a:solidFill>
                 <a:latin typeface="Consolas"/>
-              </a:defRPr>
-            </a:pPr>
-            <a:r>
+              </a:rPr>
               <a:t>sns.scatterplot(data=df, x='x', y='y', hue='class')</a:t>
             </a:r>
           </a:p>
@@ -9579,14 +9579,14 @@
               <a:spcAft>
                 <a:spcPts val="0"/>
               </a:spcAft>
-              <a:defRPr sz="1100">
+            </a:pPr>
+            <a:r>
+              <a:rPr sz="1100">
                 <a:solidFill>
                   <a:srgbClr val="000000"/>
                 </a:solidFill>
                 <a:latin typeface="Consolas"/>
-              </a:defRPr>
-            </a:pPr>
-            <a:r>
+              </a:rPr>
               <a:t>sns.regplot(data=df, x='x', y='y', scatter_kws={'alpha': 0.5})</a:t>
             </a:r>
           </a:p>
@@ -9600,7 +9600,7 @@
         </p:nvSpPr>
         <p:spPr>
           <a:xfrm>
-            <a:off x="640080" y="3977639"/>
+            <a:off x="640080" y="5550407"/>
             <a:ext cx="6766560" cy="201168"/>
           </a:xfrm>
           <a:prstGeom prst="rect">
@@ -9711,7 +9711,7 @@
         <p:spPr>
           <a:xfrm>
             <a:off x="640080" y="1371600"/>
-            <a:ext cx="6858000" cy="1810512"/>
+            <a:ext cx="6858000" cy="3383279"/>
           </a:xfrm>
           <a:prstGeom prst="rect">
             <a:avLst/>
@@ -9720,7 +9720,7 @@
         </p:spPr>
         <p:txBody>
           <a:bodyPr wrap="square">
-            <a:spAutoFit/>
+            <a:normAutofit/>
           </a:bodyPr>
           <a:lstStyle/>
           <a:p>
@@ -9809,7 +9809,7 @@
         </p:nvSpPr>
         <p:spPr>
           <a:xfrm>
-            <a:off x="640080" y="3291840"/>
+            <a:off x="640080" y="4864607"/>
             <a:ext cx="6766560" cy="630936"/>
           </a:xfrm>
           <a:prstGeom prst="rect">
@@ -9854,7 +9854,7 @@
         </p:nvSpPr>
         <p:spPr>
           <a:xfrm>
-            <a:off x="713231" y="3328416"/>
+            <a:off x="713231" y="4901183"/>
             <a:ext cx="6620256" cy="557784"/>
           </a:xfrm>
           <a:prstGeom prst="rect">
@@ -9863,7 +9863,7 @@
           <a:noFill/>
         </p:spPr>
         <p:txBody>
-          <a:bodyPr wrap="square">
+          <a:bodyPr wrap="none">
             <a:noAutofit/>
           </a:bodyPr>
           <a:lstStyle/>
@@ -9872,14 +9872,14 @@
               <a:spcAft>
                 <a:spcPts val="0"/>
               </a:spcAft>
-              <a:defRPr sz="1100">
+            </a:pPr>
+            <a:r>
+              <a:rPr sz="1100">
                 <a:solidFill>
                   <a:srgbClr val="000000"/>
                 </a:solidFill>
                 <a:latin typeface="Consolas"/>
-              </a:defRPr>
-            </a:pPr>
-            <a:r>
+              </a:rPr>
               <a:t>ax.set_title('ROC-кривая', fontsize=14)</a:t>
             </a:r>
           </a:p>
@@ -9888,14 +9888,14 @@
               <a:spcAft>
                 <a:spcPts val="0"/>
               </a:spcAft>
-              <a:defRPr sz="1100">
+            </a:pPr>
+            <a:r>
+              <a:rPr sz="1100">
                 <a:solidFill>
                   <a:srgbClr val="000000"/>
                 </a:solidFill>
                 <a:latin typeface="Consolas"/>
-              </a:defRPr>
-            </a:pPr>
-            <a:r>
+              </a:rPr>
               <a:t>ax.legend(loc='lower right')</a:t>
             </a:r>
           </a:p>
@@ -9904,14 +9904,14 @@
               <a:spcAft>
                 <a:spcPts val="0"/>
               </a:spcAft>
-              <a:defRPr sz="1100">
+            </a:pPr>
+            <a:r>
+              <a:rPr sz="1100">
                 <a:solidFill>
                   <a:srgbClr val="000000"/>
                 </a:solidFill>
                 <a:latin typeface="Consolas"/>
-              </a:defRPr>
-            </a:pPr>
-            <a:r>
+              </a:rPr>
               <a:t>ax.grid(True, alpha=0.3)</a:t>
             </a:r>
           </a:p>
@@ -9925,7 +9925,7 @@
         </p:nvSpPr>
         <p:spPr>
           <a:xfrm>
-            <a:off x="640080" y="3977639"/>
+            <a:off x="640080" y="5550407"/>
             <a:ext cx="6766560" cy="201168"/>
           </a:xfrm>
           <a:prstGeom prst="rect">

--- a/lessons/vizualizatsiya/presentation.pptx
+++ b/lessons/vizualizatsiya/presentation.pptx
@@ -4851,7 +4851,7 @@
               </a:defRPr>
             </a:pPr>
             <a:r>
-              <a:t>28.06.2026</a:t>
+              <a:t>29.06.2026</a:t>
             </a:r>
           </a:p>
         </p:txBody>

--- a/lessons/vizualizatsiya/presentation.pptx
+++ b/lessons/vizualizatsiya/presentation.pptx
@@ -4916,7 +4916,7 @@
         <p:spPr>
           <a:xfrm>
             <a:off x="640080" y="1371600"/>
-            <a:ext cx="6858000" cy="3383279"/>
+            <a:ext cx="6263640" cy="2697480"/>
           </a:xfrm>
           <a:prstGeom prst="rect">
             <a:avLst/>
@@ -4925,7 +4925,7 @@
         </p:spPr>
         <p:txBody>
           <a:bodyPr wrap="square">
-            <a:normAutofit/>
+            <a:spAutoFit/>
           </a:bodyPr>
           <a:lstStyle/>
           <a:p>
@@ -4940,7 +4940,7 @@
                   <a:srgbClr val="000000"/>
                 </a:solidFill>
               </a:rPr>
-              <a:t>`fig, axes = plt.subplots(nrows, ncols, figsize=(w,h))` — сетка графиков</a:t>
+              <a:t>• `fig, axes = plt.subplots(nrows, ncols, figsize=(w,h))` — сетка графиков</a:t>
             </a:r>
           </a:p>
           <a:p>
@@ -4955,7 +4955,7 @@
                   <a:srgbClr val="000000"/>
                 </a:solidFill>
               </a:rPr>
-              <a:t>`axes.ravel()` — плоский обход ячеек; `axes[0,1]` — доступ по индексу</a:t>
+              <a:t>• `axes.ravel()` — плоский обход ячеек; `axes[0,1]` — доступ по индексу</a:t>
             </a:r>
           </a:p>
           <a:p>
@@ -4970,7 +4970,7 @@
                   <a:srgbClr val="000000"/>
                 </a:solidFill>
               </a:rPr>
-              <a:t>`fig.suptitle('Общий заголовок')` — над всей фигурой</a:t>
+              <a:t>• `fig.suptitle('Общий заголовок')` — над всей фигурой</a:t>
             </a:r>
           </a:p>
           <a:p>
@@ -4985,7 +4985,7 @@
                   <a:srgbClr val="000000"/>
                 </a:solidFill>
               </a:rPr>
-              <a:t>Одинаковые пределы осей (`sharex`, `sharey`) — для сравнения панелей</a:t>
+              <a:t>• Одинаковые пределы осей (`sharex`, `sharey`) — для сравнения панелей</a:t>
             </a:r>
           </a:p>
         </p:txBody>
@@ -4998,8 +4998,8 @@
         </p:nvSpPr>
         <p:spPr>
           <a:xfrm>
-            <a:off x="640080" y="4864607"/>
-            <a:ext cx="6766560" cy="630936"/>
+            <a:off x="640080" y="4690872"/>
+            <a:ext cx="6172200" cy="630936"/>
           </a:xfrm>
           <a:prstGeom prst="rect">
             <a:avLst/>
@@ -5043,8 +5043,8 @@
         </p:nvSpPr>
         <p:spPr>
           <a:xfrm>
-            <a:off x="713231" y="4901183"/>
-            <a:ext cx="6620256" cy="557784"/>
+            <a:off x="713231" y="4727448"/>
+            <a:ext cx="6025896" cy="557784"/>
           </a:xfrm>
           <a:prstGeom prst="rect">
             <a:avLst/>
@@ -5114,8 +5114,8 @@
         </p:nvSpPr>
         <p:spPr>
           <a:xfrm>
-            <a:off x="640080" y="5550407"/>
-            <a:ext cx="6766560" cy="201168"/>
+            <a:off x="640080" y="5376672"/>
+            <a:ext cx="6172200" cy="201168"/>
           </a:xfrm>
           <a:prstGeom prst="rect">
             <a:avLst/>
@@ -5157,8 +5157,8 @@
         </p:blipFill>
         <p:spPr>
           <a:xfrm>
-            <a:off x="7635240" y="1825234"/>
-            <a:ext cx="4343400" cy="3481850"/>
+            <a:off x="7269480" y="1325880"/>
+            <a:ext cx="4465015" cy="3597593"/>
           </a:xfrm>
           <a:prstGeom prst="rect">
             <a:avLst/>
@@ -5225,7 +5225,7 @@
         <p:spPr>
           <a:xfrm>
             <a:off x="640080" y="1371600"/>
-            <a:ext cx="6858000" cy="3383279"/>
+            <a:ext cx="6263640" cy="2697480"/>
           </a:xfrm>
           <a:prstGeom prst="rect">
             <a:avLst/>
@@ -5234,7 +5234,7 @@
         </p:spPr>
         <p:txBody>
           <a:bodyPr wrap="square">
-            <a:normAutofit/>
+            <a:spAutoFit/>
           </a:bodyPr>
           <a:lstStyle/>
           <a:p>
@@ -5249,7 +5249,7 @@
                   <a:srgbClr val="000000"/>
                 </a:solidFill>
               </a:rPr>
-              <a:t>`df.corr()` — матрица Pearson; `sns.heatmap(corr, annot=True, cmap='RdBu_r', center=0)`</a:t>
+              <a:t>• `df.corr()` — матрица Pearson; `sns.heatmap(corr, annot=True, cmap='RdBu_r', center=0)`</a:t>
             </a:r>
           </a:p>
           <a:p>
@@ -5264,7 +5264,7 @@
                   <a:srgbClr val="000000"/>
                 </a:solidFill>
               </a:rPr>
-              <a:t>Сильная |r| ≳ 0.8 — кандидаты на мультиколлинеарность</a:t>
+              <a:t>• Сильная |r| ≳ 0.8 — кандидаты на мультиколлинеарность</a:t>
             </a:r>
           </a:p>
           <a:p>
@@ -5279,7 +5279,7 @@
                   <a:srgbClr val="000000"/>
                 </a:solidFill>
               </a:rPr>
-              <a:t>Корреляция ≠ причинность; скрытые нелинейные связи corr не видит</a:t>
+              <a:t>• Корреляция ≠ причинность; скрытые нелинейные связи corr не видит</a:t>
             </a:r>
           </a:p>
           <a:p>
@@ -5294,7 +5294,7 @@
                   <a:srgbClr val="000000"/>
                 </a:solidFill>
               </a:rPr>
-              <a:t>Масштабируй признаки перед интерпретацией corr в смешанных единицах</a:t>
+              <a:t>• Масштабируй признаки перед интерпретацией corr в смешанных единицах</a:t>
             </a:r>
           </a:p>
         </p:txBody>
@@ -5307,8 +5307,8 @@
         </p:nvSpPr>
         <p:spPr>
           <a:xfrm>
-            <a:off x="640080" y="4864607"/>
-            <a:ext cx="6766560" cy="630936"/>
+            <a:off x="640080" y="4892040"/>
+            <a:ext cx="6172200" cy="457200"/>
           </a:xfrm>
           <a:prstGeom prst="rect">
             <a:avLst/>
@@ -5352,8 +5352,8 @@
         </p:nvSpPr>
         <p:spPr>
           <a:xfrm>
-            <a:off x="713231" y="4901183"/>
-            <a:ext cx="6620256" cy="557784"/>
+            <a:off x="713231" y="4928616"/>
+            <a:ext cx="6025896" cy="384048"/>
           </a:xfrm>
           <a:prstGeom prst="rect">
             <a:avLst/>
@@ -5378,7 +5378,7 @@
                 </a:solidFill>
                 <a:latin typeface="Consolas"/>
               </a:rPr>
-              <a:t>import seaborn as sns</a:t>
+              <a:t>corr = df.corr(numeric_only=True)</a:t>
             </a:r>
           </a:p>
           <a:p>
@@ -5394,22 +5394,6 @@
                 </a:solidFill>
                 <a:latin typeface="Consolas"/>
               </a:rPr>
-              <a:t>corr = df.corr(numeric_only=True)</a:t>
-            </a:r>
-          </a:p>
-          <a:p>
-            <a:pPr>
-              <a:spcAft>
-                <a:spcPts val="0"/>
-              </a:spcAft>
-            </a:pPr>
-            <a:r>
-              <a:rPr sz="1100">
-                <a:solidFill>
-                  <a:srgbClr val="000000"/>
-                </a:solidFill>
-                <a:latin typeface="Consolas"/>
-              </a:rPr>
               <a:t>sns.heatmap(corr, annot=True, cmap='coolwarm', vmin=-1, vmax=1)</a:t>
             </a:r>
           </a:p>
@@ -5423,8 +5407,8 @@
         </p:nvSpPr>
         <p:spPr>
           <a:xfrm>
-            <a:off x="640080" y="5550407"/>
-            <a:ext cx="6766560" cy="201168"/>
+            <a:off x="640080" y="5404104"/>
+            <a:ext cx="6172200" cy="201168"/>
           </a:xfrm>
           <a:prstGeom prst="rect">
             <a:avLst/>
@@ -5466,8 +5450,8 @@
         </p:blipFill>
         <p:spPr>
           <a:xfrm>
-            <a:off x="7635240" y="1364913"/>
-            <a:ext cx="4343400" cy="4402494"/>
+            <a:off x="7269480" y="1325880"/>
+            <a:ext cx="4465015" cy="3909460"/>
           </a:xfrm>
           <a:prstGeom prst="rect">
             <a:avLst/>
@@ -5534,7 +5518,7 @@
         <p:spPr>
           <a:xfrm>
             <a:off x="640080" y="1371600"/>
-            <a:ext cx="6858000" cy="3557015"/>
+            <a:ext cx="6263640" cy="2697480"/>
           </a:xfrm>
           <a:prstGeom prst="rect">
             <a:avLst/>
@@ -5543,7 +5527,7 @@
         </p:spPr>
         <p:txBody>
           <a:bodyPr wrap="square">
-            <a:normAutofit/>
+            <a:spAutoFit/>
           </a:bodyPr>
           <a:lstStyle/>
           <a:p>
@@ -5558,7 +5542,7 @@
                   <a:srgbClr val="000000"/>
                 </a:solidFill>
               </a:rPr>
-              <a:t>`sns.countplot(data=df, x='col')` — частоты категорий</a:t>
+              <a:t>• `sns.countplot(data=df, x='col')` — частоты категорий</a:t>
             </a:r>
           </a:p>
           <a:p>
@@ -5573,7 +5557,7 @@
                   <a:srgbClr val="000000"/>
                 </a:solidFill>
               </a:rPr>
-              <a:t>`sns.barplot(x=, y=, estimator='mean')` — агрегат по категории</a:t>
+              <a:t>• `sns.barplot(x=, y=, estimator='mean')` — агрегат по категории</a:t>
             </a:r>
           </a:p>
           <a:p>
@@ -5588,7 +5572,7 @@
                   <a:srgbClr val="000000"/>
                 </a:solidFill>
               </a:rPr>
-              <a:t>Violin / stripplot — распределение внутри категории</a:t>
+              <a:t>• Violin / stripplot — распределение внутри категории</a:t>
             </a:r>
           </a:p>
           <a:p>
@@ -5603,7 +5587,7 @@
                   <a:srgbClr val="000000"/>
                 </a:solidFill>
               </a:rPr>
-              <a:t>Порядок категорий на оси X задавай явно (`order=`) для читаемости</a:t>
+              <a:t>• Порядок категорий на оси X задавай явно (`order=`) для читаемости</a:t>
             </a:r>
           </a:p>
         </p:txBody>
@@ -5616,8 +5600,8 @@
         </p:nvSpPr>
         <p:spPr>
           <a:xfrm>
-            <a:off x="640080" y="5038344"/>
-            <a:ext cx="6766560" cy="457200"/>
+            <a:off x="640080" y="4892040"/>
+            <a:ext cx="6172200" cy="457200"/>
           </a:xfrm>
           <a:prstGeom prst="rect">
             <a:avLst/>
@@ -5661,8 +5645,8 @@
         </p:nvSpPr>
         <p:spPr>
           <a:xfrm>
-            <a:off x="713231" y="5074920"/>
-            <a:ext cx="6620256" cy="384048"/>
+            <a:off x="713231" y="4928616"/>
+            <a:ext cx="6025896" cy="384048"/>
           </a:xfrm>
           <a:prstGeom prst="rect">
             <a:avLst/>
@@ -5716,8 +5700,8 @@
         </p:nvSpPr>
         <p:spPr>
           <a:xfrm>
-            <a:off x="640080" y="5550408"/>
-            <a:ext cx="6766560" cy="201168"/>
+            <a:off x="640080" y="5404104"/>
+            <a:ext cx="6172200" cy="201168"/>
           </a:xfrm>
           <a:prstGeom prst="rect">
             <a:avLst/>
@@ -5759,8 +5743,8 @@
         </p:blipFill>
         <p:spPr>
           <a:xfrm>
-            <a:off x="7635240" y="2775910"/>
-            <a:ext cx="4343400" cy="1580498"/>
+            <a:off x="7419948" y="1325880"/>
+            <a:ext cx="4164078" cy="4407408"/>
           </a:xfrm>
           <a:prstGeom prst="rect">
             <a:avLst/>
@@ -5827,7 +5811,7 @@
         <p:spPr>
           <a:xfrm>
             <a:off x="640080" y="1371600"/>
-            <a:ext cx="6858000" cy="1810512"/>
+            <a:ext cx="6263640" cy="2697480"/>
           </a:xfrm>
           <a:prstGeom prst="rect">
             <a:avLst/>
@@ -5851,7 +5835,7 @@
                   <a:srgbClr val="000000"/>
                 </a:solidFill>
               </a:rPr>
-              <a:t xml:space="preserve">Круговая диаграмма — </a:t>
+              <a:t xml:space="preserve">• Круговая диаграмма — </a:t>
             </a:r>
             <a:r>
               <a:rPr lang="ru-RU" dirty="0" sz="2000" b="1">
@@ -5882,7 +5866,7 @@
                   <a:srgbClr val="000000"/>
                 </a:solidFill>
               </a:rPr>
-              <a:t>Много секторов (&gt;5) — нечитаемо; малые доли не отличить</a:t>
+              <a:t>• Много секторов (&gt;5) — нечитаемо; малые доли не отличить</a:t>
             </a:r>
           </a:p>
           <a:p>
@@ -5897,7 +5881,7 @@
                   <a:srgbClr val="000000"/>
                 </a:solidFill>
               </a:rPr>
-              <a:t xml:space="preserve">Лучше </a:t>
+              <a:t xml:space="preserve">• Лучше </a:t>
             </a:r>
             <a:r>
               <a:rPr lang="ru-RU" dirty="0" sz="2000" b="1">
@@ -5928,7 +5912,7 @@
                   <a:srgbClr val="000000"/>
                 </a:solidFill>
               </a:rPr>
-              <a:t>3D pie и «explode» — декоративный шум, не добавляет информации</a:t>
+              <a:t>• 3D pie и «explode» — декоративный шум, не добавляет информации</a:t>
             </a:r>
           </a:p>
         </p:txBody>
@@ -5949,8 +5933,8 @@
         </p:blipFill>
         <p:spPr>
           <a:xfrm>
-            <a:off x="7635240" y="2719133"/>
-            <a:ext cx="4343400" cy="1694053"/>
+            <a:off x="7421174" y="1325880"/>
+            <a:ext cx="4161626" cy="4407408"/>
           </a:xfrm>
           <a:prstGeom prst="rect">
             <a:avLst/>
@@ -6017,7 +6001,7 @@
         <p:spPr>
           <a:xfrm>
             <a:off x="640080" y="1371600"/>
-            <a:ext cx="6858000" cy="1810512"/>
+            <a:ext cx="6263640" cy="2148839"/>
           </a:xfrm>
           <a:prstGeom prst="rect">
             <a:avLst/>
@@ -6041,7 +6025,7 @@
                   <a:srgbClr val="000000"/>
                 </a:solidFill>
               </a:rPr>
-              <a:t>Белый фон, тёмный текст `#1a1a1a` — как на слайдах курса</a:t>
+              <a:t>• Белый фон, тёмный текст `#1a1a1a` — как на слайдах курса</a:t>
             </a:r>
           </a:p>
           <a:p>
@@ -6056,7 +6040,7 @@
                   <a:srgbClr val="000000"/>
                 </a:solidFill>
               </a:rPr>
-              <a:t>Размер шрифта осей 12–14 pt в ноутбуке; `figsize` достаточный</a:t>
+              <a:t>• Размер шрифта осей 12–14 pt в ноутбуке; `figsize` достаточный</a:t>
             </a:r>
           </a:p>
           <a:p>
@@ -6071,7 +6055,7 @@
                   <a:srgbClr val="000000"/>
                 </a:solidFill>
               </a:rPr>
-              <a:t>Меньше «chartjunk»: лишние сетки, 3D, тени</a:t>
+              <a:t>• Меньше «chartjunk»: лишние сетки, 3D, тени</a:t>
             </a:r>
           </a:p>
           <a:p>
@@ -6086,7 +6070,7 @@
                   <a:srgbClr val="000000"/>
                 </a:solidFill>
               </a:rPr>
-              <a:t>Один график — одна мысль; не перегружай элементы</a:t>
+              <a:t>• Один график — одна мысль; не перегружай элементы</a:t>
             </a:r>
           </a:p>
         </p:txBody>
@@ -6107,8 +6091,8 @@
         </p:blipFill>
         <p:spPr>
           <a:xfrm>
-            <a:off x="7635240" y="2775910"/>
-            <a:ext cx="4343400" cy="1580498"/>
+            <a:off x="7358687" y="1325880"/>
+            <a:ext cx="4286600" cy="4407408"/>
           </a:xfrm>
           <a:prstGeom prst="rect">
             <a:avLst/>
@@ -6175,7 +6159,7 @@
         <p:spPr>
           <a:xfrm>
             <a:off x="640080" y="1371600"/>
-            <a:ext cx="6858000" cy="3383279"/>
+            <a:ext cx="6263640" cy="2697480"/>
           </a:xfrm>
           <a:prstGeom prst="rect">
             <a:avLst/>
@@ -6184,7 +6168,7 @@
         </p:spPr>
         <p:txBody>
           <a:bodyPr wrap="square">
-            <a:normAutofit/>
+            <a:spAutoFit/>
           </a:bodyPr>
           <a:lstStyle/>
           <a:p>
@@ -6199,7 +6183,7 @@
                   <a:srgbClr val="000000"/>
                 </a:solidFill>
               </a:rPr>
-              <a:t xml:space="preserve">Residual plot: ось X — </a:t>
+              <a:t xml:space="preserve">• Residual plot: ось X — </a:t>
             </a:r>
             <ns0:m xmlns:ns0="http://schemas.microsoft.com/office/drawing/2010/main">
               <m:oMath xmlns:m="http://schemas.openxmlformats.org/officeDocument/2006/math">
@@ -6253,7 +6237,7 @@
                   <a:srgbClr val="000000"/>
                 </a:solidFill>
               </a:rPr>
-              <a:t>Идеал — случайное облако вокруг нуля без «воронки» или U-образного паттерна</a:t>
+              <a:t>• Идеал — случайное облако вокруг нуля без «воронки» или U-образного паттерна</a:t>
             </a:r>
           </a:p>
           <a:p>
@@ -6268,7 +6252,7 @@
                   <a:srgbClr val="000000"/>
                 </a:solidFill>
               </a:rPr>
-              <a:t>Histogram остатков — близость к симметрии (не строгая нормальность)</a:t>
+              <a:t>• Histogram остатков — близость к симметрии (не строгая нормальность)</a:t>
             </a:r>
           </a:p>
           <a:p>
@@ -6283,7 +6267,7 @@
                   <a:srgbClr val="000000"/>
                 </a:solidFill>
               </a:rPr>
-              <a:t>Тот же приём, что в уроке линейной регрессии — единый язык диагностики</a:t>
+              <a:t>• Тот же приём, что в уроке линейной регрессии — единый язык диагностики</a:t>
             </a:r>
           </a:p>
         </p:txBody>
@@ -6296,8 +6280,8 @@
         </p:nvSpPr>
         <p:spPr>
           <a:xfrm>
-            <a:off x="640080" y="4864607"/>
-            <a:ext cx="6766560" cy="630936"/>
+            <a:off x="640080" y="4690872"/>
+            <a:ext cx="6172200" cy="630936"/>
           </a:xfrm>
           <a:prstGeom prst="rect">
             <a:avLst/>
@@ -6341,8 +6325,8 @@
         </p:nvSpPr>
         <p:spPr>
           <a:xfrm>
-            <a:off x="713231" y="4901183"/>
-            <a:ext cx="6620256" cy="557784"/>
+            <a:off x="713231" y="4727448"/>
+            <a:ext cx="6025896" cy="557784"/>
           </a:xfrm>
           <a:prstGeom prst="rect">
             <a:avLst/>
@@ -6412,8 +6396,8 @@
         </p:nvSpPr>
         <p:spPr>
           <a:xfrm>
-            <a:off x="640080" y="5550407"/>
-            <a:ext cx="6766560" cy="201168"/>
+            <a:off x="640080" y="5376672"/>
+            <a:ext cx="6172200" cy="201168"/>
           </a:xfrm>
           <a:prstGeom prst="rect">
             <a:avLst/>
@@ -6455,8 +6439,8 @@
         </p:blipFill>
         <p:spPr>
           <a:xfrm>
-            <a:off x="7635240" y="2775910"/>
-            <a:ext cx="4343400" cy="1580498"/>
+            <a:off x="7462680" y="1325880"/>
+            <a:ext cx="4078613" cy="4407407"/>
           </a:xfrm>
           <a:prstGeom prst="rect">
             <a:avLst/>
@@ -6523,7 +6507,7 @@
         <p:spPr>
           <a:xfrm>
             <a:off x="640080" y="1371600"/>
-            <a:ext cx="6858000" cy="3383279"/>
+            <a:ext cx="6263640" cy="2423160"/>
           </a:xfrm>
           <a:prstGeom prst="rect">
             <a:avLst/>
@@ -6532,7 +6516,7 @@
         </p:spPr>
         <p:txBody>
           <a:bodyPr wrap="square">
-            <a:normAutofit/>
+            <a:spAutoFit/>
           </a:bodyPr>
           <a:lstStyle/>
           <a:p>
@@ -6547,7 +6531,7 @@
                   <a:srgbClr val="000000"/>
                 </a:solidFill>
               </a:rPr>
-              <a:t>ROC: TPR vs FPR при смене порога; площадь AUC — ранжирование</a:t>
+              <a:t>• ROC: TPR vs FPR при смене порога; площадь AUC — ранжирование</a:t>
             </a:r>
           </a:p>
           <a:p>
@@ -6562,7 +6546,7 @@
                   <a:srgbClr val="000000"/>
                 </a:solidFill>
               </a:rPr>
-              <a:t xml:space="preserve">PR-кривая важнее при </a:t>
+              <a:t xml:space="preserve">• PR-кривая важнее при </a:t>
             </a:r>
             <a:r>
               <a:rPr lang="ru-RU" dirty="0" sz="2000" b="1">
@@ -6593,7 +6577,7 @@
                   <a:srgbClr val="000000"/>
                 </a:solidFill>
               </a:rPr>
-              <a:t>sklearn: `RocCurveDisplay.from_predictions`, `PrecisionRecallDisplay`</a:t>
+              <a:t>• sklearn: `RocCurveDisplay.from_predictions`, `PrecisionRecallDisplay`</a:t>
             </a:r>
           </a:p>
           <a:p>
@@ -6608,7 +6592,7 @@
                   <a:srgbClr val="000000"/>
                 </a:solidFill>
               </a:rPr>
-              <a:t>Добавляй диагональ случайного классификатора на ROC для ориентира</a:t>
+              <a:t>• Добавляй диагональ случайного классификатора на ROC для ориентира</a:t>
             </a:r>
           </a:p>
         </p:txBody>
@@ -6621,8 +6605,8 @@
         </p:nvSpPr>
         <p:spPr>
           <a:xfrm>
-            <a:off x="640080" y="4864607"/>
-            <a:ext cx="6766560" cy="630936"/>
+            <a:off x="640080" y="4892040"/>
+            <a:ext cx="6172200" cy="457200"/>
           </a:xfrm>
           <a:prstGeom prst="rect">
             <a:avLst/>
@@ -6666,8 +6650,8 @@
         </p:nvSpPr>
         <p:spPr>
           <a:xfrm>
-            <a:off x="713231" y="4901183"/>
-            <a:ext cx="6620256" cy="557784"/>
+            <a:off x="713231" y="4928616"/>
+            <a:ext cx="6025896" cy="384048"/>
           </a:xfrm>
           <a:prstGeom prst="rect">
             <a:avLst/>
@@ -6692,7 +6676,7 @@
                 </a:solidFill>
                 <a:latin typeface="Consolas"/>
               </a:rPr>
-              <a:t>from sklearn.metrics import RocCurveDisplay</a:t>
+              <a:t>RocCurveDisplay.from_predictions(y_test, y_score)</a:t>
             </a:r>
           </a:p>
           <a:p>
@@ -6708,22 +6692,6 @@
                 </a:solidFill>
                 <a:latin typeface="Consolas"/>
               </a:rPr>
-              <a:t>RocCurveDisplay.from_predictions(y_test, y_score)</a:t>
-            </a:r>
-          </a:p>
-          <a:p>
-            <a:pPr>
-              <a:spcAft>
-                <a:spcPts val="0"/>
-              </a:spcAft>
-            </a:pPr>
-            <a:r>
-              <a:rPr sz="1100">
-                <a:solidFill>
-                  <a:srgbClr val="000000"/>
-                </a:solidFill>
-                <a:latin typeface="Consolas"/>
-              </a:rPr>
               <a:t>plt.title('ROC')</a:t>
             </a:r>
           </a:p>
@@ -6737,8 +6705,8 @@
         </p:nvSpPr>
         <p:spPr>
           <a:xfrm>
-            <a:off x="640080" y="5550407"/>
-            <a:ext cx="6766560" cy="201168"/>
+            <a:off x="640080" y="5404104"/>
+            <a:ext cx="6172200" cy="201168"/>
           </a:xfrm>
           <a:prstGeom prst="rect">
             <a:avLst/>
@@ -6780,8 +6748,8 @@
         </p:blipFill>
         <p:spPr>
           <a:xfrm>
-            <a:off x="7635240" y="2775910"/>
-            <a:ext cx="4343400" cy="1580498"/>
+            <a:off x="7447421" y="1325880"/>
+            <a:ext cx="4109132" cy="4407407"/>
           </a:xfrm>
           <a:prstGeom prst="rect">
             <a:avLst/>
@@ -6848,7 +6816,7 @@
         <p:spPr>
           <a:xfrm>
             <a:off x="640080" y="1371600"/>
-            <a:ext cx="6858000" cy="1810512"/>
+            <a:ext cx="6263640" cy="2423160"/>
           </a:xfrm>
           <a:prstGeom prst="rect">
             <a:avLst/>
@@ -6872,7 +6840,7 @@
                   <a:srgbClr val="000000"/>
                 </a:solidFill>
               </a:rPr>
-              <a:t>Truncated axis на bar (Y не с нуля) — ложное усиление эффекта</a:t>
+              <a:t>• Truncated axis на bar (Y не с нуля) — ложное усиление эффекта</a:t>
             </a:r>
           </a:p>
           <a:p>
@@ -6887,7 +6855,7 @@
                   <a:srgbClr val="000000"/>
                 </a:solidFill>
               </a:rPr>
-              <a:t>Dual axis с разными масштабами — ложные корреляции</a:t>
+              <a:t>• Dual axis с разными масштабами — ложные корреляции</a:t>
             </a:r>
           </a:p>
           <a:p>
@@ -6902,7 +6870,7 @@
                   <a:srgbClr val="000000"/>
                 </a:solidFill>
               </a:rPr>
-              <a:t>Слишком мало/много bins в histogram</a:t>
+              <a:t>• Слишком мало/много bins в histogram</a:t>
             </a:r>
           </a:p>
           <a:p>
@@ -6917,7 +6885,7 @@
                   <a:srgbClr val="000000"/>
                 </a:solidFill>
               </a:rPr>
-              <a:t>Подписи перекрываются — `rotation`, `tight_layout`, уменьшение шрифта</a:t>
+              <a:t>• Подписи перекрываются — `rotation`, `tight_layout`, уменьшение шрифта</a:t>
             </a:r>
           </a:p>
         </p:txBody>
@@ -6938,8 +6906,8 @@
         </p:blipFill>
         <p:spPr>
           <a:xfrm>
-            <a:off x="7635240" y="2775910"/>
-            <a:ext cx="4343400" cy="1580498"/>
+            <a:off x="7269480" y="1325880"/>
+            <a:ext cx="4465015" cy="4394405"/>
           </a:xfrm>
           <a:prstGeom prst="rect">
             <a:avLst/>
@@ -7006,7 +6974,7 @@
         <p:spPr>
           <a:xfrm>
             <a:off x="640080" y="1371600"/>
-            <a:ext cx="6858000" cy="1810512"/>
+            <a:ext cx="6263640" cy="2697480"/>
           </a:xfrm>
           <a:prstGeom prst="rect">
             <a:avLst/>
@@ -7030,7 +6998,7 @@
                   <a:srgbClr val="000000"/>
                 </a:solidFill>
               </a:rPr>
-              <a:t>Линейная регрессия: scatter+line, residuals, bar метрик — те же паттерны</a:t>
+              <a:t>• Линейная регрессия: scatter+line, residuals, bar метрик — те же паттерны</a:t>
             </a:r>
           </a:p>
           <a:p>
@@ -7045,7 +7013,7 @@
                   <a:srgbClr val="000000"/>
                 </a:solidFill>
               </a:rPr>
-              <a:t>Логистическая: ROC/PR, calibration, decision boundary</a:t>
+              <a:t>• Логистическая: ROC/PR, calibration, decision boundary</a:t>
             </a:r>
           </a:p>
           <a:p>
@@ -7060,7 +7028,7 @@
                   <a:srgbClr val="000000"/>
                 </a:solidFill>
               </a:rPr>
-              <a:t>Деревья: `plot_tree`, feature importance bar, confusion matrix heatmap</a:t>
+              <a:t>• Деревья: `plot_tree`, feature importance bar, confusion matrix heatmap</a:t>
             </a:r>
           </a:p>
           <a:p>
@@ -7075,7 +7043,7 @@
                   <a:srgbClr val="000000"/>
                 </a:solidFill>
               </a:rPr>
-              <a:t>Чек-лист: EDA → модель → диагностика; подписи на русском; bar с нуля</a:t>
+              <a:t>• Чек-лист: EDA → модель → диагностика; подписи на русском; bar с нуля</a:t>
             </a:r>
           </a:p>
         </p:txBody>
@@ -7096,8 +7064,8 @@
         </p:blipFill>
         <p:spPr>
           <a:xfrm>
-            <a:off x="7635240" y="1825234"/>
-            <a:ext cx="4343400" cy="3481850"/>
+            <a:off x="7269480" y="1325880"/>
+            <a:ext cx="4465015" cy="3631639"/>
           </a:xfrm>
           <a:prstGeom prst="rect">
             <a:avLst/>
@@ -7619,7 +7587,7 @@
         <p:spPr>
           <a:xfrm>
             <a:off x="640080" y="1371600"/>
-            <a:ext cx="6858000" cy="1810512"/>
+            <a:ext cx="6263640" cy="2697480"/>
           </a:xfrm>
           <a:prstGeom prst="rect">
             <a:avLst/>
@@ -7643,7 +7611,7 @@
                   <a:srgbClr val="000000"/>
                 </a:solidFill>
               </a:rPr>
-              <a:t xml:space="preserve">График показывает </a:t>
+              <a:t xml:space="preserve">• График показывает </a:t>
             </a:r>
             <a:r>
               <a:rPr lang="ru-RU" dirty="0" sz="2000" b="1">
@@ -7674,7 +7642,7 @@
                   <a:srgbClr val="000000"/>
                 </a:solidFill>
               </a:rPr>
-              <a:t>EDA до модели: «что вообще в данных?» — scatter, hist, box</a:t>
+              <a:t>• EDA до модели: «что вообще в данных?» — scatter, hist, box</a:t>
             </a:r>
           </a:p>
           <a:p>
@@ -7689,7 +7657,7 @@
                   <a:srgbClr val="000000"/>
                 </a:solidFill>
               </a:rPr>
-              <a:t>Диагностика модели: остатки, ROC, calibration — график ловит ошибки метрик</a:t>
+              <a:t>• Диагностика модели: остатки, ROC, calibration — график ловит ошибки метрик</a:t>
             </a:r>
           </a:p>
           <a:p>
@@ -7704,7 +7672,7 @@
                   <a:srgbClr val="000000"/>
                 </a:solidFill>
               </a:rPr>
-              <a:t>Хорошая визуализация — аргумент для коллег и проверка собственных гипотез</a:t>
+              <a:t>• Хорошая визуализация — аргумент для коллег и проверка собственных гипотез</a:t>
             </a:r>
           </a:p>
         </p:txBody>
@@ -7725,8 +7693,8 @@
         </p:blipFill>
         <p:spPr>
           <a:xfrm>
-            <a:off x="7635240" y="1825234"/>
-            <a:ext cx="4343400" cy="3481850"/>
+            <a:off x="7269480" y="1325880"/>
+            <a:ext cx="4465015" cy="3597593"/>
           </a:xfrm>
           <a:prstGeom prst="rect">
             <a:avLst/>
@@ -7793,7 +7761,7 @@
         <p:spPr>
           <a:xfrm>
             <a:off x="640080" y="1371600"/>
-            <a:ext cx="6858000" cy="3209544"/>
+            <a:ext cx="6263640" cy="2697480"/>
           </a:xfrm>
           <a:prstGeom prst="rect">
             <a:avLst/>
@@ -7802,7 +7770,7 @@
         </p:spPr>
         <p:txBody>
           <a:bodyPr wrap="square">
-            <a:normAutofit/>
+            <a:spAutoFit/>
           </a:bodyPr>
           <a:lstStyle/>
           <a:p>
@@ -7817,7 +7785,7 @@
                   <a:srgbClr val="000000"/>
                 </a:solidFill>
               </a:rPr>
-              <a:t xml:space="preserve">`fig, ax = plt.subplots()` — </a:t>
+              <a:t xml:space="preserve">• `fig, ax = plt.subplots()` — </a:t>
             </a:r>
             <a:r>
               <a:rPr lang="ru-RU" dirty="0" sz="2000" b="1">
@@ -7864,7 +7832,7 @@
                   <a:srgbClr val="000000"/>
                 </a:solidFill>
               </a:rPr>
-              <a:t>Рисуем на `ax`: `ax.plot(...)`, `ax.set_xlabel(...)` — не смешивать pyplot без нужды</a:t>
+              <a:t>• Рисуем на `ax`: `ax.plot(...)`, `ax.set_xlabel(...)` — не смешивать pyplot без нужды</a:t>
             </a:r>
           </a:p>
           <a:p>
@@ -7879,7 +7847,7 @@
                   <a:srgbClr val="000000"/>
                 </a:solidFill>
               </a:rPr>
-              <a:t>`plt.tight_layout()` — подгонка отступов перед `plt.show()` или savefig</a:t>
+              <a:t>• `plt.tight_layout()` — подгонка отступов перед `plt.show()` или savefig</a:t>
             </a:r>
           </a:p>
           <a:p>
@@ -7894,7 +7862,7 @@
                   <a:srgbClr val="000000"/>
                 </a:solidFill>
               </a:rPr>
-              <a:t>`%matplotlib inline` в Jupyter — график под ячейкой</a:t>
+              <a:t>• `%matplotlib inline` в Jupyter — график под ячейкой</a:t>
             </a:r>
           </a:p>
         </p:txBody>
@@ -7907,8 +7875,8 @@
         </p:nvSpPr>
         <p:spPr>
           <a:xfrm>
-            <a:off x="640080" y="4690872"/>
-            <a:ext cx="6766560" cy="804672"/>
+            <a:off x="640080" y="4489703"/>
+            <a:ext cx="6172200" cy="804672"/>
           </a:xfrm>
           <a:prstGeom prst="rect">
             <a:avLst/>
@@ -7952,8 +7920,8 @@
         </p:nvSpPr>
         <p:spPr>
           <a:xfrm>
-            <a:off x="713231" y="4727448"/>
-            <a:ext cx="6620256" cy="731520"/>
+            <a:off x="713231" y="4526279"/>
+            <a:ext cx="6025896" cy="731520"/>
           </a:xfrm>
           <a:prstGeom prst="rect">
             <a:avLst/>
@@ -8039,8 +8007,8 @@
         </p:nvSpPr>
         <p:spPr>
           <a:xfrm>
-            <a:off x="640080" y="5550408"/>
-            <a:ext cx="6766560" cy="201168"/>
+            <a:off x="640080" y="5349240"/>
+            <a:ext cx="6172200" cy="201168"/>
           </a:xfrm>
           <a:prstGeom prst="rect">
             <a:avLst/>
@@ -8082,8 +8050,8 @@
         </p:blipFill>
         <p:spPr>
           <a:xfrm>
-            <a:off x="7635240" y="1928206"/>
-            <a:ext cx="4343400" cy="3275906"/>
+            <a:off x="7269480" y="1325880"/>
+            <a:ext cx="4465015" cy="3355068"/>
           </a:xfrm>
           <a:prstGeom prst="rect">
             <a:avLst/>
@@ -8150,7 +8118,7 @@
         <p:spPr>
           <a:xfrm>
             <a:off x="640080" y="1371600"/>
-            <a:ext cx="6858000" cy="3383279"/>
+            <a:ext cx="6263640" cy="2697480"/>
           </a:xfrm>
           <a:prstGeom prst="rect">
             <a:avLst/>
@@ -8159,7 +8127,7 @@
         </p:spPr>
         <p:txBody>
           <a:bodyPr wrap="square">
-            <a:normAutofit/>
+            <a:spAutoFit/>
           </a:bodyPr>
           <a:lstStyle/>
           <a:p>
@@ -8174,7 +8142,7 @@
                   <a:srgbClr val="000000"/>
                 </a:solidFill>
               </a:rPr>
-              <a:t>`ax.plot(x, y)` — тренды во времени, learning curve, validation curve</a:t>
+              <a:t>• `ax.plot(x, y)` — тренды во времени, learning curve, validation curve</a:t>
             </a:r>
           </a:p>
           <a:p>
@@ -8189,7 +8157,7 @@
                   <a:srgbClr val="000000"/>
                 </a:solidFill>
               </a:rPr>
-              <a:t>Маркеры `marker='o'` помогают при малом числе точек</a:t>
+              <a:t>• Маркеры `marker='o'` помогают при малом числе точек</a:t>
             </a:r>
           </a:p>
           <a:p>
@@ -8204,7 +8172,7 @@
                   <a:srgbClr val="000000"/>
                 </a:solidFill>
               </a:rPr>
-              <a:t>Несколько линий на одном axes — разные `label` + `ax.legend()`</a:t>
+              <a:t>• Несколько линий на одном axes — разные `label` + `ax.legend()`</a:t>
             </a:r>
           </a:p>
           <a:p>
@@ -8219,7 +8187,7 @@
                   <a:srgbClr val="000000"/>
                 </a:solidFill>
               </a:rPr>
-              <a:t>Не соединяй линией категории без порядка — line для упорядоченной оси X</a:t>
+              <a:t>• Не соединяй линией категории без порядка — line для упорядоченной оси X</a:t>
             </a:r>
           </a:p>
         </p:txBody>
@@ -8232,8 +8200,8 @@
         </p:nvSpPr>
         <p:spPr>
           <a:xfrm>
-            <a:off x="640080" y="4864607"/>
-            <a:ext cx="6766560" cy="630936"/>
+            <a:off x="640080" y="4690872"/>
+            <a:ext cx="6172200" cy="630936"/>
           </a:xfrm>
           <a:prstGeom prst="rect">
             <a:avLst/>
@@ -8277,8 +8245,8 @@
         </p:nvSpPr>
         <p:spPr>
           <a:xfrm>
-            <a:off x="713231" y="4901183"/>
-            <a:ext cx="6620256" cy="557784"/>
+            <a:off x="713231" y="4727448"/>
+            <a:ext cx="6025896" cy="557784"/>
           </a:xfrm>
           <a:prstGeom prst="rect">
             <a:avLst/>
@@ -8348,8 +8316,8 @@
         </p:nvSpPr>
         <p:spPr>
           <a:xfrm>
-            <a:off x="640080" y="5550407"/>
-            <a:ext cx="6766560" cy="201168"/>
+            <a:off x="640080" y="5376672"/>
+            <a:ext cx="6172200" cy="201168"/>
           </a:xfrm>
           <a:prstGeom prst="rect">
             <a:avLst/>
@@ -8391,8 +8359,8 @@
         </p:blipFill>
         <p:spPr>
           <a:xfrm>
-            <a:off x="7635240" y="2075955"/>
-            <a:ext cx="4343400" cy="2980408"/>
+            <a:off x="7269480" y="1325880"/>
+            <a:ext cx="4465015" cy="2424089"/>
           </a:xfrm>
           <a:prstGeom prst="rect">
             <a:avLst/>
@@ -8459,7 +8427,7 @@
         <p:spPr>
           <a:xfrm>
             <a:off x="640080" y="1371600"/>
-            <a:ext cx="6858000" cy="3557015"/>
+            <a:ext cx="6263640" cy="2423160"/>
           </a:xfrm>
           <a:prstGeom prst="rect">
             <a:avLst/>
@@ -8468,7 +8436,7 @@
         </p:spPr>
         <p:txBody>
           <a:bodyPr wrap="square">
-            <a:normAutofit/>
+            <a:spAutoFit/>
           </a:bodyPr>
           <a:lstStyle/>
           <a:p>
@@ -8483,7 +8451,7 @@
                   <a:srgbClr val="000000"/>
                 </a:solidFill>
               </a:rPr>
-              <a:t>`ax.scatter(x, y, alpha=0.5, s=20)` — связь двух числовых признаков</a:t>
+              <a:t>• `ax.scatter(x, y, alpha=0.5, s=20)` — связь двух числовых признаков</a:t>
             </a:r>
           </a:p>
           <a:p>
@@ -8498,7 +8466,7 @@
                   <a:srgbClr val="000000"/>
                 </a:solidFill>
               </a:rPr>
-              <a:t>Цвет `c=target` или `hue` в seaborn — классы или третий признак</a:t>
+              <a:t>• Цвет `c=target` или `hue` в seaborn — классы или третий признак</a:t>
             </a:r>
           </a:p>
           <a:p>
@@ -8513,7 +8481,7 @@
                   <a:srgbClr val="000000"/>
                 </a:solidFill>
               </a:rPr>
-              <a:t>Выбросы видны как изолированные точки; кластеры — плотные облака</a:t>
+              <a:t>• Выбросы видны как изолированные точки; кластеры — плотные облака</a:t>
             </a:r>
           </a:p>
           <a:p>
@@ -8528,7 +8496,7 @@
                   <a:srgbClr val="000000"/>
                 </a:solidFill>
               </a:rPr>
-              <a:t>Базовый график регрессии и классификации в 2D</a:t>
+              <a:t>• Базовый график регрессии и классификации в 2D</a:t>
             </a:r>
           </a:p>
         </p:txBody>
@@ -8541,8 +8509,8 @@
         </p:nvSpPr>
         <p:spPr>
           <a:xfrm>
-            <a:off x="640080" y="5038344"/>
-            <a:ext cx="6766560" cy="457200"/>
+            <a:off x="640080" y="4892040"/>
+            <a:ext cx="6172200" cy="457200"/>
           </a:xfrm>
           <a:prstGeom prst="rect">
             <a:avLst/>
@@ -8586,8 +8554,8 @@
         </p:nvSpPr>
         <p:spPr>
           <a:xfrm>
-            <a:off x="713231" y="5074920"/>
-            <a:ext cx="6620256" cy="384048"/>
+            <a:off x="713231" y="4928616"/>
+            <a:ext cx="6025896" cy="384048"/>
           </a:xfrm>
           <a:prstGeom prst="rect">
             <a:avLst/>
@@ -8641,8 +8609,8 @@
         </p:nvSpPr>
         <p:spPr>
           <a:xfrm>
-            <a:off x="640080" y="5550408"/>
-            <a:ext cx="6766560" cy="201168"/>
+            <a:off x="640080" y="5404104"/>
+            <a:ext cx="6172200" cy="201168"/>
           </a:xfrm>
           <a:prstGeom prst="rect">
             <a:avLst/>
@@ -8684,8 +8652,8 @@
         </p:blipFill>
         <p:spPr>
           <a:xfrm>
-            <a:off x="7635240" y="1939656"/>
-            <a:ext cx="4343400" cy="3253007"/>
+            <a:off x="7269480" y="1325880"/>
+            <a:ext cx="4465015" cy="3303820"/>
           </a:xfrm>
           <a:prstGeom prst="rect">
             <a:avLst/>
@@ -8752,7 +8720,7 @@
         <p:spPr>
           <a:xfrm>
             <a:off x="640080" y="1371600"/>
-            <a:ext cx="6858000" cy="3383279"/>
+            <a:ext cx="6263640" cy="2423160"/>
           </a:xfrm>
           <a:prstGeom prst="rect">
             <a:avLst/>
@@ -8761,7 +8729,7 @@
         </p:spPr>
         <p:txBody>
           <a:bodyPr wrap="square">
-            <a:normAutofit/>
+            <a:spAutoFit/>
           </a:bodyPr>
           <a:lstStyle/>
           <a:p>
@@ -8776,7 +8744,7 @@
                   <a:srgbClr val="000000"/>
                 </a:solidFill>
               </a:rPr>
-              <a:t xml:space="preserve">`ax.bar(categories, values)` — сравнение </a:t>
+              <a:t xml:space="preserve">• `ax.bar(categories, values)` — сравнение </a:t>
             </a:r>
             <a:r>
               <a:rPr lang="ru-RU" dirty="0" sz="2000" b="1">
@@ -8807,7 +8775,7 @@
                   <a:srgbClr val="000000"/>
                 </a:solidFill>
               </a:rPr>
-              <a:t>Горизонтальный `barh` — длинные подписи категорий</a:t>
+              <a:t>• Горизонтальный `barh` — длинные подписи категорий</a:t>
             </a:r>
           </a:p>
           <a:p>
@@ -8822,7 +8790,7 @@
                   <a:srgbClr val="000000"/>
                 </a:solidFill>
               </a:rPr>
-              <a:t>Grouped bar — несколько серий рядом; stacked — доли суммы</a:t>
+              <a:t>• Grouped bar — несколько серий рядом; stacked — доли суммы</a:t>
             </a:r>
           </a:p>
           <a:p>
@@ -8837,7 +8805,7 @@
                   <a:srgbClr val="000000"/>
                 </a:solidFill>
               </a:rPr>
-              <a:t xml:space="preserve">Ось Y для bar должна начинаться с </a:t>
+              <a:t xml:space="preserve">• Ось Y для bar должна начинаться с </a:t>
             </a:r>
             <a:r>
               <a:rPr lang="ru-RU" dirty="0" sz="2000" b="1">
@@ -8866,8 +8834,8 @@
         </p:nvSpPr>
         <p:spPr>
           <a:xfrm>
-            <a:off x="640080" y="4864607"/>
-            <a:ext cx="6766560" cy="630936"/>
+            <a:off x="640080" y="4690872"/>
+            <a:ext cx="6172200" cy="630936"/>
           </a:xfrm>
           <a:prstGeom prst="rect">
             <a:avLst/>
@@ -8911,8 +8879,8 @@
         </p:nvSpPr>
         <p:spPr>
           <a:xfrm>
-            <a:off x="713231" y="4901183"/>
-            <a:ext cx="6620256" cy="557784"/>
+            <a:off x="713231" y="4727448"/>
+            <a:ext cx="6025896" cy="557784"/>
           </a:xfrm>
           <a:prstGeom prst="rect">
             <a:avLst/>
@@ -8982,8 +8950,8 @@
         </p:nvSpPr>
         <p:spPr>
           <a:xfrm>
-            <a:off x="640080" y="5550407"/>
-            <a:ext cx="6766560" cy="201168"/>
+            <a:off x="640080" y="5376672"/>
+            <a:ext cx="6172200" cy="201168"/>
           </a:xfrm>
           <a:prstGeom prst="rect">
             <a:avLst/>
@@ -9025,8 +8993,8 @@
         </p:blipFill>
         <p:spPr>
           <a:xfrm>
-            <a:off x="7635240" y="2073874"/>
-            <a:ext cx="4343400" cy="2984571"/>
+            <a:off x="7269480" y="1325880"/>
+            <a:ext cx="4465015" cy="2765544"/>
           </a:xfrm>
           <a:prstGeom prst="rect">
             <a:avLst/>
@@ -9093,7 +9061,7 @@
         <p:spPr>
           <a:xfrm>
             <a:off x="640080" y="1371600"/>
-            <a:ext cx="6858000" cy="3383279"/>
+            <a:ext cx="6263640" cy="2423160"/>
           </a:xfrm>
           <a:prstGeom prst="rect">
             <a:avLst/>
@@ -9102,7 +9070,7 @@
         </p:spPr>
         <p:txBody>
           <a:bodyPr wrap="square">
-            <a:normAutofit/>
+            <a:spAutoFit/>
           </a:bodyPr>
           <a:lstStyle/>
           <a:p>
@@ -9117,7 +9085,7 @@
                   <a:srgbClr val="000000"/>
                 </a:solidFill>
               </a:rPr>
-              <a:t>`ax.hist(data, bins=30)` — распределение одной переменной</a:t>
+              <a:t>• `ax.hist(data, bins=30)` — распределение одной переменной</a:t>
             </a:r>
           </a:p>
           <a:p>
@@ -9132,7 +9100,7 @@
                   <a:srgbClr val="000000"/>
                 </a:solidFill>
               </a:rPr>
-              <a:t>Box plot: медиана, IQR, whiskers, точки-выбросы — `ax.boxplot` или `sns.boxplot`</a:t>
+              <a:t>• Box plot: медиана, IQR, whiskers, точки-выбросы — `ax.boxplot` или `sns.boxplot`</a:t>
             </a:r>
           </a:p>
           <a:p>
@@ -9147,7 +9115,7 @@
                   <a:srgbClr val="000000"/>
                 </a:solidFill>
               </a:rPr>
-              <a:t>Hist + KDE (seaborn) — форма пика и хвостов</a:t>
+              <a:t>• Hist + KDE (seaborn) — форма пика и хвостов</a:t>
             </a:r>
           </a:p>
           <a:p>
@@ -9162,7 +9130,7 @@
                   <a:srgbClr val="000000"/>
                 </a:solidFill>
               </a:rPr>
-              <a:t>Разное число bins меняет впечатление — пробуй несколько значений</a:t>
+              <a:t>• Разное число bins меняет впечатление — пробуй несколько значений</a:t>
             </a:r>
           </a:p>
         </p:txBody>
@@ -9175,8 +9143,8 @@
         </p:nvSpPr>
         <p:spPr>
           <a:xfrm>
-            <a:off x="640080" y="4864607"/>
-            <a:ext cx="6766560" cy="630936"/>
+            <a:off x="640080" y="4690872"/>
+            <a:ext cx="6172200" cy="630936"/>
           </a:xfrm>
           <a:prstGeom prst="rect">
             <a:avLst/>
@@ -9220,8 +9188,8 @@
         </p:nvSpPr>
         <p:spPr>
           <a:xfrm>
-            <a:off x="713231" y="4901183"/>
-            <a:ext cx="6620256" cy="557784"/>
+            <a:off x="713231" y="4727448"/>
+            <a:ext cx="6025896" cy="557784"/>
           </a:xfrm>
           <a:prstGeom prst="rect">
             <a:avLst/>
@@ -9291,8 +9259,8 @@
         </p:nvSpPr>
         <p:spPr>
           <a:xfrm>
-            <a:off x="640080" y="5550407"/>
-            <a:ext cx="6766560" cy="201168"/>
+            <a:off x="640080" y="5376672"/>
+            <a:ext cx="6172200" cy="201168"/>
           </a:xfrm>
           <a:prstGeom prst="rect">
             <a:avLst/>
@@ -9334,8 +9302,8 @@
         </p:blipFill>
         <p:spPr>
           <a:xfrm>
-            <a:off x="7635240" y="2775910"/>
-            <a:ext cx="4343400" cy="1580498"/>
+            <a:off x="7419948" y="1325880"/>
+            <a:ext cx="4164078" cy="4407408"/>
           </a:xfrm>
           <a:prstGeom prst="rect">
             <a:avLst/>
@@ -9402,7 +9370,7 @@
         <p:spPr>
           <a:xfrm>
             <a:off x="640080" y="1371600"/>
-            <a:ext cx="6858000" cy="3383279"/>
+            <a:ext cx="6263640" cy="2697480"/>
           </a:xfrm>
           <a:prstGeom prst="rect">
             <a:avLst/>
@@ -9411,7 +9379,7 @@
         </p:spPr>
         <p:txBody>
           <a:bodyPr wrap="square">
-            <a:normAutofit/>
+            <a:spAutoFit/>
           </a:bodyPr>
           <a:lstStyle/>
           <a:p>
@@ -9426,7 +9394,7 @@
                   <a:srgbClr val="000000"/>
                 </a:solidFill>
               </a:rPr>
-              <a:t>Seaborn строит на matplotlib: `sns.scatterplot`, `sns.histplot`, `sns.heatmap`</a:t>
+              <a:t>• Seaborn строит на matplotlib: `sns.scatterplot`, `sns.histplot`, `sns.heatmap`</a:t>
             </a:r>
           </a:p>
           <a:p>
@@ -9441,7 +9409,7 @@
                   <a:srgbClr val="000000"/>
                 </a:solidFill>
               </a:rPr>
-              <a:t>`data=df, x=, y=, hue=` — имена столбцов вместо массивов</a:t>
+              <a:t>• `data=df, x=, y=, hue=` — имена столбцов вместо массивов</a:t>
             </a:r>
           </a:p>
           <a:p>
@@ -9456,7 +9424,7 @@
                   <a:srgbClr val="000000"/>
                 </a:solidFill>
               </a:rPr>
-              <a:t>`sns.set_theme(style='whitegrid')` — единый стиль лекции</a:t>
+              <a:t>• `sns.set_theme(style='whitegrid')` — единый стиль лекции</a:t>
             </a:r>
           </a:p>
           <a:p>
@@ -9471,7 +9439,7 @@
                   <a:srgbClr val="000000"/>
                 </a:solidFill>
               </a:rPr>
-              <a:t>Для ML-диагностики: `sns.regplot`, `jointplot`, `pairplot` на подмножестве признаков</a:t>
+              <a:t>• Для ML-диагностики: `sns.regplot`, `jointplot`, `pairplot` на подмножестве признаков</a:t>
             </a:r>
           </a:p>
         </p:txBody>
@@ -9484,8 +9452,8 @@
         </p:nvSpPr>
         <p:spPr>
           <a:xfrm>
-            <a:off x="640080" y="4864607"/>
-            <a:ext cx="6766560" cy="630936"/>
+            <a:off x="640080" y="4892040"/>
+            <a:ext cx="6172200" cy="457200"/>
           </a:xfrm>
           <a:prstGeom prst="rect">
             <a:avLst/>
@@ -9529,8 +9497,8 @@
         </p:nvSpPr>
         <p:spPr>
           <a:xfrm>
-            <a:off x="713231" y="4901183"/>
-            <a:ext cx="6620256" cy="557784"/>
+            <a:off x="713231" y="4928616"/>
+            <a:ext cx="6025896" cy="384048"/>
           </a:xfrm>
           <a:prstGeom prst="rect">
             <a:avLst/>
@@ -9555,7 +9523,7 @@
                 </a:solidFill>
                 <a:latin typeface="Consolas"/>
               </a:rPr>
-              <a:t>import seaborn as sns</a:t>
+              <a:t>sns.scatterplot(data=df, x='x', y='y', hue='class')</a:t>
             </a:r>
           </a:p>
           <a:p>
@@ -9571,22 +9539,6 @@
                 </a:solidFill>
                 <a:latin typeface="Consolas"/>
               </a:rPr>
-              <a:t>sns.scatterplot(data=df, x='x', y='y', hue='class')</a:t>
-            </a:r>
-          </a:p>
-          <a:p>
-            <a:pPr>
-              <a:spcAft>
-                <a:spcPts val="0"/>
-              </a:spcAft>
-            </a:pPr>
-            <a:r>
-              <a:rPr sz="1100">
-                <a:solidFill>
-                  <a:srgbClr val="000000"/>
-                </a:solidFill>
-                <a:latin typeface="Consolas"/>
-              </a:rPr>
               <a:t>sns.regplot(data=df, x='x', y='y', scatter_kws={'alpha': 0.5})</a:t>
             </a:r>
           </a:p>
@@ -9600,8 +9552,8 @@
         </p:nvSpPr>
         <p:spPr>
           <a:xfrm>
-            <a:off x="640080" y="5550407"/>
-            <a:ext cx="6766560" cy="201168"/>
+            <a:off x="640080" y="5404104"/>
+            <a:ext cx="6172200" cy="201168"/>
           </a:xfrm>
           <a:prstGeom prst="rect">
             <a:avLst/>
@@ -9643,8 +9595,8 @@
         </p:blipFill>
         <p:spPr>
           <a:xfrm>
-            <a:off x="7635240" y="1939656"/>
-            <a:ext cx="4343400" cy="3253007"/>
+            <a:off x="7269480" y="1325880"/>
+            <a:ext cx="4465015" cy="3095015"/>
           </a:xfrm>
           <a:prstGeom prst="rect">
             <a:avLst/>
@@ -9711,7 +9663,7 @@
         <p:spPr>
           <a:xfrm>
             <a:off x="640080" y="1371600"/>
-            <a:ext cx="6858000" cy="3383279"/>
+            <a:ext cx="6263640" cy="2697480"/>
           </a:xfrm>
           <a:prstGeom prst="rect">
             <a:avLst/>
@@ -9720,7 +9672,7 @@
         </p:spPr>
         <p:txBody>
           <a:bodyPr wrap="square">
-            <a:normAutofit/>
+            <a:spAutoFit/>
           </a:bodyPr>
           <a:lstStyle/>
           <a:p>
@@ -9735,7 +9687,7 @@
                   <a:srgbClr val="000000"/>
                 </a:solidFill>
               </a:rPr>
-              <a:t xml:space="preserve">Оси: `set_xlabel`, `set_ylabel`, `set_title` — </a:t>
+              <a:t xml:space="preserve">• Оси: `set_xlabel`, `set_ylabel`, `set_title` — </a:t>
             </a:r>
             <a:r>
               <a:rPr lang="ru-RU" dirty="0" sz="2000" b="1">
@@ -9766,7 +9718,7 @@
                   <a:srgbClr val="000000"/>
                 </a:solidFill>
               </a:rPr>
-              <a:t>`legend()` — подписи серий; `loc='best'` или явное место</a:t>
+              <a:t>• `legend()` — подписи серий; `loc='best'` или явное место</a:t>
             </a:r>
           </a:p>
           <a:p>
@@ -9781,7 +9733,7 @@
                   <a:srgbClr val="000000"/>
                 </a:solidFill>
               </a:rPr>
-              <a:t>Цвет: colorblind-friendly палитры (`tab10`, `colorblind` в seaborn)</a:t>
+              <a:t>• Цвет: colorblind-friendly палитры (`tab10`, `colorblind` в seaborn)</a:t>
             </a:r>
           </a:p>
           <a:p>
@@ -9796,7 +9748,7 @@
                   <a:srgbClr val="000000"/>
                 </a:solidFill>
               </a:rPr>
-              <a:t>Не полагайся только на цвет — добавь маркер/ linestyle для различия серий</a:t>
+              <a:t>• Не полагайся только на цвет — добавь маркер/ linestyle для различия серий</a:t>
             </a:r>
           </a:p>
         </p:txBody>
@@ -9809,8 +9761,8 @@
         </p:nvSpPr>
         <p:spPr>
           <a:xfrm>
-            <a:off x="640080" y="4864607"/>
-            <a:ext cx="6766560" cy="630936"/>
+            <a:off x="640080" y="4690872"/>
+            <a:ext cx="6172200" cy="630936"/>
           </a:xfrm>
           <a:prstGeom prst="rect">
             <a:avLst/>
@@ -9854,8 +9806,8 @@
         </p:nvSpPr>
         <p:spPr>
           <a:xfrm>
-            <a:off x="713231" y="4901183"/>
-            <a:ext cx="6620256" cy="557784"/>
+            <a:off x="713231" y="4727448"/>
+            <a:ext cx="6025896" cy="557784"/>
           </a:xfrm>
           <a:prstGeom prst="rect">
             <a:avLst/>
@@ -9925,8 +9877,8 @@
         </p:nvSpPr>
         <p:spPr>
           <a:xfrm>
-            <a:off x="640080" y="5550407"/>
-            <a:ext cx="6766560" cy="201168"/>
+            <a:off x="640080" y="5376672"/>
+            <a:ext cx="6172200" cy="201168"/>
           </a:xfrm>
           <a:prstGeom prst="rect">
             <a:avLst/>
@@ -9968,8 +9920,8 @@
         </p:blipFill>
         <p:spPr>
           <a:xfrm>
-            <a:off x="7635240" y="2073874"/>
-            <a:ext cx="4343400" cy="2984571"/>
+            <a:off x="7269480" y="1325880"/>
+            <a:ext cx="4465015" cy="2892695"/>
           </a:xfrm>
           <a:prstGeom prst="rect">
             <a:avLst/>

--- a/lessons/vizualizatsiya/presentation.pptx
+++ b/lessons/vizualizatsiya/presentation.pptx
@@ -4916,7 +4916,7 @@
         <p:spPr>
           <a:xfrm>
             <a:off x="640080" y="1371600"/>
-            <a:ext cx="6263640" cy="2697480"/>
+            <a:ext cx="6263640" cy="2514600"/>
           </a:xfrm>
           <a:prstGeom prst="rect">
             <a:avLst/>
@@ -4940,7 +4940,26 @@
                   <a:srgbClr val="000000"/>
                 </a:solidFill>
               </a:rPr>
-              <a:t>• `fig, axes = plt.subplots(nrows, ncols, figsize=(w,h))` — сетка графиков</a:t>
+              <a:t xml:space="preserve">• </a:t>
+            </a:r>
+            <a:r>
+              <a:rPr lang="ru-RU" dirty="0" sz="2000">
+                <a:latin typeface="Consolas"/>
+                <a:cs typeface="Consolas"/>
+                <a:ea typeface="Consolas"/>
+                <a:solidFill>
+                  <a:srgbClr val="000000"/>
+                </a:solidFill>
+              </a:rPr>
+              <a:t>fig, axes = plt.subplots(nrows, ncols, figsize=(w,h))</a:t>
+            </a:r>
+            <a:r>
+              <a:rPr lang="ru-RU" dirty="0" sz="2000">
+                <a:solidFill>
+                  <a:srgbClr val="000000"/>
+                </a:solidFill>
+              </a:rPr>
+              <a:t xml:space="preserve"> — сетка графиков</a:t>
             </a:r>
           </a:p>
           <a:p>
@@ -4955,7 +4974,45 @@
                   <a:srgbClr val="000000"/>
                 </a:solidFill>
               </a:rPr>
-              <a:t>• `axes.ravel()` — плоский обход ячеек; `axes[0,1]` — доступ по индексу</a:t>
+              <a:t xml:space="preserve">• </a:t>
+            </a:r>
+            <a:r>
+              <a:rPr lang="ru-RU" dirty="0" sz="2000">
+                <a:latin typeface="Consolas"/>
+                <a:cs typeface="Consolas"/>
+                <a:ea typeface="Consolas"/>
+                <a:solidFill>
+                  <a:srgbClr val="000000"/>
+                </a:solidFill>
+              </a:rPr>
+              <a:t>axes.ravel()</a:t>
+            </a:r>
+            <a:r>
+              <a:rPr lang="ru-RU" dirty="0" sz="2000">
+                <a:solidFill>
+                  <a:srgbClr val="000000"/>
+                </a:solidFill>
+              </a:rPr>
+              <a:t xml:space="preserve"> — плоский обход ячеек; </a:t>
+            </a:r>
+            <a:r>
+              <a:rPr lang="ru-RU" dirty="0" sz="2000">
+                <a:latin typeface="Consolas"/>
+                <a:cs typeface="Consolas"/>
+                <a:ea typeface="Consolas"/>
+                <a:solidFill>
+                  <a:srgbClr val="000000"/>
+                </a:solidFill>
+              </a:rPr>
+              <a:t>axes[0,1]</a:t>
+            </a:r>
+            <a:r>
+              <a:rPr lang="ru-RU" dirty="0" sz="2000">
+                <a:solidFill>
+                  <a:srgbClr val="000000"/>
+                </a:solidFill>
+              </a:rPr>
+              <a:t xml:space="preserve"> — доступ по индексу</a:t>
             </a:r>
           </a:p>
           <a:p>
@@ -4970,7 +5027,26 @@
                   <a:srgbClr val="000000"/>
                 </a:solidFill>
               </a:rPr>
-              <a:t>• `fig.suptitle('Общий заголовок')` — над всей фигурой</a:t>
+              <a:t xml:space="preserve">• </a:t>
+            </a:r>
+            <a:r>
+              <a:rPr lang="ru-RU" dirty="0" sz="2000">
+                <a:latin typeface="Consolas"/>
+                <a:cs typeface="Consolas"/>
+                <a:ea typeface="Consolas"/>
+                <a:solidFill>
+                  <a:srgbClr val="000000"/>
+                </a:solidFill>
+              </a:rPr>
+              <a:t>fig.suptitle('Общий заголовок')</a:t>
+            </a:r>
+            <a:r>
+              <a:rPr lang="ru-RU" dirty="0" sz="2000">
+                <a:solidFill>
+                  <a:srgbClr val="000000"/>
+                </a:solidFill>
+              </a:rPr>
+              <a:t xml:space="preserve"> — над всей фигурой</a:t>
             </a:r>
           </a:p>
           <a:p>
@@ -4985,7 +5061,45 @@
                   <a:srgbClr val="000000"/>
                 </a:solidFill>
               </a:rPr>
-              <a:t>• Одинаковые пределы осей (`sharex`, `sharey`) — для сравнения панелей</a:t>
+              <a:t>• Одинаковые пределы осей (</a:t>
+            </a:r>
+            <a:r>
+              <a:rPr lang="ru-RU" dirty="0" sz="2000">
+                <a:latin typeface="Consolas"/>
+                <a:cs typeface="Consolas"/>
+                <a:ea typeface="Consolas"/>
+                <a:solidFill>
+                  <a:srgbClr val="000000"/>
+                </a:solidFill>
+              </a:rPr>
+              <a:t>sharex</a:t>
+            </a:r>
+            <a:r>
+              <a:rPr lang="ru-RU" dirty="0" sz="2000">
+                <a:solidFill>
+                  <a:srgbClr val="000000"/>
+                </a:solidFill>
+              </a:rPr>
+              <a:t xml:space="preserve">, </a:t>
+            </a:r>
+            <a:r>
+              <a:rPr lang="ru-RU" dirty="0" sz="2000">
+                <a:latin typeface="Consolas"/>
+                <a:cs typeface="Consolas"/>
+                <a:ea typeface="Consolas"/>
+                <a:solidFill>
+                  <a:srgbClr val="000000"/>
+                </a:solidFill>
+              </a:rPr>
+              <a:t>sharey</a:t>
+            </a:r>
+            <a:r>
+              <a:rPr lang="ru-RU" dirty="0" sz="2000">
+                <a:solidFill>
+                  <a:srgbClr val="000000"/>
+                </a:solidFill>
+              </a:rPr>
+              <a:t>) — для сравнения панелей</a:t>
             </a:r>
           </a:p>
         </p:txBody>
@@ -4998,8 +5112,8 @@
         </p:nvSpPr>
         <p:spPr>
           <a:xfrm>
-            <a:off x="640080" y="4690872"/>
-            <a:ext cx="6172200" cy="630936"/>
+            <a:off x="640080" y="5832856"/>
+            <a:ext cx="6172200" cy="604520"/>
           </a:xfrm>
           <a:prstGeom prst="rect">
             <a:avLst/>
@@ -5043,21 +5157,27 @@
         </p:nvSpPr>
         <p:spPr>
           <a:xfrm>
-            <a:off x="713231" y="4727448"/>
-            <a:ext cx="6025896" cy="557784"/>
+            <a:off x="713231" y="5878576"/>
+            <a:ext cx="6025896" cy="139700"/>
           </a:xfrm>
           <a:prstGeom prst="rect">
             <a:avLst/>
           </a:prstGeom>
           <a:noFill/>
+          <a:ln>
+            <a:noFill/>
+          </a:ln>
         </p:spPr>
         <p:txBody>
-          <a:bodyPr wrap="none">
+          <a:bodyPr wrap="none" anchor="t" lIns="0" rIns="0" tIns="0" bIns="0">
             <a:noAutofit/>
           </a:bodyPr>
           <a:lstStyle/>
           <a:p>
             <a:pPr>
+              <a:spcBef>
+                <a:spcPts val="0"/>
+              </a:spcBef>
               <a:spcAft>
                 <a:spcPts val="0"/>
               </a:spcAft>
@@ -5069,11 +5189,275 @@
                 </a:solidFill>
                 <a:latin typeface="Consolas"/>
               </a:rPr>
-              <a:t>fig, axes = plt.subplots(2, 2, figsize=(8, 6))</a:t>
-            </a:r>
-          </a:p>
+              <a:t>fig</a:t>
+            </a:r>
+            <a:r>
+              <a:rPr sz="1100">
+                <a:solidFill>
+                  <a:srgbClr val="000000"/>
+                </a:solidFill>
+                <a:latin typeface="Consolas"/>
+              </a:rPr>
+              <a:t>,</a:t>
+            </a:r>
+            <a:r>
+              <a:rPr sz="1100">
+                <a:solidFill>
+                  <a:srgbClr val="000000"/>
+                </a:solidFill>
+                <a:latin typeface="Consolas"/>
+              </a:rPr>
+              <a:t> </a:t>
+            </a:r>
+            <a:r>
+              <a:rPr sz="1100">
+                <a:solidFill>
+                  <a:srgbClr val="000000"/>
+                </a:solidFill>
+                <a:latin typeface="Consolas"/>
+              </a:rPr>
+              <a:t>axes</a:t>
+            </a:r>
+            <a:r>
+              <a:rPr sz="1100">
+                <a:solidFill>
+                  <a:srgbClr val="000000"/>
+                </a:solidFill>
+                <a:latin typeface="Consolas"/>
+              </a:rPr>
+              <a:t> </a:t>
+            </a:r>
+            <a:r>
+              <a:rPr sz="1100">
+                <a:solidFill>
+                  <a:srgbClr val="666666"/>
+                </a:solidFill>
+                <a:latin typeface="Consolas"/>
+              </a:rPr>
+              <a:t>=</a:t>
+            </a:r>
+            <a:r>
+              <a:rPr sz="1100">
+                <a:solidFill>
+                  <a:srgbClr val="000000"/>
+                </a:solidFill>
+                <a:latin typeface="Consolas"/>
+              </a:rPr>
+              <a:t> </a:t>
+            </a:r>
+            <a:r>
+              <a:rPr sz="1100">
+                <a:solidFill>
+                  <a:srgbClr val="000000"/>
+                </a:solidFill>
+                <a:latin typeface="Consolas"/>
+              </a:rPr>
+              <a:t>plt</a:t>
+            </a:r>
+            <a:r>
+              <a:rPr sz="1100">
+                <a:solidFill>
+                  <a:srgbClr val="666666"/>
+                </a:solidFill>
+                <a:latin typeface="Consolas"/>
+              </a:rPr>
+              <a:t>.</a:t>
+            </a:r>
+            <a:r>
+              <a:rPr sz="1100">
+                <a:solidFill>
+                  <a:srgbClr val="000000"/>
+                </a:solidFill>
+                <a:latin typeface="Consolas"/>
+              </a:rPr>
+              <a:t>subplots</a:t>
+            </a:r>
+            <a:r>
+              <a:rPr sz="1100">
+                <a:solidFill>
+                  <a:srgbClr val="000000"/>
+                </a:solidFill>
+                <a:latin typeface="Consolas"/>
+              </a:rPr>
+              <a:t>(</a:t>
+            </a:r>
+            <a:r>
+              <a:rPr sz="1100">
+                <a:solidFill>
+                  <a:srgbClr val="40A070"/>
+                </a:solidFill>
+                <a:latin typeface="Consolas"/>
+              </a:rPr>
+              <a:t>2</a:t>
+            </a:r>
+            <a:r>
+              <a:rPr sz="1100">
+                <a:solidFill>
+                  <a:srgbClr val="000000"/>
+                </a:solidFill>
+                <a:latin typeface="Consolas"/>
+              </a:rPr>
+              <a:t>,</a:t>
+            </a:r>
+            <a:r>
+              <a:rPr sz="1100">
+                <a:solidFill>
+                  <a:srgbClr val="000000"/>
+                </a:solidFill>
+                <a:latin typeface="Consolas"/>
+              </a:rPr>
+              <a:t> </a:t>
+            </a:r>
+            <a:r>
+              <a:rPr sz="1100">
+                <a:solidFill>
+                  <a:srgbClr val="40A070"/>
+                </a:solidFill>
+                <a:latin typeface="Consolas"/>
+              </a:rPr>
+              <a:t>2</a:t>
+            </a:r>
+            <a:r>
+              <a:rPr sz="1100">
+                <a:solidFill>
+                  <a:srgbClr val="000000"/>
+                </a:solidFill>
+                <a:latin typeface="Consolas"/>
+              </a:rPr>
+              <a:t>,</a:t>
+            </a:r>
+            <a:r>
+              <a:rPr sz="1100">
+                <a:solidFill>
+                  <a:srgbClr val="000000"/>
+                </a:solidFill>
+                <a:latin typeface="Consolas"/>
+              </a:rPr>
+              <a:t> </a:t>
+            </a:r>
+            <a:r>
+              <a:rPr sz="1100">
+                <a:solidFill>
+                  <a:srgbClr val="000000"/>
+                </a:solidFill>
+                <a:latin typeface="Consolas"/>
+              </a:rPr>
+              <a:t>figsize</a:t>
+            </a:r>
+            <a:r>
+              <a:rPr sz="1100">
+                <a:solidFill>
+                  <a:srgbClr val="666666"/>
+                </a:solidFill>
+                <a:latin typeface="Consolas"/>
+              </a:rPr>
+              <a:t>=</a:t>
+            </a:r>
+            <a:r>
+              <a:rPr sz="1100">
+                <a:solidFill>
+                  <a:srgbClr val="000000"/>
+                </a:solidFill>
+                <a:latin typeface="Consolas"/>
+              </a:rPr>
+              <a:t>(</a:t>
+            </a:r>
+            <a:r>
+              <a:rPr sz="1100">
+                <a:solidFill>
+                  <a:srgbClr val="40A070"/>
+                </a:solidFill>
+                <a:latin typeface="Consolas"/>
+              </a:rPr>
+              <a:t>8</a:t>
+            </a:r>
+            <a:r>
+              <a:rPr sz="1100">
+                <a:solidFill>
+                  <a:srgbClr val="000000"/>
+                </a:solidFill>
+                <a:latin typeface="Consolas"/>
+              </a:rPr>
+              <a:t>,</a:t>
+            </a:r>
+            <a:r>
+              <a:rPr sz="1100">
+                <a:solidFill>
+                  <a:srgbClr val="000000"/>
+                </a:solidFill>
+                <a:latin typeface="Consolas"/>
+              </a:rPr>
+              <a:t> </a:t>
+            </a:r>
+            <a:r>
+              <a:rPr sz="1100">
+                <a:solidFill>
+                  <a:srgbClr val="40A070"/>
+                </a:solidFill>
+                <a:latin typeface="Consolas"/>
+              </a:rPr>
+              <a:t>6</a:t>
+            </a:r>
+            <a:r>
+              <a:rPr sz="1100">
+                <a:solidFill>
+                  <a:srgbClr val="000000"/>
+                </a:solidFill>
+                <a:latin typeface="Consolas"/>
+              </a:rPr>
+              <a:t>)</a:t>
+            </a:r>
+            <a:r>
+              <a:rPr sz="1100">
+                <a:solidFill>
+                  <a:srgbClr val="000000"/>
+                </a:solidFill>
+                <a:latin typeface="Consolas"/>
+              </a:rPr>
+              <a:t>)</a:t>
+            </a:r>
+            <a:r>
+              <a:rPr sz="1100">
+                <a:solidFill>
+                  <a:srgbClr val="BBBBBB"/>
+                </a:solidFill>
+                <a:latin typeface="Consolas"/>
+              </a:rPr>
+              <a:t>
+</a:t>
+            </a:r>
+          </a:p>
+        </p:txBody>
+      </p:sp>
+      <p:sp>
+        <p:nvSpPr>
+          <p:cNvPr id="6" name="TextBox 5"/>
+          <p:cNvSpPr txBox="1"/>
+          <p:nvPr/>
+        </p:nvSpPr>
+        <p:spPr>
+          <a:xfrm>
+            <a:off x="713231" y="6018275"/>
+            <a:ext cx="6025896" cy="139700"/>
+          </a:xfrm>
+          <a:prstGeom prst="rect">
+            <a:avLst/>
+          </a:prstGeom>
+          <a:noFill/>
+          <a:ln>
+            <a:noFill/>
+          </a:ln>
+        </p:spPr>
+        <p:txBody>
+          <a:bodyPr wrap="none" anchor="t" lIns="0" rIns="0" tIns="0" bIns="0">
+            <a:noAutofit/>
+          </a:bodyPr>
+          <a:lstStyle/>
           <a:p>
             <a:pPr>
+              <a:spcBef>
+                <a:spcPts val="0"/>
+              </a:spcBef>
               <a:spcAft>
                 <a:spcPts val="0"/>
               </a:spcAft>
@@ -5085,11 +5469,302 @@
                 </a:solidFill>
                 <a:latin typeface="Consolas"/>
               </a:rPr>
-              <a:t>axes[0, 0].hist(a); axes[0, 1].scatter(x, y)</a:t>
-            </a:r>
-          </a:p>
+              <a:t>axes</a:t>
+            </a:r>
+            <a:r>
+              <a:rPr sz="1100">
+                <a:solidFill>
+                  <a:srgbClr val="000000"/>
+                </a:solidFill>
+                <a:latin typeface="Consolas"/>
+              </a:rPr>
+              <a:t>[</a:t>
+            </a:r>
+            <a:r>
+              <a:rPr sz="1100">
+                <a:solidFill>
+                  <a:srgbClr val="40A070"/>
+                </a:solidFill>
+                <a:latin typeface="Consolas"/>
+              </a:rPr>
+              <a:t>0</a:t>
+            </a:r>
+            <a:r>
+              <a:rPr sz="1100">
+                <a:solidFill>
+                  <a:srgbClr val="000000"/>
+                </a:solidFill>
+                <a:latin typeface="Consolas"/>
+              </a:rPr>
+              <a:t>,</a:t>
+            </a:r>
+            <a:r>
+              <a:rPr sz="1100">
+                <a:solidFill>
+                  <a:srgbClr val="000000"/>
+                </a:solidFill>
+                <a:latin typeface="Consolas"/>
+              </a:rPr>
+              <a:t> </a:t>
+            </a:r>
+            <a:r>
+              <a:rPr sz="1100">
+                <a:solidFill>
+                  <a:srgbClr val="40A070"/>
+                </a:solidFill>
+                <a:latin typeface="Consolas"/>
+              </a:rPr>
+              <a:t>0</a:t>
+            </a:r>
+            <a:r>
+              <a:rPr sz="1100">
+                <a:solidFill>
+                  <a:srgbClr val="000000"/>
+                </a:solidFill>
+                <a:latin typeface="Consolas"/>
+              </a:rPr>
+              <a:t>]</a:t>
+            </a:r>
+            <a:r>
+              <a:rPr sz="1100">
+                <a:solidFill>
+                  <a:srgbClr val="666666"/>
+                </a:solidFill>
+                <a:latin typeface="Consolas"/>
+              </a:rPr>
+              <a:t>.</a:t>
+            </a:r>
+            <a:r>
+              <a:rPr sz="1100">
+                <a:solidFill>
+                  <a:srgbClr val="000000"/>
+                </a:solidFill>
+                <a:latin typeface="Consolas"/>
+              </a:rPr>
+              <a:t>hist</a:t>
+            </a:r>
+            <a:r>
+              <a:rPr sz="1100">
+                <a:solidFill>
+                  <a:srgbClr val="000000"/>
+                </a:solidFill>
+                <a:latin typeface="Consolas"/>
+              </a:rPr>
+              <a:t>(</a:t>
+            </a:r>
+            <a:r>
+              <a:rPr sz="1100">
+                <a:solidFill>
+                  <a:srgbClr val="000000"/>
+                </a:solidFill>
+                <a:latin typeface="Consolas"/>
+              </a:rPr>
+              <a:t>a</a:t>
+            </a:r>
+            <a:r>
+              <a:rPr sz="1100">
+                <a:solidFill>
+                  <a:srgbClr val="000000"/>
+                </a:solidFill>
+                <a:latin typeface="Consolas"/>
+              </a:rPr>
+              <a:t>)</a:t>
+            </a:r>
+            <a:r>
+              <a:rPr sz="1100">
+                <a:solidFill>
+                  <a:srgbClr val="000000"/>
+                </a:solidFill>
+                <a:latin typeface="Consolas"/>
+              </a:rPr>
+              <a:t>;</a:t>
+            </a:r>
+            <a:r>
+              <a:rPr sz="1100">
+                <a:solidFill>
+                  <a:srgbClr val="000000"/>
+                </a:solidFill>
+                <a:latin typeface="Consolas"/>
+              </a:rPr>
+              <a:t> </a:t>
+            </a:r>
+            <a:r>
+              <a:rPr sz="1100">
+                <a:solidFill>
+                  <a:srgbClr val="000000"/>
+                </a:solidFill>
+                <a:latin typeface="Consolas"/>
+              </a:rPr>
+              <a:t>axes</a:t>
+            </a:r>
+            <a:r>
+              <a:rPr sz="1100">
+                <a:solidFill>
+                  <a:srgbClr val="000000"/>
+                </a:solidFill>
+                <a:latin typeface="Consolas"/>
+              </a:rPr>
+              <a:t>[</a:t>
+            </a:r>
+            <a:r>
+              <a:rPr sz="1100">
+                <a:solidFill>
+                  <a:srgbClr val="40A070"/>
+                </a:solidFill>
+                <a:latin typeface="Consolas"/>
+              </a:rPr>
+              <a:t>0</a:t>
+            </a:r>
+            <a:r>
+              <a:rPr sz="1100">
+                <a:solidFill>
+                  <a:srgbClr val="000000"/>
+                </a:solidFill>
+                <a:latin typeface="Consolas"/>
+              </a:rPr>
+              <a:t>,</a:t>
+            </a:r>
+            <a:r>
+              <a:rPr sz="1100">
+                <a:solidFill>
+                  <a:srgbClr val="000000"/>
+                </a:solidFill>
+                <a:latin typeface="Consolas"/>
+              </a:rPr>
+              <a:t> </a:t>
+            </a:r>
+            <a:r>
+              <a:rPr sz="1100">
+                <a:solidFill>
+                  <a:srgbClr val="40A070"/>
+                </a:solidFill>
+                <a:latin typeface="Consolas"/>
+              </a:rPr>
+              <a:t>1</a:t>
+            </a:r>
+            <a:r>
+              <a:rPr sz="1100">
+                <a:solidFill>
+                  <a:srgbClr val="000000"/>
+                </a:solidFill>
+                <a:latin typeface="Consolas"/>
+              </a:rPr>
+              <a:t>]</a:t>
+            </a:r>
+            <a:r>
+              <a:rPr sz="1100">
+                <a:solidFill>
+                  <a:srgbClr val="666666"/>
+                </a:solidFill>
+                <a:latin typeface="Consolas"/>
+              </a:rPr>
+              <a:t>.</a:t>
+            </a:r>
+            <a:r>
+              <a:rPr sz="1100">
+                <a:solidFill>
+                  <a:srgbClr val="000000"/>
+                </a:solidFill>
+                <a:latin typeface="Consolas"/>
+              </a:rPr>
+              <a:t>scatter</a:t>
+            </a:r>
+            <a:r>
+              <a:rPr sz="1100">
+                <a:solidFill>
+                  <a:srgbClr val="000000"/>
+                </a:solidFill>
+                <a:latin typeface="Consolas"/>
+              </a:rPr>
+              <a:t>(</a:t>
+            </a:r>
+            <a:r>
+              <a:rPr sz="1100">
+                <a:solidFill>
+                  <a:srgbClr val="000000"/>
+                </a:solidFill>
+                <a:latin typeface="Consolas"/>
+              </a:rPr>
+              <a:t>x</a:t>
+            </a:r>
+            <a:r>
+              <a:rPr sz="1100">
+                <a:solidFill>
+                  <a:srgbClr val="000000"/>
+                </a:solidFill>
+                <a:latin typeface="Consolas"/>
+              </a:rPr>
+              <a:t>,</a:t>
+            </a:r>
+            <a:r>
+              <a:rPr sz="1100">
+                <a:solidFill>
+                  <a:srgbClr val="000000"/>
+                </a:solidFill>
+                <a:latin typeface="Consolas"/>
+              </a:rPr>
+              <a:t> </a:t>
+            </a:r>
+            <a:r>
+              <a:rPr sz="1100">
+                <a:solidFill>
+                  <a:srgbClr val="000000"/>
+                </a:solidFill>
+                <a:latin typeface="Consolas"/>
+              </a:rPr>
+              <a:t>y</a:t>
+            </a:r>
+            <a:r>
+              <a:rPr sz="1100">
+                <a:solidFill>
+                  <a:srgbClr val="000000"/>
+                </a:solidFill>
+                <a:latin typeface="Consolas"/>
+              </a:rPr>
+              <a:t>)</a:t>
+            </a:r>
+            <a:r>
+              <a:rPr sz="1100">
+                <a:solidFill>
+                  <a:srgbClr val="BBBBBB"/>
+                </a:solidFill>
+                <a:latin typeface="Consolas"/>
+              </a:rPr>
+              <a:t>
+</a:t>
+            </a:r>
+          </a:p>
+        </p:txBody>
+      </p:sp>
+      <p:sp>
+        <p:nvSpPr>
+          <p:cNvPr id="7" name="TextBox 6"/>
+          <p:cNvSpPr txBox="1"/>
+          <p:nvPr/>
+        </p:nvSpPr>
+        <p:spPr>
+          <a:xfrm>
+            <a:off x="713231" y="6157975"/>
+            <a:ext cx="6025896" cy="139700"/>
+          </a:xfrm>
+          <a:prstGeom prst="rect">
+            <a:avLst/>
+          </a:prstGeom>
+          <a:noFill/>
+          <a:ln>
+            <a:noFill/>
+          </a:ln>
+        </p:spPr>
+        <p:txBody>
+          <a:bodyPr wrap="none" anchor="t" lIns="0" rIns="0" tIns="0" bIns="0">
+            <a:noAutofit/>
+          </a:bodyPr>
+          <a:lstStyle/>
           <a:p>
             <a:pPr>
+              <a:spcBef>
+                <a:spcPts val="0"/>
+              </a:spcBef>
               <a:spcAft>
                 <a:spcPts val="0"/>
               </a:spcAft>
@@ -5101,20 +5776,66 @@
                 </a:solidFill>
                 <a:latin typeface="Consolas"/>
               </a:rPr>
-              <a:t>fig.tight_layout()</a:t>
-            </a:r>
-          </a:p>
-        </p:txBody>
-      </p:sp>
-      <p:sp>
-        <p:nvSpPr>
-          <p:cNvPr id="6" name="TextBox 5"/>
+              <a:t>fig</a:t>
+            </a:r>
+            <a:r>
+              <a:rPr sz="1100">
+                <a:solidFill>
+                  <a:srgbClr val="666666"/>
+                </a:solidFill>
+                <a:latin typeface="Consolas"/>
+              </a:rPr>
+              <a:t>.</a:t>
+            </a:r>
+            <a:r>
+              <a:rPr sz="1100">
+                <a:solidFill>
+                  <a:srgbClr val="000000"/>
+                </a:solidFill>
+                <a:latin typeface="Consolas"/>
+              </a:rPr>
+              <a:t>tight_layout</a:t>
+            </a:r>
+            <a:r>
+              <a:rPr sz="1100">
+                <a:solidFill>
+                  <a:srgbClr val="000000"/>
+                </a:solidFill>
+                <a:latin typeface="Consolas"/>
+              </a:rPr>
+              <a:t>(</a:t>
+            </a:r>
+            <a:r>
+              <a:rPr sz="1100">
+                <a:solidFill>
+                  <a:srgbClr val="000000"/>
+                </a:solidFill>
+                <a:latin typeface="Consolas"/>
+              </a:rPr>
+              <a:t>)</a:t>
+            </a:r>
+            <a:r>
+              <a:rPr sz="1100">
+                <a:solidFill>
+                  <a:srgbClr val="BBBBBB"/>
+                </a:solidFill>
+                <a:latin typeface="Consolas"/>
+              </a:rPr>
+              <a:t>
+</a:t>
+            </a:r>
+          </a:p>
+        </p:txBody>
+      </p:sp>
+      <p:sp>
+        <p:nvSpPr>
+          <p:cNvPr id="8" name="TextBox 7"/>
           <p:cNvSpPr txBox="1"/>
           <p:nvPr/>
         </p:nvSpPr>
         <p:spPr>
           <a:xfrm>
-            <a:off x="640080" y="5376672"/>
+            <a:off x="640080" y="6492240"/>
             <a:ext cx="6172200" cy="201168"/>
           </a:xfrm>
           <a:prstGeom prst="rect">
@@ -5143,7 +5864,7 @@
       </p:sp>
       <p:pic>
         <p:nvPicPr>
-          <p:cNvPr id="7" name="Picture 6" descr="subplots_grid_2x2.png"/>
+          <p:cNvPr id="9" name="Picture 8" descr="subplots_grid_2x2.png"/>
           <p:cNvPicPr>
             <a:picLocks noChangeAspect="1"/>
           </p:cNvPicPr>
@@ -5157,8 +5878,8 @@
         </p:blipFill>
         <p:spPr>
           <a:xfrm>
-            <a:off x="7269480" y="1325880"/>
-            <a:ext cx="4465015" cy="3597593"/>
+            <a:off x="7269480" y="1371600"/>
+            <a:ext cx="4465015" cy="3572467"/>
           </a:xfrm>
           <a:prstGeom prst="rect">
             <a:avLst/>
@@ -5225,7 +5946,7 @@
         <p:spPr>
           <a:xfrm>
             <a:off x="640080" y="1371600"/>
-            <a:ext cx="6263640" cy="2697480"/>
+            <a:ext cx="6263640" cy="2514600"/>
           </a:xfrm>
           <a:prstGeom prst="rect">
             <a:avLst/>
@@ -5249,7 +5970,37 @@
                   <a:srgbClr val="000000"/>
                 </a:solidFill>
               </a:rPr>
-              <a:t>• `df.corr()` — матрица Pearson; `sns.heatmap(corr, annot=True, cmap='RdBu_r', center=0)`</a:t>
+              <a:t xml:space="preserve">• </a:t>
+            </a:r>
+            <a:r>
+              <a:rPr lang="ru-RU" dirty="0" sz="2000">
+                <a:latin typeface="Consolas"/>
+                <a:cs typeface="Consolas"/>
+                <a:ea typeface="Consolas"/>
+                <a:solidFill>
+                  <a:srgbClr val="000000"/>
+                </a:solidFill>
+              </a:rPr>
+              <a:t>df.corr()</a:t>
+            </a:r>
+            <a:r>
+              <a:rPr lang="ru-RU" dirty="0" sz="2000">
+                <a:solidFill>
+                  <a:srgbClr val="000000"/>
+                </a:solidFill>
+              </a:rPr>
+              <a:t xml:space="preserve"> — матрица Pearson; </a:t>
+            </a:r>
+            <a:r>
+              <a:rPr lang="ru-RU" dirty="0" sz="2000">
+                <a:latin typeface="Consolas"/>
+                <a:cs typeface="Consolas"/>
+                <a:ea typeface="Consolas"/>
+                <a:solidFill>
+                  <a:srgbClr val="000000"/>
+                </a:solidFill>
+              </a:rPr>
+              <a:t>sns.heatmap(corr, annot=True, cmap='RdBu_r', center=0)</a:t>
             </a:r>
           </a:p>
           <a:p>
@@ -5307,8 +6058,8 @@
         </p:nvSpPr>
         <p:spPr>
           <a:xfrm>
-            <a:off x="640080" y="4892040"/>
-            <a:ext cx="6172200" cy="457200"/>
+            <a:off x="640080" y="5832856"/>
+            <a:ext cx="6172200" cy="604520"/>
           </a:xfrm>
           <a:prstGeom prst="rect">
             <a:avLst/>
@@ -5352,21 +6103,27 @@
         </p:nvSpPr>
         <p:spPr>
           <a:xfrm>
-            <a:off x="713231" y="4928616"/>
-            <a:ext cx="6025896" cy="384048"/>
+            <a:off x="713231" y="5878576"/>
+            <a:ext cx="6025896" cy="139700"/>
           </a:xfrm>
           <a:prstGeom prst="rect">
             <a:avLst/>
           </a:prstGeom>
           <a:noFill/>
+          <a:ln>
+            <a:noFill/>
+          </a:ln>
         </p:spPr>
         <p:txBody>
-          <a:bodyPr wrap="none">
+          <a:bodyPr wrap="none" anchor="t" lIns="0" rIns="0" tIns="0" bIns="0">
             <a:noAutofit/>
           </a:bodyPr>
           <a:lstStyle/>
           <a:p>
             <a:pPr>
+              <a:spcBef>
+                <a:spcPts val="0"/>
+              </a:spcBef>
               <a:spcAft>
                 <a:spcPts val="0"/>
               </a:spcAft>
@@ -5378,11 +6135,149 @@
                 </a:solidFill>
                 <a:latin typeface="Consolas"/>
               </a:rPr>
-              <a:t>corr = df.corr(numeric_only=True)</a:t>
-            </a:r>
-          </a:p>
+              <a:t>corr</a:t>
+            </a:r>
+            <a:r>
+              <a:rPr sz="1100">
+                <a:solidFill>
+                  <a:srgbClr val="000000"/>
+                </a:solidFill>
+                <a:latin typeface="Consolas"/>
+              </a:rPr>
+              <a:t> </a:t>
+            </a:r>
+            <a:r>
+              <a:rPr sz="1100">
+                <a:solidFill>
+                  <a:srgbClr val="666666"/>
+                </a:solidFill>
+                <a:latin typeface="Consolas"/>
+              </a:rPr>
+              <a:t>=</a:t>
+            </a:r>
+            <a:r>
+              <a:rPr sz="1100">
+                <a:solidFill>
+                  <a:srgbClr val="000000"/>
+                </a:solidFill>
+                <a:latin typeface="Consolas"/>
+              </a:rPr>
+              <a:t> </a:t>
+            </a:r>
+            <a:r>
+              <a:rPr sz="1100">
+                <a:solidFill>
+                  <a:srgbClr val="000000"/>
+                </a:solidFill>
+                <a:latin typeface="Consolas"/>
+              </a:rPr>
+              <a:t>df</a:t>
+            </a:r>
+            <a:r>
+              <a:rPr sz="1100">
+                <a:solidFill>
+                  <a:srgbClr val="666666"/>
+                </a:solidFill>
+                <a:latin typeface="Consolas"/>
+              </a:rPr>
+              <a:t>.</a:t>
+            </a:r>
+            <a:r>
+              <a:rPr sz="1100">
+                <a:solidFill>
+                  <a:srgbClr val="000000"/>
+                </a:solidFill>
+                <a:latin typeface="Consolas"/>
+              </a:rPr>
+              <a:t>corr</a:t>
+            </a:r>
+            <a:r>
+              <a:rPr sz="1100">
+                <a:solidFill>
+                  <a:srgbClr val="000000"/>
+                </a:solidFill>
+                <a:latin typeface="Consolas"/>
+              </a:rPr>
+              <a:t>(</a:t>
+            </a:r>
+            <a:r>
+              <a:rPr sz="1100">
+                <a:solidFill>
+                  <a:srgbClr val="000000"/>
+                </a:solidFill>
+                <a:latin typeface="Consolas"/>
+              </a:rPr>
+              <a:t>numeric_only</a:t>
+            </a:r>
+            <a:r>
+              <a:rPr sz="1100">
+                <a:solidFill>
+                  <a:srgbClr val="666666"/>
+                </a:solidFill>
+                <a:latin typeface="Consolas"/>
+              </a:rPr>
+              <a:t>=</a:t>
+            </a:r>
+            <a:r>
+              <a:rPr sz="1100" b="1">
+                <a:solidFill>
+                  <a:srgbClr val="007020"/>
+                </a:solidFill>
+                <a:latin typeface="Consolas"/>
+              </a:rPr>
+              <a:t>True</a:t>
+            </a:r>
+            <a:r>
+              <a:rPr sz="1100">
+                <a:solidFill>
+                  <a:srgbClr val="000000"/>
+                </a:solidFill>
+                <a:latin typeface="Consolas"/>
+              </a:rPr>
+              <a:t>)</a:t>
+            </a:r>
+            <a:r>
+              <a:rPr sz="1100">
+                <a:solidFill>
+                  <a:srgbClr val="BBBBBB"/>
+                </a:solidFill>
+                <a:latin typeface="Consolas"/>
+              </a:rPr>
+              <a:t>
+</a:t>
+            </a:r>
+          </a:p>
+        </p:txBody>
+      </p:sp>
+      <p:sp>
+        <p:nvSpPr>
+          <p:cNvPr id="6" name="TextBox 5"/>
+          <p:cNvSpPr txBox="1"/>
+          <p:nvPr/>
+        </p:nvSpPr>
+        <p:spPr>
+          <a:xfrm>
+            <a:off x="713231" y="6018275"/>
+            <a:ext cx="6025896" cy="139700"/>
+          </a:xfrm>
+          <a:prstGeom prst="rect">
+            <a:avLst/>
+          </a:prstGeom>
+          <a:noFill/>
+          <a:ln>
+            <a:noFill/>
+          </a:ln>
+        </p:spPr>
+        <p:txBody>
+          <a:bodyPr wrap="none" anchor="t" lIns="0" rIns="0" tIns="0" bIns="0">
+            <a:noAutofit/>
+          </a:bodyPr>
+          <a:lstStyle/>
           <a:p>
             <a:pPr>
+              <a:spcBef>
+                <a:spcPts val="0"/>
+              </a:spcBef>
               <a:spcAft>
                 <a:spcPts val="0"/>
               </a:spcAft>
@@ -5394,20 +6289,328 @@
                 </a:solidFill>
                 <a:latin typeface="Consolas"/>
               </a:rPr>
-              <a:t>sns.heatmap(corr, annot=True, cmap='coolwarm', vmin=-1, vmax=1)</a:t>
-            </a:r>
-          </a:p>
-        </p:txBody>
-      </p:sp>
-      <p:sp>
-        <p:nvSpPr>
-          <p:cNvPr id="6" name="TextBox 5"/>
+              <a:t>sns</a:t>
+            </a:r>
+            <a:r>
+              <a:rPr sz="1100">
+                <a:solidFill>
+                  <a:srgbClr val="666666"/>
+                </a:solidFill>
+                <a:latin typeface="Consolas"/>
+              </a:rPr>
+              <a:t>.</a:t>
+            </a:r>
+            <a:r>
+              <a:rPr sz="1100">
+                <a:solidFill>
+                  <a:srgbClr val="000000"/>
+                </a:solidFill>
+                <a:latin typeface="Consolas"/>
+              </a:rPr>
+              <a:t>heatmap</a:t>
+            </a:r>
+            <a:r>
+              <a:rPr sz="1100">
+                <a:solidFill>
+                  <a:srgbClr val="000000"/>
+                </a:solidFill>
+                <a:latin typeface="Consolas"/>
+              </a:rPr>
+              <a:t>(</a:t>
+            </a:r>
+            <a:r>
+              <a:rPr sz="1100">
+                <a:solidFill>
+                  <a:srgbClr val="000000"/>
+                </a:solidFill>
+                <a:latin typeface="Consolas"/>
+              </a:rPr>
+              <a:t>corr</a:t>
+            </a:r>
+            <a:r>
+              <a:rPr sz="1100">
+                <a:solidFill>
+                  <a:srgbClr val="000000"/>
+                </a:solidFill>
+                <a:latin typeface="Consolas"/>
+              </a:rPr>
+              <a:t>,</a:t>
+            </a:r>
+            <a:r>
+              <a:rPr sz="1100">
+                <a:solidFill>
+                  <a:srgbClr val="000000"/>
+                </a:solidFill>
+                <a:latin typeface="Consolas"/>
+              </a:rPr>
+              <a:t> </a:t>
+            </a:r>
+            <a:r>
+              <a:rPr sz="1100">
+                <a:solidFill>
+                  <a:srgbClr val="000000"/>
+                </a:solidFill>
+                <a:latin typeface="Consolas"/>
+              </a:rPr>
+              <a:t>annot</a:t>
+            </a:r>
+            <a:r>
+              <a:rPr sz="1100">
+                <a:solidFill>
+                  <a:srgbClr val="666666"/>
+                </a:solidFill>
+                <a:latin typeface="Consolas"/>
+              </a:rPr>
+              <a:t>=</a:t>
+            </a:r>
+            <a:r>
+              <a:rPr sz="1100" b="1">
+                <a:solidFill>
+                  <a:srgbClr val="007020"/>
+                </a:solidFill>
+                <a:latin typeface="Consolas"/>
+              </a:rPr>
+              <a:t>True</a:t>
+            </a:r>
+            <a:r>
+              <a:rPr sz="1100">
+                <a:solidFill>
+                  <a:srgbClr val="000000"/>
+                </a:solidFill>
+                <a:latin typeface="Consolas"/>
+              </a:rPr>
+              <a:t>,</a:t>
+            </a:r>
+            <a:r>
+              <a:rPr sz="1100">
+                <a:solidFill>
+                  <a:srgbClr val="000000"/>
+                </a:solidFill>
+                <a:latin typeface="Consolas"/>
+              </a:rPr>
+              <a:t> </a:t>
+            </a:r>
+            <a:r>
+              <a:rPr sz="1100">
+                <a:solidFill>
+                  <a:srgbClr val="000000"/>
+                </a:solidFill>
+                <a:latin typeface="Consolas"/>
+              </a:rPr>
+              <a:t>cmap</a:t>
+            </a:r>
+            <a:r>
+              <a:rPr sz="1100">
+                <a:solidFill>
+                  <a:srgbClr val="666666"/>
+                </a:solidFill>
+                <a:latin typeface="Consolas"/>
+              </a:rPr>
+              <a:t>=</a:t>
+            </a:r>
+            <a:r>
+              <a:rPr sz="1100">
+                <a:solidFill>
+                  <a:srgbClr val="4070A0"/>
+                </a:solidFill>
+                <a:latin typeface="Consolas"/>
+              </a:rPr>
+              <a:t>'</a:t>
+            </a:r>
+            <a:r>
+              <a:rPr sz="1100">
+                <a:solidFill>
+                  <a:srgbClr val="4070A0"/>
+                </a:solidFill>
+                <a:latin typeface="Consolas"/>
+              </a:rPr>
+              <a:t>coolwarm</a:t>
+            </a:r>
+            <a:r>
+              <a:rPr sz="1100">
+                <a:solidFill>
+                  <a:srgbClr val="4070A0"/>
+                </a:solidFill>
+                <a:latin typeface="Consolas"/>
+              </a:rPr>
+              <a:t>'</a:t>
+            </a:r>
+            <a:r>
+              <a:rPr sz="1100">
+                <a:solidFill>
+                  <a:srgbClr val="000000"/>
+                </a:solidFill>
+                <a:latin typeface="Consolas"/>
+              </a:rPr>
+              <a:t>,</a:t>
+            </a:r>
+            <a:r>
+              <a:rPr sz="1100">
+                <a:solidFill>
+                  <a:srgbClr val="000000"/>
+                </a:solidFill>
+                <a:latin typeface="Consolas"/>
+              </a:rPr>
+              <a:t> </a:t>
+            </a:r>
+            <a:r>
+              <a:rPr sz="1100">
+                <a:solidFill>
+                  <a:srgbClr val="000000"/>
+                </a:solidFill>
+                <a:latin typeface="Consolas"/>
+              </a:rPr>
+              <a:t>vmin</a:t>
+            </a:r>
+            <a:r>
+              <a:rPr sz="1100">
+                <a:solidFill>
+                  <a:srgbClr val="666666"/>
+                </a:solidFill>
+                <a:latin typeface="Consolas"/>
+              </a:rPr>
+              <a:t>=</a:t>
+            </a:r>
+            <a:r>
+              <a:rPr sz="1100">
+                <a:solidFill>
+                  <a:srgbClr val="666666"/>
+                </a:solidFill>
+                <a:latin typeface="Consolas"/>
+              </a:rPr>
+              <a:t>-</a:t>
+            </a:r>
+            <a:r>
+              <a:rPr sz="1100">
+                <a:solidFill>
+                  <a:srgbClr val="40A070"/>
+                </a:solidFill>
+                <a:latin typeface="Consolas"/>
+              </a:rPr>
+              <a:t>1</a:t>
+            </a:r>
+            <a:r>
+              <a:rPr sz="1100">
+                <a:solidFill>
+                  <a:srgbClr val="000000"/>
+                </a:solidFill>
+                <a:latin typeface="Consolas"/>
+              </a:rPr>
+              <a:t>,</a:t>
+            </a:r>
+            <a:r>
+              <a:rPr sz="1100">
+                <a:solidFill>
+                  <a:srgbClr val="BBBBBB"/>
+                </a:solidFill>
+                <a:latin typeface="Consolas"/>
+              </a:rPr>
+              <a:t>
+</a:t>
+            </a:r>
+          </a:p>
+        </p:txBody>
+      </p:sp>
+      <p:sp>
+        <p:nvSpPr>
+          <p:cNvPr id="7" name="TextBox 6"/>
           <p:cNvSpPr txBox="1"/>
           <p:nvPr/>
         </p:nvSpPr>
         <p:spPr>
           <a:xfrm>
-            <a:off x="640080" y="5404104"/>
+            <a:off x="713231" y="6157975"/>
+            <a:ext cx="6025896" cy="139700"/>
+          </a:xfrm>
+          <a:prstGeom prst="rect">
+            <a:avLst/>
+          </a:prstGeom>
+          <a:noFill/>
+          <a:ln>
+            <a:noFill/>
+          </a:ln>
+        </p:spPr>
+        <p:txBody>
+          <a:bodyPr wrap="none" anchor="t" lIns="0" rIns="0" tIns="0" bIns="0">
+            <a:noAutofit/>
+          </a:bodyPr>
+          <a:lstStyle/>
+          <a:p>
+            <a:pPr>
+              <a:spcBef>
+                <a:spcPts val="0"/>
+              </a:spcBef>
+              <a:spcAft>
+                <a:spcPts val="0"/>
+              </a:spcAft>
+            </a:pPr>
+            <a:r>
+              <a:rPr sz="1100">
+                <a:solidFill>
+                  <a:srgbClr val="000000"/>
+                </a:solidFill>
+                <a:latin typeface="Consolas"/>
+              </a:rPr>
+              <a:t>    </a:t>
+            </a:r>
+            <a:r>
+              <a:rPr sz="1100">
+                <a:solidFill>
+                  <a:srgbClr val="000000"/>
+                </a:solidFill>
+                <a:latin typeface="Consolas"/>
+              </a:rPr>
+              <a:t>vmax</a:t>
+            </a:r>
+            <a:r>
+              <a:rPr sz="1100">
+                <a:solidFill>
+                  <a:srgbClr val="666666"/>
+                </a:solidFill>
+                <a:latin typeface="Consolas"/>
+              </a:rPr>
+              <a:t>=</a:t>
+            </a:r>
+            <a:r>
+              <a:rPr sz="1100">
+                <a:solidFill>
+                  <a:srgbClr val="40A070"/>
+                </a:solidFill>
+                <a:latin typeface="Consolas"/>
+              </a:rPr>
+              <a:t>1</a:t>
+            </a:r>
+            <a:r>
+              <a:rPr sz="1100">
+                <a:solidFill>
+                  <a:srgbClr val="000000"/>
+                </a:solidFill>
+                <a:latin typeface="Consolas"/>
+              </a:rPr>
+              <a:t>)</a:t>
+            </a:r>
+            <a:r>
+              <a:rPr sz="1100">
+                <a:solidFill>
+                  <a:srgbClr val="BBBBBB"/>
+                </a:solidFill>
+                <a:latin typeface="Consolas"/>
+              </a:rPr>
+              <a:t>
+</a:t>
+            </a:r>
+          </a:p>
+        </p:txBody>
+      </p:sp>
+      <p:sp>
+        <p:nvSpPr>
+          <p:cNvPr id="8" name="TextBox 7"/>
+          <p:cNvSpPr txBox="1"/>
+          <p:nvPr/>
+        </p:nvSpPr>
+        <p:spPr>
+          <a:xfrm>
+            <a:off x="640080" y="6492240"/>
             <a:ext cx="6172200" cy="201168"/>
           </a:xfrm>
           <a:prstGeom prst="rect">
@@ -5436,7 +6639,7 @@
       </p:sp>
       <p:pic>
         <p:nvPicPr>
-          <p:cNvPr id="7" name="Picture 6" descr="correlation_heatmap.png"/>
+          <p:cNvPr id="9" name="Picture 8" descr="correlation_heatmap.png"/>
           <p:cNvPicPr>
             <a:picLocks noChangeAspect="1"/>
           </p:cNvPicPr>
@@ -5450,8 +6653,8 @@
         </p:blipFill>
         <p:spPr>
           <a:xfrm>
-            <a:off x="7269480" y="1325880"/>
-            <a:ext cx="4465015" cy="3909460"/>
+            <a:off x="7269480" y="1371600"/>
+            <a:ext cx="4465015" cy="3661312"/>
           </a:xfrm>
           <a:prstGeom prst="rect">
             <a:avLst/>
@@ -5518,7 +6721,7 @@
         <p:spPr>
           <a:xfrm>
             <a:off x="640080" y="1371600"/>
-            <a:ext cx="6263640" cy="2697480"/>
+            <a:ext cx="6263640" cy="2514600"/>
           </a:xfrm>
           <a:prstGeom prst="rect">
             <a:avLst/>
@@ -5542,7 +6745,26 @@
                   <a:srgbClr val="000000"/>
                 </a:solidFill>
               </a:rPr>
-              <a:t>• `sns.countplot(data=df, x='col')` — частоты категорий</a:t>
+              <a:t xml:space="preserve">• </a:t>
+            </a:r>
+            <a:r>
+              <a:rPr lang="ru-RU" dirty="0" sz="2000">
+                <a:latin typeface="Consolas"/>
+                <a:cs typeface="Consolas"/>
+                <a:ea typeface="Consolas"/>
+                <a:solidFill>
+                  <a:srgbClr val="000000"/>
+                </a:solidFill>
+              </a:rPr>
+              <a:t>sns.countplot(data=df, x='col')</a:t>
+            </a:r>
+            <a:r>
+              <a:rPr lang="ru-RU" dirty="0" sz="2000">
+                <a:solidFill>
+                  <a:srgbClr val="000000"/>
+                </a:solidFill>
+              </a:rPr>
+              <a:t xml:space="preserve"> — частоты категорий</a:t>
             </a:r>
           </a:p>
           <a:p>
@@ -5557,7 +6779,26 @@
                   <a:srgbClr val="000000"/>
                 </a:solidFill>
               </a:rPr>
-              <a:t>• `sns.barplot(x=, y=, estimator='mean')` — агрегат по категории</a:t>
+              <a:t xml:space="preserve">• </a:t>
+            </a:r>
+            <a:r>
+              <a:rPr lang="ru-RU" dirty="0" sz="2000">
+                <a:latin typeface="Consolas"/>
+                <a:cs typeface="Consolas"/>
+                <a:ea typeface="Consolas"/>
+                <a:solidFill>
+                  <a:srgbClr val="000000"/>
+                </a:solidFill>
+              </a:rPr>
+              <a:t>sns.barplot(x=, y=, estimator='mean')</a:t>
+            </a:r>
+            <a:r>
+              <a:rPr lang="ru-RU" dirty="0" sz="2000">
+                <a:solidFill>
+                  <a:srgbClr val="000000"/>
+                </a:solidFill>
+              </a:rPr>
+              <a:t xml:space="preserve"> — агрегат по категории</a:t>
             </a:r>
           </a:p>
           <a:p>
@@ -5587,7 +6828,26 @@
                   <a:srgbClr val="000000"/>
                 </a:solidFill>
               </a:rPr>
-              <a:t>• Порядок категорий на оси X задавай явно (`order=`) для читаемости</a:t>
+              <a:t>• Порядок категорий на оси X задавай явно (</a:t>
+            </a:r>
+            <a:r>
+              <a:rPr lang="ru-RU" dirty="0" sz="2000">
+                <a:latin typeface="Consolas"/>
+                <a:cs typeface="Consolas"/>
+                <a:ea typeface="Consolas"/>
+                <a:solidFill>
+                  <a:srgbClr val="000000"/>
+                </a:solidFill>
+              </a:rPr>
+              <a:t>order=</a:t>
+            </a:r>
+            <a:r>
+              <a:rPr lang="ru-RU" dirty="0" sz="2000">
+                <a:solidFill>
+                  <a:srgbClr val="000000"/>
+                </a:solidFill>
+              </a:rPr>
+              <a:t>) для читаемости</a:t>
             </a:r>
           </a:p>
         </p:txBody>
@@ -5600,8 +6860,8 @@
         </p:nvSpPr>
         <p:spPr>
           <a:xfrm>
-            <a:off x="640080" y="4892040"/>
-            <a:ext cx="6172200" cy="457200"/>
+            <a:off x="640080" y="5832856"/>
+            <a:ext cx="6172200" cy="604520"/>
           </a:xfrm>
           <a:prstGeom prst="rect">
             <a:avLst/>
@@ -5645,21 +6905,27 @@
         </p:nvSpPr>
         <p:spPr>
           <a:xfrm>
-            <a:off x="713231" y="4928616"/>
-            <a:ext cx="6025896" cy="384048"/>
+            <a:off x="713231" y="5878576"/>
+            <a:ext cx="6025896" cy="139700"/>
           </a:xfrm>
           <a:prstGeom prst="rect">
             <a:avLst/>
           </a:prstGeom>
           <a:noFill/>
+          <a:ln>
+            <a:noFill/>
+          </a:ln>
         </p:spPr>
         <p:txBody>
-          <a:bodyPr wrap="none">
+          <a:bodyPr wrap="none" anchor="t" lIns="0" rIns="0" tIns="0" bIns="0">
             <a:noAutofit/>
           </a:bodyPr>
           <a:lstStyle/>
           <a:p>
             <a:pPr>
+              <a:spcBef>
+                <a:spcPts val="0"/>
+              </a:spcBef>
               <a:spcAft>
                 <a:spcPts val="0"/>
               </a:spcAft>
@@ -5671,11 +6937,176 @@
                 </a:solidFill>
                 <a:latin typeface="Consolas"/>
               </a:rPr>
-              <a:t>sns.countplot(data=df, x='category', order=df['category'].value_counts().index)</a:t>
-            </a:r>
-          </a:p>
+              <a:t>sns</a:t>
+            </a:r>
+            <a:r>
+              <a:rPr sz="1100">
+                <a:solidFill>
+                  <a:srgbClr val="666666"/>
+                </a:solidFill>
+                <a:latin typeface="Consolas"/>
+              </a:rPr>
+              <a:t>.</a:t>
+            </a:r>
+            <a:r>
+              <a:rPr sz="1100">
+                <a:solidFill>
+                  <a:srgbClr val="000000"/>
+                </a:solidFill>
+                <a:latin typeface="Consolas"/>
+              </a:rPr>
+              <a:t>countplot</a:t>
+            </a:r>
+            <a:r>
+              <a:rPr sz="1100">
+                <a:solidFill>
+                  <a:srgbClr val="000000"/>
+                </a:solidFill>
+                <a:latin typeface="Consolas"/>
+              </a:rPr>
+              <a:t>(</a:t>
+            </a:r>
+            <a:r>
+              <a:rPr sz="1100">
+                <a:solidFill>
+                  <a:srgbClr val="000000"/>
+                </a:solidFill>
+                <a:latin typeface="Consolas"/>
+              </a:rPr>
+              <a:t>data</a:t>
+            </a:r>
+            <a:r>
+              <a:rPr sz="1100">
+                <a:solidFill>
+                  <a:srgbClr val="666666"/>
+                </a:solidFill>
+                <a:latin typeface="Consolas"/>
+              </a:rPr>
+              <a:t>=</a:t>
+            </a:r>
+            <a:r>
+              <a:rPr sz="1100">
+                <a:solidFill>
+                  <a:srgbClr val="000000"/>
+                </a:solidFill>
+                <a:latin typeface="Consolas"/>
+              </a:rPr>
+              <a:t>df</a:t>
+            </a:r>
+            <a:r>
+              <a:rPr sz="1100">
+                <a:solidFill>
+                  <a:srgbClr val="000000"/>
+                </a:solidFill>
+                <a:latin typeface="Consolas"/>
+              </a:rPr>
+              <a:t>,</a:t>
+            </a:r>
+            <a:r>
+              <a:rPr sz="1100">
+                <a:solidFill>
+                  <a:srgbClr val="000000"/>
+                </a:solidFill>
+                <a:latin typeface="Consolas"/>
+              </a:rPr>
+              <a:t> </a:t>
+            </a:r>
+            <a:r>
+              <a:rPr sz="1100">
+                <a:solidFill>
+                  <a:srgbClr val="000000"/>
+                </a:solidFill>
+                <a:latin typeface="Consolas"/>
+              </a:rPr>
+              <a:t>x</a:t>
+            </a:r>
+            <a:r>
+              <a:rPr sz="1100">
+                <a:solidFill>
+                  <a:srgbClr val="666666"/>
+                </a:solidFill>
+                <a:latin typeface="Consolas"/>
+              </a:rPr>
+              <a:t>=</a:t>
+            </a:r>
+            <a:r>
+              <a:rPr sz="1100">
+                <a:solidFill>
+                  <a:srgbClr val="4070A0"/>
+                </a:solidFill>
+                <a:latin typeface="Consolas"/>
+              </a:rPr>
+              <a:t>'</a:t>
+            </a:r>
+            <a:r>
+              <a:rPr sz="1100">
+                <a:solidFill>
+                  <a:srgbClr val="4070A0"/>
+                </a:solidFill>
+                <a:latin typeface="Consolas"/>
+              </a:rPr>
+              <a:t>category</a:t>
+            </a:r>
+            <a:r>
+              <a:rPr sz="1100">
+                <a:solidFill>
+                  <a:srgbClr val="4070A0"/>
+                </a:solidFill>
+                <a:latin typeface="Consolas"/>
+              </a:rPr>
+              <a:t>'</a:t>
+            </a:r>
+            <a:r>
+              <a:rPr sz="1100">
+                <a:solidFill>
+                  <a:srgbClr val="000000"/>
+                </a:solidFill>
+                <a:latin typeface="Consolas"/>
+              </a:rPr>
+              <a:t>,</a:t>
+            </a:r>
+            <a:r>
+              <a:rPr sz="1100">
+                <a:solidFill>
+                  <a:srgbClr val="BBBBBB"/>
+                </a:solidFill>
+                <a:latin typeface="Consolas"/>
+              </a:rPr>
+              <a:t>
+</a:t>
+            </a:r>
+          </a:p>
+        </p:txBody>
+      </p:sp>
+      <p:sp>
+        <p:nvSpPr>
+          <p:cNvPr id="6" name="TextBox 5"/>
+          <p:cNvSpPr txBox="1"/>
+          <p:nvPr/>
+        </p:nvSpPr>
+        <p:spPr>
+          <a:xfrm>
+            <a:off x="713231" y="6018275"/>
+            <a:ext cx="6025896" cy="139700"/>
+          </a:xfrm>
+          <a:prstGeom prst="rect">
+            <a:avLst/>
+          </a:prstGeom>
+          <a:noFill/>
+          <a:ln>
+            <a:noFill/>
+          </a:ln>
+        </p:spPr>
+        <p:txBody>
+          <a:bodyPr wrap="none" anchor="t" lIns="0" rIns="0" tIns="0" bIns="0">
+            <a:noAutofit/>
+          </a:bodyPr>
+          <a:lstStyle/>
           <a:p>
             <a:pPr>
+              <a:spcBef>
+                <a:spcPts val="0"/>
+              </a:spcBef>
               <a:spcAft>
                 <a:spcPts val="0"/>
               </a:spcAft>
@@ -5687,20 +7118,283 @@
                 </a:solidFill>
                 <a:latin typeface="Consolas"/>
               </a:rPr>
-              <a:t>plt.xticks(rotation=30)</a:t>
-            </a:r>
-          </a:p>
-        </p:txBody>
-      </p:sp>
-      <p:sp>
-        <p:nvSpPr>
-          <p:cNvPr id="6" name="TextBox 5"/>
+              <a:t>    </a:t>
+            </a:r>
+            <a:r>
+              <a:rPr sz="1100">
+                <a:solidFill>
+                  <a:srgbClr val="000000"/>
+                </a:solidFill>
+                <a:latin typeface="Consolas"/>
+              </a:rPr>
+              <a:t>order</a:t>
+            </a:r>
+            <a:r>
+              <a:rPr sz="1100">
+                <a:solidFill>
+                  <a:srgbClr val="666666"/>
+                </a:solidFill>
+                <a:latin typeface="Consolas"/>
+              </a:rPr>
+              <a:t>=</a:t>
+            </a:r>
+            <a:r>
+              <a:rPr sz="1100">
+                <a:solidFill>
+                  <a:srgbClr val="000000"/>
+                </a:solidFill>
+                <a:latin typeface="Consolas"/>
+              </a:rPr>
+              <a:t>df</a:t>
+            </a:r>
+            <a:r>
+              <a:rPr sz="1100">
+                <a:solidFill>
+                  <a:srgbClr val="000000"/>
+                </a:solidFill>
+                <a:latin typeface="Consolas"/>
+              </a:rPr>
+              <a:t>[</a:t>
+            </a:r>
+            <a:r>
+              <a:rPr sz="1100">
+                <a:solidFill>
+                  <a:srgbClr val="4070A0"/>
+                </a:solidFill>
+                <a:latin typeface="Consolas"/>
+              </a:rPr>
+              <a:t>'</a:t>
+            </a:r>
+            <a:r>
+              <a:rPr sz="1100">
+                <a:solidFill>
+                  <a:srgbClr val="4070A0"/>
+                </a:solidFill>
+                <a:latin typeface="Consolas"/>
+              </a:rPr>
+              <a:t>category</a:t>
+            </a:r>
+            <a:r>
+              <a:rPr sz="1100">
+                <a:solidFill>
+                  <a:srgbClr val="4070A0"/>
+                </a:solidFill>
+                <a:latin typeface="Consolas"/>
+              </a:rPr>
+              <a:t>'</a:t>
+            </a:r>
+            <a:r>
+              <a:rPr sz="1100">
+                <a:solidFill>
+                  <a:srgbClr val="000000"/>
+                </a:solidFill>
+                <a:latin typeface="Consolas"/>
+              </a:rPr>
+              <a:t>]</a:t>
+            </a:r>
+            <a:r>
+              <a:rPr sz="1100">
+                <a:solidFill>
+                  <a:srgbClr val="666666"/>
+                </a:solidFill>
+                <a:latin typeface="Consolas"/>
+              </a:rPr>
+              <a:t>.</a:t>
+            </a:r>
+            <a:r>
+              <a:rPr sz="1100">
+                <a:solidFill>
+                  <a:srgbClr val="000000"/>
+                </a:solidFill>
+                <a:latin typeface="Consolas"/>
+              </a:rPr>
+              <a:t>value_counts</a:t>
+            </a:r>
+            <a:r>
+              <a:rPr sz="1100">
+                <a:solidFill>
+                  <a:srgbClr val="000000"/>
+                </a:solidFill>
+                <a:latin typeface="Consolas"/>
+              </a:rPr>
+              <a:t>(</a:t>
+            </a:r>
+            <a:r>
+              <a:rPr sz="1100">
+                <a:solidFill>
+                  <a:srgbClr val="000000"/>
+                </a:solidFill>
+                <a:latin typeface="Consolas"/>
+              </a:rPr>
+              <a:t>)</a:t>
+            </a:r>
+            <a:r>
+              <a:rPr sz="1100">
+                <a:solidFill>
+                  <a:srgbClr val="666666"/>
+                </a:solidFill>
+                <a:latin typeface="Consolas"/>
+              </a:rPr>
+              <a:t>.</a:t>
+            </a:r>
+            <a:r>
+              <a:rPr sz="1100">
+                <a:solidFill>
+                  <a:srgbClr val="000000"/>
+                </a:solidFill>
+                <a:latin typeface="Consolas"/>
+              </a:rPr>
+              <a:t>index</a:t>
+            </a:r>
+            <a:r>
+              <a:rPr sz="1100">
+                <a:solidFill>
+                  <a:srgbClr val="000000"/>
+                </a:solidFill>
+                <a:latin typeface="Consolas"/>
+              </a:rPr>
+              <a:t>)</a:t>
+            </a:r>
+            <a:r>
+              <a:rPr sz="1100">
+                <a:solidFill>
+                  <a:srgbClr val="BBBBBB"/>
+                </a:solidFill>
+                <a:latin typeface="Consolas"/>
+              </a:rPr>
+              <a:t>
+</a:t>
+            </a:r>
+          </a:p>
+        </p:txBody>
+      </p:sp>
+      <p:sp>
+        <p:nvSpPr>
+          <p:cNvPr id="7" name="TextBox 6"/>
           <p:cNvSpPr txBox="1"/>
           <p:nvPr/>
         </p:nvSpPr>
         <p:spPr>
           <a:xfrm>
-            <a:off x="640080" y="5404104"/>
+            <a:off x="713231" y="6157975"/>
+            <a:ext cx="6025896" cy="139700"/>
+          </a:xfrm>
+          <a:prstGeom prst="rect">
+            <a:avLst/>
+          </a:prstGeom>
+          <a:noFill/>
+          <a:ln>
+            <a:noFill/>
+          </a:ln>
+        </p:spPr>
+        <p:txBody>
+          <a:bodyPr wrap="none" anchor="t" lIns="0" rIns="0" tIns="0" bIns="0">
+            <a:noAutofit/>
+          </a:bodyPr>
+          <a:lstStyle/>
+          <a:p>
+            <a:pPr>
+              <a:spcBef>
+                <a:spcPts val="0"/>
+              </a:spcBef>
+              <a:spcAft>
+                <a:spcPts val="0"/>
+              </a:spcAft>
+            </a:pPr>
+            <a:r>
+              <a:rPr sz="1100">
+                <a:solidFill>
+                  <a:srgbClr val="000000"/>
+                </a:solidFill>
+                <a:latin typeface="Consolas"/>
+              </a:rPr>
+              <a:t>plt</a:t>
+            </a:r>
+            <a:r>
+              <a:rPr sz="1100">
+                <a:solidFill>
+                  <a:srgbClr val="666666"/>
+                </a:solidFill>
+                <a:latin typeface="Consolas"/>
+              </a:rPr>
+              <a:t>.</a:t>
+            </a:r>
+            <a:r>
+              <a:rPr sz="1100">
+                <a:solidFill>
+                  <a:srgbClr val="000000"/>
+                </a:solidFill>
+                <a:latin typeface="Consolas"/>
+              </a:rPr>
+              <a:t>xticks</a:t>
+            </a:r>
+            <a:r>
+              <a:rPr sz="1100">
+                <a:solidFill>
+                  <a:srgbClr val="000000"/>
+                </a:solidFill>
+                <a:latin typeface="Consolas"/>
+              </a:rPr>
+              <a:t>(</a:t>
+            </a:r>
+            <a:r>
+              <a:rPr sz="1100">
+                <a:solidFill>
+                  <a:srgbClr val="000000"/>
+                </a:solidFill>
+                <a:latin typeface="Consolas"/>
+              </a:rPr>
+              <a:t>rotation</a:t>
+            </a:r>
+            <a:r>
+              <a:rPr sz="1100">
+                <a:solidFill>
+                  <a:srgbClr val="666666"/>
+                </a:solidFill>
+                <a:latin typeface="Consolas"/>
+              </a:rPr>
+              <a:t>=</a:t>
+            </a:r>
+            <a:r>
+              <a:rPr sz="1100">
+                <a:solidFill>
+                  <a:srgbClr val="40A070"/>
+                </a:solidFill>
+                <a:latin typeface="Consolas"/>
+              </a:rPr>
+              <a:t>30</a:t>
+            </a:r>
+            <a:r>
+              <a:rPr sz="1100">
+                <a:solidFill>
+                  <a:srgbClr val="000000"/>
+                </a:solidFill>
+                <a:latin typeface="Consolas"/>
+              </a:rPr>
+              <a:t>)</a:t>
+            </a:r>
+            <a:r>
+              <a:rPr sz="1100">
+                <a:solidFill>
+                  <a:srgbClr val="BBBBBB"/>
+                </a:solidFill>
+                <a:latin typeface="Consolas"/>
+              </a:rPr>
+              <a:t>
+</a:t>
+            </a:r>
+          </a:p>
+        </p:txBody>
+      </p:sp>
+      <p:sp>
+        <p:nvSpPr>
+          <p:cNvPr id="8" name="TextBox 7"/>
+          <p:cNvSpPr txBox="1"/>
+          <p:nvPr/>
+        </p:nvSpPr>
+        <p:spPr>
+          <a:xfrm>
+            <a:off x="640080" y="6492240"/>
             <a:ext cx="6172200" cy="201168"/>
           </a:xfrm>
           <a:prstGeom prst="rect">
@@ -5729,7 +7423,7 @@
       </p:sp>
       <p:pic>
         <p:nvPicPr>
-          <p:cNvPr id="7" name="Picture 6" descr="categorical_plots.png"/>
+          <p:cNvPr id="9" name="Picture 8" descr="categorical_plots.png"/>
           <p:cNvPicPr>
             <a:picLocks noChangeAspect="1"/>
           </p:cNvPicPr>
@@ -5743,8 +7437,8 @@
         </p:blipFill>
         <p:spPr>
           <a:xfrm>
-            <a:off x="7419948" y="1325880"/>
-            <a:ext cx="4164078" cy="4407408"/>
+            <a:off x="7269480" y="1371600"/>
+            <a:ext cx="4465015" cy="4059105"/>
           </a:xfrm>
           <a:prstGeom prst="rect">
             <a:avLst/>
@@ -5811,7 +7505,7 @@
         <p:spPr>
           <a:xfrm>
             <a:off x="640080" y="1371600"/>
-            <a:ext cx="6263640" cy="2697480"/>
+            <a:ext cx="6263640" cy="2514600"/>
           </a:xfrm>
           <a:prstGeom prst="rect">
             <a:avLst/>
@@ -5933,8 +7627,8 @@
         </p:blipFill>
         <p:spPr>
           <a:xfrm>
-            <a:off x="7421174" y="1325880"/>
-            <a:ext cx="4161626" cy="4407408"/>
+            <a:off x="7269480" y="1371600"/>
+            <a:ext cx="4465015" cy="4059105"/>
           </a:xfrm>
           <a:prstGeom prst="rect">
             <a:avLst/>
@@ -6001,7 +7695,7 @@
         <p:spPr>
           <a:xfrm>
             <a:off x="640080" y="1371600"/>
-            <a:ext cx="6263640" cy="2148839"/>
+            <a:ext cx="6263640" cy="1965960"/>
           </a:xfrm>
           <a:prstGeom prst="rect">
             <a:avLst/>
@@ -6025,7 +7719,26 @@
                   <a:srgbClr val="000000"/>
                 </a:solidFill>
               </a:rPr>
-              <a:t>• Белый фон, тёмный текст `#1a1a1a` — как на слайдах курса</a:t>
+              <a:t xml:space="preserve">• Белый фон, тёмный текст </a:t>
+            </a:r>
+            <a:r>
+              <a:rPr lang="ru-RU" dirty="0" sz="2000">
+                <a:latin typeface="Consolas"/>
+                <a:cs typeface="Consolas"/>
+                <a:ea typeface="Consolas"/>
+                <a:solidFill>
+                  <a:srgbClr val="000000"/>
+                </a:solidFill>
+              </a:rPr>
+              <a:t>#1a1a1a</a:t>
+            </a:r>
+            <a:r>
+              <a:rPr lang="ru-RU" dirty="0" sz="2000">
+                <a:solidFill>
+                  <a:srgbClr val="000000"/>
+                </a:solidFill>
+              </a:rPr>
+              <a:t xml:space="preserve"> — как на слайдах курса</a:t>
             </a:r>
           </a:p>
           <a:p>
@@ -6040,7 +7753,26 @@
                   <a:srgbClr val="000000"/>
                 </a:solidFill>
               </a:rPr>
-              <a:t>• Размер шрифта осей 12–14 pt в ноутбуке; `figsize` достаточный</a:t>
+              <a:t xml:space="preserve">• Размер шрифта осей 12–14 pt в ноутбуке; </a:t>
+            </a:r>
+            <a:r>
+              <a:rPr lang="ru-RU" dirty="0" sz="2000">
+                <a:latin typeface="Consolas"/>
+                <a:cs typeface="Consolas"/>
+                <a:ea typeface="Consolas"/>
+                <a:solidFill>
+                  <a:srgbClr val="000000"/>
+                </a:solidFill>
+              </a:rPr>
+              <a:t>figsize</a:t>
+            </a:r>
+            <a:r>
+              <a:rPr lang="ru-RU" dirty="0" sz="2000">
+                <a:solidFill>
+                  <a:srgbClr val="000000"/>
+                </a:solidFill>
+              </a:rPr>
+              <a:t xml:space="preserve"> достаточный</a:t>
             </a:r>
           </a:p>
           <a:p>
@@ -6091,8 +7823,8 @@
         </p:blipFill>
         <p:spPr>
           <a:xfrm>
-            <a:off x="7358687" y="1325880"/>
-            <a:ext cx="4286600" cy="4407408"/>
+            <a:off x="7269480" y="1371600"/>
+            <a:ext cx="4465015" cy="4059105"/>
           </a:xfrm>
           <a:prstGeom prst="rect">
             <a:avLst/>
@@ -6159,7 +7891,7 @@
         <p:spPr>
           <a:xfrm>
             <a:off x="640080" y="1371600"/>
-            <a:ext cx="6263640" cy="2697480"/>
+            <a:ext cx="6263640" cy="2514600"/>
           </a:xfrm>
           <a:prstGeom prst="rect">
             <a:avLst/>
@@ -6280,8 +8012,8 @@
         </p:nvSpPr>
         <p:spPr>
           <a:xfrm>
-            <a:off x="640080" y="4690872"/>
-            <a:ext cx="6172200" cy="630936"/>
+            <a:off x="640080" y="5832856"/>
+            <a:ext cx="6172200" cy="604520"/>
           </a:xfrm>
           <a:prstGeom prst="rect">
             <a:avLst/>
@@ -6325,21 +8057,27 @@
         </p:nvSpPr>
         <p:spPr>
           <a:xfrm>
-            <a:off x="713231" y="4727448"/>
-            <a:ext cx="6025896" cy="557784"/>
+            <a:off x="713231" y="5878576"/>
+            <a:ext cx="6025896" cy="139700"/>
           </a:xfrm>
           <a:prstGeom prst="rect">
             <a:avLst/>
           </a:prstGeom>
           <a:noFill/>
+          <a:ln>
+            <a:noFill/>
+          </a:ln>
         </p:spPr>
         <p:txBody>
-          <a:bodyPr wrap="none">
+          <a:bodyPr wrap="none" anchor="t" lIns="0" rIns="0" tIns="0" bIns="0">
             <a:noAutofit/>
           </a:bodyPr>
           <a:lstStyle/>
           <a:p>
             <a:pPr>
+              <a:spcBef>
+                <a:spcPts val="0"/>
+              </a:spcBef>
               <a:spcAft>
                 <a:spcPts val="0"/>
               </a:spcAft>
@@ -6351,11 +8089,122 @@
                 </a:solidFill>
                 <a:latin typeface="Consolas"/>
               </a:rPr>
-              <a:t>residuals = y_test - y_pred</a:t>
-            </a:r>
-          </a:p>
+              <a:t>residuals</a:t>
+            </a:r>
+            <a:r>
+              <a:rPr sz="1100">
+                <a:solidFill>
+                  <a:srgbClr val="000000"/>
+                </a:solidFill>
+                <a:latin typeface="Consolas"/>
+              </a:rPr>
+              <a:t> </a:t>
+            </a:r>
+            <a:r>
+              <a:rPr sz="1100">
+                <a:solidFill>
+                  <a:srgbClr val="666666"/>
+                </a:solidFill>
+                <a:latin typeface="Consolas"/>
+              </a:rPr>
+              <a:t>=</a:t>
+            </a:r>
+            <a:r>
+              <a:rPr sz="1100">
+                <a:solidFill>
+                  <a:srgbClr val="000000"/>
+                </a:solidFill>
+                <a:latin typeface="Consolas"/>
+              </a:rPr>
+              <a:t> </a:t>
+            </a:r>
+            <a:r>
+              <a:rPr sz="1100">
+                <a:solidFill>
+                  <a:srgbClr val="000000"/>
+                </a:solidFill>
+                <a:latin typeface="Consolas"/>
+              </a:rPr>
+              <a:t>y_test</a:t>
+            </a:r>
+            <a:r>
+              <a:rPr sz="1100">
+                <a:solidFill>
+                  <a:srgbClr val="000000"/>
+                </a:solidFill>
+                <a:latin typeface="Consolas"/>
+              </a:rPr>
+              <a:t> </a:t>
+            </a:r>
+            <a:r>
+              <a:rPr sz="1100">
+                <a:solidFill>
+                  <a:srgbClr val="666666"/>
+                </a:solidFill>
+                <a:latin typeface="Consolas"/>
+              </a:rPr>
+              <a:t>-</a:t>
+            </a:r>
+            <a:r>
+              <a:rPr sz="1100">
+                <a:solidFill>
+                  <a:srgbClr val="000000"/>
+                </a:solidFill>
+                <a:latin typeface="Consolas"/>
+              </a:rPr>
+              <a:t> </a:t>
+            </a:r>
+            <a:r>
+              <a:rPr sz="1100">
+                <a:solidFill>
+                  <a:srgbClr val="000000"/>
+                </a:solidFill>
+                <a:latin typeface="Consolas"/>
+              </a:rPr>
+              <a:t>y_pred</a:t>
+            </a:r>
+            <a:r>
+              <a:rPr sz="1100">
+                <a:solidFill>
+                  <a:srgbClr val="BBBBBB"/>
+                </a:solidFill>
+                <a:latin typeface="Consolas"/>
+              </a:rPr>
+              <a:t>
+</a:t>
+            </a:r>
+          </a:p>
+        </p:txBody>
+      </p:sp>
+      <p:sp>
+        <p:nvSpPr>
+          <p:cNvPr id="6" name="TextBox 5"/>
+          <p:cNvSpPr txBox="1"/>
+          <p:nvPr/>
+        </p:nvSpPr>
+        <p:spPr>
+          <a:xfrm>
+            <a:off x="713231" y="6018275"/>
+            <a:ext cx="6025896" cy="139700"/>
+          </a:xfrm>
+          <a:prstGeom prst="rect">
+            <a:avLst/>
+          </a:prstGeom>
+          <a:noFill/>
+          <a:ln>
+            <a:noFill/>
+          </a:ln>
+        </p:spPr>
+        <p:txBody>
+          <a:bodyPr wrap="none" anchor="t" lIns="0" rIns="0" tIns="0" bIns="0">
+            <a:noAutofit/>
+          </a:bodyPr>
+          <a:lstStyle/>
           <a:p>
             <a:pPr>
+              <a:spcBef>
+                <a:spcPts val="0"/>
+              </a:spcBef>
               <a:spcAft>
                 <a:spcPts val="0"/>
               </a:spcAft>
@@ -6367,11 +8216,167 @@
                 </a:solidFill>
                 <a:latin typeface="Consolas"/>
               </a:rPr>
-              <a:t>ax.scatter(y_pred, residuals, alpha=0.6)</a:t>
-            </a:r>
-          </a:p>
+              <a:t>ax</a:t>
+            </a:r>
+            <a:r>
+              <a:rPr sz="1100">
+                <a:solidFill>
+                  <a:srgbClr val="666666"/>
+                </a:solidFill>
+                <a:latin typeface="Consolas"/>
+              </a:rPr>
+              <a:t>.</a:t>
+            </a:r>
+            <a:r>
+              <a:rPr sz="1100">
+                <a:solidFill>
+                  <a:srgbClr val="000000"/>
+                </a:solidFill>
+                <a:latin typeface="Consolas"/>
+              </a:rPr>
+              <a:t>scatter</a:t>
+            </a:r>
+            <a:r>
+              <a:rPr sz="1100">
+                <a:solidFill>
+                  <a:srgbClr val="000000"/>
+                </a:solidFill>
+                <a:latin typeface="Consolas"/>
+              </a:rPr>
+              <a:t>(</a:t>
+            </a:r>
+            <a:r>
+              <a:rPr sz="1100">
+                <a:solidFill>
+                  <a:srgbClr val="000000"/>
+                </a:solidFill>
+                <a:latin typeface="Consolas"/>
+              </a:rPr>
+              <a:t>y_pred</a:t>
+            </a:r>
+            <a:r>
+              <a:rPr sz="1100">
+                <a:solidFill>
+                  <a:srgbClr val="000000"/>
+                </a:solidFill>
+                <a:latin typeface="Consolas"/>
+              </a:rPr>
+              <a:t>,</a:t>
+            </a:r>
+            <a:r>
+              <a:rPr sz="1100">
+                <a:solidFill>
+                  <a:srgbClr val="000000"/>
+                </a:solidFill>
+                <a:latin typeface="Consolas"/>
+              </a:rPr>
+              <a:t> </a:t>
+            </a:r>
+            <a:r>
+              <a:rPr sz="1100">
+                <a:solidFill>
+                  <a:srgbClr val="000000"/>
+                </a:solidFill>
+                <a:latin typeface="Consolas"/>
+              </a:rPr>
+              <a:t>residuals</a:t>
+            </a:r>
+            <a:r>
+              <a:rPr sz="1100">
+                <a:solidFill>
+                  <a:srgbClr val="000000"/>
+                </a:solidFill>
+                <a:latin typeface="Consolas"/>
+              </a:rPr>
+              <a:t>,</a:t>
+            </a:r>
+            <a:r>
+              <a:rPr sz="1100">
+                <a:solidFill>
+                  <a:srgbClr val="000000"/>
+                </a:solidFill>
+                <a:latin typeface="Consolas"/>
+              </a:rPr>
+              <a:t> </a:t>
+            </a:r>
+            <a:r>
+              <a:rPr sz="1100">
+                <a:solidFill>
+                  <a:srgbClr val="000000"/>
+                </a:solidFill>
+                <a:latin typeface="Consolas"/>
+              </a:rPr>
+              <a:t>alpha</a:t>
+            </a:r>
+            <a:r>
+              <a:rPr sz="1100">
+                <a:solidFill>
+                  <a:srgbClr val="666666"/>
+                </a:solidFill>
+                <a:latin typeface="Consolas"/>
+              </a:rPr>
+              <a:t>=</a:t>
+            </a:r>
+            <a:r>
+              <a:rPr sz="1100">
+                <a:solidFill>
+                  <a:srgbClr val="40A070"/>
+                </a:solidFill>
+                <a:latin typeface="Consolas"/>
+              </a:rPr>
+              <a:t>0.6</a:t>
+            </a:r>
+            <a:r>
+              <a:rPr sz="1100">
+                <a:solidFill>
+                  <a:srgbClr val="000000"/>
+                </a:solidFill>
+                <a:latin typeface="Consolas"/>
+              </a:rPr>
+              <a:t>)</a:t>
+            </a:r>
+            <a:r>
+              <a:rPr sz="1100">
+                <a:solidFill>
+                  <a:srgbClr val="BBBBBB"/>
+                </a:solidFill>
+                <a:latin typeface="Consolas"/>
+              </a:rPr>
+              <a:t>
+</a:t>
+            </a:r>
+          </a:p>
+        </p:txBody>
+      </p:sp>
+      <p:sp>
+        <p:nvSpPr>
+          <p:cNvPr id="7" name="TextBox 6"/>
+          <p:cNvSpPr txBox="1"/>
+          <p:nvPr/>
+        </p:nvSpPr>
+        <p:spPr>
+          <a:xfrm>
+            <a:off x="713231" y="6157975"/>
+            <a:ext cx="6025896" cy="139700"/>
+          </a:xfrm>
+          <a:prstGeom prst="rect">
+            <a:avLst/>
+          </a:prstGeom>
+          <a:noFill/>
+          <a:ln>
+            <a:noFill/>
+          </a:ln>
+        </p:spPr>
+        <p:txBody>
+          <a:bodyPr wrap="none" anchor="t" lIns="0" rIns="0" tIns="0" bIns="0">
+            <a:noAutofit/>
+          </a:bodyPr>
+          <a:lstStyle/>
           <a:p>
             <a:pPr>
+              <a:spcBef>
+                <a:spcPts val="0"/>
+              </a:spcBef>
               <a:spcAft>
                 <a:spcPts val="0"/>
               </a:spcAft>
@@ -6383,20 +8388,201 @@
                 </a:solidFill>
                 <a:latin typeface="Consolas"/>
               </a:rPr>
-              <a:t>ax.axhline(0, color='red', linestyle='--')</a:t>
-            </a:r>
-          </a:p>
-        </p:txBody>
-      </p:sp>
-      <p:sp>
-        <p:nvSpPr>
-          <p:cNvPr id="6" name="TextBox 5"/>
+              <a:t>ax</a:t>
+            </a:r>
+            <a:r>
+              <a:rPr sz="1100">
+                <a:solidFill>
+                  <a:srgbClr val="666666"/>
+                </a:solidFill>
+                <a:latin typeface="Consolas"/>
+              </a:rPr>
+              <a:t>.</a:t>
+            </a:r>
+            <a:r>
+              <a:rPr sz="1100">
+                <a:solidFill>
+                  <a:srgbClr val="000000"/>
+                </a:solidFill>
+                <a:latin typeface="Consolas"/>
+              </a:rPr>
+              <a:t>axhline</a:t>
+            </a:r>
+            <a:r>
+              <a:rPr sz="1100">
+                <a:solidFill>
+                  <a:srgbClr val="000000"/>
+                </a:solidFill>
+                <a:latin typeface="Consolas"/>
+              </a:rPr>
+              <a:t>(</a:t>
+            </a:r>
+            <a:r>
+              <a:rPr sz="1100">
+                <a:solidFill>
+                  <a:srgbClr val="40A070"/>
+                </a:solidFill>
+                <a:latin typeface="Consolas"/>
+              </a:rPr>
+              <a:t>0</a:t>
+            </a:r>
+            <a:r>
+              <a:rPr sz="1100">
+                <a:solidFill>
+                  <a:srgbClr val="000000"/>
+                </a:solidFill>
+                <a:latin typeface="Consolas"/>
+              </a:rPr>
+              <a:t>,</a:t>
+            </a:r>
+            <a:r>
+              <a:rPr sz="1100">
+                <a:solidFill>
+                  <a:srgbClr val="000000"/>
+                </a:solidFill>
+                <a:latin typeface="Consolas"/>
+              </a:rPr>
+              <a:t> </a:t>
+            </a:r>
+            <a:r>
+              <a:rPr sz="1100">
+                <a:solidFill>
+                  <a:srgbClr val="000000"/>
+                </a:solidFill>
+                <a:latin typeface="Consolas"/>
+              </a:rPr>
+              <a:t>color</a:t>
+            </a:r>
+            <a:r>
+              <a:rPr sz="1100">
+                <a:solidFill>
+                  <a:srgbClr val="666666"/>
+                </a:solidFill>
+                <a:latin typeface="Consolas"/>
+              </a:rPr>
+              <a:t>=</a:t>
+            </a:r>
+            <a:r>
+              <a:rPr sz="1100">
+                <a:solidFill>
+                  <a:srgbClr val="4070A0"/>
+                </a:solidFill>
+                <a:latin typeface="Consolas"/>
+              </a:rPr>
+              <a:t>'</a:t>
+            </a:r>
+            <a:r>
+              <a:rPr sz="1100">
+                <a:solidFill>
+                  <a:srgbClr val="4070A0"/>
+                </a:solidFill>
+                <a:latin typeface="Consolas"/>
+              </a:rPr>
+              <a:t>red</a:t>
+            </a:r>
+            <a:r>
+              <a:rPr sz="1100">
+                <a:solidFill>
+                  <a:srgbClr val="4070A0"/>
+                </a:solidFill>
+                <a:latin typeface="Consolas"/>
+              </a:rPr>
+              <a:t>'</a:t>
+            </a:r>
+            <a:r>
+              <a:rPr sz="1100">
+                <a:solidFill>
+                  <a:srgbClr val="000000"/>
+                </a:solidFill>
+                <a:latin typeface="Consolas"/>
+              </a:rPr>
+              <a:t>,</a:t>
+            </a:r>
+            <a:r>
+              <a:rPr sz="1100">
+                <a:solidFill>
+                  <a:srgbClr val="000000"/>
+                </a:solidFill>
+                <a:latin typeface="Consolas"/>
+              </a:rPr>
+              <a:t> </a:t>
+            </a:r>
+            <a:r>
+              <a:rPr sz="1100">
+                <a:solidFill>
+                  <a:srgbClr val="000000"/>
+                </a:solidFill>
+                <a:latin typeface="Consolas"/>
+              </a:rPr>
+              <a:t>linestyle</a:t>
+            </a:r>
+            <a:r>
+              <a:rPr sz="1100">
+                <a:solidFill>
+                  <a:srgbClr val="666666"/>
+                </a:solidFill>
+                <a:latin typeface="Consolas"/>
+              </a:rPr>
+              <a:t>=</a:t>
+            </a:r>
+            <a:r>
+              <a:rPr sz="1100">
+                <a:solidFill>
+                  <a:srgbClr val="4070A0"/>
+                </a:solidFill>
+                <a:latin typeface="Consolas"/>
+              </a:rPr>
+              <a:t>'</a:t>
+            </a:r>
+            <a:r>
+              <a:rPr sz="1100">
+                <a:solidFill>
+                  <a:srgbClr val="4070A0"/>
+                </a:solidFill>
+                <a:latin typeface="Consolas"/>
+              </a:rPr>
+              <a:t>--</a:t>
+            </a:r>
+            <a:r>
+              <a:rPr sz="1100">
+                <a:solidFill>
+                  <a:srgbClr val="4070A0"/>
+                </a:solidFill>
+                <a:latin typeface="Consolas"/>
+              </a:rPr>
+              <a:t>'</a:t>
+            </a:r>
+            <a:r>
+              <a:rPr sz="1100">
+                <a:solidFill>
+                  <a:srgbClr val="000000"/>
+                </a:solidFill>
+                <a:latin typeface="Consolas"/>
+              </a:rPr>
+              <a:t>)</a:t>
+            </a:r>
+            <a:r>
+              <a:rPr sz="1100">
+                <a:solidFill>
+                  <a:srgbClr val="BBBBBB"/>
+                </a:solidFill>
+                <a:latin typeface="Consolas"/>
+              </a:rPr>
+              <a:t>
+</a:t>
+            </a:r>
+          </a:p>
+        </p:txBody>
+      </p:sp>
+      <p:sp>
+        <p:nvSpPr>
+          <p:cNvPr id="8" name="TextBox 7"/>
           <p:cNvSpPr txBox="1"/>
           <p:nvPr/>
         </p:nvSpPr>
         <p:spPr>
           <a:xfrm>
-            <a:off x="640080" y="5376672"/>
+            <a:off x="640080" y="6492240"/>
             <a:ext cx="6172200" cy="201168"/>
           </a:xfrm>
           <a:prstGeom prst="rect">
@@ -6425,7 +8611,7 @@
       </p:sp>
       <p:pic>
         <p:nvPicPr>
-          <p:cNvPr id="7" name="Picture 6" descr="residuals_good_vs_funnel.png"/>
+          <p:cNvPr id="9" name="Picture 8" descr="residuals_good_vs_funnel.png"/>
           <p:cNvPicPr>
             <a:picLocks noChangeAspect="1"/>
           </p:cNvPicPr>
@@ -6439,8 +8625,8 @@
         </p:blipFill>
         <p:spPr>
           <a:xfrm>
-            <a:off x="7462680" y="1325880"/>
-            <a:ext cx="4078613" cy="4407407"/>
+            <a:off x="7269480" y="1371600"/>
+            <a:ext cx="4465015" cy="4059105"/>
           </a:xfrm>
           <a:prstGeom prst="rect">
             <a:avLst/>
@@ -6507,7 +8693,7 @@
         <p:spPr>
           <a:xfrm>
             <a:off x="640080" y="1371600"/>
-            <a:ext cx="6263640" cy="2423160"/>
+            <a:ext cx="6263640" cy="2240280"/>
           </a:xfrm>
           <a:prstGeom prst="rect">
             <a:avLst/>
@@ -6577,7 +8763,37 @@
                   <a:srgbClr val="000000"/>
                 </a:solidFill>
               </a:rPr>
-              <a:t>• sklearn: `RocCurveDisplay.from_predictions`, `PrecisionRecallDisplay`</a:t>
+              <a:t xml:space="preserve">• sklearn: </a:t>
+            </a:r>
+            <a:r>
+              <a:rPr lang="ru-RU" dirty="0" sz="2000">
+                <a:latin typeface="Consolas"/>
+                <a:cs typeface="Consolas"/>
+                <a:ea typeface="Consolas"/>
+                <a:solidFill>
+                  <a:srgbClr val="000000"/>
+                </a:solidFill>
+              </a:rPr>
+              <a:t>RocCurveDisplay.from_predictions</a:t>
+            </a:r>
+            <a:r>
+              <a:rPr lang="ru-RU" dirty="0" sz="2000">
+                <a:solidFill>
+                  <a:srgbClr val="000000"/>
+                </a:solidFill>
+              </a:rPr>
+              <a:t xml:space="preserve">, </a:t>
+            </a:r>
+            <a:r>
+              <a:rPr lang="ru-RU" dirty="0" sz="2000">
+                <a:latin typeface="Consolas"/>
+                <a:cs typeface="Consolas"/>
+                <a:ea typeface="Consolas"/>
+                <a:solidFill>
+                  <a:srgbClr val="000000"/>
+                </a:solidFill>
+              </a:rPr>
+              <a:t>PrecisionRecallDisplay</a:t>
             </a:r>
           </a:p>
           <a:p>
@@ -6605,8 +8821,8 @@
         </p:nvSpPr>
         <p:spPr>
           <a:xfrm>
-            <a:off x="640080" y="4892040"/>
-            <a:ext cx="6172200" cy="457200"/>
+            <a:off x="640080" y="5972556"/>
+            <a:ext cx="6172200" cy="464820"/>
           </a:xfrm>
           <a:prstGeom prst="rect">
             <a:avLst/>
@@ -6650,21 +8866,27 @@
         </p:nvSpPr>
         <p:spPr>
           <a:xfrm>
-            <a:off x="713231" y="4928616"/>
-            <a:ext cx="6025896" cy="384048"/>
+            <a:off x="713231" y="6018275"/>
+            <a:ext cx="6025896" cy="139700"/>
           </a:xfrm>
           <a:prstGeom prst="rect">
             <a:avLst/>
           </a:prstGeom>
           <a:noFill/>
+          <a:ln>
+            <a:noFill/>
+          </a:ln>
         </p:spPr>
         <p:txBody>
-          <a:bodyPr wrap="none">
+          <a:bodyPr wrap="none" anchor="t" lIns="0" rIns="0" tIns="0" bIns="0">
             <a:noAutofit/>
           </a:bodyPr>
           <a:lstStyle/>
           <a:p>
             <a:pPr>
+              <a:spcBef>
+                <a:spcPts val="0"/>
+              </a:spcBef>
               <a:spcAft>
                 <a:spcPts val="0"/>
               </a:spcAft>
@@ -6676,11 +8898,122 @@
                 </a:solidFill>
                 <a:latin typeface="Consolas"/>
               </a:rPr>
-              <a:t>RocCurveDisplay.from_predictions(y_test, y_score)</a:t>
-            </a:r>
-          </a:p>
+              <a:t>RocCurveDisplay</a:t>
+            </a:r>
+            <a:r>
+              <a:rPr sz="1100">
+                <a:solidFill>
+                  <a:srgbClr val="666666"/>
+                </a:solidFill>
+                <a:latin typeface="Consolas"/>
+              </a:rPr>
+              <a:t>.</a:t>
+            </a:r>
+            <a:r>
+              <a:rPr sz="1100">
+                <a:solidFill>
+                  <a:srgbClr val="000000"/>
+                </a:solidFill>
+                <a:latin typeface="Consolas"/>
+              </a:rPr>
+              <a:t>from_predictions</a:t>
+            </a:r>
+            <a:r>
+              <a:rPr sz="1100">
+                <a:solidFill>
+                  <a:srgbClr val="000000"/>
+                </a:solidFill>
+                <a:latin typeface="Consolas"/>
+              </a:rPr>
+              <a:t>(</a:t>
+            </a:r>
+            <a:r>
+              <a:rPr sz="1100">
+                <a:solidFill>
+                  <a:srgbClr val="000000"/>
+                </a:solidFill>
+                <a:latin typeface="Consolas"/>
+              </a:rPr>
+              <a:t>y_test</a:t>
+            </a:r>
+            <a:r>
+              <a:rPr sz="1100">
+                <a:solidFill>
+                  <a:srgbClr val="000000"/>
+                </a:solidFill>
+                <a:latin typeface="Consolas"/>
+              </a:rPr>
+              <a:t>,</a:t>
+            </a:r>
+            <a:r>
+              <a:rPr sz="1100">
+                <a:solidFill>
+                  <a:srgbClr val="000000"/>
+                </a:solidFill>
+                <a:latin typeface="Consolas"/>
+              </a:rPr>
+              <a:t> </a:t>
+            </a:r>
+            <a:r>
+              <a:rPr sz="1100">
+                <a:solidFill>
+                  <a:srgbClr val="000000"/>
+                </a:solidFill>
+                <a:latin typeface="Consolas"/>
+              </a:rPr>
+              <a:t>y_score</a:t>
+            </a:r>
+            <a:r>
+              <a:rPr sz="1100">
+                <a:solidFill>
+                  <a:srgbClr val="000000"/>
+                </a:solidFill>
+                <a:latin typeface="Consolas"/>
+              </a:rPr>
+              <a:t>)</a:t>
+            </a:r>
+            <a:r>
+              <a:rPr sz="1100">
+                <a:solidFill>
+                  <a:srgbClr val="BBBBBB"/>
+                </a:solidFill>
+                <a:latin typeface="Consolas"/>
+              </a:rPr>
+              <a:t>
+</a:t>
+            </a:r>
+          </a:p>
+        </p:txBody>
+      </p:sp>
+      <p:sp>
+        <p:nvSpPr>
+          <p:cNvPr id="6" name="TextBox 5"/>
+          <p:cNvSpPr txBox="1"/>
+          <p:nvPr/>
+        </p:nvSpPr>
+        <p:spPr>
+          <a:xfrm>
+            <a:off x="713231" y="6157975"/>
+            <a:ext cx="6025896" cy="139700"/>
+          </a:xfrm>
+          <a:prstGeom prst="rect">
+            <a:avLst/>
+          </a:prstGeom>
+          <a:noFill/>
+          <a:ln>
+            <a:noFill/>
+          </a:ln>
+        </p:spPr>
+        <p:txBody>
+          <a:bodyPr wrap="none" anchor="t" lIns="0" rIns="0" tIns="0" bIns="0">
+            <a:noAutofit/>
+          </a:bodyPr>
+          <a:lstStyle/>
           <a:p>
             <a:pPr>
+              <a:spcBef>
+                <a:spcPts val="0"/>
+              </a:spcBef>
               <a:spcAft>
                 <a:spcPts val="0"/>
               </a:spcAft>
@@ -6692,20 +9025,93 @@
                 </a:solidFill>
                 <a:latin typeface="Consolas"/>
               </a:rPr>
-              <a:t>plt.title('ROC')</a:t>
-            </a:r>
-          </a:p>
-        </p:txBody>
-      </p:sp>
-      <p:sp>
-        <p:nvSpPr>
-          <p:cNvPr id="6" name="TextBox 5"/>
+              <a:t>plt</a:t>
+            </a:r>
+            <a:r>
+              <a:rPr sz="1100">
+                <a:solidFill>
+                  <a:srgbClr val="666666"/>
+                </a:solidFill>
+                <a:latin typeface="Consolas"/>
+              </a:rPr>
+              <a:t>.</a:t>
+            </a:r>
+            <a:r>
+              <a:rPr sz="1100">
+                <a:solidFill>
+                  <a:srgbClr val="000000"/>
+                </a:solidFill>
+                <a:latin typeface="Consolas"/>
+              </a:rPr>
+              <a:t>title</a:t>
+            </a:r>
+            <a:r>
+              <a:rPr sz="1100">
+                <a:solidFill>
+                  <a:srgbClr val="000000"/>
+                </a:solidFill>
+                <a:latin typeface="Consolas"/>
+              </a:rPr>
+              <a:t>(</a:t>
+            </a:r>
+            <a:r>
+              <a:rPr sz="1100">
+                <a:solidFill>
+                  <a:srgbClr val="4070A0"/>
+                </a:solidFill>
+                <a:latin typeface="Consolas"/>
+              </a:rPr>
+              <a:t>'</a:t>
+            </a:r>
+            <a:r>
+              <a:rPr sz="1100">
+                <a:solidFill>
+                  <a:srgbClr val="4070A0"/>
+                </a:solidFill>
+                <a:latin typeface="Consolas"/>
+              </a:rPr>
+              <a:t>ROC</a:t>
+            </a:r>
+            <a:r>
+              <a:rPr sz="1100">
+                <a:solidFill>
+                  <a:srgbClr val="4070A0"/>
+                </a:solidFill>
+                <a:latin typeface="Consolas"/>
+              </a:rPr>
+              <a:t>'</a:t>
+            </a:r>
+            <a:r>
+              <a:rPr sz="1100">
+                <a:solidFill>
+                  <a:srgbClr val="000000"/>
+                </a:solidFill>
+                <a:latin typeface="Consolas"/>
+              </a:rPr>
+              <a:t>)</a:t>
+            </a:r>
+            <a:r>
+              <a:rPr sz="1100">
+                <a:solidFill>
+                  <a:srgbClr val="BBBBBB"/>
+                </a:solidFill>
+                <a:latin typeface="Consolas"/>
+              </a:rPr>
+              <a:t>
+</a:t>
+            </a:r>
+          </a:p>
+        </p:txBody>
+      </p:sp>
+      <p:sp>
+        <p:nvSpPr>
+          <p:cNvPr id="7" name="TextBox 6"/>
           <p:cNvSpPr txBox="1"/>
           <p:nvPr/>
         </p:nvSpPr>
         <p:spPr>
           <a:xfrm>
-            <a:off x="640080" y="5404104"/>
+            <a:off x="640080" y="6492240"/>
             <a:ext cx="6172200" cy="201168"/>
           </a:xfrm>
           <a:prstGeom prst="rect">
@@ -6734,7 +9140,7 @@
       </p:sp>
       <p:pic>
         <p:nvPicPr>
-          <p:cNvPr id="7" name="Picture 6" descr="roc_pr_curves.png"/>
+          <p:cNvPr id="8" name="Picture 7" descr="roc_pr_curves.png"/>
           <p:cNvPicPr>
             <a:picLocks noChangeAspect="1"/>
           </p:cNvPicPr>
@@ -6748,8 +9154,8 @@
         </p:blipFill>
         <p:spPr>
           <a:xfrm>
-            <a:off x="7447421" y="1325880"/>
-            <a:ext cx="4109132" cy="4407407"/>
+            <a:off x="7269480" y="1371600"/>
+            <a:ext cx="4465015" cy="4059105"/>
           </a:xfrm>
           <a:prstGeom prst="rect">
             <a:avLst/>
@@ -6816,7 +9222,7 @@
         <p:spPr>
           <a:xfrm>
             <a:off x="640080" y="1371600"/>
-            <a:ext cx="6263640" cy="2423160"/>
+            <a:ext cx="6263640" cy="2240280"/>
           </a:xfrm>
           <a:prstGeom prst="rect">
             <a:avLst/>
@@ -6885,7 +9291,45 @@
                   <a:srgbClr val="000000"/>
                 </a:solidFill>
               </a:rPr>
-              <a:t>• Подписи перекрываются — `rotation`, `tight_layout`, уменьшение шрифта</a:t>
+              <a:t xml:space="preserve">• Подписи перекрываются — </a:t>
+            </a:r>
+            <a:r>
+              <a:rPr lang="ru-RU" dirty="0" sz="2000">
+                <a:latin typeface="Consolas"/>
+                <a:cs typeface="Consolas"/>
+                <a:ea typeface="Consolas"/>
+                <a:solidFill>
+                  <a:srgbClr val="000000"/>
+                </a:solidFill>
+              </a:rPr>
+              <a:t>rotation</a:t>
+            </a:r>
+            <a:r>
+              <a:rPr lang="ru-RU" dirty="0" sz="2000">
+                <a:solidFill>
+                  <a:srgbClr val="000000"/>
+                </a:solidFill>
+              </a:rPr>
+              <a:t xml:space="preserve">, </a:t>
+            </a:r>
+            <a:r>
+              <a:rPr lang="ru-RU" dirty="0" sz="2000">
+                <a:latin typeface="Consolas"/>
+                <a:cs typeface="Consolas"/>
+                <a:ea typeface="Consolas"/>
+                <a:solidFill>
+                  <a:srgbClr val="000000"/>
+                </a:solidFill>
+              </a:rPr>
+              <a:t>tight_layout</a:t>
+            </a:r>
+            <a:r>
+              <a:rPr lang="ru-RU" dirty="0" sz="2000">
+                <a:solidFill>
+                  <a:srgbClr val="000000"/>
+                </a:solidFill>
+              </a:rPr>
+              <a:t>, уменьшение шрифта</a:t>
             </a:r>
           </a:p>
         </p:txBody>
@@ -6906,8 +9350,8 @@
         </p:blipFill>
         <p:spPr>
           <a:xfrm>
-            <a:off x="7269480" y="1325880"/>
-            <a:ext cx="4465015" cy="4394405"/>
+            <a:off x="7269480" y="1371600"/>
+            <a:ext cx="4465015" cy="4059105"/>
           </a:xfrm>
           <a:prstGeom prst="rect">
             <a:avLst/>
@@ -6974,7 +9418,7 @@
         <p:spPr>
           <a:xfrm>
             <a:off x="640080" y="1371600"/>
-            <a:ext cx="6263640" cy="2697480"/>
+            <a:ext cx="6263640" cy="2514600"/>
           </a:xfrm>
           <a:prstGeom prst="rect">
             <a:avLst/>
@@ -7028,7 +9472,26 @@
                   <a:srgbClr val="000000"/>
                 </a:solidFill>
               </a:rPr>
-              <a:t>• Деревья: `plot_tree`, feature importance bar, confusion matrix heatmap</a:t>
+              <a:t xml:space="preserve">• Деревья: </a:t>
+            </a:r>
+            <a:r>
+              <a:rPr lang="ru-RU" dirty="0" sz="2000">
+                <a:latin typeface="Consolas"/>
+                <a:cs typeface="Consolas"/>
+                <a:ea typeface="Consolas"/>
+                <a:solidFill>
+                  <a:srgbClr val="000000"/>
+                </a:solidFill>
+              </a:rPr>
+              <a:t>plot_tree</a:t>
+            </a:r>
+            <a:r>
+              <a:rPr lang="ru-RU" dirty="0" sz="2000">
+                <a:solidFill>
+                  <a:srgbClr val="000000"/>
+                </a:solidFill>
+              </a:rPr>
+              <a:t>, feature importance bar, confusion matrix heatmap</a:t>
             </a:r>
           </a:p>
           <a:p>
@@ -7064,8 +9527,8 @@
         </p:blipFill>
         <p:spPr>
           <a:xfrm>
-            <a:off x="7269480" y="1325880"/>
-            <a:ext cx="4465015" cy="3631639"/>
+            <a:off x="7269480" y="1371600"/>
+            <a:ext cx="4465015" cy="3570647"/>
           </a:xfrm>
           <a:prstGeom prst="rect">
             <a:avLst/>
@@ -7587,7 +10050,7 @@
         <p:spPr>
           <a:xfrm>
             <a:off x="640080" y="1371600"/>
-            <a:ext cx="6263640" cy="2697480"/>
+            <a:ext cx="6263640" cy="2514600"/>
           </a:xfrm>
           <a:prstGeom prst="rect">
             <a:avLst/>
@@ -7693,8 +10156,8 @@
         </p:blipFill>
         <p:spPr>
           <a:xfrm>
-            <a:off x="7269480" y="1325880"/>
-            <a:ext cx="4465015" cy="3597593"/>
+            <a:off x="7269480" y="1371600"/>
+            <a:ext cx="4465015" cy="3572467"/>
           </a:xfrm>
           <a:prstGeom prst="rect">
             <a:avLst/>
@@ -7761,7 +10224,7 @@
         <p:spPr>
           <a:xfrm>
             <a:off x="640080" y="1371600"/>
-            <a:ext cx="6263640" cy="2697480"/>
+            <a:ext cx="6263640" cy="2514600"/>
           </a:xfrm>
           <a:prstGeom prst="rect">
             <a:avLst/>
@@ -7785,7 +10248,26 @@
                   <a:srgbClr val="000000"/>
                 </a:solidFill>
               </a:rPr>
-              <a:t xml:space="preserve">• `fig, ax = plt.subplots()` — </a:t>
+              <a:t xml:space="preserve">• </a:t>
+            </a:r>
+            <a:r>
+              <a:rPr lang="ru-RU" dirty="0" sz="2000">
+                <a:latin typeface="Consolas"/>
+                <a:cs typeface="Consolas"/>
+                <a:ea typeface="Consolas"/>
+                <a:solidFill>
+                  <a:srgbClr val="000000"/>
+                </a:solidFill>
+              </a:rPr>
+              <a:t>fig, ax = plt.subplots()</a:t>
+            </a:r>
+            <a:r>
+              <a:rPr lang="ru-RU" dirty="0" sz="2000">
+                <a:solidFill>
+                  <a:srgbClr val="000000"/>
+                </a:solidFill>
+              </a:rPr>
+              <a:t xml:space="preserve"> — </a:t>
             </a:r>
             <a:r>
               <a:rPr lang="ru-RU" dirty="0" sz="2000" b="1">
@@ -7832,7 +10314,64 @@
                   <a:srgbClr val="000000"/>
                 </a:solidFill>
               </a:rPr>
-              <a:t>• Рисуем на `ax`: `ax.plot(...)`, `ax.set_xlabel(...)` — не смешивать pyplot без нужды</a:t>
+              <a:t xml:space="preserve">• Рисуем на </a:t>
+            </a:r>
+            <a:r>
+              <a:rPr lang="ru-RU" dirty="0" sz="2000">
+                <a:latin typeface="Consolas"/>
+                <a:cs typeface="Consolas"/>
+                <a:ea typeface="Consolas"/>
+                <a:solidFill>
+                  <a:srgbClr val="000000"/>
+                </a:solidFill>
+              </a:rPr>
+              <a:t>ax</a:t>
+            </a:r>
+            <a:r>
+              <a:rPr lang="ru-RU" dirty="0" sz="2000">
+                <a:solidFill>
+                  <a:srgbClr val="000000"/>
+                </a:solidFill>
+              </a:rPr>
+              <a:t xml:space="preserve">: </a:t>
+            </a:r>
+            <a:r>
+              <a:rPr lang="ru-RU" dirty="0" sz="2000">
+                <a:latin typeface="Consolas"/>
+                <a:cs typeface="Consolas"/>
+                <a:ea typeface="Consolas"/>
+                <a:solidFill>
+                  <a:srgbClr val="000000"/>
+                </a:solidFill>
+              </a:rPr>
+              <a:t>ax.plot(...)</a:t>
+            </a:r>
+            <a:r>
+              <a:rPr lang="ru-RU" dirty="0" sz="2000">
+                <a:solidFill>
+                  <a:srgbClr val="000000"/>
+                </a:solidFill>
+              </a:rPr>
+              <a:t xml:space="preserve">, </a:t>
+            </a:r>
+            <a:r>
+              <a:rPr lang="ru-RU" dirty="0" sz="2000">
+                <a:latin typeface="Consolas"/>
+                <a:cs typeface="Consolas"/>
+                <a:ea typeface="Consolas"/>
+                <a:solidFill>
+                  <a:srgbClr val="000000"/>
+                </a:solidFill>
+              </a:rPr>
+              <a:t>ax.set_xlabel(...)</a:t>
+            </a:r>
+            <a:r>
+              <a:rPr lang="ru-RU" dirty="0" sz="2000">
+                <a:solidFill>
+                  <a:srgbClr val="000000"/>
+                </a:solidFill>
+              </a:rPr>
+              <a:t xml:space="preserve"> — не смешивать pyplot без нужды</a:t>
             </a:r>
           </a:p>
           <a:p>
@@ -7847,7 +10386,45 @@
                   <a:srgbClr val="000000"/>
                 </a:solidFill>
               </a:rPr>
-              <a:t>• `plt.tight_layout()` — подгонка отступов перед `plt.show()` или savefig</a:t>
+              <a:t xml:space="preserve">• </a:t>
+            </a:r>
+            <a:r>
+              <a:rPr lang="ru-RU" dirty="0" sz="2000">
+                <a:latin typeface="Consolas"/>
+                <a:cs typeface="Consolas"/>
+                <a:ea typeface="Consolas"/>
+                <a:solidFill>
+                  <a:srgbClr val="000000"/>
+                </a:solidFill>
+              </a:rPr>
+              <a:t>plt.tight_layout()</a:t>
+            </a:r>
+            <a:r>
+              <a:rPr lang="ru-RU" dirty="0" sz="2000">
+                <a:solidFill>
+                  <a:srgbClr val="000000"/>
+                </a:solidFill>
+              </a:rPr>
+              <a:t xml:space="preserve"> — подгонка отступов перед </a:t>
+            </a:r>
+            <a:r>
+              <a:rPr lang="ru-RU" dirty="0" sz="2000">
+                <a:latin typeface="Consolas"/>
+                <a:cs typeface="Consolas"/>
+                <a:ea typeface="Consolas"/>
+                <a:solidFill>
+                  <a:srgbClr val="000000"/>
+                </a:solidFill>
+              </a:rPr>
+              <a:t>plt.show()</a:t>
+            </a:r>
+            <a:r>
+              <a:rPr lang="ru-RU" dirty="0" sz="2000">
+                <a:solidFill>
+                  <a:srgbClr val="000000"/>
+                </a:solidFill>
+              </a:rPr>
+              <a:t xml:space="preserve"> или savefig</a:t>
             </a:r>
           </a:p>
           <a:p>
@@ -7862,7 +10439,26 @@
                   <a:srgbClr val="000000"/>
                 </a:solidFill>
               </a:rPr>
-              <a:t>• `%matplotlib inline` в Jupyter — график под ячейкой</a:t>
+              <a:t xml:space="preserve">• </a:t>
+            </a:r>
+            <a:r>
+              <a:rPr lang="ru-RU" dirty="0" sz="2000">
+                <a:latin typeface="Consolas"/>
+                <a:cs typeface="Consolas"/>
+                <a:ea typeface="Consolas"/>
+                <a:solidFill>
+                  <a:srgbClr val="000000"/>
+                </a:solidFill>
+              </a:rPr>
+              <a:t>%matplotlib inline</a:t>
+            </a:r>
+            <a:r>
+              <a:rPr lang="ru-RU" dirty="0" sz="2000">
+                <a:solidFill>
+                  <a:srgbClr val="000000"/>
+                </a:solidFill>
+              </a:rPr>
+              <a:t xml:space="preserve"> в Jupyter — график под ячейкой</a:t>
             </a:r>
           </a:p>
         </p:txBody>
@@ -7875,8 +10471,8 @@
         </p:nvSpPr>
         <p:spPr>
           <a:xfrm>
-            <a:off x="640080" y="4489703"/>
-            <a:ext cx="6172200" cy="804672"/>
+            <a:off x="640080" y="5693156"/>
+            <a:ext cx="6172200" cy="744220"/>
           </a:xfrm>
           <a:prstGeom prst="rect">
             <a:avLst/>
@@ -7920,37 +10516,154 @@
         </p:nvSpPr>
         <p:spPr>
           <a:xfrm>
-            <a:off x="713231" y="4526279"/>
-            <a:ext cx="6025896" cy="731520"/>
+            <a:off x="713231" y="5738876"/>
+            <a:ext cx="6025896" cy="139700"/>
           </a:xfrm>
           <a:prstGeom prst="rect">
             <a:avLst/>
           </a:prstGeom>
           <a:noFill/>
+          <a:ln>
+            <a:noFill/>
+          </a:ln>
         </p:spPr>
         <p:txBody>
-          <a:bodyPr wrap="none">
+          <a:bodyPr wrap="none" anchor="t" lIns="0" rIns="0" tIns="0" bIns="0">
             <a:noAutofit/>
           </a:bodyPr>
           <a:lstStyle/>
           <a:p>
             <a:pPr>
+              <a:spcBef>
+                <a:spcPts val="0"/>
+              </a:spcBef>
               <a:spcAft>
                 <a:spcPts val="0"/>
               </a:spcAft>
             </a:pPr>
             <a:r>
-              <a:rPr sz="1100">
-                <a:solidFill>
-                  <a:srgbClr val="000000"/>
-                </a:solidFill>
-                <a:latin typeface="Consolas"/>
-              </a:rPr>
-              <a:t>import matplotlib.pyplot as plt</a:t>
-            </a:r>
-          </a:p>
+              <a:rPr sz="1100" b="1">
+                <a:solidFill>
+                  <a:srgbClr val="007020"/>
+                </a:solidFill>
+                <a:latin typeface="Consolas"/>
+              </a:rPr>
+              <a:t>import</a:t>
+            </a:r>
+            <a:r>
+              <a:rPr sz="1100">
+                <a:solidFill>
+                  <a:srgbClr val="BBBBBB"/>
+                </a:solidFill>
+                <a:latin typeface="Consolas"/>
+              </a:rPr>
+              <a:t> </a:t>
+            </a:r>
+            <a:r>
+              <a:rPr sz="1100" b="1">
+                <a:solidFill>
+                  <a:srgbClr val="0E84B5"/>
+                </a:solidFill>
+                <a:latin typeface="Consolas"/>
+              </a:rPr>
+              <a:t>matplotlib</a:t>
+            </a:r>
+            <a:r>
+              <a:rPr sz="1100" b="1">
+                <a:solidFill>
+                  <a:srgbClr val="0E84B5"/>
+                </a:solidFill>
+                <a:latin typeface="Consolas"/>
+              </a:rPr>
+              <a:t>.</a:t>
+            </a:r>
+            <a:r>
+              <a:rPr sz="1100" b="1">
+                <a:solidFill>
+                  <a:srgbClr val="0E84B5"/>
+                </a:solidFill>
+                <a:latin typeface="Consolas"/>
+              </a:rPr>
+              <a:t>pyplot</a:t>
+            </a:r>
+            <a:r>
+              <a:rPr sz="1100">
+                <a:solidFill>
+                  <a:srgbClr val="BBBBBB"/>
+                </a:solidFill>
+                <a:latin typeface="Consolas"/>
+              </a:rPr>
+              <a:t> </a:t>
+            </a:r>
+            <a:r>
+              <a:rPr sz="1100" b="1">
+                <a:solidFill>
+                  <a:srgbClr val="007020"/>
+                </a:solidFill>
+                <a:latin typeface="Consolas"/>
+              </a:rPr>
+              <a:t>as</a:t>
+            </a:r>
+            <a:r>
+              <a:rPr sz="1100">
+                <a:solidFill>
+                  <a:srgbClr val="BBBBBB"/>
+                </a:solidFill>
+                <a:latin typeface="Consolas"/>
+              </a:rPr>
+              <a:t> </a:t>
+            </a:r>
+            <a:r>
+              <a:rPr sz="1100" b="1">
+                <a:solidFill>
+                  <a:srgbClr val="0E84B5"/>
+                </a:solidFill>
+                <a:latin typeface="Consolas"/>
+              </a:rPr>
+              <a:t>plt</a:t>
+            </a:r>
+            <a:r>
+              <a:rPr sz="1100">
+                <a:solidFill>
+                  <a:srgbClr val="BBBBBB"/>
+                </a:solidFill>
+                <a:latin typeface="Consolas"/>
+              </a:rPr>
+              <a:t>
+</a:t>
+            </a:r>
+          </a:p>
+        </p:txBody>
+      </p:sp>
+      <p:sp>
+        <p:nvSpPr>
+          <p:cNvPr id="6" name="TextBox 5"/>
+          <p:cNvSpPr txBox="1"/>
+          <p:nvPr/>
+        </p:nvSpPr>
+        <p:spPr>
+          <a:xfrm>
+            <a:off x="713231" y="5878576"/>
+            <a:ext cx="6025896" cy="139700"/>
+          </a:xfrm>
+          <a:prstGeom prst="rect">
+            <a:avLst/>
+          </a:prstGeom>
+          <a:noFill/>
+          <a:ln>
+            <a:noFill/>
+          </a:ln>
+        </p:spPr>
+        <p:txBody>
+          <a:bodyPr wrap="none" anchor="t" lIns="0" rIns="0" tIns="0" bIns="0">
+            <a:noAutofit/>
+          </a:bodyPr>
+          <a:lstStyle/>
           <a:p>
             <a:pPr>
+              <a:spcBef>
+                <a:spcPts val="0"/>
+              </a:spcBef>
               <a:spcAft>
                 <a:spcPts val="0"/>
               </a:spcAft>
@@ -7962,11 +10675,221 @@
                 </a:solidFill>
                 <a:latin typeface="Consolas"/>
               </a:rPr>
-              <a:t>fig, ax = plt.subplots(figsize=(6, 4))</a:t>
-            </a:r>
-          </a:p>
+              <a:t>fig</a:t>
+            </a:r>
+            <a:r>
+              <a:rPr sz="1100">
+                <a:solidFill>
+                  <a:srgbClr val="000000"/>
+                </a:solidFill>
+                <a:latin typeface="Consolas"/>
+              </a:rPr>
+              <a:t>,</a:t>
+            </a:r>
+            <a:r>
+              <a:rPr sz="1100">
+                <a:solidFill>
+                  <a:srgbClr val="000000"/>
+                </a:solidFill>
+                <a:latin typeface="Consolas"/>
+              </a:rPr>
+              <a:t> </a:t>
+            </a:r>
+            <a:r>
+              <a:rPr sz="1100">
+                <a:solidFill>
+                  <a:srgbClr val="000000"/>
+                </a:solidFill>
+                <a:latin typeface="Consolas"/>
+              </a:rPr>
+              <a:t>ax</a:t>
+            </a:r>
+            <a:r>
+              <a:rPr sz="1100">
+                <a:solidFill>
+                  <a:srgbClr val="000000"/>
+                </a:solidFill>
+                <a:latin typeface="Consolas"/>
+              </a:rPr>
+              <a:t> </a:t>
+            </a:r>
+            <a:r>
+              <a:rPr sz="1100">
+                <a:solidFill>
+                  <a:srgbClr val="666666"/>
+                </a:solidFill>
+                <a:latin typeface="Consolas"/>
+              </a:rPr>
+              <a:t>=</a:t>
+            </a:r>
+            <a:r>
+              <a:rPr sz="1100">
+                <a:solidFill>
+                  <a:srgbClr val="000000"/>
+                </a:solidFill>
+                <a:latin typeface="Consolas"/>
+              </a:rPr>
+              <a:t> </a:t>
+            </a:r>
+            <a:r>
+              <a:rPr sz="1100">
+                <a:solidFill>
+                  <a:srgbClr val="000000"/>
+                </a:solidFill>
+                <a:latin typeface="Consolas"/>
+              </a:rPr>
+              <a:t>plt</a:t>
+            </a:r>
+            <a:r>
+              <a:rPr sz="1100">
+                <a:solidFill>
+                  <a:srgbClr val="666666"/>
+                </a:solidFill>
+                <a:latin typeface="Consolas"/>
+              </a:rPr>
+              <a:t>.</a:t>
+            </a:r>
+            <a:r>
+              <a:rPr sz="1100">
+                <a:solidFill>
+                  <a:srgbClr val="000000"/>
+                </a:solidFill>
+                <a:latin typeface="Consolas"/>
+              </a:rPr>
+              <a:t>subplots</a:t>
+            </a:r>
+            <a:r>
+              <a:rPr sz="1100">
+                <a:solidFill>
+                  <a:srgbClr val="000000"/>
+                </a:solidFill>
+                <a:latin typeface="Consolas"/>
+              </a:rPr>
+              <a:t>(</a:t>
+            </a:r>
+            <a:r>
+              <a:rPr sz="1100">
+                <a:solidFill>
+                  <a:srgbClr val="000000"/>
+                </a:solidFill>
+                <a:latin typeface="Consolas"/>
+              </a:rPr>
+              <a:t>figsize</a:t>
+            </a:r>
+            <a:r>
+              <a:rPr sz="1100">
+                <a:solidFill>
+                  <a:srgbClr val="666666"/>
+                </a:solidFill>
+                <a:latin typeface="Consolas"/>
+              </a:rPr>
+              <a:t>=</a:t>
+            </a:r>
+            <a:r>
+              <a:rPr sz="1100">
+                <a:solidFill>
+                  <a:srgbClr val="000000"/>
+                </a:solidFill>
+                <a:latin typeface="Consolas"/>
+              </a:rPr>
+              <a:t>(</a:t>
+            </a:r>
+            <a:r>
+              <a:rPr sz="1100">
+                <a:solidFill>
+                  <a:srgbClr val="40A070"/>
+                </a:solidFill>
+                <a:latin typeface="Consolas"/>
+              </a:rPr>
+              <a:t>6</a:t>
+            </a:r>
+            <a:r>
+              <a:rPr sz="1100">
+                <a:solidFill>
+                  <a:srgbClr val="000000"/>
+                </a:solidFill>
+                <a:latin typeface="Consolas"/>
+              </a:rPr>
+              <a:t>,</a:t>
+            </a:r>
+            <a:r>
+              <a:rPr sz="1100">
+                <a:solidFill>
+                  <a:srgbClr val="000000"/>
+                </a:solidFill>
+                <a:latin typeface="Consolas"/>
+              </a:rPr>
+              <a:t> </a:t>
+            </a:r>
+            <a:r>
+              <a:rPr sz="1100">
+                <a:solidFill>
+                  <a:srgbClr val="40A070"/>
+                </a:solidFill>
+                <a:latin typeface="Consolas"/>
+              </a:rPr>
+              <a:t>4</a:t>
+            </a:r>
+            <a:r>
+              <a:rPr sz="1100">
+                <a:solidFill>
+                  <a:srgbClr val="000000"/>
+                </a:solidFill>
+                <a:latin typeface="Consolas"/>
+              </a:rPr>
+              <a:t>)</a:t>
+            </a:r>
+            <a:r>
+              <a:rPr sz="1100">
+                <a:solidFill>
+                  <a:srgbClr val="000000"/>
+                </a:solidFill>
+                <a:latin typeface="Consolas"/>
+              </a:rPr>
+              <a:t>)</a:t>
+            </a:r>
+            <a:r>
+              <a:rPr sz="1100">
+                <a:solidFill>
+                  <a:srgbClr val="BBBBBB"/>
+                </a:solidFill>
+                <a:latin typeface="Consolas"/>
+              </a:rPr>
+              <a:t>
+</a:t>
+            </a:r>
+          </a:p>
+        </p:txBody>
+      </p:sp>
+      <p:sp>
+        <p:nvSpPr>
+          <p:cNvPr id="7" name="TextBox 6"/>
+          <p:cNvSpPr txBox="1"/>
+          <p:nvPr/>
+        </p:nvSpPr>
+        <p:spPr>
+          <a:xfrm>
+            <a:off x="713231" y="6018275"/>
+            <a:ext cx="6025896" cy="139700"/>
+          </a:xfrm>
+          <a:prstGeom prst="rect">
+            <a:avLst/>
+          </a:prstGeom>
+          <a:noFill/>
+          <a:ln>
+            <a:noFill/>
+          </a:ln>
+        </p:spPr>
+        <p:txBody>
+          <a:bodyPr wrap="none" anchor="t" lIns="0" rIns="0" tIns="0" bIns="0">
+            <a:noAutofit/>
+          </a:bodyPr>
+          <a:lstStyle/>
           <a:p>
             <a:pPr>
+              <a:spcBef>
+                <a:spcPts val="0"/>
+              </a:spcBef>
               <a:spcAft>
                 <a:spcPts val="0"/>
               </a:spcAft>
@@ -7978,11 +10901,266 @@
                 </a:solidFill>
                 <a:latin typeface="Consolas"/>
               </a:rPr>
-              <a:t>ax.plot([1, 2, 3], [1, 4, 9])</a:t>
-            </a:r>
-          </a:p>
+              <a:t>ax</a:t>
+            </a:r>
+            <a:r>
+              <a:rPr sz="1100">
+                <a:solidFill>
+                  <a:srgbClr val="666666"/>
+                </a:solidFill>
+                <a:latin typeface="Consolas"/>
+              </a:rPr>
+              <a:t>.</a:t>
+            </a:r>
+            <a:r>
+              <a:rPr sz="1100">
+                <a:solidFill>
+                  <a:srgbClr val="000000"/>
+                </a:solidFill>
+                <a:latin typeface="Consolas"/>
+              </a:rPr>
+              <a:t>plot</a:t>
+            </a:r>
+            <a:r>
+              <a:rPr sz="1100">
+                <a:solidFill>
+                  <a:srgbClr val="000000"/>
+                </a:solidFill>
+                <a:latin typeface="Consolas"/>
+              </a:rPr>
+              <a:t>(</a:t>
+            </a:r>
+            <a:r>
+              <a:rPr sz="1100">
+                <a:solidFill>
+                  <a:srgbClr val="000000"/>
+                </a:solidFill>
+                <a:latin typeface="Consolas"/>
+              </a:rPr>
+              <a:t>[</a:t>
+            </a:r>
+            <a:r>
+              <a:rPr sz="1100">
+                <a:solidFill>
+                  <a:srgbClr val="40A070"/>
+                </a:solidFill>
+                <a:latin typeface="Consolas"/>
+              </a:rPr>
+              <a:t>1</a:t>
+            </a:r>
+            <a:r>
+              <a:rPr sz="1100">
+                <a:solidFill>
+                  <a:srgbClr val="000000"/>
+                </a:solidFill>
+                <a:latin typeface="Consolas"/>
+              </a:rPr>
+              <a:t>,</a:t>
+            </a:r>
+            <a:r>
+              <a:rPr sz="1100">
+                <a:solidFill>
+                  <a:srgbClr val="000000"/>
+                </a:solidFill>
+                <a:latin typeface="Consolas"/>
+              </a:rPr>
+              <a:t> </a:t>
+            </a:r>
+            <a:r>
+              <a:rPr sz="1100">
+                <a:solidFill>
+                  <a:srgbClr val="40A070"/>
+                </a:solidFill>
+                <a:latin typeface="Consolas"/>
+              </a:rPr>
+              <a:t>2</a:t>
+            </a:r>
+            <a:r>
+              <a:rPr sz="1100">
+                <a:solidFill>
+                  <a:srgbClr val="000000"/>
+                </a:solidFill>
+                <a:latin typeface="Consolas"/>
+              </a:rPr>
+              <a:t>,</a:t>
+            </a:r>
+            <a:r>
+              <a:rPr sz="1100">
+                <a:solidFill>
+                  <a:srgbClr val="000000"/>
+                </a:solidFill>
+                <a:latin typeface="Consolas"/>
+              </a:rPr>
+              <a:t> </a:t>
+            </a:r>
+            <a:r>
+              <a:rPr sz="1100">
+                <a:solidFill>
+                  <a:srgbClr val="40A070"/>
+                </a:solidFill>
+                <a:latin typeface="Consolas"/>
+              </a:rPr>
+              <a:t>3</a:t>
+            </a:r>
+            <a:r>
+              <a:rPr sz="1100">
+                <a:solidFill>
+                  <a:srgbClr val="000000"/>
+                </a:solidFill>
+                <a:latin typeface="Consolas"/>
+              </a:rPr>
+              <a:t>]</a:t>
+            </a:r>
+            <a:r>
+              <a:rPr sz="1100">
+                <a:solidFill>
+                  <a:srgbClr val="000000"/>
+                </a:solidFill>
+                <a:latin typeface="Consolas"/>
+              </a:rPr>
+              <a:t>,</a:t>
+            </a:r>
+            <a:r>
+              <a:rPr sz="1100">
+                <a:solidFill>
+                  <a:srgbClr val="000000"/>
+                </a:solidFill>
+                <a:latin typeface="Consolas"/>
+              </a:rPr>
+              <a:t> </a:t>
+            </a:r>
+            <a:r>
+              <a:rPr sz="1100">
+                <a:solidFill>
+                  <a:srgbClr val="000000"/>
+                </a:solidFill>
+                <a:latin typeface="Consolas"/>
+              </a:rPr>
+              <a:t>[</a:t>
+            </a:r>
+            <a:r>
+              <a:rPr sz="1100">
+                <a:solidFill>
+                  <a:srgbClr val="40A070"/>
+                </a:solidFill>
+                <a:latin typeface="Consolas"/>
+              </a:rPr>
+              <a:t>1</a:t>
+            </a:r>
+            <a:r>
+              <a:rPr sz="1100">
+                <a:solidFill>
+                  <a:srgbClr val="000000"/>
+                </a:solidFill>
+                <a:latin typeface="Consolas"/>
+              </a:rPr>
+              <a:t>,</a:t>
+            </a:r>
+            <a:r>
+              <a:rPr sz="1100">
+                <a:solidFill>
+                  <a:srgbClr val="000000"/>
+                </a:solidFill>
+                <a:latin typeface="Consolas"/>
+              </a:rPr>
+              <a:t> </a:t>
+            </a:r>
+            <a:r>
+              <a:rPr sz="1100">
+                <a:solidFill>
+                  <a:srgbClr val="40A070"/>
+                </a:solidFill>
+                <a:latin typeface="Consolas"/>
+              </a:rPr>
+              <a:t>4</a:t>
+            </a:r>
+            <a:r>
+              <a:rPr sz="1100">
+                <a:solidFill>
+                  <a:srgbClr val="000000"/>
+                </a:solidFill>
+                <a:latin typeface="Consolas"/>
+              </a:rPr>
+              <a:t>,</a:t>
+            </a:r>
+            <a:r>
+              <a:rPr sz="1100">
+                <a:solidFill>
+                  <a:srgbClr val="000000"/>
+                </a:solidFill>
+                <a:latin typeface="Consolas"/>
+              </a:rPr>
+              <a:t> </a:t>
+            </a:r>
+            <a:r>
+              <a:rPr sz="1100">
+                <a:solidFill>
+                  <a:srgbClr val="40A070"/>
+                </a:solidFill>
+                <a:latin typeface="Consolas"/>
+              </a:rPr>
+              <a:t>9</a:t>
+            </a:r>
+            <a:r>
+              <a:rPr sz="1100">
+                <a:solidFill>
+                  <a:srgbClr val="000000"/>
+                </a:solidFill>
+                <a:latin typeface="Consolas"/>
+              </a:rPr>
+              <a:t>]</a:t>
+            </a:r>
+            <a:r>
+              <a:rPr sz="1100">
+                <a:solidFill>
+                  <a:srgbClr val="000000"/>
+                </a:solidFill>
+                <a:latin typeface="Consolas"/>
+              </a:rPr>
+              <a:t>)</a:t>
+            </a:r>
+            <a:r>
+              <a:rPr sz="1100">
+                <a:solidFill>
+                  <a:srgbClr val="BBBBBB"/>
+                </a:solidFill>
+                <a:latin typeface="Consolas"/>
+              </a:rPr>
+              <a:t>
+</a:t>
+            </a:r>
+          </a:p>
+        </p:txBody>
+      </p:sp>
+      <p:sp>
+        <p:nvSpPr>
+          <p:cNvPr id="8" name="TextBox 7"/>
+          <p:cNvSpPr txBox="1"/>
+          <p:nvPr/>
+        </p:nvSpPr>
+        <p:spPr>
+          <a:xfrm>
+            <a:off x="713231" y="6157975"/>
+            <a:ext cx="6025896" cy="139700"/>
+          </a:xfrm>
+          <a:prstGeom prst="rect">
+            <a:avLst/>
+          </a:prstGeom>
+          <a:noFill/>
+          <a:ln>
+            <a:noFill/>
+          </a:ln>
+        </p:spPr>
+        <p:txBody>
+          <a:bodyPr wrap="none" anchor="t" lIns="0" rIns="0" tIns="0" bIns="0">
+            <a:noAutofit/>
+          </a:bodyPr>
+          <a:lstStyle/>
           <a:p>
             <a:pPr>
+              <a:spcBef>
+                <a:spcPts val="0"/>
+              </a:spcBef>
               <a:spcAft>
                 <a:spcPts val="0"/>
               </a:spcAft>
@@ -7994,20 +11172,183 @@
                 </a:solidFill>
                 <a:latin typeface="Consolas"/>
               </a:rPr>
-              <a:t>ax.set_xlabel('x'); ax.set_ylabel('y')</a:t>
-            </a:r>
-          </a:p>
-        </p:txBody>
-      </p:sp>
-      <p:sp>
-        <p:nvSpPr>
-          <p:cNvPr id="6" name="TextBox 5"/>
+              <a:t>ax</a:t>
+            </a:r>
+            <a:r>
+              <a:rPr sz="1100">
+                <a:solidFill>
+                  <a:srgbClr val="666666"/>
+                </a:solidFill>
+                <a:latin typeface="Consolas"/>
+              </a:rPr>
+              <a:t>.</a:t>
+            </a:r>
+            <a:r>
+              <a:rPr sz="1100">
+                <a:solidFill>
+                  <a:srgbClr val="000000"/>
+                </a:solidFill>
+                <a:latin typeface="Consolas"/>
+              </a:rPr>
+              <a:t>set_xlabel</a:t>
+            </a:r>
+            <a:r>
+              <a:rPr sz="1100">
+                <a:solidFill>
+                  <a:srgbClr val="000000"/>
+                </a:solidFill>
+                <a:latin typeface="Consolas"/>
+              </a:rPr>
+              <a:t>(</a:t>
+            </a:r>
+            <a:r>
+              <a:rPr sz="1100">
+                <a:solidFill>
+                  <a:srgbClr val="4070A0"/>
+                </a:solidFill>
+                <a:latin typeface="Consolas"/>
+              </a:rPr>
+              <a:t>'</a:t>
+            </a:r>
+            <a:r>
+              <a:rPr sz="1100">
+                <a:solidFill>
+                  <a:srgbClr val="4070A0"/>
+                </a:solidFill>
+                <a:latin typeface="Consolas"/>
+              </a:rPr>
+              <a:t>x</a:t>
+            </a:r>
+            <a:r>
+              <a:rPr sz="1100">
+                <a:solidFill>
+                  <a:srgbClr val="4070A0"/>
+                </a:solidFill>
+                <a:latin typeface="Consolas"/>
+              </a:rPr>
+              <a:t>'</a:t>
+            </a:r>
+            <a:r>
+              <a:rPr sz="1100">
+                <a:solidFill>
+                  <a:srgbClr val="000000"/>
+                </a:solidFill>
+                <a:latin typeface="Consolas"/>
+              </a:rPr>
+              <a:t>)</a:t>
+            </a:r>
+            <a:r>
+              <a:rPr sz="1100">
+                <a:solidFill>
+                  <a:srgbClr val="000000"/>
+                </a:solidFill>
+                <a:latin typeface="Consolas"/>
+              </a:rPr>
+              <a:t>;</a:t>
+            </a:r>
+            <a:r>
+              <a:rPr sz="1100">
+                <a:solidFill>
+                  <a:srgbClr val="000000"/>
+                </a:solidFill>
+                <a:latin typeface="Consolas"/>
+              </a:rPr>
+              <a:t> </a:t>
+            </a:r>
+            <a:r>
+              <a:rPr sz="1100">
+                <a:solidFill>
+                  <a:srgbClr val="000000"/>
+                </a:solidFill>
+                <a:latin typeface="Consolas"/>
+              </a:rPr>
+              <a:t>ax</a:t>
+            </a:r>
+            <a:r>
+              <a:rPr sz="1100">
+                <a:solidFill>
+                  <a:srgbClr val="666666"/>
+                </a:solidFill>
+                <a:latin typeface="Consolas"/>
+              </a:rPr>
+              <a:t>.</a:t>
+            </a:r>
+            <a:r>
+              <a:rPr sz="1100">
+                <a:solidFill>
+                  <a:srgbClr val="000000"/>
+                </a:solidFill>
+                <a:latin typeface="Consolas"/>
+              </a:rPr>
+              <a:t>set_ylabel</a:t>
+            </a:r>
+            <a:r>
+              <a:rPr sz="1100">
+                <a:solidFill>
+                  <a:srgbClr val="000000"/>
+                </a:solidFill>
+                <a:latin typeface="Consolas"/>
+              </a:rPr>
+              <a:t>(</a:t>
+            </a:r>
+            <a:r>
+              <a:rPr sz="1100">
+                <a:solidFill>
+                  <a:srgbClr val="4070A0"/>
+                </a:solidFill>
+                <a:latin typeface="Consolas"/>
+              </a:rPr>
+              <a:t>'</a:t>
+            </a:r>
+            <a:r>
+              <a:rPr sz="1100">
+                <a:solidFill>
+                  <a:srgbClr val="4070A0"/>
+                </a:solidFill>
+                <a:latin typeface="Consolas"/>
+              </a:rPr>
+              <a:t>y</a:t>
+            </a:r>
+            <a:r>
+              <a:rPr sz="1100">
+                <a:solidFill>
+                  <a:srgbClr val="4070A0"/>
+                </a:solidFill>
+                <a:latin typeface="Consolas"/>
+              </a:rPr>
+              <a:t>'</a:t>
+            </a:r>
+            <a:r>
+              <a:rPr sz="1100">
+                <a:solidFill>
+                  <a:srgbClr val="000000"/>
+                </a:solidFill>
+                <a:latin typeface="Consolas"/>
+              </a:rPr>
+              <a:t>)</a:t>
+            </a:r>
+            <a:r>
+              <a:rPr sz="1100">
+                <a:solidFill>
+                  <a:srgbClr val="BBBBBB"/>
+                </a:solidFill>
+                <a:latin typeface="Consolas"/>
+              </a:rPr>
+              <a:t>
+</a:t>
+            </a:r>
+          </a:p>
+        </p:txBody>
+      </p:sp>
+      <p:sp>
+        <p:nvSpPr>
+          <p:cNvPr id="9" name="TextBox 8"/>
           <p:cNvSpPr txBox="1"/>
           <p:nvPr/>
         </p:nvSpPr>
         <p:spPr>
           <a:xfrm>
-            <a:off x="640080" y="5349240"/>
+            <a:off x="640080" y="6492240"/>
             <a:ext cx="6172200" cy="201168"/>
           </a:xfrm>
           <a:prstGeom prst="rect">
@@ -8036,7 +11377,7 @@
       </p:sp>
       <p:pic>
         <p:nvPicPr>
-          <p:cNvPr id="7" name="Picture 6" descr="fig_axes_diagram.png"/>
+          <p:cNvPr id="10" name="Picture 9" descr="fig_axes_diagram.png"/>
           <p:cNvPicPr>
             <a:picLocks noChangeAspect="1"/>
           </p:cNvPicPr>
@@ -8050,8 +11391,8 @@
         </p:blipFill>
         <p:spPr>
           <a:xfrm>
-            <a:off x="7269480" y="1325880"/>
-            <a:ext cx="4465015" cy="3355068"/>
+            <a:off x="7269480" y="1371600"/>
+            <a:ext cx="4465015" cy="3426743"/>
           </a:xfrm>
           <a:prstGeom prst="rect">
             <a:avLst/>
@@ -8118,7 +11459,7 @@
         <p:spPr>
           <a:xfrm>
             <a:off x="640080" y="1371600"/>
-            <a:ext cx="6263640" cy="2697480"/>
+            <a:ext cx="6263640" cy="2514600"/>
           </a:xfrm>
           <a:prstGeom prst="rect">
             <a:avLst/>
@@ -8142,7 +11483,26 @@
                   <a:srgbClr val="000000"/>
                 </a:solidFill>
               </a:rPr>
-              <a:t>• `ax.plot(x, y)` — тренды во времени, learning curve, validation curve</a:t>
+              <a:t xml:space="preserve">• </a:t>
+            </a:r>
+            <a:r>
+              <a:rPr lang="ru-RU" dirty="0" sz="2000">
+                <a:latin typeface="Consolas"/>
+                <a:cs typeface="Consolas"/>
+                <a:ea typeface="Consolas"/>
+                <a:solidFill>
+                  <a:srgbClr val="000000"/>
+                </a:solidFill>
+              </a:rPr>
+              <a:t>ax.plot(x, y)</a:t>
+            </a:r>
+            <a:r>
+              <a:rPr lang="ru-RU" dirty="0" sz="2000">
+                <a:solidFill>
+                  <a:srgbClr val="000000"/>
+                </a:solidFill>
+              </a:rPr>
+              <a:t xml:space="preserve"> — тренды во времени, learning curve, validation curve</a:t>
             </a:r>
           </a:p>
           <a:p>
@@ -8157,7 +11517,26 @@
                   <a:srgbClr val="000000"/>
                 </a:solidFill>
               </a:rPr>
-              <a:t>• Маркеры `marker='o'` помогают при малом числе точек</a:t>
+              <a:t xml:space="preserve">• Маркеры </a:t>
+            </a:r>
+            <a:r>
+              <a:rPr lang="ru-RU" dirty="0" sz="2000">
+                <a:latin typeface="Consolas"/>
+                <a:cs typeface="Consolas"/>
+                <a:ea typeface="Consolas"/>
+                <a:solidFill>
+                  <a:srgbClr val="000000"/>
+                </a:solidFill>
+              </a:rPr>
+              <a:t>marker='o'</a:t>
+            </a:r>
+            <a:r>
+              <a:rPr lang="ru-RU" dirty="0" sz="2000">
+                <a:solidFill>
+                  <a:srgbClr val="000000"/>
+                </a:solidFill>
+              </a:rPr>
+              <a:t xml:space="preserve"> помогают при малом числе точек</a:t>
             </a:r>
           </a:p>
           <a:p>
@@ -8172,7 +11551,37 @@
                   <a:srgbClr val="000000"/>
                 </a:solidFill>
               </a:rPr>
-              <a:t>• Несколько линий на одном axes — разные `label` + `ax.legend()`</a:t>
+              <a:t xml:space="preserve">• Несколько линий на одном axes — разные </a:t>
+            </a:r>
+            <a:r>
+              <a:rPr lang="ru-RU" dirty="0" sz="2000">
+                <a:latin typeface="Consolas"/>
+                <a:cs typeface="Consolas"/>
+                <a:ea typeface="Consolas"/>
+                <a:solidFill>
+                  <a:srgbClr val="000000"/>
+                </a:solidFill>
+              </a:rPr>
+              <a:t>label</a:t>
+            </a:r>
+            <a:r>
+              <a:rPr lang="ru-RU" dirty="0" sz="2000">
+                <a:solidFill>
+                  <a:srgbClr val="000000"/>
+                </a:solidFill>
+              </a:rPr>
+              <a:t xml:space="preserve"> + </a:t>
+            </a:r>
+            <a:r>
+              <a:rPr lang="ru-RU" dirty="0" sz="2000">
+                <a:latin typeface="Consolas"/>
+                <a:cs typeface="Consolas"/>
+                <a:ea typeface="Consolas"/>
+                <a:solidFill>
+                  <a:srgbClr val="000000"/>
+                </a:solidFill>
+              </a:rPr>
+              <a:t>ax.legend()</a:t>
             </a:r>
           </a:p>
           <a:p>
@@ -8200,8 +11609,8 @@
         </p:nvSpPr>
         <p:spPr>
           <a:xfrm>
-            <a:off x="640080" y="4690872"/>
-            <a:ext cx="6172200" cy="630936"/>
+            <a:off x="640080" y="5832856"/>
+            <a:ext cx="6172200" cy="604520"/>
           </a:xfrm>
           <a:prstGeom prst="rect">
             <a:avLst/>
@@ -8245,21 +11654,27 @@
         </p:nvSpPr>
         <p:spPr>
           <a:xfrm>
-            <a:off x="713231" y="4727448"/>
-            <a:ext cx="6025896" cy="557784"/>
+            <a:off x="713231" y="5878576"/>
+            <a:ext cx="6025896" cy="139700"/>
           </a:xfrm>
           <a:prstGeom prst="rect">
             <a:avLst/>
           </a:prstGeom>
           <a:noFill/>
+          <a:ln>
+            <a:noFill/>
+          </a:ln>
         </p:spPr>
         <p:txBody>
-          <a:bodyPr wrap="none">
+          <a:bodyPr wrap="none" anchor="t" lIns="0" rIns="0" tIns="0" bIns="0">
             <a:noAutofit/>
           </a:bodyPr>
           <a:lstStyle/>
           <a:p>
             <a:pPr>
+              <a:spcBef>
+                <a:spcPts val="0"/>
+              </a:spcBef>
               <a:spcAft>
                 <a:spcPts val="0"/>
               </a:spcAft>
@@ -8271,11 +11686,248 @@
                 </a:solidFill>
                 <a:latin typeface="Consolas"/>
               </a:rPr>
-              <a:t>ax.plot(x, y, label='train', color='C0')</a:t>
-            </a:r>
-          </a:p>
+              <a:t>ax</a:t>
+            </a:r>
+            <a:r>
+              <a:rPr sz="1100">
+                <a:solidFill>
+                  <a:srgbClr val="666666"/>
+                </a:solidFill>
+                <a:latin typeface="Consolas"/>
+              </a:rPr>
+              <a:t>.</a:t>
+            </a:r>
+            <a:r>
+              <a:rPr sz="1100">
+                <a:solidFill>
+                  <a:srgbClr val="000000"/>
+                </a:solidFill>
+                <a:latin typeface="Consolas"/>
+              </a:rPr>
+              <a:t>plot</a:t>
+            </a:r>
+            <a:r>
+              <a:rPr sz="1100">
+                <a:solidFill>
+                  <a:srgbClr val="000000"/>
+                </a:solidFill>
+                <a:latin typeface="Consolas"/>
+              </a:rPr>
+              <a:t>(</a:t>
+            </a:r>
+            <a:r>
+              <a:rPr sz="1100">
+                <a:solidFill>
+                  <a:srgbClr val="000000"/>
+                </a:solidFill>
+                <a:latin typeface="Consolas"/>
+              </a:rPr>
+              <a:t>x</a:t>
+            </a:r>
+            <a:r>
+              <a:rPr sz="1100">
+                <a:solidFill>
+                  <a:srgbClr val="000000"/>
+                </a:solidFill>
+                <a:latin typeface="Consolas"/>
+              </a:rPr>
+              <a:t>,</a:t>
+            </a:r>
+            <a:r>
+              <a:rPr sz="1100">
+                <a:solidFill>
+                  <a:srgbClr val="000000"/>
+                </a:solidFill>
+                <a:latin typeface="Consolas"/>
+              </a:rPr>
+              <a:t> </a:t>
+            </a:r>
+            <a:r>
+              <a:rPr sz="1100">
+                <a:solidFill>
+                  <a:srgbClr val="000000"/>
+                </a:solidFill>
+                <a:latin typeface="Consolas"/>
+              </a:rPr>
+              <a:t>y</a:t>
+            </a:r>
+            <a:r>
+              <a:rPr sz="1100">
+                <a:solidFill>
+                  <a:srgbClr val="000000"/>
+                </a:solidFill>
+                <a:latin typeface="Consolas"/>
+              </a:rPr>
+              <a:t>,</a:t>
+            </a:r>
+            <a:r>
+              <a:rPr sz="1100">
+                <a:solidFill>
+                  <a:srgbClr val="000000"/>
+                </a:solidFill>
+                <a:latin typeface="Consolas"/>
+              </a:rPr>
+              <a:t> </a:t>
+            </a:r>
+            <a:r>
+              <a:rPr sz="1100">
+                <a:solidFill>
+                  <a:srgbClr val="000000"/>
+                </a:solidFill>
+                <a:latin typeface="Consolas"/>
+              </a:rPr>
+              <a:t>label</a:t>
+            </a:r>
+            <a:r>
+              <a:rPr sz="1100">
+                <a:solidFill>
+                  <a:srgbClr val="666666"/>
+                </a:solidFill>
+                <a:latin typeface="Consolas"/>
+              </a:rPr>
+              <a:t>=</a:t>
+            </a:r>
+            <a:r>
+              <a:rPr sz="1100">
+                <a:solidFill>
+                  <a:srgbClr val="4070A0"/>
+                </a:solidFill>
+                <a:latin typeface="Consolas"/>
+              </a:rPr>
+              <a:t>'</a:t>
+            </a:r>
+            <a:r>
+              <a:rPr sz="1100">
+                <a:solidFill>
+                  <a:srgbClr val="4070A0"/>
+                </a:solidFill>
+                <a:latin typeface="Consolas"/>
+              </a:rPr>
+              <a:t>train</a:t>
+            </a:r>
+            <a:r>
+              <a:rPr sz="1100">
+                <a:solidFill>
+                  <a:srgbClr val="4070A0"/>
+                </a:solidFill>
+                <a:latin typeface="Consolas"/>
+              </a:rPr>
+              <a:t>'</a:t>
+            </a:r>
+            <a:r>
+              <a:rPr sz="1100">
+                <a:solidFill>
+                  <a:srgbClr val="000000"/>
+                </a:solidFill>
+                <a:latin typeface="Consolas"/>
+              </a:rPr>
+              <a:t>,</a:t>
+            </a:r>
+            <a:r>
+              <a:rPr sz="1100">
+                <a:solidFill>
+                  <a:srgbClr val="000000"/>
+                </a:solidFill>
+                <a:latin typeface="Consolas"/>
+              </a:rPr>
+              <a:t> </a:t>
+            </a:r>
+            <a:r>
+              <a:rPr sz="1100">
+                <a:solidFill>
+                  <a:srgbClr val="000000"/>
+                </a:solidFill>
+                <a:latin typeface="Consolas"/>
+              </a:rPr>
+              <a:t>color</a:t>
+            </a:r>
+            <a:r>
+              <a:rPr sz="1100">
+                <a:solidFill>
+                  <a:srgbClr val="666666"/>
+                </a:solidFill>
+                <a:latin typeface="Consolas"/>
+              </a:rPr>
+              <a:t>=</a:t>
+            </a:r>
+            <a:r>
+              <a:rPr sz="1100">
+                <a:solidFill>
+                  <a:srgbClr val="4070A0"/>
+                </a:solidFill>
+                <a:latin typeface="Consolas"/>
+              </a:rPr>
+              <a:t>'</a:t>
+            </a:r>
+            <a:r>
+              <a:rPr sz="1100">
+                <a:solidFill>
+                  <a:srgbClr val="4070A0"/>
+                </a:solidFill>
+                <a:latin typeface="Consolas"/>
+              </a:rPr>
+              <a:t>C0</a:t>
+            </a:r>
+            <a:r>
+              <a:rPr sz="1100">
+                <a:solidFill>
+                  <a:srgbClr val="4070A0"/>
+                </a:solidFill>
+                <a:latin typeface="Consolas"/>
+              </a:rPr>
+              <a:t>'</a:t>
+            </a:r>
+            <a:r>
+              <a:rPr sz="1100">
+                <a:solidFill>
+                  <a:srgbClr val="000000"/>
+                </a:solidFill>
+                <a:latin typeface="Consolas"/>
+              </a:rPr>
+              <a:t>)</a:t>
+            </a:r>
+            <a:r>
+              <a:rPr sz="1100">
+                <a:solidFill>
+                  <a:srgbClr val="BBBBBB"/>
+                </a:solidFill>
+                <a:latin typeface="Consolas"/>
+              </a:rPr>
+              <a:t>
+</a:t>
+            </a:r>
+          </a:p>
+        </p:txBody>
+      </p:sp>
+      <p:sp>
+        <p:nvSpPr>
+          <p:cNvPr id="6" name="TextBox 5"/>
+          <p:cNvSpPr txBox="1"/>
+          <p:nvPr/>
+        </p:nvSpPr>
+        <p:spPr>
+          <a:xfrm>
+            <a:off x="713231" y="6018275"/>
+            <a:ext cx="6025896" cy="139700"/>
+          </a:xfrm>
+          <a:prstGeom prst="rect">
+            <a:avLst/>
+          </a:prstGeom>
+          <a:noFill/>
+          <a:ln>
+            <a:noFill/>
+          </a:ln>
+        </p:spPr>
+        <p:txBody>
+          <a:bodyPr wrap="none" anchor="t" lIns="0" rIns="0" tIns="0" bIns="0">
+            <a:noAutofit/>
+          </a:bodyPr>
+          <a:lstStyle/>
           <a:p>
             <a:pPr>
+              <a:spcBef>
+                <a:spcPts val="0"/>
+              </a:spcBef>
               <a:spcAft>
                 <a:spcPts val="0"/>
               </a:spcAft>
@@ -8287,11 +11939,248 @@
                 </a:solidFill>
                 <a:latin typeface="Consolas"/>
               </a:rPr>
-              <a:t>ax.plot(x, y_test, label='test', linestyle='--')</a:t>
-            </a:r>
-          </a:p>
+              <a:t>ax</a:t>
+            </a:r>
+            <a:r>
+              <a:rPr sz="1100">
+                <a:solidFill>
+                  <a:srgbClr val="666666"/>
+                </a:solidFill>
+                <a:latin typeface="Consolas"/>
+              </a:rPr>
+              <a:t>.</a:t>
+            </a:r>
+            <a:r>
+              <a:rPr sz="1100">
+                <a:solidFill>
+                  <a:srgbClr val="000000"/>
+                </a:solidFill>
+                <a:latin typeface="Consolas"/>
+              </a:rPr>
+              <a:t>plot</a:t>
+            </a:r>
+            <a:r>
+              <a:rPr sz="1100">
+                <a:solidFill>
+                  <a:srgbClr val="000000"/>
+                </a:solidFill>
+                <a:latin typeface="Consolas"/>
+              </a:rPr>
+              <a:t>(</a:t>
+            </a:r>
+            <a:r>
+              <a:rPr sz="1100">
+                <a:solidFill>
+                  <a:srgbClr val="000000"/>
+                </a:solidFill>
+                <a:latin typeface="Consolas"/>
+              </a:rPr>
+              <a:t>x</a:t>
+            </a:r>
+            <a:r>
+              <a:rPr sz="1100">
+                <a:solidFill>
+                  <a:srgbClr val="000000"/>
+                </a:solidFill>
+                <a:latin typeface="Consolas"/>
+              </a:rPr>
+              <a:t>,</a:t>
+            </a:r>
+            <a:r>
+              <a:rPr sz="1100">
+                <a:solidFill>
+                  <a:srgbClr val="000000"/>
+                </a:solidFill>
+                <a:latin typeface="Consolas"/>
+              </a:rPr>
+              <a:t> </a:t>
+            </a:r>
+            <a:r>
+              <a:rPr sz="1100">
+                <a:solidFill>
+                  <a:srgbClr val="000000"/>
+                </a:solidFill>
+                <a:latin typeface="Consolas"/>
+              </a:rPr>
+              <a:t>y_test</a:t>
+            </a:r>
+            <a:r>
+              <a:rPr sz="1100">
+                <a:solidFill>
+                  <a:srgbClr val="000000"/>
+                </a:solidFill>
+                <a:latin typeface="Consolas"/>
+              </a:rPr>
+              <a:t>,</a:t>
+            </a:r>
+            <a:r>
+              <a:rPr sz="1100">
+                <a:solidFill>
+                  <a:srgbClr val="000000"/>
+                </a:solidFill>
+                <a:latin typeface="Consolas"/>
+              </a:rPr>
+              <a:t> </a:t>
+            </a:r>
+            <a:r>
+              <a:rPr sz="1100">
+                <a:solidFill>
+                  <a:srgbClr val="000000"/>
+                </a:solidFill>
+                <a:latin typeface="Consolas"/>
+              </a:rPr>
+              <a:t>label</a:t>
+            </a:r>
+            <a:r>
+              <a:rPr sz="1100">
+                <a:solidFill>
+                  <a:srgbClr val="666666"/>
+                </a:solidFill>
+                <a:latin typeface="Consolas"/>
+              </a:rPr>
+              <a:t>=</a:t>
+            </a:r>
+            <a:r>
+              <a:rPr sz="1100">
+                <a:solidFill>
+                  <a:srgbClr val="4070A0"/>
+                </a:solidFill>
+                <a:latin typeface="Consolas"/>
+              </a:rPr>
+              <a:t>'</a:t>
+            </a:r>
+            <a:r>
+              <a:rPr sz="1100">
+                <a:solidFill>
+                  <a:srgbClr val="4070A0"/>
+                </a:solidFill>
+                <a:latin typeface="Consolas"/>
+              </a:rPr>
+              <a:t>test</a:t>
+            </a:r>
+            <a:r>
+              <a:rPr sz="1100">
+                <a:solidFill>
+                  <a:srgbClr val="4070A0"/>
+                </a:solidFill>
+                <a:latin typeface="Consolas"/>
+              </a:rPr>
+              <a:t>'</a:t>
+            </a:r>
+            <a:r>
+              <a:rPr sz="1100">
+                <a:solidFill>
+                  <a:srgbClr val="000000"/>
+                </a:solidFill>
+                <a:latin typeface="Consolas"/>
+              </a:rPr>
+              <a:t>,</a:t>
+            </a:r>
+            <a:r>
+              <a:rPr sz="1100">
+                <a:solidFill>
+                  <a:srgbClr val="000000"/>
+                </a:solidFill>
+                <a:latin typeface="Consolas"/>
+              </a:rPr>
+              <a:t> </a:t>
+            </a:r>
+            <a:r>
+              <a:rPr sz="1100">
+                <a:solidFill>
+                  <a:srgbClr val="000000"/>
+                </a:solidFill>
+                <a:latin typeface="Consolas"/>
+              </a:rPr>
+              <a:t>linestyle</a:t>
+            </a:r>
+            <a:r>
+              <a:rPr sz="1100">
+                <a:solidFill>
+                  <a:srgbClr val="666666"/>
+                </a:solidFill>
+                <a:latin typeface="Consolas"/>
+              </a:rPr>
+              <a:t>=</a:t>
+            </a:r>
+            <a:r>
+              <a:rPr sz="1100">
+                <a:solidFill>
+                  <a:srgbClr val="4070A0"/>
+                </a:solidFill>
+                <a:latin typeface="Consolas"/>
+              </a:rPr>
+              <a:t>'</a:t>
+            </a:r>
+            <a:r>
+              <a:rPr sz="1100">
+                <a:solidFill>
+                  <a:srgbClr val="4070A0"/>
+                </a:solidFill>
+                <a:latin typeface="Consolas"/>
+              </a:rPr>
+              <a:t>--</a:t>
+            </a:r>
+            <a:r>
+              <a:rPr sz="1100">
+                <a:solidFill>
+                  <a:srgbClr val="4070A0"/>
+                </a:solidFill>
+                <a:latin typeface="Consolas"/>
+              </a:rPr>
+              <a:t>'</a:t>
+            </a:r>
+            <a:r>
+              <a:rPr sz="1100">
+                <a:solidFill>
+                  <a:srgbClr val="000000"/>
+                </a:solidFill>
+                <a:latin typeface="Consolas"/>
+              </a:rPr>
+              <a:t>)</a:t>
+            </a:r>
+            <a:r>
+              <a:rPr sz="1100">
+                <a:solidFill>
+                  <a:srgbClr val="BBBBBB"/>
+                </a:solidFill>
+                <a:latin typeface="Consolas"/>
+              </a:rPr>
+              <a:t>
+</a:t>
+            </a:r>
+          </a:p>
+        </p:txBody>
+      </p:sp>
+      <p:sp>
+        <p:nvSpPr>
+          <p:cNvPr id="7" name="TextBox 6"/>
+          <p:cNvSpPr txBox="1"/>
+          <p:nvPr/>
+        </p:nvSpPr>
+        <p:spPr>
+          <a:xfrm>
+            <a:off x="713231" y="6157975"/>
+            <a:ext cx="6025896" cy="139700"/>
+          </a:xfrm>
+          <a:prstGeom prst="rect">
+            <a:avLst/>
+          </a:prstGeom>
+          <a:noFill/>
+          <a:ln>
+            <a:noFill/>
+          </a:ln>
+        </p:spPr>
+        <p:txBody>
+          <a:bodyPr wrap="none" anchor="t" lIns="0" rIns="0" tIns="0" bIns="0">
+            <a:noAutofit/>
+          </a:bodyPr>
+          <a:lstStyle/>
           <a:p>
             <a:pPr>
+              <a:spcBef>
+                <a:spcPts val="0"/>
+              </a:spcBef>
               <a:spcAft>
                 <a:spcPts val="0"/>
               </a:spcAft>
@@ -8303,20 +12192,66 @@
                 </a:solidFill>
                 <a:latin typeface="Consolas"/>
               </a:rPr>
-              <a:t>ax.legend()</a:t>
-            </a:r>
-          </a:p>
-        </p:txBody>
-      </p:sp>
-      <p:sp>
-        <p:nvSpPr>
-          <p:cNvPr id="6" name="TextBox 5"/>
+              <a:t>ax</a:t>
+            </a:r>
+            <a:r>
+              <a:rPr sz="1100">
+                <a:solidFill>
+                  <a:srgbClr val="666666"/>
+                </a:solidFill>
+                <a:latin typeface="Consolas"/>
+              </a:rPr>
+              <a:t>.</a:t>
+            </a:r>
+            <a:r>
+              <a:rPr sz="1100">
+                <a:solidFill>
+                  <a:srgbClr val="000000"/>
+                </a:solidFill>
+                <a:latin typeface="Consolas"/>
+              </a:rPr>
+              <a:t>legend</a:t>
+            </a:r>
+            <a:r>
+              <a:rPr sz="1100">
+                <a:solidFill>
+                  <a:srgbClr val="000000"/>
+                </a:solidFill>
+                <a:latin typeface="Consolas"/>
+              </a:rPr>
+              <a:t>(</a:t>
+            </a:r>
+            <a:r>
+              <a:rPr sz="1100">
+                <a:solidFill>
+                  <a:srgbClr val="000000"/>
+                </a:solidFill>
+                <a:latin typeface="Consolas"/>
+              </a:rPr>
+              <a:t>)</a:t>
+            </a:r>
+            <a:r>
+              <a:rPr sz="1100">
+                <a:solidFill>
+                  <a:srgbClr val="BBBBBB"/>
+                </a:solidFill>
+                <a:latin typeface="Consolas"/>
+              </a:rPr>
+              <a:t>
+</a:t>
+            </a:r>
+          </a:p>
+        </p:txBody>
+      </p:sp>
+      <p:sp>
+        <p:nvSpPr>
+          <p:cNvPr id="8" name="TextBox 7"/>
           <p:cNvSpPr txBox="1"/>
           <p:nvPr/>
         </p:nvSpPr>
         <p:spPr>
           <a:xfrm>
-            <a:off x="640080" y="5376672"/>
+            <a:off x="640080" y="6492240"/>
             <a:ext cx="6172200" cy="201168"/>
           </a:xfrm>
           <a:prstGeom prst="rect">
@@ -8345,7 +12280,7 @@
       </p:sp>
       <p:pic>
         <p:nvPicPr>
-          <p:cNvPr id="7" name="Picture 6" descr="line_learning_curve.png"/>
+          <p:cNvPr id="9" name="Picture 8" descr="line_learning_curve.png"/>
           <p:cNvPicPr>
             <a:picLocks noChangeAspect="1"/>
           </p:cNvPicPr>
@@ -8359,8 +12294,8 @@
         </p:blipFill>
         <p:spPr>
           <a:xfrm>
-            <a:off x="7269480" y="1325880"/>
-            <a:ext cx="4465015" cy="2424089"/>
+            <a:off x="7269480" y="1371600"/>
+            <a:ext cx="4465015" cy="2808494"/>
           </a:xfrm>
           <a:prstGeom prst="rect">
             <a:avLst/>
@@ -8427,7 +12362,7 @@
         <p:spPr>
           <a:xfrm>
             <a:off x="640080" y="1371600"/>
-            <a:ext cx="6263640" cy="2423160"/>
+            <a:ext cx="6263640" cy="2240280"/>
           </a:xfrm>
           <a:prstGeom prst="rect">
             <a:avLst/>
@@ -8451,7 +12386,26 @@
                   <a:srgbClr val="000000"/>
                 </a:solidFill>
               </a:rPr>
-              <a:t>• `ax.scatter(x, y, alpha=0.5, s=20)` — связь двух числовых признаков</a:t>
+              <a:t xml:space="preserve">• </a:t>
+            </a:r>
+            <a:r>
+              <a:rPr lang="ru-RU" dirty="0" sz="2000">
+                <a:latin typeface="Consolas"/>
+                <a:cs typeface="Consolas"/>
+                <a:ea typeface="Consolas"/>
+                <a:solidFill>
+                  <a:srgbClr val="000000"/>
+                </a:solidFill>
+              </a:rPr>
+              <a:t>ax.scatter(x, y, alpha=0.5, s=20)</a:t>
+            </a:r>
+            <a:r>
+              <a:rPr lang="ru-RU" dirty="0" sz="2000">
+                <a:solidFill>
+                  <a:srgbClr val="000000"/>
+                </a:solidFill>
+              </a:rPr>
+              <a:t xml:space="preserve"> — связь двух числовых признаков</a:t>
             </a:r>
           </a:p>
           <a:p>
@@ -8466,7 +12420,45 @@
                   <a:srgbClr val="000000"/>
                 </a:solidFill>
               </a:rPr>
-              <a:t>• Цвет `c=target` или `hue` в seaborn — классы или третий признак</a:t>
+              <a:t xml:space="preserve">• Цвет </a:t>
+            </a:r>
+            <a:r>
+              <a:rPr lang="ru-RU" dirty="0" sz="2000">
+                <a:latin typeface="Consolas"/>
+                <a:cs typeface="Consolas"/>
+                <a:ea typeface="Consolas"/>
+                <a:solidFill>
+                  <a:srgbClr val="000000"/>
+                </a:solidFill>
+              </a:rPr>
+              <a:t>c=target</a:t>
+            </a:r>
+            <a:r>
+              <a:rPr lang="ru-RU" dirty="0" sz="2000">
+                <a:solidFill>
+                  <a:srgbClr val="000000"/>
+                </a:solidFill>
+              </a:rPr>
+              <a:t xml:space="preserve"> или </a:t>
+            </a:r>
+            <a:r>
+              <a:rPr lang="ru-RU" dirty="0" sz="2000">
+                <a:latin typeface="Consolas"/>
+                <a:cs typeface="Consolas"/>
+                <a:ea typeface="Consolas"/>
+                <a:solidFill>
+                  <a:srgbClr val="000000"/>
+                </a:solidFill>
+              </a:rPr>
+              <a:t>hue</a:t>
+            </a:r>
+            <a:r>
+              <a:rPr lang="ru-RU" dirty="0" sz="2000">
+                <a:solidFill>
+                  <a:srgbClr val="000000"/>
+                </a:solidFill>
+              </a:rPr>
+              <a:t xml:space="preserve"> в seaborn — классы или третий признак</a:t>
             </a:r>
           </a:p>
           <a:p>
@@ -8509,8 +12501,8 @@
         </p:nvSpPr>
         <p:spPr>
           <a:xfrm>
-            <a:off x="640080" y="4892040"/>
-            <a:ext cx="6172200" cy="457200"/>
+            <a:off x="640080" y="5972556"/>
+            <a:ext cx="6172200" cy="464820"/>
           </a:xfrm>
           <a:prstGeom prst="rect">
             <a:avLst/>
@@ -8554,21 +12546,27 @@
         </p:nvSpPr>
         <p:spPr>
           <a:xfrm>
-            <a:off x="713231" y="4928616"/>
-            <a:ext cx="6025896" cy="384048"/>
+            <a:off x="713231" y="6018275"/>
+            <a:ext cx="6025896" cy="139700"/>
           </a:xfrm>
           <a:prstGeom prst="rect">
             <a:avLst/>
           </a:prstGeom>
           <a:noFill/>
+          <a:ln>
+            <a:noFill/>
+          </a:ln>
         </p:spPr>
         <p:txBody>
-          <a:bodyPr wrap="none">
+          <a:bodyPr wrap="none" anchor="t" lIns="0" rIns="0" tIns="0" bIns="0">
             <a:noAutofit/>
           </a:bodyPr>
           <a:lstStyle/>
           <a:p>
             <a:pPr>
+              <a:spcBef>
+                <a:spcPts val="0"/>
+              </a:spcBef>
               <a:spcAft>
                 <a:spcPts val="0"/>
               </a:spcAft>
@@ -8580,11 +12578,383 @@
                 </a:solidFill>
                 <a:latin typeface="Consolas"/>
               </a:rPr>
-              <a:t>ax.scatter(X[:, 0], X[:, 1], c=y, cmap='viridis', alpha=0.7)</a:t>
-            </a:r>
-          </a:p>
+              <a:t>ax</a:t>
+            </a:r>
+            <a:r>
+              <a:rPr sz="1100">
+                <a:solidFill>
+                  <a:srgbClr val="666666"/>
+                </a:solidFill>
+                <a:latin typeface="Consolas"/>
+              </a:rPr>
+              <a:t>.</a:t>
+            </a:r>
+            <a:r>
+              <a:rPr sz="1100">
+                <a:solidFill>
+                  <a:srgbClr val="000000"/>
+                </a:solidFill>
+                <a:latin typeface="Consolas"/>
+              </a:rPr>
+              <a:t>scatter</a:t>
+            </a:r>
+            <a:r>
+              <a:rPr sz="1100">
+                <a:solidFill>
+                  <a:srgbClr val="000000"/>
+                </a:solidFill>
+                <a:latin typeface="Consolas"/>
+              </a:rPr>
+              <a:t>(</a:t>
+            </a:r>
+            <a:r>
+              <a:rPr sz="1100">
+                <a:solidFill>
+                  <a:srgbClr val="000000"/>
+                </a:solidFill>
+                <a:latin typeface="Consolas"/>
+              </a:rPr>
+              <a:t>X</a:t>
+            </a:r>
+            <a:r>
+              <a:rPr sz="1100">
+                <a:solidFill>
+                  <a:srgbClr val="000000"/>
+                </a:solidFill>
+                <a:latin typeface="Consolas"/>
+              </a:rPr>
+              <a:t>[</a:t>
+            </a:r>
+            <a:r>
+              <a:rPr sz="1100">
+                <a:solidFill>
+                  <a:srgbClr val="000000"/>
+                </a:solidFill>
+                <a:latin typeface="Consolas"/>
+              </a:rPr>
+              <a:t>:</a:t>
+            </a:r>
+            <a:r>
+              <a:rPr sz="1100">
+                <a:solidFill>
+                  <a:srgbClr val="000000"/>
+                </a:solidFill>
+                <a:latin typeface="Consolas"/>
+              </a:rPr>
+              <a:t>,</a:t>
+            </a:r>
+            <a:r>
+              <a:rPr sz="1100">
+                <a:solidFill>
+                  <a:srgbClr val="000000"/>
+                </a:solidFill>
+                <a:latin typeface="Consolas"/>
+              </a:rPr>
+              <a:t> </a:t>
+            </a:r>
+            <a:r>
+              <a:rPr sz="1100">
+                <a:solidFill>
+                  <a:srgbClr val="40A070"/>
+                </a:solidFill>
+                <a:latin typeface="Consolas"/>
+              </a:rPr>
+              <a:t>0</a:t>
+            </a:r>
+            <a:r>
+              <a:rPr sz="1100">
+                <a:solidFill>
+                  <a:srgbClr val="000000"/>
+                </a:solidFill>
+                <a:latin typeface="Consolas"/>
+              </a:rPr>
+              <a:t>]</a:t>
+            </a:r>
+            <a:r>
+              <a:rPr sz="1100">
+                <a:solidFill>
+                  <a:srgbClr val="000000"/>
+                </a:solidFill>
+                <a:latin typeface="Consolas"/>
+              </a:rPr>
+              <a:t>,</a:t>
+            </a:r>
+            <a:r>
+              <a:rPr sz="1100">
+                <a:solidFill>
+                  <a:srgbClr val="000000"/>
+                </a:solidFill>
+                <a:latin typeface="Consolas"/>
+              </a:rPr>
+              <a:t> </a:t>
+            </a:r>
+            <a:r>
+              <a:rPr sz="1100">
+                <a:solidFill>
+                  <a:srgbClr val="000000"/>
+                </a:solidFill>
+                <a:latin typeface="Consolas"/>
+              </a:rPr>
+              <a:t>X</a:t>
+            </a:r>
+            <a:r>
+              <a:rPr sz="1100">
+                <a:solidFill>
+                  <a:srgbClr val="000000"/>
+                </a:solidFill>
+                <a:latin typeface="Consolas"/>
+              </a:rPr>
+              <a:t>[</a:t>
+            </a:r>
+            <a:r>
+              <a:rPr sz="1100">
+                <a:solidFill>
+                  <a:srgbClr val="000000"/>
+                </a:solidFill>
+                <a:latin typeface="Consolas"/>
+              </a:rPr>
+              <a:t>:</a:t>
+            </a:r>
+            <a:r>
+              <a:rPr sz="1100">
+                <a:solidFill>
+                  <a:srgbClr val="000000"/>
+                </a:solidFill>
+                <a:latin typeface="Consolas"/>
+              </a:rPr>
+              <a:t>,</a:t>
+            </a:r>
+            <a:r>
+              <a:rPr sz="1100">
+                <a:solidFill>
+                  <a:srgbClr val="000000"/>
+                </a:solidFill>
+                <a:latin typeface="Consolas"/>
+              </a:rPr>
+              <a:t> </a:t>
+            </a:r>
+            <a:r>
+              <a:rPr sz="1100">
+                <a:solidFill>
+                  <a:srgbClr val="40A070"/>
+                </a:solidFill>
+                <a:latin typeface="Consolas"/>
+              </a:rPr>
+              <a:t>1</a:t>
+            </a:r>
+            <a:r>
+              <a:rPr sz="1100">
+                <a:solidFill>
+                  <a:srgbClr val="000000"/>
+                </a:solidFill>
+                <a:latin typeface="Consolas"/>
+              </a:rPr>
+              <a:t>]</a:t>
+            </a:r>
+            <a:r>
+              <a:rPr sz="1100">
+                <a:solidFill>
+                  <a:srgbClr val="000000"/>
+                </a:solidFill>
+                <a:latin typeface="Consolas"/>
+              </a:rPr>
+              <a:t>,</a:t>
+            </a:r>
+            <a:r>
+              <a:rPr sz="1100">
+                <a:solidFill>
+                  <a:srgbClr val="000000"/>
+                </a:solidFill>
+                <a:latin typeface="Consolas"/>
+              </a:rPr>
+              <a:t> </a:t>
+            </a:r>
+            <a:r>
+              <a:rPr sz="1100">
+                <a:solidFill>
+                  <a:srgbClr val="000000"/>
+                </a:solidFill>
+                <a:latin typeface="Consolas"/>
+              </a:rPr>
+              <a:t>c</a:t>
+            </a:r>
+            <a:r>
+              <a:rPr sz="1100">
+                <a:solidFill>
+                  <a:srgbClr val="666666"/>
+                </a:solidFill>
+                <a:latin typeface="Consolas"/>
+              </a:rPr>
+              <a:t>=</a:t>
+            </a:r>
+            <a:r>
+              <a:rPr sz="1100">
+                <a:solidFill>
+                  <a:srgbClr val="000000"/>
+                </a:solidFill>
+                <a:latin typeface="Consolas"/>
+              </a:rPr>
+              <a:t>y</a:t>
+            </a:r>
+            <a:r>
+              <a:rPr sz="1100">
+                <a:solidFill>
+                  <a:srgbClr val="000000"/>
+                </a:solidFill>
+                <a:latin typeface="Consolas"/>
+              </a:rPr>
+              <a:t>,</a:t>
+            </a:r>
+            <a:r>
+              <a:rPr sz="1100">
+                <a:solidFill>
+                  <a:srgbClr val="000000"/>
+                </a:solidFill>
+                <a:latin typeface="Consolas"/>
+              </a:rPr>
+              <a:t> </a:t>
+            </a:r>
+            <a:r>
+              <a:rPr sz="1100">
+                <a:solidFill>
+                  <a:srgbClr val="000000"/>
+                </a:solidFill>
+                <a:latin typeface="Consolas"/>
+              </a:rPr>
+              <a:t>cmap</a:t>
+            </a:r>
+            <a:r>
+              <a:rPr sz="1100">
+                <a:solidFill>
+                  <a:srgbClr val="666666"/>
+                </a:solidFill>
+                <a:latin typeface="Consolas"/>
+              </a:rPr>
+              <a:t>=</a:t>
+            </a:r>
+            <a:r>
+              <a:rPr sz="1100">
+                <a:solidFill>
+                  <a:srgbClr val="4070A0"/>
+                </a:solidFill>
+                <a:latin typeface="Consolas"/>
+              </a:rPr>
+              <a:t>'</a:t>
+            </a:r>
+            <a:r>
+              <a:rPr sz="1100">
+                <a:solidFill>
+                  <a:srgbClr val="4070A0"/>
+                </a:solidFill>
+                <a:latin typeface="Consolas"/>
+              </a:rPr>
+              <a:t>viridis</a:t>
+            </a:r>
+            <a:r>
+              <a:rPr sz="1100">
+                <a:solidFill>
+                  <a:srgbClr val="4070A0"/>
+                </a:solidFill>
+                <a:latin typeface="Consolas"/>
+              </a:rPr>
+              <a:t>'</a:t>
+            </a:r>
+            <a:r>
+              <a:rPr sz="1100">
+                <a:solidFill>
+                  <a:srgbClr val="000000"/>
+                </a:solidFill>
+                <a:latin typeface="Consolas"/>
+              </a:rPr>
+              <a:t>,</a:t>
+            </a:r>
+            <a:r>
+              <a:rPr sz="1100">
+                <a:solidFill>
+                  <a:srgbClr val="000000"/>
+                </a:solidFill>
+                <a:latin typeface="Consolas"/>
+              </a:rPr>
+              <a:t> </a:t>
+            </a:r>
+            <a:r>
+              <a:rPr sz="1100">
+                <a:solidFill>
+                  <a:srgbClr val="000000"/>
+                </a:solidFill>
+                <a:latin typeface="Consolas"/>
+              </a:rPr>
+              <a:t>alpha</a:t>
+            </a:r>
+            <a:r>
+              <a:rPr sz="1100">
+                <a:solidFill>
+                  <a:srgbClr val="666666"/>
+                </a:solidFill>
+                <a:latin typeface="Consolas"/>
+              </a:rPr>
+              <a:t>=</a:t>
+            </a:r>
+            <a:r>
+              <a:rPr sz="1100">
+                <a:solidFill>
+                  <a:srgbClr val="40A070"/>
+                </a:solidFill>
+                <a:latin typeface="Consolas"/>
+              </a:rPr>
+              <a:t>0.7</a:t>
+            </a:r>
+            <a:r>
+              <a:rPr sz="1100">
+                <a:solidFill>
+                  <a:srgbClr val="000000"/>
+                </a:solidFill>
+                <a:latin typeface="Consolas"/>
+              </a:rPr>
+              <a:t>)</a:t>
+            </a:r>
+            <a:r>
+              <a:rPr sz="1100">
+                <a:solidFill>
+                  <a:srgbClr val="BBBBBB"/>
+                </a:solidFill>
+                <a:latin typeface="Consolas"/>
+              </a:rPr>
+              <a:t>
+</a:t>
+            </a:r>
+          </a:p>
+        </p:txBody>
+      </p:sp>
+      <p:sp>
+        <p:nvSpPr>
+          <p:cNvPr id="6" name="TextBox 5"/>
+          <p:cNvSpPr txBox="1"/>
+          <p:nvPr/>
+        </p:nvSpPr>
+        <p:spPr>
+          <a:xfrm>
+            <a:off x="713231" y="6157975"/>
+            <a:ext cx="6025896" cy="139700"/>
+          </a:xfrm>
+          <a:prstGeom prst="rect">
+            <a:avLst/>
+          </a:prstGeom>
+          <a:noFill/>
+          <a:ln>
+            <a:noFill/>
+          </a:ln>
+        </p:spPr>
+        <p:txBody>
+          <a:bodyPr wrap="none" anchor="t" lIns="0" rIns="0" tIns="0" bIns="0">
+            <a:noAutofit/>
+          </a:bodyPr>
+          <a:lstStyle/>
           <a:p>
             <a:pPr>
+              <a:spcBef>
+                <a:spcPts val="0"/>
+              </a:spcBef>
               <a:spcAft>
                 <a:spcPts val="0"/>
               </a:spcAft>
@@ -8596,20 +12966,183 @@
                 </a:solidFill>
                 <a:latin typeface="Consolas"/>
               </a:rPr>
-              <a:t>ax.set_xlabel('feature 1'); ax.set_ylabel('feature 2')</a:t>
-            </a:r>
-          </a:p>
-        </p:txBody>
-      </p:sp>
-      <p:sp>
-        <p:nvSpPr>
-          <p:cNvPr id="6" name="TextBox 5"/>
+              <a:t>ax</a:t>
+            </a:r>
+            <a:r>
+              <a:rPr sz="1100">
+                <a:solidFill>
+                  <a:srgbClr val="666666"/>
+                </a:solidFill>
+                <a:latin typeface="Consolas"/>
+              </a:rPr>
+              <a:t>.</a:t>
+            </a:r>
+            <a:r>
+              <a:rPr sz="1100">
+                <a:solidFill>
+                  <a:srgbClr val="000000"/>
+                </a:solidFill>
+                <a:latin typeface="Consolas"/>
+              </a:rPr>
+              <a:t>set_xlabel</a:t>
+            </a:r>
+            <a:r>
+              <a:rPr sz="1100">
+                <a:solidFill>
+                  <a:srgbClr val="000000"/>
+                </a:solidFill>
+                <a:latin typeface="Consolas"/>
+              </a:rPr>
+              <a:t>(</a:t>
+            </a:r>
+            <a:r>
+              <a:rPr sz="1100">
+                <a:solidFill>
+                  <a:srgbClr val="4070A0"/>
+                </a:solidFill>
+                <a:latin typeface="Consolas"/>
+              </a:rPr>
+              <a:t>'</a:t>
+            </a:r>
+            <a:r>
+              <a:rPr sz="1100">
+                <a:solidFill>
+                  <a:srgbClr val="4070A0"/>
+                </a:solidFill>
+                <a:latin typeface="Consolas"/>
+              </a:rPr>
+              <a:t>feature 1</a:t>
+            </a:r>
+            <a:r>
+              <a:rPr sz="1100">
+                <a:solidFill>
+                  <a:srgbClr val="4070A0"/>
+                </a:solidFill>
+                <a:latin typeface="Consolas"/>
+              </a:rPr>
+              <a:t>'</a:t>
+            </a:r>
+            <a:r>
+              <a:rPr sz="1100">
+                <a:solidFill>
+                  <a:srgbClr val="000000"/>
+                </a:solidFill>
+                <a:latin typeface="Consolas"/>
+              </a:rPr>
+              <a:t>)</a:t>
+            </a:r>
+            <a:r>
+              <a:rPr sz="1100">
+                <a:solidFill>
+                  <a:srgbClr val="000000"/>
+                </a:solidFill>
+                <a:latin typeface="Consolas"/>
+              </a:rPr>
+              <a:t>;</a:t>
+            </a:r>
+            <a:r>
+              <a:rPr sz="1100">
+                <a:solidFill>
+                  <a:srgbClr val="000000"/>
+                </a:solidFill>
+                <a:latin typeface="Consolas"/>
+              </a:rPr>
+              <a:t> </a:t>
+            </a:r>
+            <a:r>
+              <a:rPr sz="1100">
+                <a:solidFill>
+                  <a:srgbClr val="000000"/>
+                </a:solidFill>
+                <a:latin typeface="Consolas"/>
+              </a:rPr>
+              <a:t>ax</a:t>
+            </a:r>
+            <a:r>
+              <a:rPr sz="1100">
+                <a:solidFill>
+                  <a:srgbClr val="666666"/>
+                </a:solidFill>
+                <a:latin typeface="Consolas"/>
+              </a:rPr>
+              <a:t>.</a:t>
+            </a:r>
+            <a:r>
+              <a:rPr sz="1100">
+                <a:solidFill>
+                  <a:srgbClr val="000000"/>
+                </a:solidFill>
+                <a:latin typeface="Consolas"/>
+              </a:rPr>
+              <a:t>set_ylabel</a:t>
+            </a:r>
+            <a:r>
+              <a:rPr sz="1100">
+                <a:solidFill>
+                  <a:srgbClr val="000000"/>
+                </a:solidFill>
+                <a:latin typeface="Consolas"/>
+              </a:rPr>
+              <a:t>(</a:t>
+            </a:r>
+            <a:r>
+              <a:rPr sz="1100">
+                <a:solidFill>
+                  <a:srgbClr val="4070A0"/>
+                </a:solidFill>
+                <a:latin typeface="Consolas"/>
+              </a:rPr>
+              <a:t>'</a:t>
+            </a:r>
+            <a:r>
+              <a:rPr sz="1100">
+                <a:solidFill>
+                  <a:srgbClr val="4070A0"/>
+                </a:solidFill>
+                <a:latin typeface="Consolas"/>
+              </a:rPr>
+              <a:t>feature 2</a:t>
+            </a:r>
+            <a:r>
+              <a:rPr sz="1100">
+                <a:solidFill>
+                  <a:srgbClr val="4070A0"/>
+                </a:solidFill>
+                <a:latin typeface="Consolas"/>
+              </a:rPr>
+              <a:t>'</a:t>
+            </a:r>
+            <a:r>
+              <a:rPr sz="1100">
+                <a:solidFill>
+                  <a:srgbClr val="000000"/>
+                </a:solidFill>
+                <a:latin typeface="Consolas"/>
+              </a:rPr>
+              <a:t>)</a:t>
+            </a:r>
+            <a:r>
+              <a:rPr sz="1100">
+                <a:solidFill>
+                  <a:srgbClr val="BBBBBB"/>
+                </a:solidFill>
+                <a:latin typeface="Consolas"/>
+              </a:rPr>
+              <a:t>
+</a:t>
+            </a:r>
+          </a:p>
+        </p:txBody>
+      </p:sp>
+      <p:sp>
+        <p:nvSpPr>
+          <p:cNvPr id="7" name="TextBox 6"/>
           <p:cNvSpPr txBox="1"/>
           <p:nvPr/>
         </p:nvSpPr>
         <p:spPr>
           <a:xfrm>
-            <a:off x="640080" y="5404104"/>
+            <a:off x="640080" y="6492240"/>
             <a:ext cx="6172200" cy="201168"/>
           </a:xfrm>
           <a:prstGeom prst="rect">
@@ -8638,7 +13171,7 @@
       </p:sp>
       <p:pic>
         <p:nvPicPr>
-          <p:cNvPr id="7" name="Picture 6" descr="scatter_classes.png"/>
+          <p:cNvPr id="8" name="Picture 7" descr="scatter_classes.png"/>
           <p:cNvPicPr>
             <a:picLocks noChangeAspect="1"/>
           </p:cNvPicPr>
@@ -8652,8 +13185,8 @@
         </p:blipFill>
         <p:spPr>
           <a:xfrm>
-            <a:off x="7269480" y="1325880"/>
-            <a:ext cx="4465015" cy="3303820"/>
+            <a:off x="7269480" y="1371600"/>
+            <a:ext cx="4465015" cy="3000490"/>
           </a:xfrm>
           <a:prstGeom prst="rect">
             <a:avLst/>
@@ -8720,7 +13253,7 @@
         <p:spPr>
           <a:xfrm>
             <a:off x="640080" y="1371600"/>
-            <a:ext cx="6263640" cy="2423160"/>
+            <a:ext cx="6263640" cy="2240280"/>
           </a:xfrm>
           <a:prstGeom prst="rect">
             <a:avLst/>
@@ -8744,7 +13277,26 @@
                   <a:srgbClr val="000000"/>
                 </a:solidFill>
               </a:rPr>
-              <a:t xml:space="preserve">• `ax.bar(categories, values)` — сравнение </a:t>
+              <a:t xml:space="preserve">• </a:t>
+            </a:r>
+            <a:r>
+              <a:rPr lang="ru-RU" dirty="0" sz="2000">
+                <a:latin typeface="Consolas"/>
+                <a:cs typeface="Consolas"/>
+                <a:ea typeface="Consolas"/>
+                <a:solidFill>
+                  <a:srgbClr val="000000"/>
+                </a:solidFill>
+              </a:rPr>
+              <a:t>ax.bar(categories, values)</a:t>
+            </a:r>
+            <a:r>
+              <a:rPr lang="ru-RU" dirty="0" sz="2000">
+                <a:solidFill>
+                  <a:srgbClr val="000000"/>
+                </a:solidFill>
+              </a:rPr>
+              <a:t xml:space="preserve"> — сравнение </a:t>
             </a:r>
             <a:r>
               <a:rPr lang="ru-RU" dirty="0" sz="2000" b="1">
@@ -8775,7 +13327,26 @@
                   <a:srgbClr val="000000"/>
                 </a:solidFill>
               </a:rPr>
-              <a:t>• Горизонтальный `barh` — длинные подписи категорий</a:t>
+              <a:t xml:space="preserve">• Горизонтальный </a:t>
+            </a:r>
+            <a:r>
+              <a:rPr lang="ru-RU" dirty="0" sz="2000">
+                <a:latin typeface="Consolas"/>
+                <a:cs typeface="Consolas"/>
+                <a:ea typeface="Consolas"/>
+                <a:solidFill>
+                  <a:srgbClr val="000000"/>
+                </a:solidFill>
+              </a:rPr>
+              <a:t>barh</a:t>
+            </a:r>
+            <a:r>
+              <a:rPr lang="ru-RU" dirty="0" sz="2000">
+                <a:solidFill>
+                  <a:srgbClr val="000000"/>
+                </a:solidFill>
+              </a:rPr>
+              <a:t xml:space="preserve"> — длинные подписи категорий</a:t>
             </a:r>
           </a:p>
           <a:p>
@@ -8834,8 +13405,8 @@
         </p:nvSpPr>
         <p:spPr>
           <a:xfrm>
-            <a:off x="640080" y="4690872"/>
-            <a:ext cx="6172200" cy="630936"/>
+            <a:off x="640080" y="5832856"/>
+            <a:ext cx="6172200" cy="604520"/>
           </a:xfrm>
           <a:prstGeom prst="rect">
             <a:avLst/>
@@ -8879,21 +13450,27 @@
         </p:nvSpPr>
         <p:spPr>
           <a:xfrm>
-            <a:off x="713231" y="4727448"/>
-            <a:ext cx="6025896" cy="557784"/>
+            <a:off x="713231" y="5878576"/>
+            <a:ext cx="6025896" cy="139700"/>
           </a:xfrm>
           <a:prstGeom prst="rect">
             <a:avLst/>
           </a:prstGeom>
           <a:noFill/>
+          <a:ln>
+            <a:noFill/>
+          </a:ln>
         </p:spPr>
         <p:txBody>
-          <a:bodyPr wrap="none">
+          <a:bodyPr wrap="none" anchor="t" lIns="0" rIns="0" tIns="0" bIns="0">
             <a:noAutofit/>
           </a:bodyPr>
           <a:lstStyle/>
           <a:p>
             <a:pPr>
+              <a:spcBef>
+                <a:spcPts val="0"/>
+              </a:spcBef>
               <a:spcAft>
                 <a:spcPts val="0"/>
               </a:spcAft>
@@ -8905,11 +13482,185 @@
                 </a:solidFill>
                 <a:latin typeface="Consolas"/>
               </a:rPr>
-              <a:t>ax.bar(categories, values, color='steelblue')</a:t>
-            </a:r>
-          </a:p>
+              <a:t>ax</a:t>
+            </a:r>
+            <a:r>
+              <a:rPr sz="1100">
+                <a:solidFill>
+                  <a:srgbClr val="666666"/>
+                </a:solidFill>
+                <a:latin typeface="Consolas"/>
+              </a:rPr>
+              <a:t>.</a:t>
+            </a:r>
+            <a:r>
+              <a:rPr sz="1100">
+                <a:solidFill>
+                  <a:srgbClr val="000000"/>
+                </a:solidFill>
+                <a:latin typeface="Consolas"/>
+              </a:rPr>
+              <a:t>bar</a:t>
+            </a:r>
+            <a:r>
+              <a:rPr sz="1100">
+                <a:solidFill>
+                  <a:srgbClr val="000000"/>
+                </a:solidFill>
+                <a:latin typeface="Consolas"/>
+              </a:rPr>
+              <a:t>(</a:t>
+            </a:r>
+            <a:r>
+              <a:rPr sz="1100">
+                <a:solidFill>
+                  <a:srgbClr val="000000"/>
+                </a:solidFill>
+                <a:latin typeface="Consolas"/>
+              </a:rPr>
+              <a:t>categories</a:t>
+            </a:r>
+            <a:r>
+              <a:rPr sz="1100">
+                <a:solidFill>
+                  <a:srgbClr val="000000"/>
+                </a:solidFill>
+                <a:latin typeface="Consolas"/>
+              </a:rPr>
+              <a:t>,</a:t>
+            </a:r>
+            <a:r>
+              <a:rPr sz="1100">
+                <a:solidFill>
+                  <a:srgbClr val="000000"/>
+                </a:solidFill>
+                <a:latin typeface="Consolas"/>
+              </a:rPr>
+              <a:t> </a:t>
+            </a:r>
+            <a:r>
+              <a:rPr sz="1100">
+                <a:solidFill>
+                  <a:srgbClr val="000000"/>
+                </a:solidFill>
+                <a:latin typeface="Consolas"/>
+              </a:rPr>
+              <a:t>values</a:t>
+            </a:r>
+            <a:r>
+              <a:rPr sz="1100">
+                <a:solidFill>
+                  <a:srgbClr val="000000"/>
+                </a:solidFill>
+                <a:latin typeface="Consolas"/>
+              </a:rPr>
+              <a:t>,</a:t>
+            </a:r>
+            <a:r>
+              <a:rPr sz="1100">
+                <a:solidFill>
+                  <a:srgbClr val="000000"/>
+                </a:solidFill>
+                <a:latin typeface="Consolas"/>
+              </a:rPr>
+              <a:t> </a:t>
+            </a:r>
+            <a:r>
+              <a:rPr sz="1100">
+                <a:solidFill>
+                  <a:srgbClr val="000000"/>
+                </a:solidFill>
+                <a:latin typeface="Consolas"/>
+              </a:rPr>
+              <a:t>color</a:t>
+            </a:r>
+            <a:r>
+              <a:rPr sz="1100">
+                <a:solidFill>
+                  <a:srgbClr val="666666"/>
+                </a:solidFill>
+                <a:latin typeface="Consolas"/>
+              </a:rPr>
+              <a:t>=</a:t>
+            </a:r>
+            <a:r>
+              <a:rPr sz="1100">
+                <a:solidFill>
+                  <a:srgbClr val="4070A0"/>
+                </a:solidFill>
+                <a:latin typeface="Consolas"/>
+              </a:rPr>
+              <a:t>'</a:t>
+            </a:r>
+            <a:r>
+              <a:rPr sz="1100">
+                <a:solidFill>
+                  <a:srgbClr val="4070A0"/>
+                </a:solidFill>
+                <a:latin typeface="Consolas"/>
+              </a:rPr>
+              <a:t>steelblue</a:t>
+            </a:r>
+            <a:r>
+              <a:rPr sz="1100">
+                <a:solidFill>
+                  <a:srgbClr val="4070A0"/>
+                </a:solidFill>
+                <a:latin typeface="Consolas"/>
+              </a:rPr>
+              <a:t>'</a:t>
+            </a:r>
+            <a:r>
+              <a:rPr sz="1100">
+                <a:solidFill>
+                  <a:srgbClr val="000000"/>
+                </a:solidFill>
+                <a:latin typeface="Consolas"/>
+              </a:rPr>
+              <a:t>)</a:t>
+            </a:r>
+            <a:r>
+              <a:rPr sz="1100">
+                <a:solidFill>
+                  <a:srgbClr val="BBBBBB"/>
+                </a:solidFill>
+                <a:latin typeface="Consolas"/>
+              </a:rPr>
+              <a:t>
+</a:t>
+            </a:r>
+          </a:p>
+        </p:txBody>
+      </p:sp>
+      <p:sp>
+        <p:nvSpPr>
+          <p:cNvPr id="6" name="TextBox 5"/>
+          <p:cNvSpPr txBox="1"/>
+          <p:nvPr/>
+        </p:nvSpPr>
+        <p:spPr>
+          <a:xfrm>
+            <a:off x="713231" y="6018275"/>
+            <a:ext cx="6025896" cy="139700"/>
+          </a:xfrm>
+          <a:prstGeom prst="rect">
+            <a:avLst/>
+          </a:prstGeom>
+          <a:noFill/>
+          <a:ln>
+            <a:noFill/>
+          </a:ln>
+        </p:spPr>
+        <p:txBody>
+          <a:bodyPr wrap="none" anchor="t" lIns="0" rIns="0" tIns="0" bIns="0">
+            <a:noAutofit/>
+          </a:bodyPr>
+          <a:lstStyle/>
           <a:p>
             <a:pPr>
+              <a:spcBef>
+                <a:spcPts val="0"/>
+              </a:spcBef>
               <a:spcAft>
                 <a:spcPts val="0"/>
               </a:spcAft>
@@ -8921,11 +13672,113 @@
                 </a:solidFill>
                 <a:latin typeface="Consolas"/>
               </a:rPr>
-              <a:t>ax.set_ylabel('count')</a:t>
-            </a:r>
-          </a:p>
+              <a:t>ax</a:t>
+            </a:r>
+            <a:r>
+              <a:rPr sz="1100">
+                <a:solidFill>
+                  <a:srgbClr val="666666"/>
+                </a:solidFill>
+                <a:latin typeface="Consolas"/>
+              </a:rPr>
+              <a:t>.</a:t>
+            </a:r>
+            <a:r>
+              <a:rPr sz="1100">
+                <a:solidFill>
+                  <a:srgbClr val="000000"/>
+                </a:solidFill>
+                <a:latin typeface="Consolas"/>
+              </a:rPr>
+              <a:t>set_ylabel</a:t>
+            </a:r>
+            <a:r>
+              <a:rPr sz="1100">
+                <a:solidFill>
+                  <a:srgbClr val="000000"/>
+                </a:solidFill>
+                <a:latin typeface="Consolas"/>
+              </a:rPr>
+              <a:t>(</a:t>
+            </a:r>
+            <a:r>
+              <a:rPr sz="1100">
+                <a:solidFill>
+                  <a:srgbClr val="4070A0"/>
+                </a:solidFill>
+                <a:latin typeface="Consolas"/>
+              </a:rPr>
+              <a:t>'</a:t>
+            </a:r>
+            <a:r>
+              <a:rPr sz="1100">
+                <a:solidFill>
+                  <a:srgbClr val="4070A0"/>
+                </a:solidFill>
+                <a:latin typeface="Consolas"/>
+              </a:rPr>
+              <a:t>count</a:t>
+            </a:r>
+            <a:r>
+              <a:rPr sz="1100">
+                <a:solidFill>
+                  <a:srgbClr val="4070A0"/>
+                </a:solidFill>
+                <a:latin typeface="Consolas"/>
+              </a:rPr>
+              <a:t>'</a:t>
+            </a:r>
+            <a:r>
+              <a:rPr sz="1100">
+                <a:solidFill>
+                  <a:srgbClr val="000000"/>
+                </a:solidFill>
+                <a:latin typeface="Consolas"/>
+              </a:rPr>
+              <a:t>)</a:t>
+            </a:r>
+            <a:r>
+              <a:rPr sz="1100">
+                <a:solidFill>
+                  <a:srgbClr val="BBBBBB"/>
+                </a:solidFill>
+                <a:latin typeface="Consolas"/>
+              </a:rPr>
+              <a:t>
+</a:t>
+            </a:r>
+          </a:p>
+        </p:txBody>
+      </p:sp>
+      <p:sp>
+        <p:nvSpPr>
+          <p:cNvPr id="7" name="TextBox 6"/>
+          <p:cNvSpPr txBox="1"/>
+          <p:nvPr/>
+        </p:nvSpPr>
+        <p:spPr>
+          <a:xfrm>
+            <a:off x="713231" y="6157975"/>
+            <a:ext cx="6025896" cy="139700"/>
+          </a:xfrm>
+          <a:prstGeom prst="rect">
+            <a:avLst/>
+          </a:prstGeom>
+          <a:noFill/>
+          <a:ln>
+            <a:noFill/>
+          </a:ln>
+        </p:spPr>
+        <p:txBody>
+          <a:bodyPr wrap="none" anchor="t" lIns="0" rIns="0" tIns="0" bIns="0">
+            <a:noAutofit/>
+          </a:bodyPr>
+          <a:lstStyle/>
           <a:p>
             <a:pPr>
+              <a:spcBef>
+                <a:spcPts val="0"/>
+              </a:spcBef>
               <a:spcAft>
                 <a:spcPts val="0"/>
               </a:spcAft>
@@ -8937,20 +13790,93 @@
                 </a:solidFill>
                 <a:latin typeface="Consolas"/>
               </a:rPr>
-              <a:t>plt.xticks(rotation=45)</a:t>
-            </a:r>
-          </a:p>
-        </p:txBody>
-      </p:sp>
-      <p:sp>
-        <p:nvSpPr>
-          <p:cNvPr id="6" name="TextBox 5"/>
+              <a:t>plt</a:t>
+            </a:r>
+            <a:r>
+              <a:rPr sz="1100">
+                <a:solidFill>
+                  <a:srgbClr val="666666"/>
+                </a:solidFill>
+                <a:latin typeface="Consolas"/>
+              </a:rPr>
+              <a:t>.</a:t>
+            </a:r>
+            <a:r>
+              <a:rPr sz="1100">
+                <a:solidFill>
+                  <a:srgbClr val="000000"/>
+                </a:solidFill>
+                <a:latin typeface="Consolas"/>
+              </a:rPr>
+              <a:t>xticks</a:t>
+            </a:r>
+            <a:r>
+              <a:rPr sz="1100">
+                <a:solidFill>
+                  <a:srgbClr val="000000"/>
+                </a:solidFill>
+                <a:latin typeface="Consolas"/>
+              </a:rPr>
+              <a:t>(</a:t>
+            </a:r>
+            <a:r>
+              <a:rPr sz="1100">
+                <a:solidFill>
+                  <a:srgbClr val="000000"/>
+                </a:solidFill>
+                <a:latin typeface="Consolas"/>
+              </a:rPr>
+              <a:t>rotation</a:t>
+            </a:r>
+            <a:r>
+              <a:rPr sz="1100">
+                <a:solidFill>
+                  <a:srgbClr val="666666"/>
+                </a:solidFill>
+                <a:latin typeface="Consolas"/>
+              </a:rPr>
+              <a:t>=</a:t>
+            </a:r>
+            <a:r>
+              <a:rPr sz="1100">
+                <a:solidFill>
+                  <a:srgbClr val="40A070"/>
+                </a:solidFill>
+                <a:latin typeface="Consolas"/>
+              </a:rPr>
+              <a:t>45</a:t>
+            </a:r>
+            <a:r>
+              <a:rPr sz="1100">
+                <a:solidFill>
+                  <a:srgbClr val="000000"/>
+                </a:solidFill>
+                <a:latin typeface="Consolas"/>
+              </a:rPr>
+              <a:t>)</a:t>
+            </a:r>
+            <a:r>
+              <a:rPr sz="1100">
+                <a:solidFill>
+                  <a:srgbClr val="BBBBBB"/>
+                </a:solidFill>
+                <a:latin typeface="Consolas"/>
+              </a:rPr>
+              <a:t>
+</a:t>
+            </a:r>
+          </a:p>
+        </p:txBody>
+      </p:sp>
+      <p:sp>
+        <p:nvSpPr>
+          <p:cNvPr id="8" name="TextBox 7"/>
           <p:cNvSpPr txBox="1"/>
           <p:nvPr/>
         </p:nvSpPr>
         <p:spPr>
           <a:xfrm>
-            <a:off x="640080" y="5376672"/>
+            <a:off x="640080" y="6492240"/>
             <a:ext cx="6172200" cy="201168"/>
           </a:xfrm>
           <a:prstGeom prst="rect">
@@ -8979,7 +13905,7 @@
       </p:sp>
       <p:pic>
         <p:nvPicPr>
-          <p:cNvPr id="7" name="Picture 6" descr="bar_metrics_compare.png"/>
+          <p:cNvPr id="9" name="Picture 8" descr="bar_metrics_compare.png"/>
           <p:cNvPicPr>
             <a:picLocks noChangeAspect="1"/>
           </p:cNvPicPr>
@@ -8993,8 +13919,8 @@
         </p:blipFill>
         <p:spPr>
           <a:xfrm>
-            <a:off x="7269480" y="1325880"/>
-            <a:ext cx="4465015" cy="2765544"/>
+            <a:off x="7269480" y="1371600"/>
+            <a:ext cx="4465015" cy="2799564"/>
           </a:xfrm>
           <a:prstGeom prst="rect">
             <a:avLst/>
@@ -9061,7 +13987,7 @@
         <p:spPr>
           <a:xfrm>
             <a:off x="640080" y="1371600"/>
-            <a:ext cx="6263640" cy="2423160"/>
+            <a:ext cx="6263640" cy="2240280"/>
           </a:xfrm>
           <a:prstGeom prst="rect">
             <a:avLst/>
@@ -9085,7 +14011,26 @@
                   <a:srgbClr val="000000"/>
                 </a:solidFill>
               </a:rPr>
-              <a:t>• `ax.hist(data, bins=30)` — распределение одной переменной</a:t>
+              <a:t xml:space="preserve">• </a:t>
+            </a:r>
+            <a:r>
+              <a:rPr lang="ru-RU" dirty="0" sz="2000">
+                <a:latin typeface="Consolas"/>
+                <a:cs typeface="Consolas"/>
+                <a:ea typeface="Consolas"/>
+                <a:solidFill>
+                  <a:srgbClr val="000000"/>
+                </a:solidFill>
+              </a:rPr>
+              <a:t>ax.hist(data, bins=30)</a:t>
+            </a:r>
+            <a:r>
+              <a:rPr lang="ru-RU" dirty="0" sz="2000">
+                <a:solidFill>
+                  <a:srgbClr val="000000"/>
+                </a:solidFill>
+              </a:rPr>
+              <a:t xml:space="preserve"> — распределение одной переменной</a:t>
             </a:r>
           </a:p>
           <a:p>
@@ -9100,7 +14045,37 @@
                   <a:srgbClr val="000000"/>
                 </a:solidFill>
               </a:rPr>
-              <a:t>• Box plot: медиана, IQR, whiskers, точки-выбросы — `ax.boxplot` или `sns.boxplot`</a:t>
+              <a:t xml:space="preserve">• Box plot: медиана, IQR, whiskers, точки-выбросы — </a:t>
+            </a:r>
+            <a:r>
+              <a:rPr lang="ru-RU" dirty="0" sz="2000">
+                <a:latin typeface="Consolas"/>
+                <a:cs typeface="Consolas"/>
+                <a:ea typeface="Consolas"/>
+                <a:solidFill>
+                  <a:srgbClr val="000000"/>
+                </a:solidFill>
+              </a:rPr>
+              <a:t>ax.boxplot</a:t>
+            </a:r>
+            <a:r>
+              <a:rPr lang="ru-RU" dirty="0" sz="2000">
+                <a:solidFill>
+                  <a:srgbClr val="000000"/>
+                </a:solidFill>
+              </a:rPr>
+              <a:t xml:space="preserve"> или </a:t>
+            </a:r>
+            <a:r>
+              <a:rPr lang="ru-RU" dirty="0" sz="2000">
+                <a:latin typeface="Consolas"/>
+                <a:cs typeface="Consolas"/>
+                <a:ea typeface="Consolas"/>
+                <a:solidFill>
+                  <a:srgbClr val="000000"/>
+                </a:solidFill>
+              </a:rPr>
+              <a:t>sns.boxplot</a:t>
             </a:r>
           </a:p>
           <a:p>
@@ -9143,8 +14118,8 @@
         </p:nvSpPr>
         <p:spPr>
           <a:xfrm>
-            <a:off x="640080" y="4690872"/>
-            <a:ext cx="6172200" cy="630936"/>
+            <a:off x="640080" y="5832856"/>
+            <a:ext cx="6172200" cy="604520"/>
           </a:xfrm>
           <a:prstGeom prst="rect">
             <a:avLst/>
@@ -9188,21 +14163,27 @@
         </p:nvSpPr>
         <p:spPr>
           <a:xfrm>
-            <a:off x="713231" y="4727448"/>
-            <a:ext cx="6025896" cy="557784"/>
+            <a:off x="713231" y="5878576"/>
+            <a:ext cx="6025896" cy="139700"/>
           </a:xfrm>
           <a:prstGeom prst="rect">
             <a:avLst/>
           </a:prstGeom>
           <a:noFill/>
+          <a:ln>
+            <a:noFill/>
+          </a:ln>
         </p:spPr>
         <p:txBody>
-          <a:bodyPr wrap="none">
+          <a:bodyPr wrap="none" anchor="t" lIns="0" rIns="0" tIns="0" bIns="0">
             <a:noAutofit/>
           </a:bodyPr>
           <a:lstStyle/>
           <a:p>
             <a:pPr>
+              <a:spcBef>
+                <a:spcPts val="0"/>
+              </a:spcBef>
               <a:spcAft>
                 <a:spcPts val="0"/>
               </a:spcAft>
@@ -9214,11 +14195,203 @@
                 </a:solidFill>
                 <a:latin typeface="Consolas"/>
               </a:rPr>
-              <a:t>ax.hist(data, bins=30, edgecolor='white')</a:t>
-            </a:r>
-          </a:p>
+              <a:t>ax</a:t>
+            </a:r>
+            <a:r>
+              <a:rPr sz="1100">
+                <a:solidFill>
+                  <a:srgbClr val="666666"/>
+                </a:solidFill>
+                <a:latin typeface="Consolas"/>
+              </a:rPr>
+              <a:t>.</a:t>
+            </a:r>
+            <a:r>
+              <a:rPr sz="1100">
+                <a:solidFill>
+                  <a:srgbClr val="000000"/>
+                </a:solidFill>
+                <a:latin typeface="Consolas"/>
+              </a:rPr>
+              <a:t>hist</a:t>
+            </a:r>
+            <a:r>
+              <a:rPr sz="1100">
+                <a:solidFill>
+                  <a:srgbClr val="000000"/>
+                </a:solidFill>
+                <a:latin typeface="Consolas"/>
+              </a:rPr>
+              <a:t>(</a:t>
+            </a:r>
+            <a:r>
+              <a:rPr sz="1100">
+                <a:solidFill>
+                  <a:srgbClr val="000000"/>
+                </a:solidFill>
+                <a:latin typeface="Consolas"/>
+              </a:rPr>
+              <a:t>data</a:t>
+            </a:r>
+            <a:r>
+              <a:rPr sz="1100">
+                <a:solidFill>
+                  <a:srgbClr val="000000"/>
+                </a:solidFill>
+                <a:latin typeface="Consolas"/>
+              </a:rPr>
+              <a:t>,</a:t>
+            </a:r>
+            <a:r>
+              <a:rPr sz="1100">
+                <a:solidFill>
+                  <a:srgbClr val="000000"/>
+                </a:solidFill>
+                <a:latin typeface="Consolas"/>
+              </a:rPr>
+              <a:t> </a:t>
+            </a:r>
+            <a:r>
+              <a:rPr sz="1100">
+                <a:solidFill>
+                  <a:srgbClr val="000000"/>
+                </a:solidFill>
+                <a:latin typeface="Consolas"/>
+              </a:rPr>
+              <a:t>bins</a:t>
+            </a:r>
+            <a:r>
+              <a:rPr sz="1100">
+                <a:solidFill>
+                  <a:srgbClr val="666666"/>
+                </a:solidFill>
+                <a:latin typeface="Consolas"/>
+              </a:rPr>
+              <a:t>=</a:t>
+            </a:r>
+            <a:r>
+              <a:rPr sz="1100">
+                <a:solidFill>
+                  <a:srgbClr val="40A070"/>
+                </a:solidFill>
+                <a:latin typeface="Consolas"/>
+              </a:rPr>
+              <a:t>30</a:t>
+            </a:r>
+            <a:r>
+              <a:rPr sz="1100">
+                <a:solidFill>
+                  <a:srgbClr val="000000"/>
+                </a:solidFill>
+                <a:latin typeface="Consolas"/>
+              </a:rPr>
+              <a:t>,</a:t>
+            </a:r>
+            <a:r>
+              <a:rPr sz="1100">
+                <a:solidFill>
+                  <a:srgbClr val="000000"/>
+                </a:solidFill>
+                <a:latin typeface="Consolas"/>
+              </a:rPr>
+              <a:t> </a:t>
+            </a:r>
+            <a:r>
+              <a:rPr sz="1100">
+                <a:solidFill>
+                  <a:srgbClr val="000000"/>
+                </a:solidFill>
+                <a:latin typeface="Consolas"/>
+              </a:rPr>
+              <a:t>edgecolor</a:t>
+            </a:r>
+            <a:r>
+              <a:rPr sz="1100">
+                <a:solidFill>
+                  <a:srgbClr val="666666"/>
+                </a:solidFill>
+                <a:latin typeface="Consolas"/>
+              </a:rPr>
+              <a:t>=</a:t>
+            </a:r>
+            <a:r>
+              <a:rPr sz="1100">
+                <a:solidFill>
+                  <a:srgbClr val="4070A0"/>
+                </a:solidFill>
+                <a:latin typeface="Consolas"/>
+              </a:rPr>
+              <a:t>'</a:t>
+            </a:r>
+            <a:r>
+              <a:rPr sz="1100">
+                <a:solidFill>
+                  <a:srgbClr val="4070A0"/>
+                </a:solidFill>
+                <a:latin typeface="Consolas"/>
+              </a:rPr>
+              <a:t>white</a:t>
+            </a:r>
+            <a:r>
+              <a:rPr sz="1100">
+                <a:solidFill>
+                  <a:srgbClr val="4070A0"/>
+                </a:solidFill>
+                <a:latin typeface="Consolas"/>
+              </a:rPr>
+              <a:t>'</a:t>
+            </a:r>
+            <a:r>
+              <a:rPr sz="1100">
+                <a:solidFill>
+                  <a:srgbClr val="000000"/>
+                </a:solidFill>
+                <a:latin typeface="Consolas"/>
+              </a:rPr>
+              <a:t>)</a:t>
+            </a:r>
+            <a:r>
+              <a:rPr sz="1100">
+                <a:solidFill>
+                  <a:srgbClr val="BBBBBB"/>
+                </a:solidFill>
+                <a:latin typeface="Consolas"/>
+              </a:rPr>
+              <a:t>
+</a:t>
+            </a:r>
+          </a:p>
+        </p:txBody>
+      </p:sp>
+      <p:sp>
+        <p:nvSpPr>
+          <p:cNvPr id="6" name="TextBox 5"/>
+          <p:cNvSpPr txBox="1"/>
+          <p:nvPr/>
+        </p:nvSpPr>
+        <p:spPr>
+          <a:xfrm>
+            <a:off x="713231" y="6018275"/>
+            <a:ext cx="6025896" cy="139700"/>
+          </a:xfrm>
+          <a:prstGeom prst="rect">
+            <a:avLst/>
+          </a:prstGeom>
+          <a:noFill/>
+          <a:ln>
+            <a:noFill/>
+          </a:ln>
+        </p:spPr>
+        <p:txBody>
+          <a:bodyPr wrap="none" anchor="t" lIns="0" rIns="0" tIns="0" bIns="0">
+            <a:noAutofit/>
+          </a:bodyPr>
+          <a:lstStyle/>
           <a:p>
             <a:pPr>
+              <a:spcBef>
+                <a:spcPts val="0"/>
+              </a:spcBef>
               <a:spcAft>
                 <a:spcPts val="0"/>
               </a:spcAft>
@@ -9230,11 +14403,140 @@
                 </a:solidFill>
                 <a:latin typeface="Consolas"/>
               </a:rPr>
-              <a:t>ax.boxplot(data, vert=True)</a:t>
-            </a:r>
-          </a:p>
+              <a:t>ax</a:t>
+            </a:r>
+            <a:r>
+              <a:rPr sz="1100">
+                <a:solidFill>
+                  <a:srgbClr val="666666"/>
+                </a:solidFill>
+                <a:latin typeface="Consolas"/>
+              </a:rPr>
+              <a:t>.</a:t>
+            </a:r>
+            <a:r>
+              <a:rPr sz="1100">
+                <a:solidFill>
+                  <a:srgbClr val="000000"/>
+                </a:solidFill>
+                <a:latin typeface="Consolas"/>
+              </a:rPr>
+              <a:t>boxplot</a:t>
+            </a:r>
+            <a:r>
+              <a:rPr sz="1100">
+                <a:solidFill>
+                  <a:srgbClr val="000000"/>
+                </a:solidFill>
+                <a:latin typeface="Consolas"/>
+              </a:rPr>
+              <a:t>(</a:t>
+            </a:r>
+            <a:r>
+              <a:rPr sz="1100">
+                <a:solidFill>
+                  <a:srgbClr val="000000"/>
+                </a:solidFill>
+                <a:latin typeface="Consolas"/>
+              </a:rPr>
+              <a:t>data</a:t>
+            </a:r>
+            <a:r>
+              <a:rPr sz="1100">
+                <a:solidFill>
+                  <a:srgbClr val="000000"/>
+                </a:solidFill>
+                <a:latin typeface="Consolas"/>
+              </a:rPr>
+              <a:t>,</a:t>
+            </a:r>
+            <a:r>
+              <a:rPr sz="1100">
+                <a:solidFill>
+                  <a:srgbClr val="000000"/>
+                </a:solidFill>
+                <a:latin typeface="Consolas"/>
+              </a:rPr>
+              <a:t> </a:t>
+            </a:r>
+            <a:r>
+              <a:rPr sz="1100">
+                <a:solidFill>
+                  <a:srgbClr val="000000"/>
+                </a:solidFill>
+                <a:latin typeface="Consolas"/>
+              </a:rPr>
+              <a:t>vert</a:t>
+            </a:r>
+            <a:r>
+              <a:rPr sz="1100">
+                <a:solidFill>
+                  <a:srgbClr val="666666"/>
+                </a:solidFill>
+                <a:latin typeface="Consolas"/>
+              </a:rPr>
+              <a:t>=</a:t>
+            </a:r>
+            <a:r>
+              <a:rPr sz="1100" b="1">
+                <a:solidFill>
+                  <a:srgbClr val="007020"/>
+                </a:solidFill>
+                <a:latin typeface="Consolas"/>
+              </a:rPr>
+              <a:t>True</a:t>
+            </a:r>
+            <a:r>
+              <a:rPr sz="1100">
+                <a:solidFill>
+                  <a:srgbClr val="000000"/>
+                </a:solidFill>
+                <a:latin typeface="Consolas"/>
+              </a:rPr>
+              <a:t>)</a:t>
+            </a:r>
+            <a:r>
+              <a:rPr sz="1100">
+                <a:solidFill>
+                  <a:srgbClr val="BBBBBB"/>
+                </a:solidFill>
+                <a:latin typeface="Consolas"/>
+              </a:rPr>
+              <a:t>
+</a:t>
+            </a:r>
+          </a:p>
+        </p:txBody>
+      </p:sp>
+      <p:sp>
+        <p:nvSpPr>
+          <p:cNvPr id="7" name="TextBox 6"/>
+          <p:cNvSpPr txBox="1"/>
+          <p:nvPr/>
+        </p:nvSpPr>
+        <p:spPr>
+          <a:xfrm>
+            <a:off x="713231" y="6157975"/>
+            <a:ext cx="6025896" cy="139700"/>
+          </a:xfrm>
+          <a:prstGeom prst="rect">
+            <a:avLst/>
+          </a:prstGeom>
+          <a:noFill/>
+          <a:ln>
+            <a:noFill/>
+          </a:ln>
+        </p:spPr>
+        <p:txBody>
+          <a:bodyPr wrap="none" anchor="t" lIns="0" rIns="0" tIns="0" bIns="0">
+            <a:noAutofit/>
+          </a:bodyPr>
+          <a:lstStyle/>
           <a:p>
             <a:pPr>
+              <a:spcBef>
+                <a:spcPts val="0"/>
+              </a:spcBef>
               <a:spcAft>
                 <a:spcPts val="0"/>
               </a:spcAft>
@@ -9246,20 +14548,93 @@
                 </a:solidFill>
                 <a:latin typeface="Consolas"/>
               </a:rPr>
-              <a:t>ax.set_title('Распределение')</a:t>
-            </a:r>
-          </a:p>
-        </p:txBody>
-      </p:sp>
-      <p:sp>
-        <p:nvSpPr>
-          <p:cNvPr id="6" name="TextBox 5"/>
+              <a:t>ax</a:t>
+            </a:r>
+            <a:r>
+              <a:rPr sz="1100">
+                <a:solidFill>
+                  <a:srgbClr val="666666"/>
+                </a:solidFill>
+                <a:latin typeface="Consolas"/>
+              </a:rPr>
+              <a:t>.</a:t>
+            </a:r>
+            <a:r>
+              <a:rPr sz="1100">
+                <a:solidFill>
+                  <a:srgbClr val="000000"/>
+                </a:solidFill>
+                <a:latin typeface="Consolas"/>
+              </a:rPr>
+              <a:t>set_title</a:t>
+            </a:r>
+            <a:r>
+              <a:rPr sz="1100">
+                <a:solidFill>
+                  <a:srgbClr val="000000"/>
+                </a:solidFill>
+                <a:latin typeface="Consolas"/>
+              </a:rPr>
+              <a:t>(</a:t>
+            </a:r>
+            <a:r>
+              <a:rPr sz="1100">
+                <a:solidFill>
+                  <a:srgbClr val="4070A0"/>
+                </a:solidFill>
+                <a:latin typeface="Consolas"/>
+              </a:rPr>
+              <a:t>'</a:t>
+            </a:r>
+            <a:r>
+              <a:rPr sz="1100">
+                <a:solidFill>
+                  <a:srgbClr val="4070A0"/>
+                </a:solidFill>
+                <a:latin typeface="Consolas"/>
+              </a:rPr>
+              <a:t>Распределение</a:t>
+            </a:r>
+            <a:r>
+              <a:rPr sz="1100">
+                <a:solidFill>
+                  <a:srgbClr val="4070A0"/>
+                </a:solidFill>
+                <a:latin typeface="Consolas"/>
+              </a:rPr>
+              <a:t>'</a:t>
+            </a:r>
+            <a:r>
+              <a:rPr sz="1100">
+                <a:solidFill>
+                  <a:srgbClr val="000000"/>
+                </a:solidFill>
+                <a:latin typeface="Consolas"/>
+              </a:rPr>
+              <a:t>)</a:t>
+            </a:r>
+            <a:r>
+              <a:rPr sz="1100">
+                <a:solidFill>
+                  <a:srgbClr val="BBBBBB"/>
+                </a:solidFill>
+                <a:latin typeface="Consolas"/>
+              </a:rPr>
+              <a:t>
+</a:t>
+            </a:r>
+          </a:p>
+        </p:txBody>
+      </p:sp>
+      <p:sp>
+        <p:nvSpPr>
+          <p:cNvPr id="8" name="TextBox 7"/>
           <p:cNvSpPr txBox="1"/>
           <p:nvPr/>
         </p:nvSpPr>
         <p:spPr>
           <a:xfrm>
-            <a:off x="640080" y="5376672"/>
+            <a:off x="640080" y="6492240"/>
             <a:ext cx="6172200" cy="201168"/>
           </a:xfrm>
           <a:prstGeom prst="rect">
@@ -9288,7 +14663,7 @@
       </p:sp>
       <p:pic>
         <p:nvPicPr>
-          <p:cNvPr id="7" name="Picture 6" descr="hist_box_combo.png"/>
+          <p:cNvPr id="9" name="Picture 8" descr="hist_box_combo.png"/>
           <p:cNvPicPr>
             <a:picLocks noChangeAspect="1"/>
           </p:cNvPicPr>
@@ -9302,8 +14677,8 @@
         </p:blipFill>
         <p:spPr>
           <a:xfrm>
-            <a:off x="7419948" y="1325880"/>
-            <a:ext cx="4164078" cy="4407408"/>
+            <a:off x="7269480" y="1371600"/>
+            <a:ext cx="4465015" cy="4059105"/>
           </a:xfrm>
           <a:prstGeom prst="rect">
             <a:avLst/>
@@ -9370,7 +14745,7 @@
         <p:spPr>
           <a:xfrm>
             <a:off x="640080" y="1371600"/>
-            <a:ext cx="6263640" cy="2697480"/>
+            <a:ext cx="6263640" cy="2514600"/>
           </a:xfrm>
           <a:prstGeom prst="rect">
             <a:avLst/>
@@ -9394,7 +14769,56 @@
                   <a:srgbClr val="000000"/>
                 </a:solidFill>
               </a:rPr>
-              <a:t>• Seaborn строит на matplotlib: `sns.scatterplot`, `sns.histplot`, `sns.heatmap`</a:t>
+              <a:t xml:space="preserve">• Seaborn строит на matplotlib: </a:t>
+            </a:r>
+            <a:r>
+              <a:rPr lang="ru-RU" dirty="0" sz="2000">
+                <a:latin typeface="Consolas"/>
+                <a:cs typeface="Consolas"/>
+                <a:ea typeface="Consolas"/>
+                <a:solidFill>
+                  <a:srgbClr val="000000"/>
+                </a:solidFill>
+              </a:rPr>
+              <a:t>sns.scatterplot</a:t>
+            </a:r>
+            <a:r>
+              <a:rPr lang="ru-RU" dirty="0" sz="2000">
+                <a:solidFill>
+                  <a:srgbClr val="000000"/>
+                </a:solidFill>
+              </a:rPr>
+              <a:t xml:space="preserve">, </a:t>
+            </a:r>
+            <a:r>
+              <a:rPr lang="ru-RU" dirty="0" sz="2000">
+                <a:latin typeface="Consolas"/>
+                <a:cs typeface="Consolas"/>
+                <a:ea typeface="Consolas"/>
+                <a:solidFill>
+                  <a:srgbClr val="000000"/>
+                </a:solidFill>
+              </a:rPr>
+              <a:t>sns.histplot</a:t>
+            </a:r>
+            <a:r>
+              <a:rPr lang="ru-RU" dirty="0" sz="2000">
+                <a:solidFill>
+                  <a:srgbClr val="000000"/>
+                </a:solidFill>
+              </a:rPr>
+              <a:t xml:space="preserve">, </a:t>
+            </a:r>
+            <a:r>
+              <a:rPr lang="ru-RU" dirty="0" sz="2000">
+                <a:latin typeface="Consolas"/>
+                <a:cs typeface="Consolas"/>
+                <a:ea typeface="Consolas"/>
+                <a:solidFill>
+                  <a:srgbClr val="000000"/>
+                </a:solidFill>
+              </a:rPr>
+              <a:t>sns.heatmap</a:t>
             </a:r>
           </a:p>
           <a:p>
@@ -9409,7 +14833,26 @@
                   <a:srgbClr val="000000"/>
                 </a:solidFill>
               </a:rPr>
-              <a:t>• `data=df, x=, y=, hue=` — имена столбцов вместо массивов</a:t>
+              <a:t xml:space="preserve">• </a:t>
+            </a:r>
+            <a:r>
+              <a:rPr lang="ru-RU" dirty="0" sz="2000">
+                <a:latin typeface="Consolas"/>
+                <a:cs typeface="Consolas"/>
+                <a:ea typeface="Consolas"/>
+                <a:solidFill>
+                  <a:srgbClr val="000000"/>
+                </a:solidFill>
+              </a:rPr>
+              <a:t>data=df, x=, y=, hue=</a:t>
+            </a:r>
+            <a:r>
+              <a:rPr lang="ru-RU" dirty="0" sz="2000">
+                <a:solidFill>
+                  <a:srgbClr val="000000"/>
+                </a:solidFill>
+              </a:rPr>
+              <a:t xml:space="preserve"> — имена столбцов вместо массивов</a:t>
             </a:r>
           </a:p>
           <a:p>
@@ -9424,7 +14867,26 @@
                   <a:srgbClr val="000000"/>
                 </a:solidFill>
               </a:rPr>
-              <a:t>• `sns.set_theme(style='whitegrid')` — единый стиль лекции</a:t>
+              <a:t xml:space="preserve">• </a:t>
+            </a:r>
+            <a:r>
+              <a:rPr lang="ru-RU" dirty="0" sz="2000">
+                <a:latin typeface="Consolas"/>
+                <a:cs typeface="Consolas"/>
+                <a:ea typeface="Consolas"/>
+                <a:solidFill>
+                  <a:srgbClr val="000000"/>
+                </a:solidFill>
+              </a:rPr>
+              <a:t>sns.set_theme(style='whitegrid')</a:t>
+            </a:r>
+            <a:r>
+              <a:rPr lang="ru-RU" dirty="0" sz="2000">
+                <a:solidFill>
+                  <a:srgbClr val="000000"/>
+                </a:solidFill>
+              </a:rPr>
+              <a:t xml:space="preserve"> — единый стиль лекции</a:t>
             </a:r>
           </a:p>
           <a:p>
@@ -9439,7 +14901,64 @@
                   <a:srgbClr val="000000"/>
                 </a:solidFill>
               </a:rPr>
-              <a:t>• Для ML-диагностики: `sns.regplot`, `jointplot`, `pairplot` на подмножестве признаков</a:t>
+              <a:t xml:space="preserve">• Для ML-диагностики: </a:t>
+            </a:r>
+            <a:r>
+              <a:rPr lang="ru-RU" dirty="0" sz="2000">
+                <a:latin typeface="Consolas"/>
+                <a:cs typeface="Consolas"/>
+                <a:ea typeface="Consolas"/>
+                <a:solidFill>
+                  <a:srgbClr val="000000"/>
+                </a:solidFill>
+              </a:rPr>
+              <a:t>sns.regplot</a:t>
+            </a:r>
+            <a:r>
+              <a:rPr lang="ru-RU" dirty="0" sz="2000">
+                <a:solidFill>
+                  <a:srgbClr val="000000"/>
+                </a:solidFill>
+              </a:rPr>
+              <a:t xml:space="preserve">, </a:t>
+            </a:r>
+            <a:r>
+              <a:rPr lang="ru-RU" dirty="0" sz="2000">
+                <a:latin typeface="Consolas"/>
+                <a:cs typeface="Consolas"/>
+                <a:ea typeface="Consolas"/>
+                <a:solidFill>
+                  <a:srgbClr val="000000"/>
+                </a:solidFill>
+              </a:rPr>
+              <a:t>jointplot</a:t>
+            </a:r>
+            <a:r>
+              <a:rPr lang="ru-RU" dirty="0" sz="2000">
+                <a:solidFill>
+                  <a:srgbClr val="000000"/>
+                </a:solidFill>
+              </a:rPr>
+              <a:t xml:space="preserve">, </a:t>
+            </a:r>
+            <a:r>
+              <a:rPr lang="ru-RU" dirty="0" sz="2000">
+                <a:latin typeface="Consolas"/>
+                <a:cs typeface="Consolas"/>
+                <a:ea typeface="Consolas"/>
+                <a:solidFill>
+                  <a:srgbClr val="000000"/>
+                </a:solidFill>
+              </a:rPr>
+              <a:t>pairplot</a:t>
+            </a:r>
+            <a:r>
+              <a:rPr lang="ru-RU" dirty="0" sz="2000">
+                <a:solidFill>
+                  <a:srgbClr val="000000"/>
+                </a:solidFill>
+              </a:rPr>
+              <a:t xml:space="preserve"> на подмножестве признаков</a:t>
             </a:r>
           </a:p>
         </p:txBody>
@@ -9452,8 +14971,8 @@
         </p:nvSpPr>
         <p:spPr>
           <a:xfrm>
-            <a:off x="640080" y="4892040"/>
-            <a:ext cx="6172200" cy="457200"/>
+            <a:off x="640080" y="5832856"/>
+            <a:ext cx="6172200" cy="604520"/>
           </a:xfrm>
           <a:prstGeom prst="rect">
             <a:avLst/>
@@ -9497,21 +15016,27 @@
         </p:nvSpPr>
         <p:spPr>
           <a:xfrm>
-            <a:off x="713231" y="4928616"/>
-            <a:ext cx="6025896" cy="384048"/>
+            <a:off x="713231" y="5878576"/>
+            <a:ext cx="6025896" cy="139700"/>
           </a:xfrm>
           <a:prstGeom prst="rect">
             <a:avLst/>
           </a:prstGeom>
           <a:noFill/>
+          <a:ln>
+            <a:noFill/>
+          </a:ln>
         </p:spPr>
         <p:txBody>
-          <a:bodyPr wrap="none">
+          <a:bodyPr wrap="none" anchor="t" lIns="0" rIns="0" tIns="0" bIns="0">
             <a:noAutofit/>
           </a:bodyPr>
           <a:lstStyle/>
           <a:p>
             <a:pPr>
+              <a:spcBef>
+                <a:spcPts val="0"/>
+              </a:spcBef>
               <a:spcAft>
                 <a:spcPts val="0"/>
               </a:spcAft>
@@ -9523,11 +15048,302 @@
                 </a:solidFill>
                 <a:latin typeface="Consolas"/>
               </a:rPr>
-              <a:t>sns.scatterplot(data=df, x='x', y='y', hue='class')</a:t>
-            </a:r>
-          </a:p>
+              <a:t>sns</a:t>
+            </a:r>
+            <a:r>
+              <a:rPr sz="1100">
+                <a:solidFill>
+                  <a:srgbClr val="666666"/>
+                </a:solidFill>
+                <a:latin typeface="Consolas"/>
+              </a:rPr>
+              <a:t>.</a:t>
+            </a:r>
+            <a:r>
+              <a:rPr sz="1100">
+                <a:solidFill>
+                  <a:srgbClr val="000000"/>
+                </a:solidFill>
+                <a:latin typeface="Consolas"/>
+              </a:rPr>
+              <a:t>scatterplot</a:t>
+            </a:r>
+            <a:r>
+              <a:rPr sz="1100">
+                <a:solidFill>
+                  <a:srgbClr val="000000"/>
+                </a:solidFill>
+                <a:latin typeface="Consolas"/>
+              </a:rPr>
+              <a:t>(</a:t>
+            </a:r>
+            <a:r>
+              <a:rPr sz="1100">
+                <a:solidFill>
+                  <a:srgbClr val="000000"/>
+                </a:solidFill>
+                <a:latin typeface="Consolas"/>
+              </a:rPr>
+              <a:t>data</a:t>
+            </a:r>
+            <a:r>
+              <a:rPr sz="1100">
+                <a:solidFill>
+                  <a:srgbClr val="666666"/>
+                </a:solidFill>
+                <a:latin typeface="Consolas"/>
+              </a:rPr>
+              <a:t>=</a:t>
+            </a:r>
+            <a:r>
+              <a:rPr sz="1100">
+                <a:solidFill>
+                  <a:srgbClr val="000000"/>
+                </a:solidFill>
+                <a:latin typeface="Consolas"/>
+              </a:rPr>
+              <a:t>df</a:t>
+            </a:r>
+            <a:r>
+              <a:rPr sz="1100">
+                <a:solidFill>
+                  <a:srgbClr val="000000"/>
+                </a:solidFill>
+                <a:latin typeface="Consolas"/>
+              </a:rPr>
+              <a:t>,</a:t>
+            </a:r>
+            <a:r>
+              <a:rPr sz="1100">
+                <a:solidFill>
+                  <a:srgbClr val="000000"/>
+                </a:solidFill>
+                <a:latin typeface="Consolas"/>
+              </a:rPr>
+              <a:t> </a:t>
+            </a:r>
+            <a:r>
+              <a:rPr sz="1100">
+                <a:solidFill>
+                  <a:srgbClr val="000000"/>
+                </a:solidFill>
+                <a:latin typeface="Consolas"/>
+              </a:rPr>
+              <a:t>x</a:t>
+            </a:r>
+            <a:r>
+              <a:rPr sz="1100">
+                <a:solidFill>
+                  <a:srgbClr val="666666"/>
+                </a:solidFill>
+                <a:latin typeface="Consolas"/>
+              </a:rPr>
+              <a:t>=</a:t>
+            </a:r>
+            <a:r>
+              <a:rPr sz="1100">
+                <a:solidFill>
+                  <a:srgbClr val="4070A0"/>
+                </a:solidFill>
+                <a:latin typeface="Consolas"/>
+              </a:rPr>
+              <a:t>'</a:t>
+            </a:r>
+            <a:r>
+              <a:rPr sz="1100">
+                <a:solidFill>
+                  <a:srgbClr val="4070A0"/>
+                </a:solidFill>
+                <a:latin typeface="Consolas"/>
+              </a:rPr>
+              <a:t>x</a:t>
+            </a:r>
+            <a:r>
+              <a:rPr sz="1100">
+                <a:solidFill>
+                  <a:srgbClr val="4070A0"/>
+                </a:solidFill>
+                <a:latin typeface="Consolas"/>
+              </a:rPr>
+              <a:t>'</a:t>
+            </a:r>
+            <a:r>
+              <a:rPr sz="1100">
+                <a:solidFill>
+                  <a:srgbClr val="000000"/>
+                </a:solidFill>
+                <a:latin typeface="Consolas"/>
+              </a:rPr>
+              <a:t>,</a:t>
+            </a:r>
+            <a:r>
+              <a:rPr sz="1100">
+                <a:solidFill>
+                  <a:srgbClr val="000000"/>
+                </a:solidFill>
+                <a:latin typeface="Consolas"/>
+              </a:rPr>
+              <a:t> </a:t>
+            </a:r>
+            <a:r>
+              <a:rPr sz="1100">
+                <a:solidFill>
+                  <a:srgbClr val="000000"/>
+                </a:solidFill>
+                <a:latin typeface="Consolas"/>
+              </a:rPr>
+              <a:t>y</a:t>
+            </a:r>
+            <a:r>
+              <a:rPr sz="1100">
+                <a:solidFill>
+                  <a:srgbClr val="666666"/>
+                </a:solidFill>
+                <a:latin typeface="Consolas"/>
+              </a:rPr>
+              <a:t>=</a:t>
+            </a:r>
+            <a:r>
+              <a:rPr sz="1100">
+                <a:solidFill>
+                  <a:srgbClr val="4070A0"/>
+                </a:solidFill>
+                <a:latin typeface="Consolas"/>
+              </a:rPr>
+              <a:t>'</a:t>
+            </a:r>
+            <a:r>
+              <a:rPr sz="1100">
+                <a:solidFill>
+                  <a:srgbClr val="4070A0"/>
+                </a:solidFill>
+                <a:latin typeface="Consolas"/>
+              </a:rPr>
+              <a:t>y</a:t>
+            </a:r>
+            <a:r>
+              <a:rPr sz="1100">
+                <a:solidFill>
+                  <a:srgbClr val="4070A0"/>
+                </a:solidFill>
+                <a:latin typeface="Consolas"/>
+              </a:rPr>
+              <a:t>'</a:t>
+            </a:r>
+            <a:r>
+              <a:rPr sz="1100">
+                <a:solidFill>
+                  <a:srgbClr val="000000"/>
+                </a:solidFill>
+                <a:latin typeface="Consolas"/>
+              </a:rPr>
+              <a:t>,</a:t>
+            </a:r>
+            <a:r>
+              <a:rPr sz="1100">
+                <a:solidFill>
+                  <a:srgbClr val="000000"/>
+                </a:solidFill>
+                <a:latin typeface="Consolas"/>
+              </a:rPr>
+              <a:t> </a:t>
+            </a:r>
+            <a:r>
+              <a:rPr sz="1100">
+                <a:solidFill>
+                  <a:srgbClr val="000000"/>
+                </a:solidFill>
+                <a:latin typeface="Consolas"/>
+              </a:rPr>
+              <a:t>hue</a:t>
+            </a:r>
+            <a:r>
+              <a:rPr sz="1100">
+                <a:solidFill>
+                  <a:srgbClr val="666666"/>
+                </a:solidFill>
+                <a:latin typeface="Consolas"/>
+              </a:rPr>
+              <a:t>=</a:t>
+            </a:r>
+            <a:r>
+              <a:rPr sz="1100">
+                <a:solidFill>
+                  <a:srgbClr val="4070A0"/>
+                </a:solidFill>
+                <a:latin typeface="Consolas"/>
+              </a:rPr>
+              <a:t>'</a:t>
+            </a:r>
+            <a:r>
+              <a:rPr sz="1100">
+                <a:solidFill>
+                  <a:srgbClr val="4070A0"/>
+                </a:solidFill>
+                <a:latin typeface="Consolas"/>
+              </a:rPr>
+              <a:t>class</a:t>
+            </a:r>
+            <a:r>
+              <a:rPr sz="1100">
+                <a:solidFill>
+                  <a:srgbClr val="4070A0"/>
+                </a:solidFill>
+                <a:latin typeface="Consolas"/>
+              </a:rPr>
+              <a:t>'</a:t>
+            </a:r>
+            <a:r>
+              <a:rPr sz="1100">
+                <a:solidFill>
+                  <a:srgbClr val="000000"/>
+                </a:solidFill>
+                <a:latin typeface="Consolas"/>
+              </a:rPr>
+              <a:t>)</a:t>
+            </a:r>
+            <a:r>
+              <a:rPr sz="1100">
+                <a:solidFill>
+                  <a:srgbClr val="BBBBBB"/>
+                </a:solidFill>
+                <a:latin typeface="Consolas"/>
+              </a:rPr>
+              <a:t>
+</a:t>
+            </a:r>
+          </a:p>
+        </p:txBody>
+      </p:sp>
+      <p:sp>
+        <p:nvSpPr>
+          <p:cNvPr id="6" name="TextBox 5"/>
+          <p:cNvSpPr txBox="1"/>
+          <p:nvPr/>
+        </p:nvSpPr>
+        <p:spPr>
+          <a:xfrm>
+            <a:off x="713231" y="6018275"/>
+            <a:ext cx="6025896" cy="139700"/>
+          </a:xfrm>
+          <a:prstGeom prst="rect">
+            <a:avLst/>
+          </a:prstGeom>
+          <a:noFill/>
+          <a:ln>
+            <a:noFill/>
+          </a:ln>
+        </p:spPr>
+        <p:txBody>
+          <a:bodyPr wrap="none" anchor="t" lIns="0" rIns="0" tIns="0" bIns="0">
+            <a:noAutofit/>
+          </a:bodyPr>
+          <a:lstStyle/>
           <a:p>
             <a:pPr>
+              <a:spcBef>
+                <a:spcPts val="0"/>
+              </a:spcBef>
               <a:spcAft>
                 <a:spcPts val="0"/>
               </a:spcAft>
@@ -9539,20 +15355,373 @@
                 </a:solidFill>
                 <a:latin typeface="Consolas"/>
               </a:rPr>
-              <a:t>sns.regplot(data=df, x='x', y='y', scatter_kws={'alpha': 0.5})</a:t>
-            </a:r>
-          </a:p>
-        </p:txBody>
-      </p:sp>
-      <p:sp>
-        <p:nvSpPr>
-          <p:cNvPr id="6" name="TextBox 5"/>
+              <a:t>sns</a:t>
+            </a:r>
+            <a:r>
+              <a:rPr sz="1100">
+                <a:solidFill>
+                  <a:srgbClr val="666666"/>
+                </a:solidFill>
+                <a:latin typeface="Consolas"/>
+              </a:rPr>
+              <a:t>.</a:t>
+            </a:r>
+            <a:r>
+              <a:rPr sz="1100">
+                <a:solidFill>
+                  <a:srgbClr val="000000"/>
+                </a:solidFill>
+                <a:latin typeface="Consolas"/>
+              </a:rPr>
+              <a:t>regplot</a:t>
+            </a:r>
+            <a:r>
+              <a:rPr sz="1100">
+                <a:solidFill>
+                  <a:srgbClr val="000000"/>
+                </a:solidFill>
+                <a:latin typeface="Consolas"/>
+              </a:rPr>
+              <a:t>(</a:t>
+            </a:r>
+            <a:r>
+              <a:rPr sz="1100">
+                <a:solidFill>
+                  <a:srgbClr val="000000"/>
+                </a:solidFill>
+                <a:latin typeface="Consolas"/>
+              </a:rPr>
+              <a:t>data</a:t>
+            </a:r>
+            <a:r>
+              <a:rPr sz="1100">
+                <a:solidFill>
+                  <a:srgbClr val="666666"/>
+                </a:solidFill>
+                <a:latin typeface="Consolas"/>
+              </a:rPr>
+              <a:t>=</a:t>
+            </a:r>
+            <a:r>
+              <a:rPr sz="1100">
+                <a:solidFill>
+                  <a:srgbClr val="000000"/>
+                </a:solidFill>
+                <a:latin typeface="Consolas"/>
+              </a:rPr>
+              <a:t>df</a:t>
+            </a:r>
+            <a:r>
+              <a:rPr sz="1100">
+                <a:solidFill>
+                  <a:srgbClr val="000000"/>
+                </a:solidFill>
+                <a:latin typeface="Consolas"/>
+              </a:rPr>
+              <a:t>,</a:t>
+            </a:r>
+            <a:r>
+              <a:rPr sz="1100">
+                <a:solidFill>
+                  <a:srgbClr val="000000"/>
+                </a:solidFill>
+                <a:latin typeface="Consolas"/>
+              </a:rPr>
+              <a:t> </a:t>
+            </a:r>
+            <a:r>
+              <a:rPr sz="1100">
+                <a:solidFill>
+                  <a:srgbClr val="000000"/>
+                </a:solidFill>
+                <a:latin typeface="Consolas"/>
+              </a:rPr>
+              <a:t>x</a:t>
+            </a:r>
+            <a:r>
+              <a:rPr sz="1100">
+                <a:solidFill>
+                  <a:srgbClr val="666666"/>
+                </a:solidFill>
+                <a:latin typeface="Consolas"/>
+              </a:rPr>
+              <a:t>=</a:t>
+            </a:r>
+            <a:r>
+              <a:rPr sz="1100">
+                <a:solidFill>
+                  <a:srgbClr val="4070A0"/>
+                </a:solidFill>
+                <a:latin typeface="Consolas"/>
+              </a:rPr>
+              <a:t>'</a:t>
+            </a:r>
+            <a:r>
+              <a:rPr sz="1100">
+                <a:solidFill>
+                  <a:srgbClr val="4070A0"/>
+                </a:solidFill>
+                <a:latin typeface="Consolas"/>
+              </a:rPr>
+              <a:t>x</a:t>
+            </a:r>
+            <a:r>
+              <a:rPr sz="1100">
+                <a:solidFill>
+                  <a:srgbClr val="4070A0"/>
+                </a:solidFill>
+                <a:latin typeface="Consolas"/>
+              </a:rPr>
+              <a:t>'</a:t>
+            </a:r>
+            <a:r>
+              <a:rPr sz="1100">
+                <a:solidFill>
+                  <a:srgbClr val="000000"/>
+                </a:solidFill>
+                <a:latin typeface="Consolas"/>
+              </a:rPr>
+              <a:t>,</a:t>
+            </a:r>
+            <a:r>
+              <a:rPr sz="1100">
+                <a:solidFill>
+                  <a:srgbClr val="000000"/>
+                </a:solidFill>
+                <a:latin typeface="Consolas"/>
+              </a:rPr>
+              <a:t> </a:t>
+            </a:r>
+            <a:r>
+              <a:rPr sz="1100">
+                <a:solidFill>
+                  <a:srgbClr val="000000"/>
+                </a:solidFill>
+                <a:latin typeface="Consolas"/>
+              </a:rPr>
+              <a:t>y</a:t>
+            </a:r>
+            <a:r>
+              <a:rPr sz="1100">
+                <a:solidFill>
+                  <a:srgbClr val="666666"/>
+                </a:solidFill>
+                <a:latin typeface="Consolas"/>
+              </a:rPr>
+              <a:t>=</a:t>
+            </a:r>
+            <a:r>
+              <a:rPr sz="1100">
+                <a:solidFill>
+                  <a:srgbClr val="4070A0"/>
+                </a:solidFill>
+                <a:latin typeface="Consolas"/>
+              </a:rPr>
+              <a:t>'</a:t>
+            </a:r>
+            <a:r>
+              <a:rPr sz="1100">
+                <a:solidFill>
+                  <a:srgbClr val="4070A0"/>
+                </a:solidFill>
+                <a:latin typeface="Consolas"/>
+              </a:rPr>
+              <a:t>y</a:t>
+            </a:r>
+            <a:r>
+              <a:rPr sz="1100">
+                <a:solidFill>
+                  <a:srgbClr val="4070A0"/>
+                </a:solidFill>
+                <a:latin typeface="Consolas"/>
+              </a:rPr>
+              <a:t>'</a:t>
+            </a:r>
+            <a:r>
+              <a:rPr sz="1100">
+                <a:solidFill>
+                  <a:srgbClr val="000000"/>
+                </a:solidFill>
+                <a:latin typeface="Consolas"/>
+              </a:rPr>
+              <a:t>,</a:t>
+            </a:r>
+            <a:r>
+              <a:rPr sz="1100">
+                <a:solidFill>
+                  <a:srgbClr val="000000"/>
+                </a:solidFill>
+                <a:latin typeface="Consolas"/>
+              </a:rPr>
+              <a:t> </a:t>
+            </a:r>
+            <a:r>
+              <a:rPr sz="1100">
+                <a:solidFill>
+                  <a:srgbClr val="000000"/>
+                </a:solidFill>
+                <a:latin typeface="Consolas"/>
+              </a:rPr>
+              <a:t>scatter_kws</a:t>
+            </a:r>
+            <a:r>
+              <a:rPr sz="1100">
+                <a:solidFill>
+                  <a:srgbClr val="666666"/>
+                </a:solidFill>
+                <a:latin typeface="Consolas"/>
+              </a:rPr>
+              <a:t>=</a:t>
+            </a:r>
+            <a:r>
+              <a:rPr sz="1100">
+                <a:solidFill>
+                  <a:srgbClr val="000000"/>
+                </a:solidFill>
+                <a:latin typeface="Consolas"/>
+              </a:rPr>
+              <a:t>{</a:t>
+            </a:r>
+            <a:r>
+              <a:rPr sz="1100">
+                <a:solidFill>
+                  <a:srgbClr val="4070A0"/>
+                </a:solidFill>
+                <a:latin typeface="Consolas"/>
+              </a:rPr>
+              <a:t>'</a:t>
+            </a:r>
+            <a:r>
+              <a:rPr sz="1100">
+                <a:solidFill>
+                  <a:srgbClr val="4070A0"/>
+                </a:solidFill>
+                <a:latin typeface="Consolas"/>
+              </a:rPr>
+              <a:t>alpha</a:t>
+            </a:r>
+            <a:r>
+              <a:rPr sz="1100">
+                <a:solidFill>
+                  <a:srgbClr val="4070A0"/>
+                </a:solidFill>
+                <a:latin typeface="Consolas"/>
+              </a:rPr>
+              <a:t>'</a:t>
+            </a:r>
+            <a:r>
+              <a:rPr sz="1100">
+                <a:solidFill>
+                  <a:srgbClr val="000000"/>
+                </a:solidFill>
+                <a:latin typeface="Consolas"/>
+              </a:rPr>
+              <a:t>:</a:t>
+            </a:r>
+            <a:r>
+              <a:rPr sz="1100">
+                <a:solidFill>
+                  <a:srgbClr val="BBBBBB"/>
+                </a:solidFill>
+                <a:latin typeface="Consolas"/>
+              </a:rPr>
+              <a:t>
+</a:t>
+            </a:r>
+          </a:p>
+        </p:txBody>
+      </p:sp>
+      <p:sp>
+        <p:nvSpPr>
+          <p:cNvPr id="7" name="TextBox 6"/>
           <p:cNvSpPr txBox="1"/>
           <p:nvPr/>
         </p:nvSpPr>
         <p:spPr>
           <a:xfrm>
-            <a:off x="640080" y="5404104"/>
+            <a:off x="713231" y="6157975"/>
+            <a:ext cx="6025896" cy="139700"/>
+          </a:xfrm>
+          <a:prstGeom prst="rect">
+            <a:avLst/>
+          </a:prstGeom>
+          <a:noFill/>
+          <a:ln>
+            <a:noFill/>
+          </a:ln>
+        </p:spPr>
+        <p:txBody>
+          <a:bodyPr wrap="none" anchor="t" lIns="0" rIns="0" tIns="0" bIns="0">
+            <a:noAutofit/>
+          </a:bodyPr>
+          <a:lstStyle/>
+          <a:p>
+            <a:pPr>
+              <a:spcBef>
+                <a:spcPts val="0"/>
+              </a:spcBef>
+              <a:spcAft>
+                <a:spcPts val="0"/>
+              </a:spcAft>
+            </a:pPr>
+            <a:r>
+              <a:rPr sz="1100">
+                <a:solidFill>
+                  <a:srgbClr val="000000"/>
+                </a:solidFill>
+                <a:latin typeface="Consolas"/>
+              </a:rPr>
+              <a:t>    </a:t>
+            </a:r>
+            <a:r>
+              <a:rPr sz="1100">
+                <a:solidFill>
+                  <a:srgbClr val="40A070"/>
+                </a:solidFill>
+                <a:latin typeface="Consolas"/>
+              </a:rPr>
+              <a:t>0.5</a:t>
+            </a:r>
+            <a:r>
+              <a:rPr sz="1100">
+                <a:solidFill>
+                  <a:srgbClr val="000000"/>
+                </a:solidFill>
+                <a:latin typeface="Consolas"/>
+              </a:rPr>
+              <a:t>}</a:t>
+            </a:r>
+            <a:r>
+              <a:rPr sz="1100">
+                <a:solidFill>
+                  <a:srgbClr val="000000"/>
+                </a:solidFill>
+                <a:latin typeface="Consolas"/>
+              </a:rPr>
+              <a:t>)</a:t>
+            </a:r>
+            <a:r>
+              <a:rPr sz="1100">
+                <a:solidFill>
+                  <a:srgbClr val="BBBBBB"/>
+                </a:solidFill>
+                <a:latin typeface="Consolas"/>
+              </a:rPr>
+              <a:t>
+</a:t>
+            </a:r>
+          </a:p>
+        </p:txBody>
+      </p:sp>
+      <p:sp>
+        <p:nvSpPr>
+          <p:cNvPr id="8" name="TextBox 7"/>
+          <p:cNvSpPr txBox="1"/>
+          <p:nvPr/>
+        </p:nvSpPr>
+        <p:spPr>
+          <a:xfrm>
+            <a:off x="640080" y="6492240"/>
             <a:ext cx="6172200" cy="201168"/>
           </a:xfrm>
           <a:prstGeom prst="rect">
@@ -9581,7 +15750,7 @@
       </p:sp>
       <p:pic>
         <p:nvPicPr>
-          <p:cNvPr id="7" name="Picture 6" descr="seaborn_scatter_reg.png"/>
+          <p:cNvPr id="9" name="Picture 8" descr="seaborn_scatter_reg.png"/>
           <p:cNvPicPr>
             <a:picLocks noChangeAspect="1"/>
           </p:cNvPicPr>
@@ -9595,8 +15764,8 @@
         </p:blipFill>
         <p:spPr>
           <a:xfrm>
-            <a:off x="7269480" y="1325880"/>
-            <a:ext cx="4465015" cy="3095015"/>
+            <a:off x="7269480" y="1371600"/>
+            <a:ext cx="4465015" cy="3344296"/>
           </a:xfrm>
           <a:prstGeom prst="rect">
             <a:avLst/>
@@ -9663,7 +15832,7 @@
         <p:spPr>
           <a:xfrm>
             <a:off x="640080" y="1371600"/>
-            <a:ext cx="6263640" cy="2697480"/>
+            <a:ext cx="6263640" cy="2514600"/>
           </a:xfrm>
           <a:prstGeom prst="rect">
             <a:avLst/>
@@ -9687,7 +15856,64 @@
                   <a:srgbClr val="000000"/>
                 </a:solidFill>
               </a:rPr>
-              <a:t xml:space="preserve">• Оси: `set_xlabel`, `set_ylabel`, `set_title` — </a:t>
+              <a:t xml:space="preserve">• Оси: </a:t>
+            </a:r>
+            <a:r>
+              <a:rPr lang="ru-RU" dirty="0" sz="2000">
+                <a:latin typeface="Consolas"/>
+                <a:cs typeface="Consolas"/>
+                <a:ea typeface="Consolas"/>
+                <a:solidFill>
+                  <a:srgbClr val="000000"/>
+                </a:solidFill>
+              </a:rPr>
+              <a:t>set_xlabel</a:t>
+            </a:r>
+            <a:r>
+              <a:rPr lang="ru-RU" dirty="0" sz="2000">
+                <a:solidFill>
+                  <a:srgbClr val="000000"/>
+                </a:solidFill>
+              </a:rPr>
+              <a:t xml:space="preserve">, </a:t>
+            </a:r>
+            <a:r>
+              <a:rPr lang="ru-RU" dirty="0" sz="2000">
+                <a:latin typeface="Consolas"/>
+                <a:cs typeface="Consolas"/>
+                <a:ea typeface="Consolas"/>
+                <a:solidFill>
+                  <a:srgbClr val="000000"/>
+                </a:solidFill>
+              </a:rPr>
+              <a:t>set_ylabel</a:t>
+            </a:r>
+            <a:r>
+              <a:rPr lang="ru-RU" dirty="0" sz="2000">
+                <a:solidFill>
+                  <a:srgbClr val="000000"/>
+                </a:solidFill>
+              </a:rPr>
+              <a:t xml:space="preserve">, </a:t>
+            </a:r>
+            <a:r>
+              <a:rPr lang="ru-RU" dirty="0" sz="2000">
+                <a:latin typeface="Consolas"/>
+                <a:cs typeface="Consolas"/>
+                <a:ea typeface="Consolas"/>
+                <a:solidFill>
+                  <a:srgbClr val="000000"/>
+                </a:solidFill>
+              </a:rPr>
+              <a:t>set_title</a:t>
+            </a:r>
+            <a:r>
+              <a:rPr lang="ru-RU" dirty="0" sz="2000">
+                <a:solidFill>
+                  <a:srgbClr val="000000"/>
+                </a:solidFill>
+              </a:rPr>
+              <a:t xml:space="preserve"> — </a:t>
             </a:r>
             <a:r>
               <a:rPr lang="ru-RU" dirty="0" sz="2000" b="1">
@@ -9718,7 +15944,45 @@
                   <a:srgbClr val="000000"/>
                 </a:solidFill>
               </a:rPr>
-              <a:t>• `legend()` — подписи серий; `loc='best'` или явное место</a:t>
+              <a:t xml:space="preserve">• </a:t>
+            </a:r>
+            <a:r>
+              <a:rPr lang="ru-RU" dirty="0" sz="2000">
+                <a:latin typeface="Consolas"/>
+                <a:cs typeface="Consolas"/>
+                <a:ea typeface="Consolas"/>
+                <a:solidFill>
+                  <a:srgbClr val="000000"/>
+                </a:solidFill>
+              </a:rPr>
+              <a:t>legend()</a:t>
+            </a:r>
+            <a:r>
+              <a:rPr lang="ru-RU" dirty="0" sz="2000">
+                <a:solidFill>
+                  <a:srgbClr val="000000"/>
+                </a:solidFill>
+              </a:rPr>
+              <a:t xml:space="preserve"> — подписи серий; </a:t>
+            </a:r>
+            <a:r>
+              <a:rPr lang="ru-RU" dirty="0" sz="2000">
+                <a:latin typeface="Consolas"/>
+                <a:cs typeface="Consolas"/>
+                <a:ea typeface="Consolas"/>
+                <a:solidFill>
+                  <a:srgbClr val="000000"/>
+                </a:solidFill>
+              </a:rPr>
+              <a:t>loc='best'</a:t>
+            </a:r>
+            <a:r>
+              <a:rPr lang="ru-RU" dirty="0" sz="2000">
+                <a:solidFill>
+                  <a:srgbClr val="000000"/>
+                </a:solidFill>
+              </a:rPr>
+              <a:t xml:space="preserve"> или явное место</a:t>
             </a:r>
           </a:p>
           <a:p>
@@ -9733,7 +15997,45 @@
                   <a:srgbClr val="000000"/>
                 </a:solidFill>
               </a:rPr>
-              <a:t>• Цвет: colorblind-friendly палитры (`tab10`, `colorblind` в seaborn)</a:t>
+              <a:t>• Цвет: colorblind-friendly палитры (</a:t>
+            </a:r>
+            <a:r>
+              <a:rPr lang="ru-RU" dirty="0" sz="2000">
+                <a:latin typeface="Consolas"/>
+                <a:cs typeface="Consolas"/>
+                <a:ea typeface="Consolas"/>
+                <a:solidFill>
+                  <a:srgbClr val="000000"/>
+                </a:solidFill>
+              </a:rPr>
+              <a:t>tab10</a:t>
+            </a:r>
+            <a:r>
+              <a:rPr lang="ru-RU" dirty="0" sz="2000">
+                <a:solidFill>
+                  <a:srgbClr val="000000"/>
+                </a:solidFill>
+              </a:rPr>
+              <a:t xml:space="preserve">, </a:t>
+            </a:r>
+            <a:r>
+              <a:rPr lang="ru-RU" dirty="0" sz="2000">
+                <a:latin typeface="Consolas"/>
+                <a:cs typeface="Consolas"/>
+                <a:ea typeface="Consolas"/>
+                <a:solidFill>
+                  <a:srgbClr val="000000"/>
+                </a:solidFill>
+              </a:rPr>
+              <a:t>colorblind</a:t>
+            </a:r>
+            <a:r>
+              <a:rPr lang="ru-RU" dirty="0" sz="2000">
+                <a:solidFill>
+                  <a:srgbClr val="000000"/>
+                </a:solidFill>
+              </a:rPr>
+              <a:t xml:space="preserve"> в seaborn)</a:t>
             </a:r>
           </a:p>
           <a:p>
@@ -9761,8 +16063,8 @@
         </p:nvSpPr>
         <p:spPr>
           <a:xfrm>
-            <a:off x="640080" y="4690872"/>
-            <a:ext cx="6172200" cy="630936"/>
+            <a:off x="640080" y="5832856"/>
+            <a:ext cx="6172200" cy="604520"/>
           </a:xfrm>
           <a:prstGeom prst="rect">
             <a:avLst/>
@@ -9806,21 +16108,27 @@
         </p:nvSpPr>
         <p:spPr>
           <a:xfrm>
-            <a:off x="713231" y="4727448"/>
-            <a:ext cx="6025896" cy="557784"/>
+            <a:off x="713231" y="5878576"/>
+            <a:ext cx="6025896" cy="139700"/>
           </a:xfrm>
           <a:prstGeom prst="rect">
             <a:avLst/>
           </a:prstGeom>
           <a:noFill/>
+          <a:ln>
+            <a:noFill/>
+          </a:ln>
         </p:spPr>
         <p:txBody>
-          <a:bodyPr wrap="none">
+          <a:bodyPr wrap="none" anchor="t" lIns="0" rIns="0" tIns="0" bIns="0">
             <a:noAutofit/>
           </a:bodyPr>
           <a:lstStyle/>
           <a:p>
             <a:pPr>
+              <a:spcBef>
+                <a:spcPts val="0"/>
+              </a:spcBef>
               <a:spcAft>
                 <a:spcPts val="0"/>
               </a:spcAft>
@@ -9832,11 +16140,158 @@
                 </a:solidFill>
                 <a:latin typeface="Consolas"/>
               </a:rPr>
-              <a:t>ax.set_title('ROC-кривая', fontsize=14)</a:t>
-            </a:r>
-          </a:p>
+              <a:t>ax</a:t>
+            </a:r>
+            <a:r>
+              <a:rPr sz="1100">
+                <a:solidFill>
+                  <a:srgbClr val="666666"/>
+                </a:solidFill>
+                <a:latin typeface="Consolas"/>
+              </a:rPr>
+              <a:t>.</a:t>
+            </a:r>
+            <a:r>
+              <a:rPr sz="1100">
+                <a:solidFill>
+                  <a:srgbClr val="000000"/>
+                </a:solidFill>
+                <a:latin typeface="Consolas"/>
+              </a:rPr>
+              <a:t>set_title</a:t>
+            </a:r>
+            <a:r>
+              <a:rPr sz="1100">
+                <a:solidFill>
+                  <a:srgbClr val="000000"/>
+                </a:solidFill>
+                <a:latin typeface="Consolas"/>
+              </a:rPr>
+              <a:t>(</a:t>
+            </a:r>
+            <a:r>
+              <a:rPr sz="1100">
+                <a:solidFill>
+                  <a:srgbClr val="4070A0"/>
+                </a:solidFill>
+                <a:latin typeface="Consolas"/>
+              </a:rPr>
+              <a:t>'</a:t>
+            </a:r>
+            <a:r>
+              <a:rPr sz="1100">
+                <a:solidFill>
+                  <a:srgbClr val="4070A0"/>
+                </a:solidFill>
+                <a:latin typeface="Consolas"/>
+              </a:rPr>
+              <a:t>ROC-кривая</a:t>
+            </a:r>
+            <a:r>
+              <a:rPr sz="1100">
+                <a:solidFill>
+                  <a:srgbClr val="4070A0"/>
+                </a:solidFill>
+                <a:latin typeface="Consolas"/>
+              </a:rPr>
+              <a:t>'</a:t>
+            </a:r>
+            <a:r>
+              <a:rPr sz="1100">
+                <a:solidFill>
+                  <a:srgbClr val="000000"/>
+                </a:solidFill>
+                <a:latin typeface="Consolas"/>
+              </a:rPr>
+              <a:t>,</a:t>
+            </a:r>
+            <a:r>
+              <a:rPr sz="1100">
+                <a:solidFill>
+                  <a:srgbClr val="000000"/>
+                </a:solidFill>
+                <a:latin typeface="Consolas"/>
+              </a:rPr>
+              <a:t> </a:t>
+            </a:r>
+            <a:r>
+              <a:rPr sz="1100">
+                <a:solidFill>
+                  <a:srgbClr val="000000"/>
+                </a:solidFill>
+                <a:latin typeface="Consolas"/>
+              </a:rPr>
+              <a:t>fontsize</a:t>
+            </a:r>
+            <a:r>
+              <a:rPr sz="1100">
+                <a:solidFill>
+                  <a:srgbClr val="666666"/>
+                </a:solidFill>
+                <a:latin typeface="Consolas"/>
+              </a:rPr>
+              <a:t>=</a:t>
+            </a:r>
+            <a:r>
+              <a:rPr sz="1100">
+                <a:solidFill>
+                  <a:srgbClr val="40A070"/>
+                </a:solidFill>
+                <a:latin typeface="Consolas"/>
+              </a:rPr>
+              <a:t>14</a:t>
+            </a:r>
+            <a:r>
+              <a:rPr sz="1100">
+                <a:solidFill>
+                  <a:srgbClr val="000000"/>
+                </a:solidFill>
+                <a:latin typeface="Consolas"/>
+              </a:rPr>
+              <a:t>)</a:t>
+            </a:r>
+            <a:r>
+              <a:rPr sz="1100">
+                <a:solidFill>
+                  <a:srgbClr val="BBBBBB"/>
+                </a:solidFill>
+                <a:latin typeface="Consolas"/>
+              </a:rPr>
+              <a:t>
+</a:t>
+            </a:r>
+          </a:p>
+        </p:txBody>
+      </p:sp>
+      <p:sp>
+        <p:nvSpPr>
+          <p:cNvPr id="6" name="TextBox 5"/>
+          <p:cNvSpPr txBox="1"/>
+          <p:nvPr/>
+        </p:nvSpPr>
+        <p:spPr>
+          <a:xfrm>
+            <a:off x="713231" y="6018275"/>
+            <a:ext cx="6025896" cy="139700"/>
+          </a:xfrm>
+          <a:prstGeom prst="rect">
+            <a:avLst/>
+          </a:prstGeom>
+          <a:noFill/>
+          <a:ln>
+            <a:noFill/>
+          </a:ln>
+        </p:spPr>
+        <p:txBody>
+          <a:bodyPr wrap="none" anchor="t" lIns="0" rIns="0" tIns="0" bIns="0">
+            <a:noAutofit/>
+          </a:bodyPr>
+          <a:lstStyle/>
           <a:p>
             <a:pPr>
+              <a:spcBef>
+                <a:spcPts val="0"/>
+              </a:spcBef>
               <a:spcAft>
                 <a:spcPts val="0"/>
               </a:spcAft>
@@ -9848,11 +16303,131 @@
                 </a:solidFill>
                 <a:latin typeface="Consolas"/>
               </a:rPr>
-              <a:t>ax.legend(loc='lower right')</a:t>
-            </a:r>
-          </a:p>
+              <a:t>ax</a:t>
+            </a:r>
+            <a:r>
+              <a:rPr sz="1100">
+                <a:solidFill>
+                  <a:srgbClr val="666666"/>
+                </a:solidFill>
+                <a:latin typeface="Consolas"/>
+              </a:rPr>
+              <a:t>.</a:t>
+            </a:r>
+            <a:r>
+              <a:rPr sz="1100">
+                <a:solidFill>
+                  <a:srgbClr val="000000"/>
+                </a:solidFill>
+                <a:latin typeface="Consolas"/>
+              </a:rPr>
+              <a:t>legend</a:t>
+            </a:r>
+            <a:r>
+              <a:rPr sz="1100">
+                <a:solidFill>
+                  <a:srgbClr val="000000"/>
+                </a:solidFill>
+                <a:latin typeface="Consolas"/>
+              </a:rPr>
+              <a:t>(</a:t>
+            </a:r>
+            <a:r>
+              <a:rPr sz="1100">
+                <a:solidFill>
+                  <a:srgbClr val="000000"/>
+                </a:solidFill>
+                <a:latin typeface="Consolas"/>
+              </a:rPr>
+              <a:t>loc</a:t>
+            </a:r>
+            <a:r>
+              <a:rPr sz="1100">
+                <a:solidFill>
+                  <a:srgbClr val="666666"/>
+                </a:solidFill>
+                <a:latin typeface="Consolas"/>
+              </a:rPr>
+              <a:t>=</a:t>
+            </a:r>
+            <a:r>
+              <a:rPr sz="1100">
+                <a:solidFill>
+                  <a:srgbClr val="4070A0"/>
+                </a:solidFill>
+                <a:latin typeface="Consolas"/>
+              </a:rPr>
+              <a:t>'</a:t>
+            </a:r>
+            <a:r>
+              <a:rPr sz="1100">
+                <a:solidFill>
+                  <a:srgbClr val="4070A0"/>
+                </a:solidFill>
+                <a:latin typeface="Consolas"/>
+              </a:rPr>
+              <a:t>lower right</a:t>
+            </a:r>
+            <a:r>
+              <a:rPr sz="1100">
+                <a:solidFill>
+                  <a:srgbClr val="4070A0"/>
+                </a:solidFill>
+                <a:latin typeface="Consolas"/>
+              </a:rPr>
+              <a:t>'</a:t>
+            </a:r>
+            <a:r>
+              <a:rPr sz="1100">
+                <a:solidFill>
+                  <a:srgbClr val="000000"/>
+                </a:solidFill>
+                <a:latin typeface="Consolas"/>
+              </a:rPr>
+              <a:t>)</a:t>
+            </a:r>
+            <a:r>
+              <a:rPr sz="1100">
+                <a:solidFill>
+                  <a:srgbClr val="BBBBBB"/>
+                </a:solidFill>
+                <a:latin typeface="Consolas"/>
+              </a:rPr>
+              <a:t>
+</a:t>
+            </a:r>
+          </a:p>
+        </p:txBody>
+      </p:sp>
+      <p:sp>
+        <p:nvSpPr>
+          <p:cNvPr id="7" name="TextBox 6"/>
+          <p:cNvSpPr txBox="1"/>
+          <p:nvPr/>
+        </p:nvSpPr>
+        <p:spPr>
+          <a:xfrm>
+            <a:off x="713231" y="6157975"/>
+            <a:ext cx="6025896" cy="139700"/>
+          </a:xfrm>
+          <a:prstGeom prst="rect">
+            <a:avLst/>
+          </a:prstGeom>
+          <a:noFill/>
+          <a:ln>
+            <a:noFill/>
+          </a:ln>
+        </p:spPr>
+        <p:txBody>
+          <a:bodyPr wrap="none" anchor="t" lIns="0" rIns="0" tIns="0" bIns="0">
+            <a:noAutofit/>
+          </a:bodyPr>
+          <a:lstStyle/>
           <a:p>
             <a:pPr>
+              <a:spcBef>
+                <a:spcPts val="0"/>
+              </a:spcBef>
               <a:spcAft>
                 <a:spcPts val="0"/>
               </a:spcAft>
@@ -9864,20 +16439,120 @@
                 </a:solidFill>
                 <a:latin typeface="Consolas"/>
               </a:rPr>
-              <a:t>ax.grid(True, alpha=0.3)</a:t>
-            </a:r>
-          </a:p>
-        </p:txBody>
-      </p:sp>
-      <p:sp>
-        <p:nvSpPr>
-          <p:cNvPr id="6" name="TextBox 5"/>
+              <a:t>ax</a:t>
+            </a:r>
+            <a:r>
+              <a:rPr sz="1100">
+                <a:solidFill>
+                  <a:srgbClr val="666666"/>
+                </a:solidFill>
+                <a:latin typeface="Consolas"/>
+              </a:rPr>
+              <a:t>.</a:t>
+            </a:r>
+            <a:r>
+              <a:rPr sz="1100">
+                <a:solidFill>
+                  <a:srgbClr val="000000"/>
+                </a:solidFill>
+                <a:latin typeface="Consolas"/>
+              </a:rPr>
+              <a:t>grid</a:t>
+            </a:r>
+            <a:r>
+              <a:rPr sz="1100">
+                <a:solidFill>
+                  <a:srgbClr val="000000"/>
+                </a:solidFill>
+                <a:latin typeface="Consolas"/>
+              </a:rPr>
+              <a:t>(</a:t>
+            </a:r>
+            <a:r>
+              <a:rPr sz="1100" b="1">
+                <a:solidFill>
+                  <a:srgbClr val="007020"/>
+                </a:solidFill>
+                <a:latin typeface="Consolas"/>
+              </a:rPr>
+              <a:t>True</a:t>
+            </a:r>
+            <a:r>
+              <a:rPr sz="1100">
+                <a:solidFill>
+                  <a:srgbClr val="000000"/>
+                </a:solidFill>
+                <a:latin typeface="Consolas"/>
+              </a:rPr>
+              <a:t>,</a:t>
+            </a:r>
+            <a:r>
+              <a:rPr sz="1100">
+                <a:solidFill>
+                  <a:srgbClr val="000000"/>
+                </a:solidFill>
+                <a:latin typeface="Consolas"/>
+              </a:rPr>
+              <a:t> </a:t>
+            </a:r>
+            <a:r>
+              <a:rPr sz="1100">
+                <a:solidFill>
+                  <a:srgbClr val="000000"/>
+                </a:solidFill>
+                <a:latin typeface="Consolas"/>
+              </a:rPr>
+              <a:t>alpha</a:t>
+            </a:r>
+            <a:r>
+              <a:rPr sz="1100">
+                <a:solidFill>
+                  <a:srgbClr val="666666"/>
+                </a:solidFill>
+                <a:latin typeface="Consolas"/>
+              </a:rPr>
+              <a:t>=</a:t>
+            </a:r>
+            <a:r>
+              <a:rPr sz="1100">
+                <a:solidFill>
+                  <a:srgbClr val="40A070"/>
+                </a:solidFill>
+                <a:latin typeface="Consolas"/>
+              </a:rPr>
+              <a:t>0.3</a:t>
+            </a:r>
+            <a:r>
+              <a:rPr sz="1100">
+                <a:solidFill>
+                  <a:srgbClr val="000000"/>
+                </a:solidFill>
+                <a:latin typeface="Consolas"/>
+              </a:rPr>
+              <a:t>)</a:t>
+            </a:r>
+            <a:r>
+              <a:rPr sz="1100">
+                <a:solidFill>
+                  <a:srgbClr val="BBBBBB"/>
+                </a:solidFill>
+                <a:latin typeface="Consolas"/>
+              </a:rPr>
+              <a:t>
+</a:t>
+            </a:r>
+          </a:p>
+        </p:txBody>
+      </p:sp>
+      <p:sp>
+        <p:nvSpPr>
+          <p:cNvPr id="8" name="TextBox 7"/>
           <p:cNvSpPr txBox="1"/>
           <p:nvPr/>
         </p:nvSpPr>
         <p:spPr>
           <a:xfrm>
-            <a:off x="640080" y="5376672"/>
+            <a:off x="640080" y="6492240"/>
             <a:ext cx="6172200" cy="201168"/>
           </a:xfrm>
           <a:prstGeom prst="rect">
@@ -9906,7 +16581,7 @@
       </p:sp>
       <p:pic>
         <p:nvPicPr>
-          <p:cNvPr id="7" name="Picture 6" descr="legend_color_marker.png"/>
+          <p:cNvPr id="9" name="Picture 8" descr="legend_color_marker.png"/>
           <p:cNvPicPr>
             <a:picLocks noChangeAspect="1"/>
           </p:cNvPicPr>
@@ -9920,8 +16595,8 @@
         </p:blipFill>
         <p:spPr>
           <a:xfrm>
-            <a:off x="7269480" y="1325880"/>
-            <a:ext cx="4465015" cy="2892695"/>
+            <a:off x="7269480" y="1371600"/>
+            <a:ext cx="4465015" cy="2799564"/>
           </a:xfrm>
           <a:prstGeom prst="rect">
             <a:avLst/>
